--- a/Fluctus_Laadplan_Zwevegem.pptx
+++ b/Fluctus_Laadplan_Zwevegem.pptx
@@ -117,7 +117,7 @@
 </p:presentation>
 </file>
 
-<file path=ppt/charts/chart1.xml><?xml version="1.0" encoding="utf-8"?>
+<file path=ppt/charts/chart2.xml><?xml version="1.0" encoding="utf-8"?>
 <c:chartSpace xmlns:c="http://schemas.openxmlformats.org/drawingml/2006/chart" xmlns:a="http://schemas.openxmlformats.org/drawingml/2006/main" xmlns:r="http://schemas.openxmlformats.org/officeDocument/2006/relationships">
   <c:date1904 val="0"/>
   <c:roundedCorners val="1"/>
@@ -6666,7 +6666,7 @@
                 <a:ea typeface="Arial" pitchFamily="34" charset="-122"/>
                 <a:cs typeface="Arial" pitchFamily="34" charset="-120"/>
               </a:rPr>
-              <a:t>De 1.046 wagens zijn de </a:t>
+              <a:t>De 1.416 wagens zijn de </a:t>
             </a:r>
             <a:pPr indent="0" marL="0">
               <a:buNone/>
@@ -6823,7 +6823,7 @@
                 <a:ea typeface="Arial" pitchFamily="34" charset="-122"/>
                 <a:cs typeface="Arial" pitchFamily="34" charset="-120"/>
               </a:rPr>
-              <a:t>1.046</a:t>
+              <a:t>1.416</a:t>
             </a:r>
             <a:endParaRPr lang="en-US" sz="3200" dirty="0"/>
           </a:p>
@@ -6935,7 +6935,7 @@
                 <a:ea typeface="Arial" pitchFamily="34" charset="-122"/>
                 <a:cs typeface="Arial" pitchFamily="34" charset="-120"/>
               </a:rPr>
-              <a:t>44</a:t>
+              <a:t>52</a:t>
             </a:r>
             <a:endParaRPr lang="en-US" sz="3200" dirty="0"/>
           </a:p>
@@ -7047,7 +7047,7 @@
                 <a:ea typeface="Arial" pitchFamily="34" charset="-122"/>
                 <a:cs typeface="Arial" pitchFamily="34" charset="-120"/>
               </a:rPr>
-              <a:t>€ 1,57 mln</a:t>
+              <a:t>€ 2,12 mln</a:t>
             </a:r>
             <a:endParaRPr lang="en-US" sz="3200" dirty="0"/>
           </a:p>
@@ -7159,7 +7159,7 @@
                 <a:ea typeface="Arial" pitchFamily="34" charset="-122"/>
                 <a:cs typeface="Arial" pitchFamily="34" charset="-120"/>
               </a:rPr>
-              <a:t>€ 3,14 mln</a:t>
+              <a:t>€ 4,25 mln</a:t>
             </a:r>
             <a:endParaRPr lang="en-US" sz="3200" dirty="0"/>
           </a:p>
@@ -7266,7 +7266,7 @@
                 <a:ea typeface="Arial" pitchFamily="34" charset="-122"/>
                 <a:cs typeface="Arial" pitchFamily="34" charset="-120"/>
               </a:rPr>
-              <a:t>1.046 wagens</a:t>
+              <a:t>1.416 wagens</a:t>
             </a:r>
             <a:pPr indent="0" marL="0">
               <a:buNone/>
@@ -7294,7 +7294,7 @@
                 <a:ea typeface="Arial" pitchFamily="34" charset="-122"/>
                 <a:cs typeface="Arial" pitchFamily="34" charset="-120"/>
               </a:rPr>
-              <a:t>€ 1,57 mln besparing / jaar</a:t>
+              <a:t>€ 2,12 mln besparing / jaar</a:t>
             </a:r>
             <a:endParaRPr lang="en-US" sz="1500" dirty="0"/>
           </a:p>
@@ -7333,7 +7333,7 @@
                 <a:ea typeface="Arial" pitchFamily="34" charset="-122"/>
                 <a:cs typeface="Arial" pitchFamily="34" charset="-120"/>
               </a:rPr>
-              <a:t>1.046 wagens</a:t>
+              <a:t>1.416 wagens</a:t>
             </a:r>
             <a:pPr indent="0" marL="0">
               <a:buNone/>
@@ -7361,7 +7361,7 @@
                 <a:ea typeface="Arial" pitchFamily="34" charset="-122"/>
                 <a:cs typeface="Arial" pitchFamily="34" charset="-120"/>
               </a:rPr>
-              <a:t>€ 3,14 mln investering</a:t>
+              <a:t>€ 4,25 mln investering</a:t>
             </a:r>
             <a:pPr indent="0" marL="0">
               <a:buNone/>
@@ -7614,7 +7614,7 @@
         </p:nvSpPr>
         <p:spPr>
           <a:xfrm>
-            <a:off x="3646093" y="4501597"/>
+            <a:off x="1860775" y="2531586"/>
             <a:ext cx="256032" cy="256032"/>
           </a:xfrm>
           <a:prstGeom prst="ellipse">
@@ -7639,7 +7639,7 @@
         </p:nvSpPr>
         <p:spPr>
           <a:xfrm>
-            <a:off x="3646093" y="4501597"/>
+            <a:off x="1860775" y="2531586"/>
             <a:ext cx="256032" cy="256032"/>
           </a:xfrm>
           <a:prstGeom prst="rect">
@@ -7678,7 +7678,7 @@
         </p:nvSpPr>
         <p:spPr>
           <a:xfrm>
-            <a:off x="3478825" y="4845806"/>
+            <a:off x="5250692" y="5022762"/>
             <a:ext cx="256032" cy="256032"/>
           </a:xfrm>
           <a:prstGeom prst="ellipse">
@@ -7703,7 +7703,7 @@
         </p:nvSpPr>
         <p:spPr>
           <a:xfrm>
-            <a:off x="3478825" y="4845806"/>
+            <a:off x="5250692" y="5022762"/>
             <a:ext cx="256032" cy="256032"/>
           </a:xfrm>
           <a:prstGeom prst="rect">
@@ -7742,7 +7742,7 @@
         </p:nvSpPr>
         <p:spPr>
           <a:xfrm>
-            <a:off x="3478033" y="4910716"/>
+            <a:off x="5065215" y="5405146"/>
             <a:ext cx="256032" cy="256032"/>
           </a:xfrm>
           <a:prstGeom prst="ellipse">
@@ -7767,7 +7767,7 @@
         </p:nvSpPr>
         <p:spPr>
           <a:xfrm>
-            <a:off x="3478033" y="4910716"/>
+            <a:off x="5065215" y="5405146"/>
             <a:ext cx="256032" cy="256032"/>
           </a:xfrm>
           <a:prstGeom prst="rect">
@@ -7806,7 +7806,7 @@
         </p:nvSpPr>
         <p:spPr>
           <a:xfrm>
-            <a:off x="3401025" y="4871511"/>
+            <a:off x="2010383" y="2498873"/>
             <a:ext cx="256032" cy="256032"/>
           </a:xfrm>
           <a:prstGeom prst="ellipse">
@@ -7831,7 +7831,7 @@
         </p:nvSpPr>
         <p:spPr>
           <a:xfrm>
-            <a:off x="3401025" y="4871511"/>
+            <a:off x="2010383" y="2498873"/>
             <a:ext cx="256032" cy="256032"/>
           </a:xfrm>
           <a:prstGeom prst="rect">
@@ -7870,7 +7870,7 @@
         </p:nvSpPr>
         <p:spPr>
           <a:xfrm>
-            <a:off x="3388417" y="4865322"/>
+            <a:off x="1982308" y="2524575"/>
             <a:ext cx="256032" cy="256032"/>
           </a:xfrm>
           <a:prstGeom prst="ellipse">
@@ -7895,7 +7895,7 @@
         </p:nvSpPr>
         <p:spPr>
           <a:xfrm>
-            <a:off x="3388417" y="4865322"/>
+            <a:off x="1982308" y="2524575"/>
             <a:ext cx="256032" cy="256032"/>
           </a:xfrm>
           <a:prstGeom prst="rect">
@@ -7934,7 +7934,7 @@
         </p:nvSpPr>
         <p:spPr>
           <a:xfrm>
-            <a:off x="3362038" y="4839346"/>
+            <a:off x="2780058" y="2157984"/>
             <a:ext cx="256032" cy="256032"/>
           </a:xfrm>
           <a:prstGeom prst="ellipse">
@@ -7959,7 +7959,7 @@
         </p:nvSpPr>
         <p:spPr>
           <a:xfrm>
-            <a:off x="3362038" y="4839346"/>
+            <a:off x="2780058" y="2157984"/>
             <a:ext cx="256032" cy="256032"/>
           </a:xfrm>
           <a:prstGeom prst="rect">
@@ -7998,7 +7998,7 @@
         </p:nvSpPr>
         <p:spPr>
           <a:xfrm>
-            <a:off x="3421023" y="4759828"/>
+            <a:off x="2802205" y="2160210"/>
             <a:ext cx="256032" cy="256032"/>
           </a:xfrm>
           <a:prstGeom prst="ellipse">
@@ -8023,7 +8023,7 @@
         </p:nvSpPr>
         <p:spPr>
           <a:xfrm>
-            <a:off x="3421023" y="4759828"/>
+            <a:off x="2802205" y="2160210"/>
             <a:ext cx="256032" cy="256032"/>
           </a:xfrm>
           <a:prstGeom prst="rect">
@@ -8062,7 +8062,7 @@
         </p:nvSpPr>
         <p:spPr>
           <a:xfrm>
-            <a:off x="3273599" y="4807565"/>
+            <a:off x="3005606" y="2284020"/>
             <a:ext cx="256032" cy="256032"/>
           </a:xfrm>
           <a:prstGeom prst="ellipse">
@@ -8087,7 +8087,7 @@
         </p:nvSpPr>
         <p:spPr>
           <a:xfrm>
-            <a:off x="3273599" y="4807565"/>
+            <a:off x="3005606" y="2284020"/>
             <a:ext cx="256032" cy="256032"/>
           </a:xfrm>
           <a:prstGeom prst="rect">
@@ -8126,7 +8126,7 @@
         </p:nvSpPr>
         <p:spPr>
           <a:xfrm>
-            <a:off x="3303285" y="4801394"/>
+            <a:off x="2955956" y="2315340"/>
             <a:ext cx="256032" cy="256032"/>
           </a:xfrm>
           <a:prstGeom prst="ellipse">
@@ -8151,7 +8151,7 @@
         </p:nvSpPr>
         <p:spPr>
           <a:xfrm>
-            <a:off x="3303285" y="4801394"/>
+            <a:off x="2955956" y="2315340"/>
             <a:ext cx="256032" cy="256032"/>
           </a:xfrm>
           <a:prstGeom prst="rect">
@@ -8190,7 +8190,7 @@
         </p:nvSpPr>
         <p:spPr>
           <a:xfrm>
-            <a:off x="4160932" y="5477256"/>
+            <a:off x="2977653" y="2320800"/>
             <a:ext cx="256032" cy="256032"/>
           </a:xfrm>
           <a:prstGeom prst="ellipse">
@@ -8215,7 +8215,7 @@
         </p:nvSpPr>
         <p:spPr>
           <a:xfrm>
-            <a:off x="4160932" y="5477256"/>
+            <a:off x="2977653" y="2320800"/>
             <a:ext cx="256032" cy="256032"/>
           </a:xfrm>
           <a:prstGeom prst="rect">
@@ -8254,7 +8254,7 @@
         </p:nvSpPr>
         <p:spPr>
           <a:xfrm>
-            <a:off x="3825675" y="4808374"/>
+            <a:off x="3016523" y="2295117"/>
             <a:ext cx="256032" cy="256032"/>
           </a:xfrm>
           <a:prstGeom prst="ellipse">
@@ -8279,7 +8279,7 @@
         </p:nvSpPr>
         <p:spPr>
           <a:xfrm>
-            <a:off x="3825675" y="4808374"/>
+            <a:off x="3016523" y="2295117"/>
             <a:ext cx="256032" cy="256032"/>
           </a:xfrm>
           <a:prstGeom prst="rect">
@@ -8318,7 +8318,7 @@
         </p:nvSpPr>
         <p:spPr>
           <a:xfrm>
-            <a:off x="3354679" y="4497559"/>
+            <a:off x="5064337" y="5477256"/>
             <a:ext cx="256032" cy="256032"/>
           </a:xfrm>
           <a:prstGeom prst="ellipse">
@@ -8343,7 +8343,7 @@
         </p:nvSpPr>
         <p:spPr>
           <a:xfrm>
-            <a:off x="3354679" y="4497559"/>
+            <a:off x="5064337" y="5477256"/>
             <a:ext cx="256032" cy="256032"/>
           </a:xfrm>
           <a:prstGeom prst="rect">
@@ -8382,7 +8382,7 @@
         </p:nvSpPr>
         <p:spPr>
           <a:xfrm>
-            <a:off x="3343179" y="4482384"/>
+            <a:off x="4978946" y="5433702"/>
             <a:ext cx="256032" cy="256032"/>
           </a:xfrm>
           <a:prstGeom prst="ellipse">
@@ -8407,7 +8407,7 @@
         </p:nvSpPr>
         <p:spPr>
           <a:xfrm>
-            <a:off x="3343179" y="4482384"/>
+            <a:off x="4978946" y="5433702"/>
             <a:ext cx="256032" cy="256032"/>
           </a:xfrm>
           <a:prstGeom prst="rect">
@@ -8446,7 +8446,7 @@
         </p:nvSpPr>
         <p:spPr>
           <a:xfrm>
-            <a:off x="3333456" y="4473575"/>
+            <a:off x="4964966" y="5426827"/>
             <a:ext cx="256032" cy="256032"/>
           </a:xfrm>
           <a:prstGeom prst="ellipse">
@@ -8471,7 +8471,7 @@
         </p:nvSpPr>
         <p:spPr>
           <a:xfrm>
-            <a:off x="3333456" y="4473575"/>
+            <a:off x="4964966" y="5426827"/>
             <a:ext cx="256032" cy="256032"/>
           </a:xfrm>
           <a:prstGeom prst="rect">
@@ -8510,7 +8510,7 @@
         </p:nvSpPr>
         <p:spPr>
           <a:xfrm>
-            <a:off x="3449418" y="4493657"/>
+            <a:off x="4935714" y="5397971"/>
             <a:ext cx="256032" cy="256032"/>
           </a:xfrm>
           <a:prstGeom prst="ellipse">
@@ -8535,7 +8535,7 @@
         </p:nvSpPr>
         <p:spPr>
           <a:xfrm>
-            <a:off x="3449418" y="4493657"/>
+            <a:off x="4935714" y="5397971"/>
             <a:ext cx="256032" cy="256032"/>
           </a:xfrm>
           <a:prstGeom prst="rect">
@@ -8574,7 +8574,7 @@
         </p:nvSpPr>
         <p:spPr>
           <a:xfrm>
-            <a:off x="3308502" y="4449172"/>
+            <a:off x="5001120" y="5309633"/>
             <a:ext cx="256032" cy="256032"/>
           </a:xfrm>
           <a:prstGeom prst="ellipse">
@@ -8599,7 +8599,7 @@
         </p:nvSpPr>
         <p:spPr>
           <a:xfrm>
-            <a:off x="3308502" y="4449172"/>
+            <a:off x="5001120" y="5309633"/>
             <a:ext cx="256032" cy="256032"/>
           </a:xfrm>
           <a:prstGeom prst="rect">
@@ -8638,7 +8638,7 @@
         </p:nvSpPr>
         <p:spPr>
           <a:xfrm>
-            <a:off x="3344231" y="4451114"/>
+            <a:off x="4837648" y="5362664"/>
             <a:ext cx="256032" cy="256032"/>
           </a:xfrm>
           <a:prstGeom prst="ellipse">
@@ -8663,7 +8663,7 @@
         </p:nvSpPr>
         <p:spPr>
           <a:xfrm>
-            <a:off x="3344231" y="4451114"/>
+            <a:off x="4837648" y="5362664"/>
             <a:ext cx="256032" cy="256032"/>
           </a:xfrm>
           <a:prstGeom prst="rect">
@@ -8702,7 +8702,7 @@
         </p:nvSpPr>
         <p:spPr>
           <a:xfrm>
-            <a:off x="3293110" y="4427612"/>
+            <a:off x="4870565" y="5355810"/>
             <a:ext cx="256032" cy="256032"/>
           </a:xfrm>
           <a:prstGeom prst="ellipse">
@@ -8727,7 +8727,7 @@
         </p:nvSpPr>
         <p:spPr>
           <a:xfrm>
-            <a:off x="3293110" y="4427612"/>
+            <a:off x="4870565" y="5355810"/>
             <a:ext cx="256032" cy="256032"/>
           </a:xfrm>
           <a:prstGeom prst="rect">
@@ -8766,7 +8766,7 @@
         </p:nvSpPr>
         <p:spPr>
           <a:xfrm>
-            <a:off x="3330907" y="4427060"/>
+            <a:off x="5449824" y="5363563"/>
             <a:ext cx="256032" cy="256032"/>
           </a:xfrm>
           <a:prstGeom prst="ellipse">
@@ -8791,7 +8791,7 @@
         </p:nvSpPr>
         <p:spPr>
           <a:xfrm>
-            <a:off x="3330907" y="4427060"/>
+            <a:off x="5449824" y="5363563"/>
             <a:ext cx="256032" cy="256032"/>
           </a:xfrm>
           <a:prstGeom prst="rect">
@@ -8830,7 +8830,7 @@
         </p:nvSpPr>
         <p:spPr>
           <a:xfrm>
-            <a:off x="923544" y="2822908"/>
+            <a:off x="4927554" y="5018276"/>
             <a:ext cx="256032" cy="256032"/>
           </a:xfrm>
           <a:prstGeom prst="ellipse">
@@ -8855,7 +8855,7 @@
         </p:nvSpPr>
         <p:spPr>
           <a:xfrm>
-            <a:off x="923544" y="2822908"/>
+            <a:off x="4927554" y="5018276"/>
             <a:ext cx="256032" cy="256032"/>
           </a:xfrm>
           <a:prstGeom prst="rect">
@@ -8880,7 +8880,7 @@
                 <a:ea typeface="Arial" pitchFamily="34" charset="-122"/>
                 <a:cs typeface="Arial" pitchFamily="34" charset="-120"/>
               </a:rPr>
-              <a:t>16</a:t>
+              <a:t>15</a:t>
             </a:r>
             <a:endParaRPr lang="en-US" sz="900" dirty="0"/>
           </a:p>
@@ -8894,7 +8894,7 @@
         </p:nvSpPr>
         <p:spPr>
           <a:xfrm>
-            <a:off x="1170446" y="2884040"/>
+            <a:off x="4914803" y="5001418"/>
             <a:ext cx="256032" cy="256032"/>
           </a:xfrm>
           <a:prstGeom prst="ellipse">
@@ -8919,7 +8919,7 @@
         </p:nvSpPr>
         <p:spPr>
           <a:xfrm>
-            <a:off x="1170446" y="2884040"/>
+            <a:off x="4914803" y="5001418"/>
             <a:ext cx="256032" cy="256032"/>
           </a:xfrm>
           <a:prstGeom prst="rect">
@@ -8944,7 +8944,7 @@
                 <a:ea typeface="Arial" pitchFamily="34" charset="-122"/>
                 <a:cs typeface="Arial" pitchFamily="34" charset="-120"/>
               </a:rPr>
-              <a:t>17</a:t>
+              <a:t>15</a:t>
             </a:r>
             <a:endParaRPr lang="en-US" sz="900" dirty="0"/>
           </a:p>
@@ -8958,7 +8958,7 @@
         </p:nvSpPr>
         <p:spPr>
           <a:xfrm>
-            <a:off x="2691489" y="2157984"/>
+            <a:off x="4904021" y="4991632"/>
             <a:ext cx="256032" cy="256032"/>
           </a:xfrm>
           <a:prstGeom prst="ellipse">
@@ -8983,7 +8983,7 @@
         </p:nvSpPr>
         <p:spPr>
           <a:xfrm>
-            <a:off x="2691489" y="2157984"/>
+            <a:off x="4904021" y="4991632"/>
             <a:ext cx="256032" cy="256032"/>
           </a:xfrm>
           <a:prstGeom prst="rect">
@@ -9008,7 +9008,7 @@
                 <a:ea typeface="Arial" pitchFamily="34" charset="-122"/>
                 <a:cs typeface="Arial" pitchFamily="34" charset="-120"/>
               </a:rPr>
-              <a:t>17</a:t>
+              <a:t>15</a:t>
             </a:r>
             <a:endParaRPr lang="en-US" sz="900" dirty="0"/>
           </a:p>
@@ -9022,7 +9022,7 @@
         </p:nvSpPr>
         <p:spPr>
           <a:xfrm>
-            <a:off x="3436109" y="4030695"/>
+            <a:off x="5032607" y="5013942"/>
             <a:ext cx="256032" cy="256032"/>
           </a:xfrm>
           <a:prstGeom prst="ellipse">
@@ -9047,7 +9047,7 @@
         </p:nvSpPr>
         <p:spPr>
           <a:xfrm>
-            <a:off x="3436109" y="4030695"/>
+            <a:off x="5032607" y="5013942"/>
             <a:ext cx="256032" cy="256032"/>
           </a:xfrm>
           <a:prstGeom prst="rect">
@@ -9072,7 +9072,7 @@
                 <a:ea typeface="Arial" pitchFamily="34" charset="-122"/>
                 <a:cs typeface="Arial" pitchFamily="34" charset="-120"/>
               </a:rPr>
-              <a:t>18</a:t>
+              <a:t>15</a:t>
             </a:r>
             <a:endParaRPr lang="en-US" sz="900" dirty="0"/>
           </a:p>
@@ -9086,7 +9086,7 @@
         </p:nvSpPr>
         <p:spPr>
           <a:xfrm>
-            <a:off x="4917970" y="4111168"/>
+            <a:off x="4876351" y="4964522"/>
             <a:ext cx="256032" cy="256032"/>
           </a:xfrm>
           <a:prstGeom prst="ellipse">
@@ -9111,7 +9111,7 @@
         </p:nvSpPr>
         <p:spPr>
           <a:xfrm>
-            <a:off x="4917970" y="4111168"/>
+            <a:off x="4876351" y="4964522"/>
             <a:ext cx="256032" cy="256032"/>
           </a:xfrm>
           <a:prstGeom prst="rect">
@@ -9136,7 +9136,7 @@
                 <a:ea typeface="Arial" pitchFamily="34" charset="-122"/>
                 <a:cs typeface="Arial" pitchFamily="34" charset="-120"/>
               </a:rPr>
-              <a:t>18</a:t>
+              <a:t>15</a:t>
             </a:r>
             <a:endParaRPr lang="en-US" sz="900" dirty="0"/>
           </a:p>
@@ -9150,7 +9150,7 @@
         </p:nvSpPr>
         <p:spPr>
           <a:xfrm>
-            <a:off x="1906531" y="2921102"/>
+            <a:off x="4915969" y="4966680"/>
             <a:ext cx="256032" cy="256032"/>
           </a:xfrm>
           <a:prstGeom prst="ellipse">
@@ -9175,7 +9175,7 @@
         </p:nvSpPr>
         <p:spPr>
           <a:xfrm>
-            <a:off x="1906531" y="2921102"/>
+            <a:off x="4915969" y="4966680"/>
             <a:ext cx="256032" cy="256032"/>
           </a:xfrm>
           <a:prstGeom prst="rect">
@@ -9200,7 +9200,7 @@
                 <a:ea typeface="Arial" pitchFamily="34" charset="-122"/>
                 <a:cs typeface="Arial" pitchFamily="34" charset="-120"/>
               </a:rPr>
-              <a:t>18</a:t>
+              <a:t>15</a:t>
             </a:r>
             <a:endParaRPr lang="en-US" sz="900" dirty="0"/>
           </a:p>
@@ -9214,7 +9214,7 @@
         </p:nvSpPr>
         <p:spPr>
           <a:xfrm>
-            <a:off x="2748998" y="2423719"/>
+            <a:off x="4859283" y="4940572"/>
             <a:ext cx="256032" cy="256032"/>
           </a:xfrm>
           <a:prstGeom prst="ellipse">
@@ -9239,7 +9239,7 @@
         </p:nvSpPr>
         <p:spPr>
           <a:xfrm>
-            <a:off x="2748998" y="2423719"/>
+            <a:off x="4859283" y="4940572"/>
             <a:ext cx="256032" cy="256032"/>
           </a:xfrm>
           <a:prstGeom prst="rect">
@@ -9264,7 +9264,7 @@
                 <a:ea typeface="Arial" pitchFamily="34" charset="-122"/>
                 <a:cs typeface="Arial" pitchFamily="34" charset="-120"/>
               </a:rPr>
-              <a:t>18</a:t>
+              <a:t>15</a:t>
             </a:r>
             <a:endParaRPr lang="en-US" sz="900" dirty="0"/>
           </a:p>
@@ -9278,7 +9278,7 @@
         </p:nvSpPr>
         <p:spPr>
           <a:xfrm>
-            <a:off x="3628632" y="4497644"/>
+            <a:off x="4901195" y="4939958"/>
             <a:ext cx="256032" cy="256032"/>
           </a:xfrm>
           <a:prstGeom prst="ellipse">
@@ -9303,7 +9303,7 @@
         </p:nvSpPr>
         <p:spPr>
           <a:xfrm>
-            <a:off x="3628632" y="4497644"/>
+            <a:off x="4901195" y="4939958"/>
             <a:ext cx="256032" cy="256032"/>
           </a:xfrm>
           <a:prstGeom prst="rect">
@@ -9328,7 +9328,7 @@
                 <a:ea typeface="Arial" pitchFamily="34" charset="-122"/>
                 <a:cs typeface="Arial" pitchFamily="34" charset="-120"/>
               </a:rPr>
-              <a:t>18</a:t>
+              <a:t>15</a:t>
             </a:r>
             <a:endParaRPr lang="en-US" sz="900" dirty="0"/>
           </a:p>
@@ -9342,7 +9342,7 @@
         </p:nvSpPr>
         <p:spPr>
           <a:xfrm>
-            <a:off x="972124" y="2808838"/>
+            <a:off x="2231762" y="3157891"/>
             <a:ext cx="256032" cy="256032"/>
           </a:xfrm>
           <a:prstGeom prst="ellipse">
@@ -9367,7 +9367,7 @@
         </p:nvSpPr>
         <p:spPr>
           <a:xfrm>
-            <a:off x="972124" y="2808838"/>
+            <a:off x="2231762" y="3157891"/>
             <a:ext cx="256032" cy="256032"/>
           </a:xfrm>
           <a:prstGeom prst="rect">
@@ -9392,7 +9392,7 @@
                 <a:ea typeface="Arial" pitchFamily="34" charset="-122"/>
                 <a:cs typeface="Arial" pitchFamily="34" charset="-120"/>
               </a:rPr>
-              <a:t>18</a:t>
+              <a:t>16</a:t>
             </a:r>
             <a:endParaRPr lang="en-US" sz="900" dirty="0"/>
           </a:p>
@@ -9406,7 +9406,7 @@
         </p:nvSpPr>
         <p:spPr>
           <a:xfrm>
-            <a:off x="4152480" y="5454156"/>
+            <a:off x="2505542" y="3225803"/>
             <a:ext cx="256032" cy="256032"/>
           </a:xfrm>
           <a:prstGeom prst="ellipse">
@@ -9431,7 +9431,7 @@
         </p:nvSpPr>
         <p:spPr>
           <a:xfrm>
-            <a:off x="4152480" y="5454156"/>
+            <a:off x="2505542" y="3225803"/>
             <a:ext cx="256032" cy="256032"/>
           </a:xfrm>
           <a:prstGeom prst="rect">
@@ -9456,7 +9456,7 @@
                 <a:ea typeface="Arial" pitchFamily="34" charset="-122"/>
                 <a:cs typeface="Arial" pitchFamily="34" charset="-120"/>
               </a:rPr>
-              <a:t>19</a:t>
+              <a:t>17</a:t>
             </a:r>
             <a:endParaRPr lang="en-US" sz="900" dirty="0"/>
           </a:p>
@@ -9470,7 +9470,7 @@
         </p:nvSpPr>
         <p:spPr>
           <a:xfrm>
-            <a:off x="1103742" y="2854992"/>
+            <a:off x="5017850" y="4499633"/>
             <a:ext cx="256032" cy="256032"/>
           </a:xfrm>
           <a:prstGeom prst="ellipse">
@@ -9495,7 +9495,7 @@
         </p:nvSpPr>
         <p:spPr>
           <a:xfrm>
-            <a:off x="1103742" y="2854992"/>
+            <a:off x="5017850" y="4499633"/>
             <a:ext cx="256032" cy="256032"/>
           </a:xfrm>
           <a:prstGeom prst="rect">
@@ -9520,7 +9520,7 @@
                 <a:ea typeface="Arial" pitchFamily="34" charset="-122"/>
                 <a:cs typeface="Arial" pitchFamily="34" charset="-120"/>
               </a:rPr>
-              <a:t>20</a:t>
+              <a:t>18</a:t>
             </a:r>
             <a:endParaRPr lang="en-US" sz="900" dirty="0"/>
           </a:p>
@@ -9534,7 +9534,7 @@
         </p:nvSpPr>
         <p:spPr>
           <a:xfrm>
-            <a:off x="1125368" y="2867007"/>
+            <a:off x="923544" y="2708858"/>
             <a:ext cx="256032" cy="256032"/>
           </a:xfrm>
           <a:prstGeom prst="ellipse">
@@ -9559,7 +9559,7 @@
         </p:nvSpPr>
         <p:spPr>
           <a:xfrm>
-            <a:off x="1125368" y="2867007"/>
+            <a:off x="923544" y="2708858"/>
             <a:ext cx="256032" cy="256032"/>
           </a:xfrm>
           <a:prstGeom prst="rect">
@@ -9584,7 +9584,7 @@
                 <a:ea typeface="Arial" pitchFamily="34" charset="-122"/>
                 <a:cs typeface="Arial" pitchFamily="34" charset="-120"/>
               </a:rPr>
-              <a:t>20</a:t>
+              <a:t>18</a:t>
             </a:r>
             <a:endParaRPr lang="en-US" sz="900" dirty="0"/>
           </a:p>
@@ -9598,7 +9598,7 @@
         </p:nvSpPr>
         <p:spPr>
           <a:xfrm>
-            <a:off x="2750561" y="2436464"/>
+            <a:off x="1417957" y="2802505"/>
             <a:ext cx="256032" cy="256032"/>
           </a:xfrm>
           <a:prstGeom prst="ellipse">
@@ -9623,7 +9623,7 @@
         </p:nvSpPr>
         <p:spPr>
           <a:xfrm>
-            <a:off x="2750561" y="2436464"/>
+            <a:off x="1417957" y="2802505"/>
             <a:ext cx="256032" cy="256032"/>
           </a:xfrm>
           <a:prstGeom prst="rect">
@@ -9648,7 +9648,7 @@
                 <a:ea typeface="Arial" pitchFamily="34" charset="-122"/>
                 <a:cs typeface="Arial" pitchFamily="34" charset="-120"/>
               </a:rPr>
-              <a:t>20</a:t>
+              <a:t>18</a:t>
             </a:r>
             <a:endParaRPr lang="en-US" sz="900" dirty="0"/>
           </a:p>
@@ -9662,7 +9662,7 @@
         </p:nvSpPr>
         <p:spPr>
           <a:xfrm>
-            <a:off x="3567296" y="4861381"/>
+            <a:off x="2705994" y="2224331"/>
             <a:ext cx="256032" cy="256032"/>
           </a:xfrm>
           <a:prstGeom prst="ellipse">
@@ -9687,7 +9687,7 @@
         </p:nvSpPr>
         <p:spPr>
           <a:xfrm>
-            <a:off x="3567296" y="4861381"/>
+            <a:off x="2705994" y="2224331"/>
             <a:ext cx="256032" cy="256032"/>
           </a:xfrm>
           <a:prstGeom prst="rect">
@@ -9712,7 +9712,7 @@
                 <a:ea typeface="Arial" pitchFamily="34" charset="-122"/>
                 <a:cs typeface="Arial" pitchFamily="34" charset="-120"/>
               </a:rPr>
-              <a:t>20</a:t>
+              <a:t>18</a:t>
             </a:r>
             <a:endParaRPr lang="en-US" sz="900" dirty="0"/>
           </a:p>
@@ -9726,7 +9726,7 @@
         </p:nvSpPr>
         <p:spPr>
           <a:xfrm>
-            <a:off x="1432660" y="2427091"/>
+            <a:off x="3321759" y="3266976"/>
             <a:ext cx="256032" cy="256032"/>
           </a:xfrm>
           <a:prstGeom prst="ellipse">
@@ -9751,7 +9751,7 @@
         </p:nvSpPr>
         <p:spPr>
           <a:xfrm>
-            <a:off x="1432660" y="2427091"/>
+            <a:off x="3321759" y="3266976"/>
             <a:ext cx="256032" cy="256032"/>
           </a:xfrm>
           <a:prstGeom prst="rect">
@@ -9776,7 +9776,7 @@
                 <a:ea typeface="Arial" pitchFamily="34" charset="-122"/>
                 <a:cs typeface="Arial" pitchFamily="34" charset="-120"/>
               </a:rPr>
-              <a:t>21</a:t>
+              <a:t>18</a:t>
             </a:r>
             <a:endParaRPr lang="en-US" sz="900" dirty="0"/>
           </a:p>
@@ -9790,7 +9790,7 @@
         </p:nvSpPr>
         <p:spPr>
           <a:xfrm>
-            <a:off x="3516738" y="4109781"/>
+            <a:off x="5231330" y="5018370"/>
             <a:ext cx="256032" cy="256032"/>
           </a:xfrm>
           <a:prstGeom prst="ellipse">
@@ -9815,7 +9815,7 @@
         </p:nvSpPr>
         <p:spPr>
           <a:xfrm>
-            <a:off x="3516738" y="4109781"/>
+            <a:off x="5231330" y="5018370"/>
             <a:ext cx="256032" cy="256032"/>
           </a:xfrm>
           <a:prstGeom prst="rect">
@@ -9840,6 +9840,454 @@
                 <a:ea typeface="Arial" pitchFamily="34" charset="-122"/>
                 <a:cs typeface="Arial" pitchFamily="34" charset="-120"/>
               </a:rPr>
+              <a:t>18</a:t>
+            </a:r>
+            <a:endParaRPr lang="en-US" sz="900" dirty="0"/>
+          </a:p>
+        </p:txBody>
+      </p:sp>
+      <p:sp>
+        <p:nvSpPr>
+          <p:cNvPr id="75" name="Shape 73"/>
+          <p:cNvSpPr/>
+          <p:nvPr/>
+        </p:nvSpPr>
+        <p:spPr>
+          <a:xfrm>
+            <a:off x="2170047" y="2432085"/>
+            <a:ext cx="256032" cy="256032"/>
+          </a:xfrm>
+          <a:prstGeom prst="ellipse">
+            <a:avLst/>
+          </a:prstGeom>
+          <a:solidFill>
+            <a:srgbClr val="888888"/>
+          </a:solidFill>
+          <a:ln w="15240">
+            <a:solidFill>
+              <a:srgbClr val="FFFFFF"/>
+            </a:solidFill>
+            <a:prstDash val="solid"/>
+          </a:ln>
+        </p:spPr>
+      </p:sp>
+      <p:sp>
+        <p:nvSpPr>
+          <p:cNvPr id="76" name="Text 74"/>
+          <p:cNvSpPr/>
+          <p:nvPr/>
+        </p:nvSpPr>
+        <p:spPr>
+          <a:xfrm>
+            <a:off x="2170047" y="2432085"/>
+            <a:ext cx="256032" cy="256032"/>
+          </a:xfrm>
+          <a:prstGeom prst="rect">
+            <a:avLst/>
+          </a:prstGeom>
+          <a:noFill/>
+          <a:ln/>
+        </p:spPr>
+        <p:txBody>
+          <a:bodyPr wrap="square" lIns="0" tIns="0" rIns="0" bIns="0" rtlCol="0" anchor="ctr"/>
+          <a:lstStyle/>
+          <a:p>
+            <a:pPr algn="ctr" indent="0" marL="0">
+              <a:buNone/>
+            </a:pPr>
+            <a:r>
+              <a:rPr lang="en-US" sz="900" b="1" dirty="0">
+                <a:solidFill>
+                  <a:srgbClr val="FFFFFF"/>
+                </a:solidFill>
+                <a:latin typeface="Arial" pitchFamily="34" charset="0"/>
+                <a:ea typeface="Arial" pitchFamily="34" charset="-122"/>
+                <a:cs typeface="Arial" pitchFamily="34" charset="-120"/>
+              </a:rPr>
+              <a:t>18</a:t>
+            </a:r>
+            <a:endParaRPr lang="en-US" sz="900" dirty="0"/>
+          </a:p>
+        </p:txBody>
+      </p:sp>
+      <p:sp>
+        <p:nvSpPr>
+          <p:cNvPr id="77" name="Shape 75"/>
+          <p:cNvSpPr/>
+          <p:nvPr/>
+        </p:nvSpPr>
+        <p:spPr>
+          <a:xfrm>
+            <a:off x="2285631" y="3142261"/>
+            <a:ext cx="256032" cy="256032"/>
+          </a:xfrm>
+          <a:prstGeom prst="ellipse">
+            <a:avLst/>
+          </a:prstGeom>
+          <a:solidFill>
+            <a:srgbClr val="888888"/>
+          </a:solidFill>
+          <a:ln w="15240">
+            <a:solidFill>
+              <a:srgbClr val="FFFFFF"/>
+            </a:solidFill>
+            <a:prstDash val="solid"/>
+          </a:ln>
+        </p:spPr>
+      </p:sp>
+      <p:sp>
+        <p:nvSpPr>
+          <p:cNvPr id="78" name="Text 76"/>
+          <p:cNvSpPr/>
+          <p:nvPr/>
+        </p:nvSpPr>
+        <p:spPr>
+          <a:xfrm>
+            <a:off x="2285631" y="3142261"/>
+            <a:ext cx="256032" cy="256032"/>
+          </a:xfrm>
+          <a:prstGeom prst="rect">
+            <a:avLst/>
+          </a:prstGeom>
+          <a:noFill/>
+          <a:ln/>
+        </p:spPr>
+        <p:txBody>
+          <a:bodyPr wrap="square" lIns="0" tIns="0" rIns="0" bIns="0" rtlCol="0" anchor="ctr"/>
+          <a:lstStyle/>
+          <a:p>
+            <a:pPr algn="ctr" indent="0" marL="0">
+              <a:buNone/>
+            </a:pPr>
+            <a:r>
+              <a:rPr lang="en-US" sz="900" b="1" dirty="0">
+                <a:solidFill>
+                  <a:srgbClr val="FFFFFF"/>
+                </a:solidFill>
+                <a:latin typeface="Arial" pitchFamily="34" charset="0"/>
+                <a:ea typeface="Arial" pitchFamily="34" charset="-122"/>
+                <a:cs typeface="Arial" pitchFamily="34" charset="-120"/>
+              </a:rPr>
+              <a:t>18</a:t>
+            </a:r>
+            <a:endParaRPr lang="en-US" sz="900" dirty="0"/>
+          </a:p>
+        </p:txBody>
+      </p:sp>
+      <p:sp>
+        <p:nvSpPr>
+          <p:cNvPr id="79" name="Shape 77"/>
+          <p:cNvSpPr/>
+          <p:nvPr/>
+        </p:nvSpPr>
+        <p:spPr>
+          <a:xfrm>
+            <a:off x="2431577" y="3193533"/>
+            <a:ext cx="256032" cy="256032"/>
+          </a:xfrm>
+          <a:prstGeom prst="ellipse">
+            <a:avLst/>
+          </a:prstGeom>
+          <a:solidFill>
+            <a:srgbClr val="888888"/>
+          </a:solidFill>
+          <a:ln w="15240">
+            <a:solidFill>
+              <a:srgbClr val="FFFFFF"/>
+            </a:solidFill>
+            <a:prstDash val="solid"/>
+          </a:ln>
+        </p:spPr>
+      </p:sp>
+      <p:sp>
+        <p:nvSpPr>
+          <p:cNvPr id="80" name="Text 78"/>
+          <p:cNvSpPr/>
+          <p:nvPr/>
+        </p:nvSpPr>
+        <p:spPr>
+          <a:xfrm>
+            <a:off x="2431577" y="3193533"/>
+            <a:ext cx="256032" cy="256032"/>
+          </a:xfrm>
+          <a:prstGeom prst="rect">
+            <a:avLst/>
+          </a:prstGeom>
+          <a:noFill/>
+          <a:ln/>
+        </p:spPr>
+        <p:txBody>
+          <a:bodyPr wrap="square" lIns="0" tIns="0" rIns="0" bIns="0" rtlCol="0" anchor="ctr"/>
+          <a:lstStyle/>
+          <a:p>
+            <a:pPr algn="ctr" indent="0" marL="0">
+              <a:buNone/>
+            </a:pPr>
+            <a:r>
+              <a:rPr lang="en-US" sz="900" b="1" dirty="0">
+                <a:solidFill>
+                  <a:srgbClr val="FFFFFF"/>
+                </a:solidFill>
+                <a:latin typeface="Arial" pitchFamily="34" charset="0"/>
+                <a:ea typeface="Arial" pitchFamily="34" charset="-122"/>
+                <a:cs typeface="Arial" pitchFamily="34" charset="-120"/>
+              </a:rPr>
+              <a:t>20</a:t>
+            </a:r>
+            <a:endParaRPr lang="en-US" sz="900" dirty="0"/>
+          </a:p>
+        </p:txBody>
+      </p:sp>
+      <p:sp>
+        <p:nvSpPr>
+          <p:cNvPr id="81" name="Shape 79"/>
+          <p:cNvSpPr/>
+          <p:nvPr/>
+        </p:nvSpPr>
+        <p:spPr>
+          <a:xfrm>
+            <a:off x="2455557" y="3206881"/>
+            <a:ext cx="256032" cy="256032"/>
+          </a:xfrm>
+          <a:prstGeom prst="ellipse">
+            <a:avLst/>
+          </a:prstGeom>
+          <a:solidFill>
+            <a:srgbClr val="888888"/>
+          </a:solidFill>
+          <a:ln w="15240">
+            <a:solidFill>
+              <a:srgbClr val="FFFFFF"/>
+            </a:solidFill>
+            <a:prstDash val="solid"/>
+          </a:ln>
+        </p:spPr>
+      </p:sp>
+      <p:sp>
+        <p:nvSpPr>
+          <p:cNvPr id="82" name="Text 80"/>
+          <p:cNvSpPr/>
+          <p:nvPr/>
+        </p:nvSpPr>
+        <p:spPr>
+          <a:xfrm>
+            <a:off x="2455557" y="3206881"/>
+            <a:ext cx="256032" cy="256032"/>
+          </a:xfrm>
+          <a:prstGeom prst="rect">
+            <a:avLst/>
+          </a:prstGeom>
+          <a:noFill/>
+          <a:ln/>
+        </p:spPr>
+        <p:txBody>
+          <a:bodyPr wrap="square" lIns="0" tIns="0" rIns="0" bIns="0" rtlCol="0" anchor="ctr"/>
+          <a:lstStyle/>
+          <a:p>
+            <a:pPr algn="ctr" indent="0" marL="0">
+              <a:buNone/>
+            </a:pPr>
+            <a:r>
+              <a:rPr lang="en-US" sz="900" b="1" dirty="0">
+                <a:solidFill>
+                  <a:srgbClr val="FFFFFF"/>
+                </a:solidFill>
+                <a:latin typeface="Arial" pitchFamily="34" charset="0"/>
+                <a:ea typeface="Arial" pitchFamily="34" charset="-122"/>
+                <a:cs typeface="Arial" pitchFamily="34" charset="-120"/>
+              </a:rPr>
+              <a:t>20</a:t>
+            </a:r>
+            <a:endParaRPr lang="en-US" sz="900" dirty="0"/>
+          </a:p>
+        </p:txBody>
+      </p:sp>
+      <p:sp>
+        <p:nvSpPr>
+          <p:cNvPr id="83" name="Shape 81"/>
+          <p:cNvSpPr/>
+          <p:nvPr/>
+        </p:nvSpPr>
+        <p:spPr>
+          <a:xfrm>
+            <a:off x="5163317" y="5422449"/>
+            <a:ext cx="256032" cy="256032"/>
+          </a:xfrm>
+          <a:prstGeom prst="ellipse">
+            <a:avLst/>
+          </a:prstGeom>
+          <a:solidFill>
+            <a:srgbClr val="888888"/>
+          </a:solidFill>
+          <a:ln w="15240">
+            <a:solidFill>
+              <a:srgbClr val="FFFFFF"/>
+            </a:solidFill>
+            <a:prstDash val="solid"/>
+          </a:ln>
+        </p:spPr>
+      </p:sp>
+      <p:sp>
+        <p:nvSpPr>
+          <p:cNvPr id="84" name="Text 82"/>
+          <p:cNvSpPr/>
+          <p:nvPr/>
+        </p:nvSpPr>
+        <p:spPr>
+          <a:xfrm>
+            <a:off x="5163317" y="5422449"/>
+            <a:ext cx="256032" cy="256032"/>
+          </a:xfrm>
+          <a:prstGeom prst="rect">
+            <a:avLst/>
+          </a:prstGeom>
+          <a:noFill/>
+          <a:ln/>
+        </p:spPr>
+        <p:txBody>
+          <a:bodyPr wrap="square" lIns="0" tIns="0" rIns="0" bIns="0" rtlCol="0" anchor="ctr"/>
+          <a:lstStyle/>
+          <a:p>
+            <a:pPr algn="ctr" indent="0" marL="0">
+              <a:buNone/>
+            </a:pPr>
+            <a:r>
+              <a:rPr lang="en-US" sz="900" b="1" dirty="0">
+                <a:solidFill>
+                  <a:srgbClr val="FFFFFF"/>
+                </a:solidFill>
+                <a:latin typeface="Arial" pitchFamily="34" charset="0"/>
+                <a:ea typeface="Arial" pitchFamily="34" charset="-122"/>
+                <a:cs typeface="Arial" pitchFamily="34" charset="-120"/>
+              </a:rPr>
+              <a:t>20</a:t>
+            </a:r>
+            <a:endParaRPr lang="en-US" sz="900" dirty="0"/>
+          </a:p>
+        </p:txBody>
+      </p:sp>
+      <p:sp>
+        <p:nvSpPr>
+          <p:cNvPr id="85" name="Shape 83"/>
+          <p:cNvSpPr/>
+          <p:nvPr/>
+        </p:nvSpPr>
+        <p:spPr>
+          <a:xfrm>
+            <a:off x="2796301" y="2718174"/>
+            <a:ext cx="256032" cy="256032"/>
+          </a:xfrm>
+          <a:prstGeom prst="ellipse">
+            <a:avLst/>
+          </a:prstGeom>
+          <a:solidFill>
+            <a:srgbClr val="888888"/>
+          </a:solidFill>
+          <a:ln w="15240">
+            <a:solidFill>
+              <a:srgbClr val="FFFFFF"/>
+            </a:solidFill>
+            <a:prstDash val="solid"/>
+          </a:ln>
+        </p:spPr>
+      </p:sp>
+      <p:sp>
+        <p:nvSpPr>
+          <p:cNvPr id="86" name="Text 84"/>
+          <p:cNvSpPr/>
+          <p:nvPr/>
+        </p:nvSpPr>
+        <p:spPr>
+          <a:xfrm>
+            <a:off x="2796301" y="2718174"/>
+            <a:ext cx="256032" cy="256032"/>
+          </a:xfrm>
+          <a:prstGeom prst="rect">
+            <a:avLst/>
+          </a:prstGeom>
+          <a:noFill/>
+          <a:ln/>
+        </p:spPr>
+        <p:txBody>
+          <a:bodyPr wrap="square" lIns="0" tIns="0" rIns="0" bIns="0" rtlCol="0" anchor="ctr"/>
+          <a:lstStyle/>
+          <a:p>
+            <a:pPr algn="ctr" indent="0" marL="0">
+              <a:buNone/>
+            </a:pPr>
+            <a:r>
+              <a:rPr lang="en-US" sz="900" b="1" dirty="0">
+                <a:solidFill>
+                  <a:srgbClr val="FFFFFF"/>
+                </a:solidFill>
+                <a:latin typeface="Arial" pitchFamily="34" charset="0"/>
+                <a:ea typeface="Arial" pitchFamily="34" charset="-122"/>
+                <a:cs typeface="Arial" pitchFamily="34" charset="-120"/>
+              </a:rPr>
+              <a:t>21</a:t>
+            </a:r>
+            <a:endParaRPr lang="en-US" sz="900" dirty="0"/>
+          </a:p>
+        </p:txBody>
+      </p:sp>
+      <p:sp>
+        <p:nvSpPr>
+          <p:cNvPr id="87" name="Shape 85"/>
+          <p:cNvSpPr/>
+          <p:nvPr/>
+        </p:nvSpPr>
+        <p:spPr>
+          <a:xfrm>
+            <a:off x="5107256" y="4587490"/>
+            <a:ext cx="256032" cy="256032"/>
+          </a:xfrm>
+          <a:prstGeom prst="ellipse">
+            <a:avLst/>
+          </a:prstGeom>
+          <a:solidFill>
+            <a:srgbClr val="888888"/>
+          </a:solidFill>
+          <a:ln w="15240">
+            <a:solidFill>
+              <a:srgbClr val="FFFFFF"/>
+            </a:solidFill>
+            <a:prstDash val="solid"/>
+          </a:ln>
+        </p:spPr>
+      </p:sp>
+      <p:sp>
+        <p:nvSpPr>
+          <p:cNvPr id="88" name="Text 86"/>
+          <p:cNvSpPr/>
+          <p:nvPr/>
+        </p:nvSpPr>
+        <p:spPr>
+          <a:xfrm>
+            <a:off x="5107256" y="4587490"/>
+            <a:ext cx="256032" cy="256032"/>
+          </a:xfrm>
+          <a:prstGeom prst="rect">
+            <a:avLst/>
+          </a:prstGeom>
+          <a:noFill/>
+          <a:ln/>
+        </p:spPr>
+        <p:txBody>
+          <a:bodyPr wrap="square" lIns="0" tIns="0" rIns="0" bIns="0" rtlCol="0" anchor="ctr"/>
+          <a:lstStyle/>
+          <a:p>
+            <a:pPr algn="ctr" indent="0" marL="0">
+              <a:buNone/>
+            </a:pPr>
+            <a:r>
+              <a:rPr lang="en-US" sz="900" b="1" dirty="0">
+                <a:solidFill>
+                  <a:srgbClr val="FFFFFF"/>
+                </a:solidFill>
+                <a:latin typeface="Arial" pitchFamily="34" charset="0"/>
+                <a:ea typeface="Arial" pitchFamily="34" charset="-122"/>
+                <a:cs typeface="Arial" pitchFamily="34" charset="-120"/>
+              </a:rPr>
               <a:t>23</a:t>
             </a:r>
             <a:endParaRPr lang="en-US" sz="900" dirty="0"/>
@@ -9848,13 +10296,13 @@
       </p:sp>
       <p:sp>
         <p:nvSpPr>
-          <p:cNvPr id="75" name="Shape 73"/>
-          <p:cNvSpPr/>
-          <p:nvPr/>
-        </p:nvSpPr>
-        <p:spPr>
-          <a:xfrm>
-            <a:off x="1157600" y="2867249"/>
+          <p:cNvPr id="89" name="Shape 87"/>
+          <p:cNvSpPr/>
+          <p:nvPr/>
+        </p:nvSpPr>
+        <p:spPr>
+          <a:xfrm>
+            <a:off x="2494285" y="3210192"/>
             <a:ext cx="310896" cy="310896"/>
           </a:xfrm>
           <a:prstGeom prst="ellipse">
@@ -9873,13 +10321,13 @@
       </p:sp>
       <p:sp>
         <p:nvSpPr>
-          <p:cNvPr id="76" name="Text 74"/>
-          <p:cNvSpPr/>
-          <p:nvPr/>
-        </p:nvSpPr>
-        <p:spPr>
-          <a:xfrm>
-            <a:off x="1157600" y="2867249"/>
+          <p:cNvPr id="90" name="Text 88"/>
+          <p:cNvSpPr/>
+          <p:nvPr/>
+        </p:nvSpPr>
+        <p:spPr>
+          <a:xfrm>
+            <a:off x="2494285" y="3210192"/>
             <a:ext cx="310896" cy="310896"/>
           </a:xfrm>
           <a:prstGeom prst="rect">
@@ -9912,13 +10360,13 @@
       </p:sp>
       <p:sp>
         <p:nvSpPr>
-          <p:cNvPr id="77" name="Shape 75"/>
-          <p:cNvSpPr/>
-          <p:nvPr/>
-        </p:nvSpPr>
-        <p:spPr>
-          <a:xfrm>
-            <a:off x="926839" y="2602620"/>
+          <p:cNvPr id="91" name="Shape 89"/>
+          <p:cNvSpPr/>
+          <p:nvPr/>
+        </p:nvSpPr>
+        <p:spPr>
+          <a:xfrm>
+            <a:off x="2238402" y="2916214"/>
             <a:ext cx="310896" cy="310896"/>
           </a:xfrm>
           <a:prstGeom prst="ellipse">
@@ -9937,13 +10385,13 @@
       </p:sp>
       <p:sp>
         <p:nvSpPr>
-          <p:cNvPr id="78" name="Text 76"/>
-          <p:cNvSpPr/>
-          <p:nvPr/>
-        </p:nvSpPr>
-        <p:spPr>
-          <a:xfrm>
-            <a:off x="926839" y="2602620"/>
+          <p:cNvPr id="92" name="Text 90"/>
+          <p:cNvSpPr/>
+          <p:nvPr/>
+        </p:nvSpPr>
+        <p:spPr>
+          <a:xfrm>
+            <a:off x="2238402" y="2916214"/>
             <a:ext cx="310896" cy="310896"/>
           </a:xfrm>
           <a:prstGeom prst="rect">
@@ -9976,13 +10424,13 @@
       </p:sp>
       <p:sp>
         <p:nvSpPr>
-          <p:cNvPr id="79" name="Shape 77"/>
-          <p:cNvSpPr/>
-          <p:nvPr/>
-        </p:nvSpPr>
-        <p:spPr>
-          <a:xfrm>
-            <a:off x="907783" y="2807225"/>
+          <p:cNvPr id="93" name="Shape 91"/>
+          <p:cNvSpPr/>
+          <p:nvPr/>
+        </p:nvSpPr>
+        <p:spPr>
+          <a:xfrm>
+            <a:off x="2217272" y="3143511"/>
             <a:ext cx="310896" cy="310896"/>
           </a:xfrm>
           <a:prstGeom prst="ellipse">
@@ -10001,13 +10449,13 @@
       </p:sp>
       <p:sp>
         <p:nvSpPr>
-          <p:cNvPr id="80" name="Text 78"/>
-          <p:cNvSpPr/>
-          <p:nvPr/>
-        </p:nvSpPr>
-        <p:spPr>
-          <a:xfrm>
-            <a:off x="907783" y="2807225"/>
+          <p:cNvPr id="94" name="Text 92"/>
+          <p:cNvSpPr/>
+          <p:nvPr/>
+        </p:nvSpPr>
+        <p:spPr>
+          <a:xfrm>
+            <a:off x="2217272" y="3143511"/>
             <a:ext cx="310896" cy="310896"/>
           </a:xfrm>
           <a:prstGeom prst="rect">
@@ -10040,13 +10488,13 @@
       </p:sp>
       <p:sp>
         <p:nvSpPr>
-          <p:cNvPr id="81" name="Shape 79"/>
-          <p:cNvSpPr/>
-          <p:nvPr/>
-        </p:nvSpPr>
-        <p:spPr>
-          <a:xfrm>
-            <a:off x="1068023" y="2832236"/>
+          <p:cNvPr id="95" name="Shape 93"/>
+          <p:cNvSpPr/>
+          <p:nvPr/>
+        </p:nvSpPr>
+        <p:spPr>
+          <a:xfrm>
+            <a:off x="2394956" y="3171296"/>
             <a:ext cx="310896" cy="310896"/>
           </a:xfrm>
           <a:prstGeom prst="ellipse">
@@ -10065,13 +10513,13 @@
       </p:sp>
       <p:sp>
         <p:nvSpPr>
-          <p:cNvPr id="82" name="Text 80"/>
-          <p:cNvSpPr/>
-          <p:nvPr/>
-        </p:nvSpPr>
-        <p:spPr>
-          <a:xfrm>
-            <a:off x="1068023" y="2832236"/>
+          <p:cNvPr id="96" name="Text 94"/>
+          <p:cNvSpPr/>
+          <p:nvPr/>
+        </p:nvSpPr>
+        <p:spPr>
+          <a:xfrm>
+            <a:off x="2394956" y="3171296"/>
             <a:ext cx="310896" cy="310896"/>
           </a:xfrm>
           <a:prstGeom prst="rect">
@@ -10104,13 +10552,13 @@
       </p:sp>
       <p:sp>
         <p:nvSpPr>
-          <p:cNvPr id="83" name="Shape 81"/>
-          <p:cNvSpPr/>
-          <p:nvPr/>
-        </p:nvSpPr>
-        <p:spPr>
-          <a:xfrm>
-            <a:off x="1076731" y="2867584"/>
+          <p:cNvPr id="97" name="Shape 95"/>
+          <p:cNvSpPr/>
+          <p:nvPr/>
+        </p:nvSpPr>
+        <p:spPr>
+          <a:xfrm>
+            <a:off x="2404612" y="3210565"/>
             <a:ext cx="310896" cy="310896"/>
           </a:xfrm>
           <a:prstGeom prst="ellipse">
@@ -10129,13 +10577,13 @@
       </p:sp>
       <p:sp>
         <p:nvSpPr>
-          <p:cNvPr id="84" name="Text 82"/>
-          <p:cNvSpPr/>
-          <p:nvPr/>
-        </p:nvSpPr>
-        <p:spPr>
-          <a:xfrm>
-            <a:off x="1076731" y="2867584"/>
+          <p:cNvPr id="98" name="Text 96"/>
+          <p:cNvSpPr/>
+          <p:nvPr/>
+        </p:nvSpPr>
+        <p:spPr>
+          <a:xfrm>
+            <a:off x="2404612" y="3210565"/>
             <a:ext cx="310896" cy="310896"/>
           </a:xfrm>
           <a:prstGeom prst="rect">
@@ -10168,13 +10616,13 @@
       </p:sp>
       <p:sp>
         <p:nvSpPr>
-          <p:cNvPr id="85" name="Shape 83"/>
-          <p:cNvSpPr/>
-          <p:nvPr/>
-        </p:nvSpPr>
-        <p:spPr>
-          <a:xfrm>
-            <a:off x="1088086" y="2844634"/>
+          <p:cNvPr id="99" name="Shape 97"/>
+          <p:cNvSpPr/>
+          <p:nvPr/>
+        </p:nvSpPr>
+        <p:spPr>
+          <a:xfrm>
+            <a:off x="2417203" y="3185069"/>
             <a:ext cx="310896" cy="310896"/>
           </a:xfrm>
           <a:prstGeom prst="ellipse">
@@ -10193,13 +10641,13 @@
       </p:sp>
       <p:sp>
         <p:nvSpPr>
-          <p:cNvPr id="86" name="Text 84"/>
-          <p:cNvSpPr/>
-          <p:nvPr/>
-        </p:nvSpPr>
-        <p:spPr>
-          <a:xfrm>
-            <a:off x="1088086" y="2844634"/>
+          <p:cNvPr id="100" name="Text 98"/>
+          <p:cNvSpPr/>
+          <p:nvPr/>
+        </p:nvSpPr>
+        <p:spPr>
+          <a:xfrm>
+            <a:off x="2417203" y="3185069"/>
             <a:ext cx="310896" cy="310896"/>
           </a:xfrm>
           <a:prstGeom prst="rect">
@@ -10232,13 +10680,13 @@
       </p:sp>
       <p:sp>
         <p:nvSpPr>
-          <p:cNvPr id="87" name="Shape 85"/>
-          <p:cNvSpPr/>
-          <p:nvPr/>
-        </p:nvSpPr>
-        <p:spPr>
-          <a:xfrm>
-            <a:off x="5422392" y="4054150"/>
+          <p:cNvPr id="101" name="Shape 99"/>
+          <p:cNvSpPr/>
+          <p:nvPr/>
+        </p:nvSpPr>
+        <p:spPr>
+          <a:xfrm>
+            <a:off x="2286366" y="2919457"/>
             <a:ext cx="310896" cy="310896"/>
           </a:xfrm>
           <a:prstGeom prst="ellipse">
@@ -10257,13 +10705,13 @@
       </p:sp>
       <p:sp>
         <p:nvSpPr>
-          <p:cNvPr id="88" name="Text 86"/>
-          <p:cNvSpPr/>
-          <p:nvPr/>
-        </p:nvSpPr>
-        <p:spPr>
-          <a:xfrm>
-            <a:off x="5422392" y="4054150"/>
+          <p:cNvPr id="102" name="Text 100"/>
+          <p:cNvSpPr/>
+          <p:nvPr/>
+        </p:nvSpPr>
+        <p:spPr>
+          <a:xfrm>
+            <a:off x="2286366" y="2919457"/>
             <a:ext cx="310896" cy="310896"/>
           </a:xfrm>
           <a:prstGeom prst="rect">
@@ -10288,7 +10736,7 @@
                 <a:ea typeface="Arial" pitchFamily="34" charset="-122"/>
                 <a:cs typeface="Arial" pitchFamily="34" charset="-120"/>
               </a:rPr>
-              <a:t>40</a:t>
+              <a:t>47</a:t>
             </a:r>
             <a:endParaRPr lang="en-US" sz="900" dirty="0"/>
           </a:p>
@@ -10296,20 +10744,20 @@
       </p:sp>
       <p:sp>
         <p:nvSpPr>
-          <p:cNvPr id="89" name="Shape 87"/>
-          <p:cNvSpPr/>
-          <p:nvPr/>
-        </p:nvSpPr>
-        <p:spPr>
-          <a:xfrm>
-            <a:off x="970094" y="2605540"/>
-            <a:ext cx="310896" cy="310896"/>
+          <p:cNvPr id="103" name="Shape 101"/>
+          <p:cNvSpPr/>
+          <p:nvPr/>
+        </p:nvSpPr>
+        <p:spPr>
+          <a:xfrm>
+            <a:off x="1442906" y="2329017"/>
+            <a:ext cx="384048" cy="384048"/>
           </a:xfrm>
           <a:prstGeom prst="ellipse">
             <a:avLst/>
           </a:prstGeom>
           <a:solidFill>
-            <a:srgbClr val="9E480E"/>
+            <a:srgbClr val="05B050"/>
           </a:solidFill>
           <a:ln w="15240">
             <a:solidFill>
@@ -10321,14 +10769,14 @@
       </p:sp>
       <p:sp>
         <p:nvSpPr>
-          <p:cNvPr id="90" name="Text 88"/>
-          <p:cNvSpPr/>
-          <p:nvPr/>
-        </p:nvSpPr>
-        <p:spPr>
-          <a:xfrm>
-            <a:off x="970094" y="2605540"/>
-            <a:ext cx="310896" cy="310896"/>
+          <p:cNvPr id="104" name="Text 102"/>
+          <p:cNvSpPr/>
+          <p:nvPr/>
+        </p:nvSpPr>
+        <p:spPr>
+          <a:xfrm>
+            <a:off x="1442906" y="2329017"/>
+            <a:ext cx="384048" cy="384048"/>
           </a:xfrm>
           <a:prstGeom prst="rect">
             <a:avLst/>
@@ -10352,7 +10800,7 @@
                 <a:ea typeface="Arial" pitchFamily="34" charset="-122"/>
                 <a:cs typeface="Arial" pitchFamily="34" charset="-120"/>
               </a:rPr>
-              <a:t>47</a:t>
+              <a:t>60</a:t>
             </a:r>
             <a:endParaRPr lang="en-US" sz="900" dirty="0"/>
           </a:p>
@@ -10360,13 +10808,13 @@
       </p:sp>
       <p:sp>
         <p:nvSpPr>
-          <p:cNvPr id="91" name="Shape 89"/>
-          <p:cNvSpPr/>
-          <p:nvPr/>
-        </p:nvSpPr>
-        <p:spPr>
-          <a:xfrm>
-            <a:off x="3288519" y="4081261"/>
+          <p:cNvPr id="105" name="Shape 103"/>
+          <p:cNvSpPr/>
+          <p:nvPr/>
+        </p:nvSpPr>
+        <p:spPr>
+          <a:xfrm>
+            <a:off x="4865142" y="4566963"/>
             <a:ext cx="457200" cy="457200"/>
           </a:xfrm>
           <a:prstGeom prst="ellipse">
@@ -10385,13 +10833,13 @@
       </p:sp>
       <p:sp>
         <p:nvSpPr>
-          <p:cNvPr id="92" name="Text 90"/>
-          <p:cNvSpPr/>
-          <p:nvPr/>
-        </p:nvSpPr>
-        <p:spPr>
-          <a:xfrm>
-            <a:off x="3288519" y="4081261"/>
+          <p:cNvPr id="106" name="Text 104"/>
+          <p:cNvSpPr/>
+          <p:nvPr/>
+        </p:nvSpPr>
+        <p:spPr>
+          <a:xfrm>
+            <a:off x="4865142" y="4566963"/>
             <a:ext cx="457200" cy="457200"/>
           </a:xfrm>
           <a:prstGeom prst="rect">
@@ -10424,7 +10872,71 @@
       </p:sp>
       <p:sp>
         <p:nvSpPr>
-          <p:cNvPr id="93" name="Text 91"/>
+          <p:cNvPr id="107" name="Shape 105"/>
+          <p:cNvSpPr/>
+          <p:nvPr/>
+        </p:nvSpPr>
+        <p:spPr>
+          <a:xfrm>
+            <a:off x="1383630" y="2524029"/>
+            <a:ext cx="457200" cy="457200"/>
+          </a:xfrm>
+          <a:prstGeom prst="ellipse">
+            <a:avLst/>
+          </a:prstGeom>
+          <a:solidFill>
+            <a:srgbClr val="1F3864"/>
+          </a:solidFill>
+          <a:ln w="15240">
+            <a:solidFill>
+              <a:srgbClr val="FFFFFF"/>
+            </a:solidFill>
+            <a:prstDash val="solid"/>
+          </a:ln>
+        </p:spPr>
+      </p:sp>
+      <p:sp>
+        <p:nvSpPr>
+          <p:cNvPr id="108" name="Text 106"/>
+          <p:cNvSpPr/>
+          <p:nvPr/>
+        </p:nvSpPr>
+        <p:spPr>
+          <a:xfrm>
+            <a:off x="1383630" y="2524029"/>
+            <a:ext cx="457200" cy="457200"/>
+          </a:xfrm>
+          <a:prstGeom prst="rect">
+            <a:avLst/>
+          </a:prstGeom>
+          <a:noFill/>
+          <a:ln/>
+        </p:spPr>
+        <p:txBody>
+          <a:bodyPr wrap="square" lIns="0" tIns="0" rIns="0" bIns="0" rtlCol="0" anchor="ctr"/>
+          <a:lstStyle/>
+          <a:p>
+            <a:pPr algn="ctr" indent="0" marL="0">
+              <a:buNone/>
+            </a:pPr>
+            <a:r>
+              <a:rPr lang="en-US" sz="1100" b="1" dirty="0">
+                <a:solidFill>
+                  <a:srgbClr val="FFFFFF"/>
+                </a:solidFill>
+                <a:latin typeface="Arial" pitchFamily="34" charset="0"/>
+                <a:ea typeface="Arial" pitchFamily="34" charset="-122"/>
+                <a:cs typeface="Arial" pitchFamily="34" charset="-120"/>
+              </a:rPr>
+              <a:t>250</a:t>
+            </a:r>
+            <a:endParaRPr lang="en-US" sz="1100" dirty="0"/>
+          </a:p>
+        </p:txBody>
+      </p:sp>
+      <p:sp>
+        <p:nvSpPr>
+          <p:cNvPr id="109" name="Text 107"/>
           <p:cNvSpPr/>
           <p:nvPr/>
         </p:nvSpPr>
@@ -10463,7 +10975,7 @@
       </p:sp>
       <p:sp>
         <p:nvSpPr>
-          <p:cNvPr id="94" name="Text 92"/>
+          <p:cNvPr id="110" name="Text 108"/>
           <p:cNvSpPr/>
           <p:nvPr/>
         </p:nvSpPr>
@@ -10494,7 +11006,7 @@
                 <a:ea typeface="Arial" pitchFamily="34" charset="-122"/>
                 <a:cs typeface="Arial" pitchFamily="34" charset="-120"/>
               </a:rPr>
-              <a:t>44 parkings · 1.046 plaatsen</a:t>
+              <a:t>52 parkings · 1.416 plaatsen</a:t>
             </a:r>
             <a:endParaRPr lang="en-US" sz="2200" dirty="0"/>
           </a:p>
@@ -10502,7 +11014,7 @@
       </p:sp>
       <p:sp>
         <p:nvSpPr>
-          <p:cNvPr id="95" name="Text 93"/>
+          <p:cNvPr id="111" name="Text 109"/>
           <p:cNvSpPr/>
           <p:nvPr/>
         </p:nvSpPr>
@@ -10541,7 +11053,7 @@
       </p:sp>
       <p:sp>
         <p:nvSpPr>
-          <p:cNvPr id="96" name="Text 94">
+          <p:cNvPr id="112" name="Text 110">
             <a:hlinkClick r:id="rId1" tooltip=""/>
           </p:cNvPr>
           <p:cNvSpPr/>
@@ -10589,7 +11101,7 @@
       </p:sp>
       <p:sp>
         <p:nvSpPr>
-          <p:cNvPr id="97" name="Shape 95"/>
+          <p:cNvPr id="113" name="Shape 111"/>
           <p:cNvSpPr/>
           <p:nvPr/>
         </p:nvSpPr>
@@ -10609,7 +11121,7 @@
       </p:sp>
       <p:pic>
         <p:nvPicPr>
-          <p:cNvPr id="98" name="Image 0" descr="preencoded.png">    </p:cNvPr>
+          <p:cNvPr id="114" name="Image 0" descr="preencoded.png">    </p:cNvPr>
           <p:cNvPicPr>
             <a:picLocks noChangeAspect="1"/>
           </p:cNvPicPr>
@@ -10633,7 +11145,7 @@
       </p:pic>
       <p:sp>
         <p:nvSpPr>
-          <p:cNvPr id="99" name="Text 96"/>
+          <p:cNvPr id="115" name="Text 112"/>
           <p:cNvSpPr/>
           <p:nvPr/>
         </p:nvSpPr>
@@ -10675,7 +11187,7 @@
       </p:sp>
       <p:sp>
         <p:nvSpPr>
-          <p:cNvPr id="100" name="Shape 97"/>
+          <p:cNvPr id="116" name="Shape 113"/>
           <p:cNvSpPr/>
           <p:nvPr/>
         </p:nvSpPr>
@@ -10695,7 +11207,7 @@
       </p:sp>
       <p:pic>
         <p:nvPicPr>
-          <p:cNvPr id="101" name="Image 1" descr="preencoded.png">    </p:cNvPr>
+          <p:cNvPr id="117" name="Image 1" descr="preencoded.png">    </p:cNvPr>
           <p:cNvPicPr>
             <a:picLocks noChangeAspect="1"/>
           </p:cNvPicPr>
@@ -10719,7 +11231,7 @@
       </p:pic>
       <p:sp>
         <p:nvSpPr>
-          <p:cNvPr id="102" name="Text 98"/>
+          <p:cNvPr id="118" name="Text 114"/>
           <p:cNvSpPr/>
           <p:nvPr/>
         </p:nvSpPr>
@@ -10761,7 +11273,7 @@
       </p:sp>
       <p:sp>
         <p:nvSpPr>
-          <p:cNvPr id="103" name="Shape 99"/>
+          <p:cNvPr id="119" name="Shape 115"/>
           <p:cNvSpPr/>
           <p:nvPr/>
         </p:nvSpPr>
@@ -10781,7 +11293,7 @@
       </p:sp>
       <p:pic>
         <p:nvPicPr>
-          <p:cNvPr id="104" name="Image 2" descr="preencoded.png">    </p:cNvPr>
+          <p:cNvPr id="120" name="Image 2" descr="preencoded.png">    </p:cNvPr>
           <p:cNvPicPr>
             <a:picLocks noChangeAspect="1"/>
           </p:cNvPicPr>
@@ -10805,7 +11317,7 @@
       </p:pic>
       <p:sp>
         <p:nvSpPr>
-          <p:cNvPr id="105" name="Text 100"/>
+          <p:cNvPr id="121" name="Text 116"/>
           <p:cNvSpPr/>
           <p:nvPr/>
         </p:nvSpPr>
@@ -10847,7 +11359,7 @@
       </p:sp>
       <p:sp>
         <p:nvSpPr>
-          <p:cNvPr id="106" name="Text 101"/>
+          <p:cNvPr id="122" name="Text 117"/>
           <p:cNvSpPr/>
           <p:nvPr/>
         </p:nvSpPr>
@@ -10886,7 +11398,7 @@
       </p:sp>
       <p:sp>
         <p:nvSpPr>
-          <p:cNvPr id="107" name="Text 102"/>
+          <p:cNvPr id="123" name="Text 118"/>
           <p:cNvSpPr/>
           <p:nvPr/>
         </p:nvSpPr>
@@ -12368,7 +12880,7 @@
                 <a:ea typeface="Arial" pitchFamily="34" charset="-122"/>
                 <a:cs typeface="Arial" pitchFamily="34" charset="-120"/>
               </a:rPr>
-              <a:t>1.046 auto’s op 44 slimme parkings </a:t>
+              <a:t>1.416 auto’s op 52 slimme parkings </a:t>
             </a:r>
             <a:pPr indent="0" marL="0">
               <a:lnSpc>

--- a/Fluctus_Laadplan_Zwevegem.pptx
+++ b/Fluctus_Laadplan_Zwevegem.pptx
@@ -117,7 +117,7 @@
 </p:presentation>
 </file>
 
-<file path=ppt/charts/chart2.xml><?xml version="1.0" encoding="utf-8"?>
+<file path=ppt/charts/chart3.xml><?xml version="1.0" encoding="utf-8"?>
 <c:chartSpace xmlns:c="http://schemas.openxmlformats.org/drawingml/2006/chart" xmlns:a="http://schemas.openxmlformats.org/drawingml/2006/main" xmlns:r="http://schemas.openxmlformats.org/officeDocument/2006/relationships">
   <c:date1904 val="0"/>
   <c:roundedCorners val="1"/>
@@ -6666,7 +6666,7 @@
                 <a:ea typeface="Arial" pitchFamily="34" charset="-122"/>
                 <a:cs typeface="Arial" pitchFamily="34" charset="-120"/>
               </a:rPr>
-              <a:t>De 1.416 wagens zijn de </a:t>
+              <a:t>De 4.710 wagens zijn de </a:t>
             </a:r>
             <a:pPr indent="0" marL="0">
               <a:buNone/>
@@ -6823,7 +6823,7 @@
                 <a:ea typeface="Arial" pitchFamily="34" charset="-122"/>
                 <a:cs typeface="Arial" pitchFamily="34" charset="-120"/>
               </a:rPr>
-              <a:t>1.416</a:t>
+              <a:t>4.710</a:t>
             </a:r>
             <a:endParaRPr lang="en-US" sz="3200" dirty="0"/>
           </a:p>
@@ -6935,7 +6935,7 @@
                 <a:ea typeface="Arial" pitchFamily="34" charset="-122"/>
                 <a:cs typeface="Arial" pitchFamily="34" charset="-120"/>
               </a:rPr>
-              <a:t>52</a:t>
+              <a:t>80</a:t>
             </a:r>
             <a:endParaRPr lang="en-US" sz="3200" dirty="0"/>
           </a:p>
@@ -7047,7 +7047,7 @@
                 <a:ea typeface="Arial" pitchFamily="34" charset="-122"/>
                 <a:cs typeface="Arial" pitchFamily="34" charset="-120"/>
               </a:rPr>
-              <a:t>€ 2,12 mln</a:t>
+              <a:t>€ 7,07 mln</a:t>
             </a:r>
             <a:endParaRPr lang="en-US" sz="3200" dirty="0"/>
           </a:p>
@@ -7159,7 +7159,7 @@
                 <a:ea typeface="Arial" pitchFamily="34" charset="-122"/>
                 <a:cs typeface="Arial" pitchFamily="34" charset="-120"/>
               </a:rPr>
-              <a:t>€ 4,25 mln</a:t>
+              <a:t>€ 14,13 mln</a:t>
             </a:r>
             <a:endParaRPr lang="en-US" sz="3200" dirty="0"/>
           </a:p>
@@ -7266,7 +7266,7 @@
                 <a:ea typeface="Arial" pitchFamily="34" charset="-122"/>
                 <a:cs typeface="Arial" pitchFamily="34" charset="-120"/>
               </a:rPr>
-              <a:t>1.416 wagens</a:t>
+              <a:t>4.710 wagens</a:t>
             </a:r>
             <a:pPr indent="0" marL="0">
               <a:buNone/>
@@ -7294,7 +7294,7 @@
                 <a:ea typeface="Arial" pitchFamily="34" charset="-122"/>
                 <a:cs typeface="Arial" pitchFamily="34" charset="-120"/>
               </a:rPr>
-              <a:t>€ 2,12 mln besparing / jaar</a:t>
+              <a:t>€ 7,07 mln besparing / jaar</a:t>
             </a:r>
             <a:endParaRPr lang="en-US" sz="1500" dirty="0"/>
           </a:p>
@@ -7333,7 +7333,7 @@
                 <a:ea typeface="Arial" pitchFamily="34" charset="-122"/>
                 <a:cs typeface="Arial" pitchFamily="34" charset="-120"/>
               </a:rPr>
-              <a:t>1.416 wagens</a:t>
+              <a:t>4.710 wagens</a:t>
             </a:r>
             <a:pPr indent="0" marL="0">
               <a:buNone/>
@@ -7361,7 +7361,7 @@
                 <a:ea typeface="Arial" pitchFamily="34" charset="-122"/>
                 <a:cs typeface="Arial" pitchFamily="34" charset="-120"/>
               </a:rPr>
-              <a:t>€ 4,25 mln investering</a:t>
+              <a:t>€ 14,13 mln investering</a:t>
             </a:r>
             <a:pPr indent="0" marL="0">
               <a:buNone/>
@@ -7614,7 +7614,7 @@
         </p:nvSpPr>
         <p:spPr>
           <a:xfrm>
-            <a:off x="1860775" y="2531586"/>
+            <a:off x="1660115" y="2467559"/>
             <a:ext cx="256032" cy="256032"/>
           </a:xfrm>
           <a:prstGeom prst="ellipse">
@@ -7639,7 +7639,7 @@
         </p:nvSpPr>
         <p:spPr>
           <a:xfrm>
-            <a:off x="1860775" y="2531586"/>
+            <a:off x="1660115" y="2467559"/>
             <a:ext cx="256032" cy="256032"/>
           </a:xfrm>
           <a:prstGeom prst="rect">
@@ -7678,7 +7678,7 @@
         </p:nvSpPr>
         <p:spPr>
           <a:xfrm>
-            <a:off x="5250692" y="5022762"/>
+            <a:off x="4324253" y="4531804"/>
             <a:ext cx="256032" cy="256032"/>
           </a:xfrm>
           <a:prstGeom prst="ellipse">
@@ -7703,7 +7703,7 @@
         </p:nvSpPr>
         <p:spPr>
           <a:xfrm>
-            <a:off x="5250692" y="5022762"/>
+            <a:off x="4324253" y="4531804"/>
             <a:ext cx="256032" cy="256032"/>
           </a:xfrm>
           <a:prstGeom prst="rect">
@@ -7742,7 +7742,7 @@
         </p:nvSpPr>
         <p:spPr>
           <a:xfrm>
-            <a:off x="5065215" y="5405146"/>
+            <a:off x="4178486" y="4848656"/>
             <a:ext cx="256032" cy="256032"/>
           </a:xfrm>
           <a:prstGeom prst="ellipse">
@@ -7767,7 +7767,7 @@
         </p:nvSpPr>
         <p:spPr>
           <a:xfrm>
-            <a:off x="5065215" y="5405146"/>
+            <a:off x="4178486" y="4848656"/>
             <a:ext cx="256032" cy="256032"/>
           </a:xfrm>
           <a:prstGeom prst="rect">
@@ -7806,7 +7806,7 @@
         </p:nvSpPr>
         <p:spPr>
           <a:xfrm>
-            <a:off x="2010383" y="2498873"/>
+            <a:off x="1777692" y="2440452"/>
             <a:ext cx="256032" cy="256032"/>
           </a:xfrm>
           <a:prstGeom prst="ellipse">
@@ -7831,7 +7831,7 @@
         </p:nvSpPr>
         <p:spPr>
           <a:xfrm>
-            <a:off x="2010383" y="2498873"/>
+            <a:off x="1777692" y="2440452"/>
             <a:ext cx="256032" cy="256032"/>
           </a:xfrm>
           <a:prstGeom prst="rect">
@@ -7870,7 +7870,7 @@
         </p:nvSpPr>
         <p:spPr>
           <a:xfrm>
-            <a:off x="1982308" y="2524575"/>
+            <a:off x="1755627" y="2461750"/>
             <a:ext cx="256032" cy="256032"/>
           </a:xfrm>
           <a:prstGeom prst="ellipse">
@@ -7895,7 +7895,7 @@
         </p:nvSpPr>
         <p:spPr>
           <a:xfrm>
-            <a:off x="1982308" y="2524575"/>
+            <a:off x="1755627" y="2461750"/>
             <a:ext cx="256032" cy="256032"/>
           </a:xfrm>
           <a:prstGeom prst="rect">
@@ -7934,7 +7934,7 @@
         </p:nvSpPr>
         <p:spPr>
           <a:xfrm>
-            <a:off x="2780058" y="2157984"/>
+            <a:off x="2382580" y="2157984"/>
             <a:ext cx="256032" cy="256032"/>
           </a:xfrm>
           <a:prstGeom prst="ellipse">
@@ -7959,7 +7959,7 @@
         </p:nvSpPr>
         <p:spPr>
           <a:xfrm>
-            <a:off x="2780058" y="2157984"/>
+            <a:off x="2382580" y="2157984"/>
             <a:ext cx="256032" cy="256032"/>
           </a:xfrm>
           <a:prstGeom prst="rect">
@@ -7998,7 +7998,7 @@
         </p:nvSpPr>
         <p:spPr>
           <a:xfrm>
-            <a:off x="2802205" y="2160210"/>
+            <a:off x="2399985" y="2159829"/>
             <a:ext cx="256032" cy="256032"/>
           </a:xfrm>
           <a:prstGeom prst="ellipse">
@@ -8023,7 +8023,7 @@
         </p:nvSpPr>
         <p:spPr>
           <a:xfrm>
-            <a:off x="2802205" y="2160210"/>
+            <a:off x="2399985" y="2159829"/>
             <a:ext cx="256032" cy="256032"/>
           </a:xfrm>
           <a:prstGeom prst="rect">
@@ -8062,7 +8062,7 @@
         </p:nvSpPr>
         <p:spPr>
           <a:xfrm>
-            <a:off x="3005606" y="2284020"/>
+            <a:off x="2559838" y="2262420"/>
             <a:ext cx="256032" cy="256032"/>
           </a:xfrm>
           <a:prstGeom prst="ellipse">
@@ -8087,7 +8087,7 @@
         </p:nvSpPr>
         <p:spPr>
           <a:xfrm>
-            <a:off x="3005606" y="2284020"/>
+            <a:off x="2559838" y="2262420"/>
             <a:ext cx="256032" cy="256032"/>
           </a:xfrm>
           <a:prstGeom prst="rect">
@@ -8126,7 +8126,7 @@
         </p:nvSpPr>
         <p:spPr>
           <a:xfrm>
-            <a:off x="2955956" y="2315340"/>
+            <a:off x="2520818" y="2288373"/>
             <a:ext cx="256032" cy="256032"/>
           </a:xfrm>
           <a:prstGeom prst="ellipse">
@@ -8151,7 +8151,7 @@
         </p:nvSpPr>
         <p:spPr>
           <a:xfrm>
-            <a:off x="2955956" y="2315340"/>
+            <a:off x="2520818" y="2288373"/>
             <a:ext cx="256032" cy="256032"/>
           </a:xfrm>
           <a:prstGeom prst="rect">
@@ -8190,7 +8190,7 @@
         </p:nvSpPr>
         <p:spPr>
           <a:xfrm>
-            <a:off x="2977653" y="2320800"/>
+            <a:off x="2537870" y="2292897"/>
             <a:ext cx="256032" cy="256032"/>
           </a:xfrm>
           <a:prstGeom prst="ellipse">
@@ -8215,7 +8215,7 @@
         </p:nvSpPr>
         <p:spPr>
           <a:xfrm>
-            <a:off x="2977653" y="2320800"/>
+            <a:off x="2537870" y="2292897"/>
             <a:ext cx="256032" cy="256032"/>
           </a:xfrm>
           <a:prstGeom prst="rect">
@@ -8254,7 +8254,7 @@
         </p:nvSpPr>
         <p:spPr>
           <a:xfrm>
-            <a:off x="3016523" y="2295117"/>
+            <a:off x="2568418" y="2271615"/>
             <a:ext cx="256032" cy="256032"/>
           </a:xfrm>
           <a:prstGeom prst="ellipse">
@@ -8279,7 +8279,7 @@
         </p:nvSpPr>
         <p:spPr>
           <a:xfrm>
-            <a:off x="3016523" y="2295117"/>
+            <a:off x="2568418" y="2271615"/>
             <a:ext cx="256032" cy="256032"/>
           </a:xfrm>
           <a:prstGeom prst="rect">
@@ -8318,7 +8318,7 @@
         </p:nvSpPr>
         <p:spPr>
           <a:xfrm>
-            <a:off x="5064337" y="5477256"/>
+            <a:off x="4177796" y="4908408"/>
             <a:ext cx="256032" cy="256032"/>
           </a:xfrm>
           <a:prstGeom prst="ellipse">
@@ -8343,7 +8343,7 @@
         </p:nvSpPr>
         <p:spPr>
           <a:xfrm>
-            <a:off x="5064337" y="5477256"/>
+            <a:off x="4177796" y="4908408"/>
             <a:ext cx="256032" cy="256032"/>
           </a:xfrm>
           <a:prstGeom prst="rect">
@@ -8382,7 +8382,7 @@
         </p:nvSpPr>
         <p:spPr>
           <a:xfrm>
-            <a:off x="4978946" y="5433702"/>
+            <a:off x="4110687" y="4872318"/>
             <a:ext cx="256032" cy="256032"/>
           </a:xfrm>
           <a:prstGeom prst="ellipse">
@@ -8407,7 +8407,7 @@
         </p:nvSpPr>
         <p:spPr>
           <a:xfrm>
-            <a:off x="4978946" y="5433702"/>
+            <a:off x="4110687" y="4872318"/>
             <a:ext cx="256032" cy="256032"/>
           </a:xfrm>
           <a:prstGeom prst="rect">
@@ -8446,7 +8446,7 @@
         </p:nvSpPr>
         <p:spPr>
           <a:xfrm>
-            <a:off x="4964966" y="5426827"/>
+            <a:off x="4099700" y="4866621"/>
             <a:ext cx="256032" cy="256032"/>
           </a:xfrm>
           <a:prstGeom prst="ellipse">
@@ -8471,7 +8471,7 @@
         </p:nvSpPr>
         <p:spPr>
           <a:xfrm>
-            <a:off x="4964966" y="5426827"/>
+            <a:off x="4099700" y="4866621"/>
             <a:ext cx="256032" cy="256032"/>
           </a:xfrm>
           <a:prstGeom prst="rect">
@@ -8510,7 +8510,7 @@
         </p:nvSpPr>
         <p:spPr>
           <a:xfrm>
-            <a:off x="4935714" y="5397971"/>
+            <a:off x="4076712" y="4842710"/>
             <a:ext cx="256032" cy="256032"/>
           </a:xfrm>
           <a:prstGeom prst="ellipse">
@@ -8535,7 +8535,7 @@
         </p:nvSpPr>
         <p:spPr>
           <a:xfrm>
-            <a:off x="4935714" y="5397971"/>
+            <a:off x="4076712" y="4842710"/>
             <a:ext cx="256032" cy="256032"/>
           </a:xfrm>
           <a:prstGeom prst="rect">
@@ -8574,7 +8574,7 @@
         </p:nvSpPr>
         <p:spPr>
           <a:xfrm>
-            <a:off x="5001120" y="5309633"/>
+            <a:off x="4128114" y="4769511"/>
             <a:ext cx="256032" cy="256032"/>
           </a:xfrm>
           <a:prstGeom prst="ellipse">
@@ -8599,7 +8599,7 @@
         </p:nvSpPr>
         <p:spPr>
           <a:xfrm>
-            <a:off x="5001120" y="5309633"/>
+            <a:off x="4128114" y="4769511"/>
             <a:ext cx="256032" cy="256032"/>
           </a:xfrm>
           <a:prstGeom prst="rect">
@@ -8638,7 +8638,7 @@
         </p:nvSpPr>
         <p:spPr>
           <a:xfrm>
-            <a:off x="4837648" y="5362664"/>
+            <a:off x="3999641" y="4813454"/>
             <a:ext cx="256032" cy="256032"/>
           </a:xfrm>
           <a:prstGeom prst="ellipse">
@@ -8663,7 +8663,7 @@
         </p:nvSpPr>
         <p:spPr>
           <a:xfrm>
-            <a:off x="4837648" y="5362664"/>
+            <a:off x="3999641" y="4813454"/>
             <a:ext cx="256032" cy="256032"/>
           </a:xfrm>
           <a:prstGeom prst="rect">
@@ -8702,7 +8702,7 @@
         </p:nvSpPr>
         <p:spPr>
           <a:xfrm>
-            <a:off x="4870565" y="5355810"/>
+            <a:off x="4025511" y="4807774"/>
             <a:ext cx="256032" cy="256032"/>
           </a:xfrm>
           <a:prstGeom prst="ellipse">
@@ -8727,7 +8727,7 @@
         </p:nvSpPr>
         <p:spPr>
           <a:xfrm>
-            <a:off x="4870565" y="5355810"/>
+            <a:off x="4025511" y="4807774"/>
             <a:ext cx="256032" cy="256032"/>
           </a:xfrm>
           <a:prstGeom prst="rect">
@@ -8766,7 +8766,7 @@
         </p:nvSpPr>
         <p:spPr>
           <a:xfrm>
-            <a:off x="5449824" y="5363563"/>
+            <a:off x="4480751" y="4814199"/>
             <a:ext cx="256032" cy="256032"/>
           </a:xfrm>
           <a:prstGeom prst="ellipse">
@@ -8791,7 +8791,7 @@
         </p:nvSpPr>
         <p:spPr>
           <a:xfrm>
-            <a:off x="5449824" y="5363563"/>
+            <a:off x="4480751" y="4814199"/>
             <a:ext cx="256032" cy="256032"/>
           </a:xfrm>
           <a:prstGeom prst="rect">
@@ -8830,7 +8830,7 @@
         </p:nvSpPr>
         <p:spPr>
           <a:xfrm>
-            <a:off x="4927554" y="5018276"/>
+            <a:off x="4070299" y="4528086"/>
             <a:ext cx="256032" cy="256032"/>
           </a:xfrm>
           <a:prstGeom prst="ellipse">
@@ -8855,7 +8855,7 @@
         </p:nvSpPr>
         <p:spPr>
           <a:xfrm>
-            <a:off x="4927554" y="5018276"/>
+            <a:off x="4070299" y="4528086"/>
             <a:ext cx="256032" cy="256032"/>
           </a:xfrm>
           <a:prstGeom prst="rect">
@@ -8894,7 +8894,7 @@
         </p:nvSpPr>
         <p:spPr>
           <a:xfrm>
-            <a:off x="4914803" y="5001418"/>
+            <a:off x="4060277" y="4514118"/>
             <a:ext cx="256032" cy="256032"/>
           </a:xfrm>
           <a:prstGeom prst="ellipse">
@@ -8919,7 +8919,7 @@
         </p:nvSpPr>
         <p:spPr>
           <a:xfrm>
-            <a:off x="4914803" y="5001418"/>
+            <a:off x="4060277" y="4514118"/>
             <a:ext cx="256032" cy="256032"/>
           </a:xfrm>
           <a:prstGeom prst="rect">
@@ -8958,7 +8958,7 @@
         </p:nvSpPr>
         <p:spPr>
           <a:xfrm>
-            <a:off x="4904021" y="4991632"/>
+            <a:off x="4051804" y="4506009"/>
             <a:ext cx="256032" cy="256032"/>
           </a:xfrm>
           <a:prstGeom prst="ellipse">
@@ -8983,7 +8983,7 @@
         </p:nvSpPr>
         <p:spPr>
           <a:xfrm>
-            <a:off x="4904021" y="4991632"/>
+            <a:off x="4051804" y="4506009"/>
             <a:ext cx="256032" cy="256032"/>
           </a:xfrm>
           <a:prstGeom prst="rect">
@@ -9022,7 +9022,7 @@
         </p:nvSpPr>
         <p:spPr>
           <a:xfrm>
-            <a:off x="5032607" y="5013942"/>
+            <a:off x="4152860" y="4524495"/>
             <a:ext cx="256032" cy="256032"/>
           </a:xfrm>
           <a:prstGeom prst="ellipse">
@@ -9047,7 +9047,7 @@
         </p:nvSpPr>
         <p:spPr>
           <a:xfrm>
-            <a:off x="5032607" y="5013942"/>
+            <a:off x="4152860" y="4524495"/>
             <a:ext cx="256032" cy="256032"/>
           </a:xfrm>
           <a:prstGeom prst="rect">
@@ -9086,7 +9086,7 @@
         </p:nvSpPr>
         <p:spPr>
           <a:xfrm>
-            <a:off x="4876351" y="4964522"/>
+            <a:off x="4030058" y="4483545"/>
             <a:ext cx="256032" cy="256032"/>
           </a:xfrm>
           <a:prstGeom prst="ellipse">
@@ -9111,7 +9111,7 @@
         </p:nvSpPr>
         <p:spPr>
           <a:xfrm>
-            <a:off x="4876351" y="4964522"/>
+            <a:off x="4030058" y="4483545"/>
             <a:ext cx="256032" cy="256032"/>
           </a:xfrm>
           <a:prstGeom prst="rect">
@@ -9150,7 +9150,7 @@
         </p:nvSpPr>
         <p:spPr>
           <a:xfrm>
-            <a:off x="4915969" y="4966680"/>
+            <a:off x="4061194" y="4485333"/>
             <a:ext cx="256032" cy="256032"/>
           </a:xfrm>
           <a:prstGeom prst="ellipse">
@@ -9175,7 +9175,7 @@
         </p:nvSpPr>
         <p:spPr>
           <a:xfrm>
-            <a:off x="4915969" y="4966680"/>
+            <a:off x="4061194" y="4485333"/>
             <a:ext cx="256032" cy="256032"/>
           </a:xfrm>
           <a:prstGeom prst="rect">
@@ -9214,7 +9214,7 @@
         </p:nvSpPr>
         <p:spPr>
           <a:xfrm>
-            <a:off x="4859283" y="4940572"/>
+            <a:off x="4016644" y="4463699"/>
             <a:ext cx="256032" cy="256032"/>
           </a:xfrm>
           <a:prstGeom prst="ellipse">
@@ -9239,7 +9239,7 @@
         </p:nvSpPr>
         <p:spPr>
           <a:xfrm>
-            <a:off x="4859283" y="4940572"/>
+            <a:off x="4016644" y="4463699"/>
             <a:ext cx="256032" cy="256032"/>
           </a:xfrm>
           <a:prstGeom prst="rect">
@@ -9278,7 +9278,7 @@
         </p:nvSpPr>
         <p:spPr>
           <a:xfrm>
-            <a:off x="4901195" y="4939958"/>
+            <a:off x="4049583" y="4463190"/>
             <a:ext cx="256032" cy="256032"/>
           </a:xfrm>
           <a:prstGeom prst="ellipse">
@@ -9303,7 +9303,7 @@
         </p:nvSpPr>
         <p:spPr>
           <a:xfrm>
-            <a:off x="4901195" y="4939958"/>
+            <a:off x="4049583" y="4463190"/>
             <a:ext cx="256032" cy="256032"/>
           </a:xfrm>
           <a:prstGeom prst="rect">
@@ -9342,7 +9342,7 @@
         </p:nvSpPr>
         <p:spPr>
           <a:xfrm>
-            <a:off x="2231762" y="3157891"/>
+            <a:off x="1951674" y="2986530"/>
             <a:ext cx="256032" cy="256032"/>
           </a:xfrm>
           <a:prstGeom prst="ellipse">
@@ -9367,7 +9367,7 @@
         </p:nvSpPr>
         <p:spPr>
           <a:xfrm>
-            <a:off x="2231762" y="3157891"/>
+            <a:off x="1951674" y="2986530"/>
             <a:ext cx="256032" cy="256032"/>
           </a:xfrm>
           <a:prstGeom prst="rect">
@@ -9406,7 +9406,7 @@
         </p:nvSpPr>
         <p:spPr>
           <a:xfrm>
-            <a:off x="2505542" y="3225803"/>
+            <a:off x="2166838" y="3042803"/>
             <a:ext cx="256032" cy="256032"/>
           </a:xfrm>
           <a:prstGeom prst="ellipse">
@@ -9431,7 +9431,7 @@
         </p:nvSpPr>
         <p:spPr>
           <a:xfrm>
-            <a:off x="2505542" y="3225803"/>
+            <a:off x="2166838" y="3042803"/>
             <a:ext cx="256032" cy="256032"/>
           </a:xfrm>
           <a:prstGeom prst="rect">
@@ -9470,7 +9470,7 @@
         </p:nvSpPr>
         <p:spPr>
           <a:xfrm>
-            <a:off x="5017850" y="4499633"/>
+            <a:off x="4141262" y="4098327"/>
             <a:ext cx="256032" cy="256032"/>
           </a:xfrm>
           <a:prstGeom prst="ellipse">
@@ -9495,7 +9495,7 @@
         </p:nvSpPr>
         <p:spPr>
           <a:xfrm>
-            <a:off x="5017850" y="4499633"/>
+            <a:off x="4141262" y="4098327"/>
             <a:ext cx="256032" cy="256032"/>
           </a:xfrm>
           <a:prstGeom prst="rect">
@@ -9534,7 +9534,7 @@
         </p:nvSpPr>
         <p:spPr>
           <a:xfrm>
-            <a:off x="923544" y="2708858"/>
+            <a:off x="923544" y="2614451"/>
             <a:ext cx="256032" cy="256032"/>
           </a:xfrm>
           <a:prstGeom prst="ellipse">
@@ -9559,7 +9559,7 @@
         </p:nvSpPr>
         <p:spPr>
           <a:xfrm>
-            <a:off x="923544" y="2708858"/>
+            <a:off x="923544" y="2614451"/>
             <a:ext cx="256032" cy="256032"/>
           </a:xfrm>
           <a:prstGeom prst="rect">
@@ -9598,7 +9598,7 @@
         </p:nvSpPr>
         <p:spPr>
           <a:xfrm>
-            <a:off x="1417957" y="2802505"/>
+            <a:off x="1312103" y="2692049"/>
             <a:ext cx="256032" cy="256032"/>
           </a:xfrm>
           <a:prstGeom prst="ellipse">
@@ -9623,7 +9623,7 @@
         </p:nvSpPr>
         <p:spPr>
           <a:xfrm>
-            <a:off x="1417957" y="2802505"/>
+            <a:off x="1312103" y="2692049"/>
             <a:ext cx="256032" cy="256032"/>
           </a:xfrm>
           <a:prstGeom prst="rect">
@@ -9662,7 +9662,7 @@
         </p:nvSpPr>
         <p:spPr>
           <a:xfrm>
-            <a:off x="2705994" y="2224331"/>
+            <a:off x="2324373" y="2212960"/>
             <a:ext cx="256032" cy="256032"/>
           </a:xfrm>
           <a:prstGeom prst="ellipse">
@@ -9687,7 +9687,7 @@
         </p:nvSpPr>
         <p:spPr>
           <a:xfrm>
-            <a:off x="2705994" y="2224331"/>
+            <a:off x="2324373" y="2212960"/>
             <a:ext cx="256032" cy="256032"/>
           </a:xfrm>
           <a:prstGeom prst="rect">
@@ -9726,7 +9726,7 @@
         </p:nvSpPr>
         <p:spPr>
           <a:xfrm>
-            <a:off x="3321759" y="3266976"/>
+            <a:off x="2808303" y="3076919"/>
             <a:ext cx="256032" cy="256032"/>
           </a:xfrm>
           <a:prstGeom prst="ellipse">
@@ -9751,7 +9751,7 @@
         </p:nvSpPr>
         <p:spPr>
           <a:xfrm>
-            <a:off x="3321759" y="3266976"/>
+            <a:off x="2808303" y="3076919"/>
             <a:ext cx="256032" cy="256032"/>
           </a:xfrm>
           <a:prstGeom prst="rect">
@@ -9790,7 +9790,7 @@
         </p:nvSpPr>
         <p:spPr>
           <a:xfrm>
-            <a:off x="5231330" y="5018370"/>
+            <a:off x="4309036" y="4528165"/>
             <a:ext cx="256032" cy="256032"/>
           </a:xfrm>
           <a:prstGeom prst="ellipse">
@@ -9815,7 +9815,7 @@
         </p:nvSpPr>
         <p:spPr>
           <a:xfrm>
-            <a:off x="5231330" y="5018370"/>
+            <a:off x="4309036" y="4528165"/>
             <a:ext cx="256032" cy="256032"/>
           </a:xfrm>
           <a:prstGeom prst="rect">
@@ -9854,7 +9854,7 @@
         </p:nvSpPr>
         <p:spPr>
           <a:xfrm>
-            <a:off x="2170047" y="2432085"/>
+            <a:off x="1903172" y="2385110"/>
             <a:ext cx="256032" cy="256032"/>
           </a:xfrm>
           <a:prstGeom prst="ellipse">
@@ -9879,7 +9879,7 @@
         </p:nvSpPr>
         <p:spPr>
           <a:xfrm>
-            <a:off x="2170047" y="2432085"/>
+            <a:off x="1903172" y="2385110"/>
             <a:ext cx="256032" cy="256032"/>
           </a:xfrm>
           <a:prstGeom prst="rect">
@@ -9918,7 +9918,7 @@
         </p:nvSpPr>
         <p:spPr>
           <a:xfrm>
-            <a:off x="2285631" y="3142261"/>
+            <a:off x="1994009" y="2973578"/>
             <a:ext cx="256032" cy="256032"/>
           </a:xfrm>
           <a:prstGeom prst="ellipse">
@@ -9943,7 +9943,7 @@
         </p:nvSpPr>
         <p:spPr>
           <a:xfrm>
-            <a:off x="2285631" y="3142261"/>
+            <a:off x="1994009" y="2973578"/>
             <a:ext cx="256032" cy="256032"/>
           </a:xfrm>
           <a:prstGeom prst="rect">
@@ -9982,7 +9982,7 @@
         </p:nvSpPr>
         <p:spPr>
           <a:xfrm>
-            <a:off x="2431577" y="3193533"/>
+            <a:off x="2108708" y="3016063"/>
             <a:ext cx="256032" cy="256032"/>
           </a:xfrm>
           <a:prstGeom prst="ellipse">
@@ -10007,7 +10007,7 @@
         </p:nvSpPr>
         <p:spPr>
           <a:xfrm>
-            <a:off x="2431577" y="3193533"/>
+            <a:off x="2108708" y="3016063"/>
             <a:ext cx="256032" cy="256032"/>
           </a:xfrm>
           <a:prstGeom prst="rect">
@@ -10046,7 +10046,7 @@
         </p:nvSpPr>
         <p:spPr>
           <a:xfrm>
-            <a:off x="2455557" y="3206881"/>
+            <a:off x="2127554" y="3027123"/>
             <a:ext cx="256032" cy="256032"/>
           </a:xfrm>
           <a:prstGeom prst="ellipse">
@@ -10071,7 +10071,7 @@
         </p:nvSpPr>
         <p:spPr>
           <a:xfrm>
-            <a:off x="2455557" y="3206881"/>
+            <a:off x="2127554" y="3027123"/>
             <a:ext cx="256032" cy="256032"/>
           </a:xfrm>
           <a:prstGeom prst="rect">
@@ -10110,7 +10110,7 @@
         </p:nvSpPr>
         <p:spPr>
           <a:xfrm>
-            <a:off x="5163317" y="5422449"/>
+            <a:off x="4255585" y="4862994"/>
             <a:ext cx="256032" cy="256032"/>
           </a:xfrm>
           <a:prstGeom prst="ellipse">
@@ -10135,7 +10135,7 @@
         </p:nvSpPr>
         <p:spPr>
           <a:xfrm>
-            <a:off x="5163317" y="5422449"/>
+            <a:off x="4255585" y="4862994"/>
             <a:ext cx="256032" cy="256032"/>
           </a:xfrm>
           <a:prstGeom prst="rect">
@@ -10174,7 +10174,7 @@
         </p:nvSpPr>
         <p:spPr>
           <a:xfrm>
-            <a:off x="2796301" y="2718174"/>
+            <a:off x="2395345" y="2622170"/>
             <a:ext cx="256032" cy="256032"/>
           </a:xfrm>
           <a:prstGeom prst="ellipse">
@@ -10199,7 +10199,7 @@
         </p:nvSpPr>
         <p:spPr>
           <a:xfrm>
-            <a:off x="2796301" y="2718174"/>
+            <a:off x="2395345" y="2622170"/>
             <a:ext cx="256032" cy="256032"/>
           </a:xfrm>
           <a:prstGeom prst="rect">
@@ -10238,7 +10238,7 @@
         </p:nvSpPr>
         <p:spPr>
           <a:xfrm>
-            <a:off x="5107256" y="4587490"/>
+            <a:off x="4211526" y="4171127"/>
             <a:ext cx="256032" cy="256032"/>
           </a:xfrm>
           <a:prstGeom prst="ellipse">
@@ -10263,7 +10263,7 @@
         </p:nvSpPr>
         <p:spPr>
           <a:xfrm>
-            <a:off x="5107256" y="4587490"/>
+            <a:off x="4211526" y="4171127"/>
             <a:ext cx="256032" cy="256032"/>
           </a:xfrm>
           <a:prstGeom prst="rect">
@@ -10302,7 +10302,7 @@
         </p:nvSpPr>
         <p:spPr>
           <a:xfrm>
-            <a:off x="2494285" y="3210192"/>
+            <a:off x="4117256" y="4051964"/>
             <a:ext cx="310896" cy="310896"/>
           </a:xfrm>
           <a:prstGeom prst="ellipse">
@@ -10327,7 +10327,7 @@
         </p:nvSpPr>
         <p:spPr>
           <a:xfrm>
-            <a:off x="2494285" y="3210192"/>
+            <a:off x="4117256" y="4051964"/>
             <a:ext cx="310896" cy="310896"/>
           </a:xfrm>
           <a:prstGeom prst="rect">
@@ -10352,7 +10352,7 @@
                 <a:ea typeface="Arial" pitchFamily="34" charset="-122"/>
                 <a:cs typeface="Arial" pitchFamily="34" charset="-120"/>
               </a:rPr>
-              <a:t>33</a:t>
+              <a:t>28</a:t>
             </a:r>
             <a:endParaRPr lang="en-US" sz="900" dirty="0"/>
           </a:p>
@@ -10366,7 +10366,7 @@
         </p:nvSpPr>
         <p:spPr>
           <a:xfrm>
-            <a:off x="2238402" y="2916214"/>
+            <a:off x="2152584" y="2578831"/>
             <a:ext cx="310896" cy="310896"/>
           </a:xfrm>
           <a:prstGeom prst="ellipse">
@@ -10391,7 +10391,7 @@
         </p:nvSpPr>
         <p:spPr>
           <a:xfrm>
-            <a:off x="2238402" y="2916214"/>
+            <a:off x="2152584" y="2578831"/>
             <a:ext cx="310896" cy="310896"/>
           </a:xfrm>
           <a:prstGeom prst="rect">
@@ -10416,7 +10416,7 @@
                 <a:ea typeface="Arial" pitchFamily="34" charset="-122"/>
                 <a:cs typeface="Arial" pitchFamily="34" charset="-120"/>
               </a:rPr>
-              <a:t>33</a:t>
+              <a:t>31</a:t>
             </a:r>
             <a:endParaRPr lang="en-US" sz="900" dirty="0"/>
           </a:p>
@@ -10430,7 +10430,7 @@
         </p:nvSpPr>
         <p:spPr>
           <a:xfrm>
-            <a:off x="2217272" y="3143511"/>
+            <a:off x="2152117" y="3025166"/>
             <a:ext cx="310896" cy="310896"/>
           </a:xfrm>
           <a:prstGeom prst="ellipse">
@@ -10455,7 +10455,7 @@
         </p:nvSpPr>
         <p:spPr>
           <a:xfrm>
-            <a:off x="2217272" y="3143511"/>
+            <a:off x="2152117" y="3025166"/>
             <a:ext cx="310896" cy="310896"/>
           </a:xfrm>
           <a:prstGeom prst="rect">
@@ -10480,7 +10480,7 @@
                 <a:ea typeface="Arial" pitchFamily="34" charset="-122"/>
                 <a:cs typeface="Arial" pitchFamily="34" charset="-120"/>
               </a:rPr>
-              <a:t>37</a:t>
+              <a:t>33</a:t>
             </a:r>
             <a:endParaRPr lang="en-US" sz="900" dirty="0"/>
           </a:p>
@@ -10494,7 +10494,7 @@
         </p:nvSpPr>
         <p:spPr>
           <a:xfrm>
-            <a:off x="2394956" y="3171296"/>
+            <a:off x="1951019" y="2781569"/>
             <a:ext cx="310896" cy="310896"/>
           </a:xfrm>
           <a:prstGeom prst="ellipse">
@@ -10519,7 +10519,7 @@
         </p:nvSpPr>
         <p:spPr>
           <a:xfrm>
-            <a:off x="2394956" y="3171296"/>
+            <a:off x="1951019" y="2781569"/>
             <a:ext cx="310896" cy="310896"/>
           </a:xfrm>
           <a:prstGeom prst="rect">
@@ -10544,7 +10544,7 @@
                 <a:ea typeface="Arial" pitchFamily="34" charset="-122"/>
                 <a:cs typeface="Arial" pitchFamily="34" charset="-120"/>
               </a:rPr>
-              <a:t>40</a:t>
+              <a:t>33</a:t>
             </a:r>
             <a:endParaRPr lang="en-US" sz="900" dirty="0"/>
           </a:p>
@@ -10558,7 +10558,7 @@
         </p:nvSpPr>
         <p:spPr>
           <a:xfrm>
-            <a:off x="2404612" y="3210565"/>
+            <a:off x="2112913" y="2507215"/>
             <a:ext cx="310896" cy="310896"/>
           </a:xfrm>
           <a:prstGeom prst="ellipse">
@@ -10583,7 +10583,7 @@
         </p:nvSpPr>
         <p:spPr>
           <a:xfrm>
-            <a:off x="2404612" y="3210565"/>
+            <a:off x="2112913" y="2507215"/>
             <a:ext cx="310896" cy="310896"/>
           </a:xfrm>
           <a:prstGeom prst="rect">
@@ -10608,7 +10608,7 @@
                 <a:ea typeface="Arial" pitchFamily="34" charset="-122"/>
                 <a:cs typeface="Arial" pitchFamily="34" charset="-120"/>
               </a:rPr>
-              <a:t>40</a:t>
+              <a:t>33</a:t>
             </a:r>
             <a:endParaRPr lang="en-US" sz="900" dirty="0"/>
           </a:p>
@@ -10622,7 +10622,7 @@
         </p:nvSpPr>
         <p:spPr>
           <a:xfrm>
-            <a:off x="2417203" y="3185069"/>
+            <a:off x="1934412" y="2969913"/>
             <a:ext cx="310896" cy="310896"/>
           </a:xfrm>
           <a:prstGeom prst="ellipse">
@@ -10647,7 +10647,7 @@
         </p:nvSpPr>
         <p:spPr>
           <a:xfrm>
-            <a:off x="2417203" y="3185069"/>
+            <a:off x="1934412" y="2969913"/>
             <a:ext cx="310896" cy="310896"/>
           </a:xfrm>
           <a:prstGeom prst="rect">
@@ -10672,7 +10672,7 @@
                 <a:ea typeface="Arial" pitchFamily="34" charset="-122"/>
                 <a:cs typeface="Arial" pitchFamily="34" charset="-120"/>
               </a:rPr>
-              <a:t>40</a:t>
+              <a:t>37</a:t>
             </a:r>
             <a:endParaRPr lang="en-US" sz="900" dirty="0"/>
           </a:p>
@@ -10686,7 +10686,7 @@
         </p:nvSpPr>
         <p:spPr>
           <a:xfrm>
-            <a:off x="2286366" y="2919457"/>
+            <a:off x="4763939" y="2661278"/>
             <a:ext cx="310896" cy="310896"/>
           </a:xfrm>
           <a:prstGeom prst="ellipse">
@@ -10711,7 +10711,7 @@
         </p:nvSpPr>
         <p:spPr>
           <a:xfrm>
-            <a:off x="2286366" y="2919457"/>
+            <a:off x="4763939" y="2661278"/>
             <a:ext cx="310896" cy="310896"/>
           </a:xfrm>
           <a:prstGeom prst="rect">
@@ -10736,7 +10736,7 @@
                 <a:ea typeface="Arial" pitchFamily="34" charset="-122"/>
                 <a:cs typeface="Arial" pitchFamily="34" charset="-120"/>
               </a:rPr>
-              <a:t>47</a:t>
+              <a:t>38</a:t>
             </a:r>
             <a:endParaRPr lang="en-US" sz="900" dirty="0"/>
           </a:p>
@@ -10750,14 +10750,14 @@
         </p:nvSpPr>
         <p:spPr>
           <a:xfrm>
-            <a:off x="1442906" y="2329017"/>
-            <a:ext cx="384048" cy="384048"/>
+            <a:off x="2074055" y="2992936"/>
+            <a:ext cx="310896" cy="310896"/>
           </a:xfrm>
           <a:prstGeom prst="ellipse">
             <a:avLst/>
           </a:prstGeom>
           <a:solidFill>
-            <a:srgbClr val="05B050"/>
+            <a:srgbClr val="9E480E"/>
           </a:solidFill>
           <a:ln w="15240">
             <a:solidFill>
@@ -10775,8 +10775,8 @@
         </p:nvSpPr>
         <p:spPr>
           <a:xfrm>
-            <a:off x="1442906" y="2329017"/>
-            <a:ext cx="384048" cy="384048"/>
+            <a:off x="2074055" y="2992936"/>
+            <a:ext cx="310896" cy="310896"/>
           </a:xfrm>
           <a:prstGeom prst="rect">
             <a:avLst/>
@@ -10800,7 +10800,7 @@
                 <a:ea typeface="Arial" pitchFamily="34" charset="-122"/>
                 <a:cs typeface="Arial" pitchFamily="34" charset="-120"/>
               </a:rPr>
-              <a:t>60</a:t>
+              <a:t>40</a:t>
             </a:r>
             <a:endParaRPr lang="en-US" sz="900" dirty="0"/>
           </a:p>
@@ -10814,14 +10814,14 @@
         </p:nvSpPr>
         <p:spPr>
           <a:xfrm>
-            <a:off x="4865142" y="4566963"/>
-            <a:ext cx="457200" cy="457200"/>
+            <a:off x="2081643" y="3025475"/>
+            <a:ext cx="310896" cy="310896"/>
           </a:xfrm>
           <a:prstGeom prst="ellipse">
             <a:avLst/>
           </a:prstGeom>
           <a:solidFill>
-            <a:srgbClr val="1F3864"/>
+            <a:srgbClr val="9E480E"/>
           </a:solidFill>
           <a:ln w="15240">
             <a:solidFill>
@@ -10839,8 +10839,8 @@
         </p:nvSpPr>
         <p:spPr>
           <a:xfrm>
-            <a:off x="4865142" y="4566963"/>
-            <a:ext cx="457200" cy="457200"/>
+            <a:off x="2081643" y="3025475"/>
+            <a:ext cx="310896" cy="310896"/>
           </a:xfrm>
           <a:prstGeom prst="rect">
             <a:avLst/>
@@ -10856,7 +10856,7 @@
               <a:buNone/>
             </a:pPr>
             <a:r>
-              <a:rPr lang="en-US" sz="1100" b="1" dirty="0">
+              <a:rPr lang="en-US" sz="900" b="1" dirty="0">
                 <a:solidFill>
                   <a:srgbClr val="FFFFFF"/>
                 </a:solidFill>
@@ -10864,9 +10864,9 @@
                 <a:ea typeface="Arial" pitchFamily="34" charset="-122"/>
                 <a:cs typeface="Arial" pitchFamily="34" charset="-120"/>
               </a:rPr>
-              <a:t>150</a:t>
-            </a:r>
-            <a:endParaRPr lang="en-US" sz="1100" dirty="0"/>
+              <a:t>40</a:t>
+            </a:r>
+            <a:endParaRPr lang="en-US" sz="900" dirty="0"/>
           </a:p>
         </p:txBody>
       </p:sp>
@@ -10878,14 +10878,14 @@
         </p:nvSpPr>
         <p:spPr>
           <a:xfrm>
-            <a:off x="1383630" y="2524029"/>
-            <a:ext cx="457200" cy="457200"/>
+            <a:off x="2091538" y="3004349"/>
+            <a:ext cx="310896" cy="310896"/>
           </a:xfrm>
           <a:prstGeom prst="ellipse">
             <a:avLst/>
           </a:prstGeom>
           <a:solidFill>
-            <a:srgbClr val="1F3864"/>
+            <a:srgbClr val="9E480E"/>
           </a:solidFill>
           <a:ln w="15240">
             <a:solidFill>
@@ -10903,9 +10903,905 @@
         </p:nvSpPr>
         <p:spPr>
           <a:xfrm>
-            <a:off x="1383630" y="2524029"/>
+            <a:off x="2091538" y="3004349"/>
+            <a:ext cx="310896" cy="310896"/>
+          </a:xfrm>
+          <a:prstGeom prst="rect">
+            <a:avLst/>
+          </a:prstGeom>
+          <a:noFill/>
+          <a:ln/>
+        </p:spPr>
+        <p:txBody>
+          <a:bodyPr wrap="square" lIns="0" tIns="0" rIns="0" bIns="0" rtlCol="0" anchor="ctr"/>
+          <a:lstStyle/>
+          <a:p>
+            <a:pPr algn="ctr" indent="0" marL="0">
+              <a:buNone/>
+            </a:pPr>
+            <a:r>
+              <a:rPr lang="en-US" sz="900" b="1" dirty="0">
+                <a:solidFill>
+                  <a:srgbClr val="FFFFFF"/>
+                </a:solidFill>
+                <a:latin typeface="Arial" pitchFamily="34" charset="0"/>
+                <a:ea typeface="Arial" pitchFamily="34" charset="-122"/>
+                <a:cs typeface="Arial" pitchFamily="34" charset="-120"/>
+              </a:rPr>
+              <a:t>40</a:t>
+            </a:r>
+            <a:endParaRPr lang="en-US" sz="900" dirty="0"/>
+          </a:p>
+        </p:txBody>
+      </p:sp>
+      <p:sp>
+        <p:nvSpPr>
+          <p:cNvPr id="109" name="Shape 107"/>
+          <p:cNvSpPr/>
+          <p:nvPr/>
+        </p:nvSpPr>
+        <p:spPr>
+          <a:xfrm>
+            <a:off x="4846946" y="4198126"/>
+            <a:ext cx="310896" cy="310896"/>
+          </a:xfrm>
+          <a:prstGeom prst="ellipse">
+            <a:avLst/>
+          </a:prstGeom>
+          <a:solidFill>
+            <a:srgbClr val="9E480E"/>
+          </a:solidFill>
+          <a:ln w="15240">
+            <a:solidFill>
+              <a:srgbClr val="FFFFFF"/>
+            </a:solidFill>
+            <a:prstDash val="solid"/>
+          </a:ln>
+        </p:spPr>
+      </p:sp>
+      <p:sp>
+        <p:nvSpPr>
+          <p:cNvPr id="110" name="Text 108"/>
+          <p:cNvSpPr/>
+          <p:nvPr/>
+        </p:nvSpPr>
+        <p:spPr>
+          <a:xfrm>
+            <a:off x="4846946" y="4198126"/>
+            <a:ext cx="310896" cy="310896"/>
+          </a:xfrm>
+          <a:prstGeom prst="rect">
+            <a:avLst/>
+          </a:prstGeom>
+          <a:noFill/>
+          <a:ln/>
+        </p:spPr>
+        <p:txBody>
+          <a:bodyPr wrap="square" lIns="0" tIns="0" rIns="0" bIns="0" rtlCol="0" anchor="ctr"/>
+          <a:lstStyle/>
+          <a:p>
+            <a:pPr algn="ctr" indent="0" marL="0">
+              <a:buNone/>
+            </a:pPr>
+            <a:r>
+              <a:rPr lang="en-US" sz="900" b="1" dirty="0">
+                <a:solidFill>
+                  <a:srgbClr val="FFFFFF"/>
+                </a:solidFill>
+                <a:latin typeface="Arial" pitchFamily="34" charset="0"/>
+                <a:ea typeface="Arial" pitchFamily="34" charset="-122"/>
+                <a:cs typeface="Arial" pitchFamily="34" charset="-120"/>
+              </a:rPr>
+              <a:t>40</a:t>
+            </a:r>
+            <a:endParaRPr lang="en-US" sz="900" dirty="0"/>
+          </a:p>
+        </p:txBody>
+      </p:sp>
+      <p:sp>
+        <p:nvSpPr>
+          <p:cNvPr id="111" name="Shape 109"/>
+          <p:cNvSpPr/>
+          <p:nvPr/>
+        </p:nvSpPr>
+        <p:spPr>
+          <a:xfrm>
+            <a:off x="5422392" y="2982286"/>
+            <a:ext cx="310896" cy="310896"/>
+          </a:xfrm>
+          <a:prstGeom prst="ellipse">
+            <a:avLst/>
+          </a:prstGeom>
+          <a:solidFill>
+            <a:srgbClr val="9E480E"/>
+          </a:solidFill>
+          <a:ln w="15240">
+            <a:solidFill>
+              <a:srgbClr val="FFFFFF"/>
+            </a:solidFill>
+            <a:prstDash val="solid"/>
+          </a:ln>
+        </p:spPr>
+      </p:sp>
+      <p:sp>
+        <p:nvSpPr>
+          <p:cNvPr id="112" name="Text 110"/>
+          <p:cNvSpPr/>
+          <p:nvPr/>
+        </p:nvSpPr>
+        <p:spPr>
+          <a:xfrm>
+            <a:off x="5422392" y="2982286"/>
+            <a:ext cx="310896" cy="310896"/>
+          </a:xfrm>
+          <a:prstGeom prst="rect">
+            <a:avLst/>
+          </a:prstGeom>
+          <a:noFill/>
+          <a:ln/>
+        </p:spPr>
+        <p:txBody>
+          <a:bodyPr wrap="square" lIns="0" tIns="0" rIns="0" bIns="0" rtlCol="0" anchor="ctr"/>
+          <a:lstStyle/>
+          <a:p>
+            <a:pPr algn="ctr" indent="0" marL="0">
+              <a:buNone/>
+            </a:pPr>
+            <a:r>
+              <a:rPr lang="en-US" sz="900" b="1" dirty="0">
+                <a:solidFill>
+                  <a:srgbClr val="FFFFFF"/>
+                </a:solidFill>
+                <a:latin typeface="Arial" pitchFamily="34" charset="0"/>
+                <a:ea typeface="Arial" pitchFamily="34" charset="-122"/>
+                <a:cs typeface="Arial" pitchFamily="34" charset="-120"/>
+              </a:rPr>
+              <a:t>40</a:t>
+            </a:r>
+            <a:endParaRPr lang="en-US" sz="900" dirty="0"/>
+          </a:p>
+        </p:txBody>
+      </p:sp>
+      <p:sp>
+        <p:nvSpPr>
+          <p:cNvPr id="113" name="Shape 111"/>
+          <p:cNvSpPr/>
+          <p:nvPr/>
+        </p:nvSpPr>
+        <p:spPr>
+          <a:xfrm>
+            <a:off x="4245992" y="4078783"/>
+            <a:ext cx="310896" cy="310896"/>
+          </a:xfrm>
+          <a:prstGeom prst="ellipse">
+            <a:avLst/>
+          </a:prstGeom>
+          <a:solidFill>
+            <a:srgbClr val="9E480E"/>
+          </a:solidFill>
+          <a:ln w="15240">
+            <a:solidFill>
+              <a:srgbClr val="FFFFFF"/>
+            </a:solidFill>
+            <a:prstDash val="solid"/>
+          </a:ln>
+        </p:spPr>
+      </p:sp>
+      <p:sp>
+        <p:nvSpPr>
+          <p:cNvPr id="114" name="Text 112"/>
+          <p:cNvSpPr/>
+          <p:nvPr/>
+        </p:nvSpPr>
+        <p:spPr>
+          <a:xfrm>
+            <a:off x="4245992" y="4078783"/>
+            <a:ext cx="310896" cy="310896"/>
+          </a:xfrm>
+          <a:prstGeom prst="rect">
+            <a:avLst/>
+          </a:prstGeom>
+          <a:noFill/>
+          <a:ln/>
+        </p:spPr>
+        <p:txBody>
+          <a:bodyPr wrap="square" lIns="0" tIns="0" rIns="0" bIns="0" rtlCol="0" anchor="ctr"/>
+          <a:lstStyle/>
+          <a:p>
+            <a:pPr algn="ctr" indent="0" marL="0">
+              <a:buNone/>
+            </a:pPr>
+            <a:r>
+              <a:rPr lang="en-US" sz="900" b="1" dirty="0">
+                <a:solidFill>
+                  <a:srgbClr val="FFFFFF"/>
+                </a:solidFill>
+                <a:latin typeface="Arial" pitchFamily="34" charset="0"/>
+                <a:ea typeface="Arial" pitchFamily="34" charset="-122"/>
+                <a:cs typeface="Arial" pitchFamily="34" charset="-120"/>
+              </a:rPr>
+              <a:t>42</a:t>
+            </a:r>
+            <a:endParaRPr lang="en-US" sz="900" dirty="0"/>
+          </a:p>
+        </p:txBody>
+      </p:sp>
+      <p:sp>
+        <p:nvSpPr>
+          <p:cNvPr id="115" name="Shape 113"/>
+          <p:cNvSpPr/>
+          <p:nvPr/>
+        </p:nvSpPr>
+        <p:spPr>
+          <a:xfrm>
+            <a:off x="1669793" y="2504952"/>
+            <a:ext cx="310896" cy="310896"/>
+          </a:xfrm>
+          <a:prstGeom prst="ellipse">
+            <a:avLst/>
+          </a:prstGeom>
+          <a:solidFill>
+            <a:srgbClr val="9E480E"/>
+          </a:solidFill>
+          <a:ln w="15240">
+            <a:solidFill>
+              <a:srgbClr val="FFFFFF"/>
+            </a:solidFill>
+            <a:prstDash val="solid"/>
+          </a:ln>
+        </p:spPr>
+      </p:sp>
+      <p:sp>
+        <p:nvSpPr>
+          <p:cNvPr id="116" name="Text 114"/>
+          <p:cNvSpPr/>
+          <p:nvPr/>
+        </p:nvSpPr>
+        <p:spPr>
+          <a:xfrm>
+            <a:off x="1669793" y="2504952"/>
+            <a:ext cx="310896" cy="310896"/>
+          </a:xfrm>
+          <a:prstGeom prst="rect">
+            <a:avLst/>
+          </a:prstGeom>
+          <a:noFill/>
+          <a:ln/>
+        </p:spPr>
+        <p:txBody>
+          <a:bodyPr wrap="square" lIns="0" tIns="0" rIns="0" bIns="0" rtlCol="0" anchor="ctr"/>
+          <a:lstStyle/>
+          <a:p>
+            <a:pPr algn="ctr" indent="0" marL="0">
+              <a:buNone/>
+            </a:pPr>
+            <a:r>
+              <a:rPr lang="en-US" sz="900" b="1" dirty="0">
+                <a:solidFill>
+                  <a:srgbClr val="FFFFFF"/>
+                </a:solidFill>
+                <a:latin typeface="Arial" pitchFamily="34" charset="0"/>
+                <a:ea typeface="Arial" pitchFamily="34" charset="-122"/>
+                <a:cs typeface="Arial" pitchFamily="34" charset="-120"/>
+              </a:rPr>
+              <a:t>46</a:t>
+            </a:r>
+            <a:endParaRPr lang="en-US" sz="900" dirty="0"/>
+          </a:p>
+        </p:txBody>
+      </p:sp>
+      <p:sp>
+        <p:nvSpPr>
+          <p:cNvPr id="117" name="Shape 115"/>
+          <p:cNvSpPr/>
+          <p:nvPr/>
+        </p:nvSpPr>
+        <p:spPr>
+          <a:xfrm>
+            <a:off x="2038425" y="2475186"/>
+            <a:ext cx="310896" cy="310896"/>
+          </a:xfrm>
+          <a:prstGeom prst="ellipse">
+            <a:avLst/>
+          </a:prstGeom>
+          <a:solidFill>
+            <a:srgbClr val="9E480E"/>
+          </a:solidFill>
+          <a:ln w="15240">
+            <a:solidFill>
+              <a:srgbClr val="FFFFFF"/>
+            </a:solidFill>
+            <a:prstDash val="solid"/>
+          </a:ln>
+        </p:spPr>
+      </p:sp>
+      <p:sp>
+        <p:nvSpPr>
+          <p:cNvPr id="118" name="Text 116"/>
+          <p:cNvSpPr/>
+          <p:nvPr/>
+        </p:nvSpPr>
+        <p:spPr>
+          <a:xfrm>
+            <a:off x="2038425" y="2475186"/>
+            <a:ext cx="310896" cy="310896"/>
+          </a:xfrm>
+          <a:prstGeom prst="rect">
+            <a:avLst/>
+          </a:prstGeom>
+          <a:noFill/>
+          <a:ln/>
+        </p:spPr>
+        <p:txBody>
+          <a:bodyPr wrap="square" lIns="0" tIns="0" rIns="0" bIns="0" rtlCol="0" anchor="ctr"/>
+          <a:lstStyle/>
+          <a:p>
+            <a:pPr algn="ctr" indent="0" marL="0">
+              <a:buNone/>
+            </a:pPr>
+            <a:r>
+              <a:rPr lang="en-US" sz="900" b="1" dirty="0">
+                <a:solidFill>
+                  <a:srgbClr val="FFFFFF"/>
+                </a:solidFill>
+                <a:latin typeface="Arial" pitchFamily="34" charset="0"/>
+                <a:ea typeface="Arial" pitchFamily="34" charset="-122"/>
+                <a:cs typeface="Arial" pitchFamily="34" charset="-120"/>
+              </a:rPr>
+              <a:t>46</a:t>
+            </a:r>
+            <a:endParaRPr lang="en-US" sz="900" dirty="0"/>
+          </a:p>
+        </p:txBody>
+      </p:sp>
+      <p:sp>
+        <p:nvSpPr>
+          <p:cNvPr id="119" name="Shape 117"/>
+          <p:cNvSpPr/>
+          <p:nvPr/>
+        </p:nvSpPr>
+        <p:spPr>
+          <a:xfrm>
+            <a:off x="1988713" y="2784257"/>
+            <a:ext cx="310896" cy="310896"/>
+          </a:xfrm>
+          <a:prstGeom prst="ellipse">
+            <a:avLst/>
+          </a:prstGeom>
+          <a:solidFill>
+            <a:srgbClr val="9E480E"/>
+          </a:solidFill>
+          <a:ln w="15240">
+            <a:solidFill>
+              <a:srgbClr val="FFFFFF"/>
+            </a:solidFill>
+            <a:prstDash val="solid"/>
+          </a:ln>
+        </p:spPr>
+      </p:sp>
+      <p:sp>
+        <p:nvSpPr>
+          <p:cNvPr id="120" name="Text 118"/>
+          <p:cNvSpPr/>
+          <p:nvPr/>
+        </p:nvSpPr>
+        <p:spPr>
+          <a:xfrm>
+            <a:off x="1988713" y="2784257"/>
+            <a:ext cx="310896" cy="310896"/>
+          </a:xfrm>
+          <a:prstGeom prst="rect">
+            <a:avLst/>
+          </a:prstGeom>
+          <a:noFill/>
+          <a:ln/>
+        </p:spPr>
+        <p:txBody>
+          <a:bodyPr wrap="square" lIns="0" tIns="0" rIns="0" bIns="0" rtlCol="0" anchor="ctr"/>
+          <a:lstStyle/>
+          <a:p>
+            <a:pPr algn="ctr" indent="0" marL="0">
+              <a:buNone/>
+            </a:pPr>
+            <a:r>
+              <a:rPr lang="en-US" sz="900" b="1" dirty="0">
+                <a:solidFill>
+                  <a:srgbClr val="FFFFFF"/>
+                </a:solidFill>
+                <a:latin typeface="Arial" pitchFamily="34" charset="0"/>
+                <a:ea typeface="Arial" pitchFamily="34" charset="-122"/>
+                <a:cs typeface="Arial" pitchFamily="34" charset="-120"/>
+              </a:rPr>
+              <a:t>47</a:t>
+            </a:r>
+            <a:endParaRPr lang="en-US" sz="900" dirty="0"/>
+          </a:p>
+        </p:txBody>
+      </p:sp>
+      <p:sp>
+        <p:nvSpPr>
+          <p:cNvPr id="121" name="Shape 119"/>
+          <p:cNvSpPr/>
+          <p:nvPr/>
+        </p:nvSpPr>
+        <p:spPr>
+          <a:xfrm>
+            <a:off x="3967123" y="3934124"/>
+            <a:ext cx="384048" cy="384048"/>
+          </a:xfrm>
+          <a:prstGeom prst="ellipse">
+            <a:avLst/>
+          </a:prstGeom>
+          <a:solidFill>
+            <a:srgbClr val="05B050"/>
+          </a:solidFill>
+          <a:ln w="15240">
+            <a:solidFill>
+              <a:srgbClr val="FFFFFF"/>
+            </a:solidFill>
+            <a:prstDash val="solid"/>
+          </a:ln>
+        </p:spPr>
+      </p:sp>
+      <p:sp>
+        <p:nvSpPr>
+          <p:cNvPr id="122" name="Text 120"/>
+          <p:cNvSpPr/>
+          <p:nvPr/>
+        </p:nvSpPr>
+        <p:spPr>
+          <a:xfrm>
+            <a:off x="3967123" y="3934124"/>
+            <a:ext cx="384048" cy="384048"/>
+          </a:xfrm>
+          <a:prstGeom prst="rect">
+            <a:avLst/>
+          </a:prstGeom>
+          <a:noFill/>
+          <a:ln/>
+        </p:spPr>
+        <p:txBody>
+          <a:bodyPr wrap="square" lIns="0" tIns="0" rIns="0" bIns="0" rtlCol="0" anchor="ctr"/>
+          <a:lstStyle/>
+          <a:p>
+            <a:pPr algn="ctr" indent="0" marL="0">
+              <a:buNone/>
+            </a:pPr>
+            <a:r>
+              <a:rPr lang="en-US" sz="900" b="1" dirty="0">
+                <a:solidFill>
+                  <a:srgbClr val="FFFFFF"/>
+                </a:solidFill>
+                <a:latin typeface="Arial" pitchFamily="34" charset="0"/>
+                <a:ea typeface="Arial" pitchFamily="34" charset="-122"/>
+                <a:cs typeface="Arial" pitchFamily="34" charset="-120"/>
+              </a:rPr>
+              <a:t>52</a:t>
+            </a:r>
+            <a:endParaRPr lang="en-US" sz="900" dirty="0"/>
+          </a:p>
+        </p:txBody>
+      </p:sp>
+      <p:sp>
+        <p:nvSpPr>
+          <p:cNvPr id="123" name="Shape 121"/>
+          <p:cNvSpPr/>
+          <p:nvPr/>
+        </p:nvSpPr>
+        <p:spPr>
+          <a:xfrm>
+            <a:off x="2046395" y="2505505"/>
+            <a:ext cx="384048" cy="384048"/>
+          </a:xfrm>
+          <a:prstGeom prst="ellipse">
+            <a:avLst/>
+          </a:prstGeom>
+          <a:solidFill>
+            <a:srgbClr val="05B050"/>
+          </a:solidFill>
+          <a:ln w="15240">
+            <a:solidFill>
+              <a:srgbClr val="FFFFFF"/>
+            </a:solidFill>
+            <a:prstDash val="solid"/>
+          </a:ln>
+        </p:spPr>
+      </p:sp>
+      <p:sp>
+        <p:nvSpPr>
+          <p:cNvPr id="124" name="Text 122"/>
+          <p:cNvSpPr/>
+          <p:nvPr/>
+        </p:nvSpPr>
+        <p:spPr>
+          <a:xfrm>
+            <a:off x="2046395" y="2505505"/>
+            <a:ext cx="384048" cy="384048"/>
+          </a:xfrm>
+          <a:prstGeom prst="rect">
+            <a:avLst/>
+          </a:prstGeom>
+          <a:noFill/>
+          <a:ln/>
+        </p:spPr>
+        <p:txBody>
+          <a:bodyPr wrap="square" lIns="0" tIns="0" rIns="0" bIns="0" rtlCol="0" anchor="ctr"/>
+          <a:lstStyle/>
+          <a:p>
+            <a:pPr algn="ctr" indent="0" marL="0">
+              <a:buNone/>
+            </a:pPr>
+            <a:r>
+              <a:rPr lang="en-US" sz="900" b="1" dirty="0">
+                <a:solidFill>
+                  <a:srgbClr val="FFFFFF"/>
+                </a:solidFill>
+                <a:latin typeface="Arial" pitchFamily="34" charset="0"/>
+                <a:ea typeface="Arial" pitchFamily="34" charset="-122"/>
+                <a:cs typeface="Arial" pitchFamily="34" charset="-120"/>
+              </a:rPr>
+              <a:t>53</a:t>
+            </a:r>
+            <a:endParaRPr lang="en-US" sz="900" dirty="0"/>
+          </a:p>
+        </p:txBody>
+      </p:sp>
+      <p:sp>
+        <p:nvSpPr>
+          <p:cNvPr id="125" name="Shape 123"/>
+          <p:cNvSpPr/>
+          <p:nvPr/>
+        </p:nvSpPr>
+        <p:spPr>
+          <a:xfrm>
+            <a:off x="4053977" y="2359483"/>
+            <a:ext cx="384048" cy="384048"/>
+          </a:xfrm>
+          <a:prstGeom prst="ellipse">
+            <a:avLst/>
+          </a:prstGeom>
+          <a:solidFill>
+            <a:srgbClr val="05B050"/>
+          </a:solidFill>
+          <a:ln w="15240">
+            <a:solidFill>
+              <a:srgbClr val="FFFFFF"/>
+            </a:solidFill>
+            <a:prstDash val="solid"/>
+          </a:ln>
+        </p:spPr>
+      </p:sp>
+      <p:sp>
+        <p:nvSpPr>
+          <p:cNvPr id="126" name="Text 124"/>
+          <p:cNvSpPr/>
+          <p:nvPr/>
+        </p:nvSpPr>
+        <p:spPr>
+          <a:xfrm>
+            <a:off x="4053977" y="2359483"/>
+            <a:ext cx="384048" cy="384048"/>
+          </a:xfrm>
+          <a:prstGeom prst="rect">
+            <a:avLst/>
+          </a:prstGeom>
+          <a:noFill/>
+          <a:ln/>
+        </p:spPr>
+        <p:txBody>
+          <a:bodyPr wrap="square" lIns="0" tIns="0" rIns="0" bIns="0" rtlCol="0" anchor="ctr"/>
+          <a:lstStyle/>
+          <a:p>
+            <a:pPr algn="ctr" indent="0" marL="0">
+              <a:buNone/>
+            </a:pPr>
+            <a:r>
+              <a:rPr lang="en-US" sz="900" b="1" dirty="0">
+                <a:solidFill>
+                  <a:srgbClr val="FFFFFF"/>
+                </a:solidFill>
+                <a:latin typeface="Arial" pitchFamily="34" charset="0"/>
+                <a:ea typeface="Arial" pitchFamily="34" charset="-122"/>
+                <a:cs typeface="Arial" pitchFamily="34" charset="-120"/>
+              </a:rPr>
+              <a:t>55</a:t>
+            </a:r>
+            <a:endParaRPr lang="en-US" sz="900" dirty="0"/>
+          </a:p>
+        </p:txBody>
+      </p:sp>
+      <p:sp>
+        <p:nvSpPr>
+          <p:cNvPr id="127" name="Shape 125"/>
+          <p:cNvSpPr/>
+          <p:nvPr/>
+        </p:nvSpPr>
+        <p:spPr>
+          <a:xfrm>
+            <a:off x="1318007" y="2288736"/>
+            <a:ext cx="384048" cy="384048"/>
+          </a:xfrm>
+          <a:prstGeom prst="ellipse">
+            <a:avLst/>
+          </a:prstGeom>
+          <a:solidFill>
+            <a:srgbClr val="05B050"/>
+          </a:solidFill>
+          <a:ln w="15240">
+            <a:solidFill>
+              <a:srgbClr val="FFFFFF"/>
+            </a:solidFill>
+            <a:prstDash val="solid"/>
+          </a:ln>
+        </p:spPr>
+      </p:sp>
+      <p:sp>
+        <p:nvSpPr>
+          <p:cNvPr id="128" name="Text 126"/>
+          <p:cNvSpPr/>
+          <p:nvPr/>
+        </p:nvSpPr>
+        <p:spPr>
+          <a:xfrm>
+            <a:off x="1318007" y="2288736"/>
+            <a:ext cx="384048" cy="384048"/>
+          </a:xfrm>
+          <a:prstGeom prst="rect">
+            <a:avLst/>
+          </a:prstGeom>
+          <a:noFill/>
+          <a:ln/>
+        </p:spPr>
+        <p:txBody>
+          <a:bodyPr wrap="square" lIns="0" tIns="0" rIns="0" bIns="0" rtlCol="0" anchor="ctr"/>
+          <a:lstStyle/>
+          <a:p>
+            <a:pPr algn="ctr" indent="0" marL="0">
+              <a:buNone/>
+            </a:pPr>
+            <a:r>
+              <a:rPr lang="en-US" sz="900" b="1" dirty="0">
+                <a:solidFill>
+                  <a:srgbClr val="FFFFFF"/>
+                </a:solidFill>
+                <a:latin typeface="Arial" pitchFamily="34" charset="0"/>
+                <a:ea typeface="Arial" pitchFamily="34" charset="-122"/>
+                <a:cs typeface="Arial" pitchFamily="34" charset="-120"/>
+              </a:rPr>
+              <a:t>60</a:t>
+            </a:r>
+            <a:endParaRPr lang="en-US" sz="900" dirty="0"/>
+          </a:p>
+        </p:txBody>
+      </p:sp>
+      <p:sp>
+        <p:nvSpPr>
+          <p:cNvPr id="129" name="Shape 127"/>
+          <p:cNvSpPr/>
+          <p:nvPr/>
+        </p:nvSpPr>
+        <p:spPr>
+          <a:xfrm>
+            <a:off x="3092594" y="5413248"/>
+            <a:ext cx="384048" cy="384048"/>
+          </a:xfrm>
+          <a:prstGeom prst="ellipse">
+            <a:avLst/>
+          </a:prstGeom>
+          <a:solidFill>
+            <a:srgbClr val="05B050"/>
+          </a:solidFill>
+          <a:ln w="15240">
+            <a:solidFill>
+              <a:srgbClr val="FFFFFF"/>
+            </a:solidFill>
+            <a:prstDash val="solid"/>
+          </a:ln>
+        </p:spPr>
+      </p:sp>
+      <p:sp>
+        <p:nvSpPr>
+          <p:cNvPr id="130" name="Text 128"/>
+          <p:cNvSpPr/>
+          <p:nvPr/>
+        </p:nvSpPr>
+        <p:spPr>
+          <a:xfrm>
+            <a:off x="3092594" y="5413248"/>
+            <a:ext cx="384048" cy="384048"/>
+          </a:xfrm>
+          <a:prstGeom prst="rect">
+            <a:avLst/>
+          </a:prstGeom>
+          <a:noFill/>
+          <a:ln/>
+        </p:spPr>
+        <p:txBody>
+          <a:bodyPr wrap="square" lIns="0" tIns="0" rIns="0" bIns="0" rtlCol="0" anchor="ctr"/>
+          <a:lstStyle/>
+          <a:p>
+            <a:pPr algn="ctr" indent="0" marL="0">
+              <a:buNone/>
+            </a:pPr>
+            <a:r>
+              <a:rPr lang="en-US" sz="900" b="1" dirty="0">
+                <a:solidFill>
+                  <a:srgbClr val="FFFFFF"/>
+                </a:solidFill>
+                <a:latin typeface="Arial" pitchFamily="34" charset="0"/>
+                <a:ea typeface="Arial" pitchFamily="34" charset="-122"/>
+                <a:cs typeface="Arial" pitchFamily="34" charset="-120"/>
+              </a:rPr>
+              <a:t>74</a:t>
+            </a:r>
+            <a:endParaRPr lang="en-US" sz="900" dirty="0"/>
+          </a:p>
+        </p:txBody>
+      </p:sp>
+      <p:sp>
+        <p:nvSpPr>
+          <p:cNvPr id="131" name="Shape 129"/>
+          <p:cNvSpPr/>
+          <p:nvPr/>
+        </p:nvSpPr>
+        <p:spPr>
+          <a:xfrm>
+            <a:off x="2635580" y="3303044"/>
+            <a:ext cx="384048" cy="384048"/>
+          </a:xfrm>
+          <a:prstGeom prst="ellipse">
+            <a:avLst/>
+          </a:prstGeom>
+          <a:solidFill>
+            <a:srgbClr val="05B050"/>
+          </a:solidFill>
+          <a:ln w="15240">
+            <a:solidFill>
+              <a:srgbClr val="FFFFFF"/>
+            </a:solidFill>
+            <a:prstDash val="solid"/>
+          </a:ln>
+        </p:spPr>
+      </p:sp>
+      <p:sp>
+        <p:nvSpPr>
+          <p:cNvPr id="132" name="Text 130"/>
+          <p:cNvSpPr/>
+          <p:nvPr/>
+        </p:nvSpPr>
+        <p:spPr>
+          <a:xfrm>
+            <a:off x="2635580" y="3303044"/>
+            <a:ext cx="384048" cy="384048"/>
+          </a:xfrm>
+          <a:prstGeom prst="rect">
+            <a:avLst/>
+          </a:prstGeom>
+          <a:noFill/>
+          <a:ln/>
+        </p:spPr>
+        <p:txBody>
+          <a:bodyPr wrap="square" lIns="0" tIns="0" rIns="0" bIns="0" rtlCol="0" anchor="ctr"/>
+          <a:lstStyle/>
+          <a:p>
+            <a:pPr algn="ctr" indent="0" marL="0">
+              <a:buNone/>
+            </a:pPr>
+            <a:r>
+              <a:rPr lang="en-US" sz="900" b="1" dirty="0">
+                <a:solidFill>
+                  <a:srgbClr val="FFFFFF"/>
+                </a:solidFill>
+                <a:latin typeface="Arial" pitchFamily="34" charset="0"/>
+                <a:ea typeface="Arial" pitchFamily="34" charset="-122"/>
+                <a:cs typeface="Arial" pitchFamily="34" charset="-120"/>
+              </a:rPr>
+              <a:t>75</a:t>
+            </a:r>
+            <a:endParaRPr lang="en-US" sz="900" dirty="0"/>
+          </a:p>
+        </p:txBody>
+      </p:sp>
+      <p:sp>
+        <p:nvSpPr>
+          <p:cNvPr id="133" name="Shape 131"/>
+          <p:cNvSpPr/>
+          <p:nvPr/>
+        </p:nvSpPr>
+        <p:spPr>
+          <a:xfrm>
+            <a:off x="1563153" y="2418225"/>
+            <a:ext cx="384048" cy="384048"/>
+          </a:xfrm>
+          <a:prstGeom prst="ellipse">
+            <a:avLst/>
+          </a:prstGeom>
+          <a:solidFill>
+            <a:srgbClr val="05B050"/>
+          </a:solidFill>
+          <a:ln w="15240">
+            <a:solidFill>
+              <a:srgbClr val="FFFFFF"/>
+            </a:solidFill>
+            <a:prstDash val="solid"/>
+          </a:ln>
+        </p:spPr>
+      </p:sp>
+      <p:sp>
+        <p:nvSpPr>
+          <p:cNvPr id="134" name="Text 132"/>
+          <p:cNvSpPr/>
+          <p:nvPr/>
+        </p:nvSpPr>
+        <p:spPr>
+          <a:xfrm>
+            <a:off x="1563153" y="2418225"/>
+            <a:ext cx="384048" cy="384048"/>
+          </a:xfrm>
+          <a:prstGeom prst="rect">
+            <a:avLst/>
+          </a:prstGeom>
+          <a:noFill/>
+          <a:ln/>
+        </p:spPr>
+        <p:txBody>
+          <a:bodyPr wrap="square" lIns="0" tIns="0" rIns="0" bIns="0" rtlCol="0" anchor="ctr"/>
+          <a:lstStyle/>
+          <a:p>
+            <a:pPr algn="ctr" indent="0" marL="0">
+              <a:buNone/>
+            </a:pPr>
+            <a:r>
+              <a:rPr lang="en-US" sz="900" b="1" dirty="0">
+                <a:solidFill>
+                  <a:srgbClr val="FFFFFF"/>
+                </a:solidFill>
+                <a:latin typeface="Arial" pitchFamily="34" charset="0"/>
+                <a:ea typeface="Arial" pitchFamily="34" charset="-122"/>
+                <a:cs typeface="Arial" pitchFamily="34" charset="-120"/>
+              </a:rPr>
+              <a:t>77</a:t>
+            </a:r>
+            <a:endParaRPr lang="en-US" sz="900" dirty="0"/>
+          </a:p>
+        </p:txBody>
+      </p:sp>
+      <p:sp>
+        <p:nvSpPr>
+          <p:cNvPr id="135" name="Shape 133"/>
+          <p:cNvSpPr/>
+          <p:nvPr/>
+        </p:nvSpPr>
+        <p:spPr>
+          <a:xfrm>
+            <a:off x="2250622" y="2440889"/>
             <a:ext cx="457200" cy="457200"/>
           </a:xfrm>
+          <a:prstGeom prst="ellipse">
+            <a:avLst/>
+          </a:prstGeom>
+          <a:solidFill>
+            <a:srgbClr val="1F3864"/>
+          </a:solidFill>
+          <a:ln w="15240">
+            <a:solidFill>
+              <a:srgbClr val="FFFFFF"/>
+            </a:solidFill>
+            <a:prstDash val="solid"/>
+          </a:ln>
+        </p:spPr>
+      </p:sp>
+      <p:sp>
+        <p:nvSpPr>
+          <p:cNvPr id="136" name="Text 134"/>
+          <p:cNvSpPr/>
+          <p:nvPr/>
+        </p:nvSpPr>
+        <p:spPr>
+          <a:xfrm>
+            <a:off x="2250622" y="2440889"/>
+            <a:ext cx="457200" cy="457200"/>
+          </a:xfrm>
           <a:prstGeom prst="rect">
             <a:avLst/>
           </a:prstGeom>
@@ -10928,6 +11824,518 @@
                 <a:ea typeface="Arial" pitchFamily="34" charset="-122"/>
                 <a:cs typeface="Arial" pitchFamily="34" charset="-120"/>
               </a:rPr>
+              <a:t>100</a:t>
+            </a:r>
+            <a:endParaRPr lang="en-US" sz="1100" dirty="0"/>
+          </a:p>
+        </p:txBody>
+      </p:sp>
+      <p:sp>
+        <p:nvSpPr>
+          <p:cNvPr id="137" name="Shape 135"/>
+          <p:cNvSpPr/>
+          <p:nvPr/>
+        </p:nvSpPr>
+        <p:spPr>
+          <a:xfrm>
+            <a:off x="4374779" y="2463006"/>
+            <a:ext cx="457200" cy="457200"/>
+          </a:xfrm>
+          <a:prstGeom prst="ellipse">
+            <a:avLst/>
+          </a:prstGeom>
+          <a:solidFill>
+            <a:srgbClr val="1F3864"/>
+          </a:solidFill>
+          <a:ln w="15240">
+            <a:solidFill>
+              <a:srgbClr val="FFFFFF"/>
+            </a:solidFill>
+            <a:prstDash val="solid"/>
+          </a:ln>
+        </p:spPr>
+      </p:sp>
+      <p:sp>
+        <p:nvSpPr>
+          <p:cNvPr id="138" name="Text 136"/>
+          <p:cNvSpPr/>
+          <p:nvPr/>
+        </p:nvSpPr>
+        <p:spPr>
+          <a:xfrm>
+            <a:off x="4374779" y="2463006"/>
+            <a:ext cx="457200" cy="457200"/>
+          </a:xfrm>
+          <a:prstGeom prst="rect">
+            <a:avLst/>
+          </a:prstGeom>
+          <a:noFill/>
+          <a:ln/>
+        </p:spPr>
+        <p:txBody>
+          <a:bodyPr wrap="square" lIns="0" tIns="0" rIns="0" bIns="0" rtlCol="0" anchor="ctr"/>
+          <a:lstStyle/>
+          <a:p>
+            <a:pPr algn="ctr" indent="0" marL="0">
+              <a:buNone/>
+            </a:pPr>
+            <a:r>
+              <a:rPr lang="en-US" sz="1100" b="1" dirty="0">
+                <a:solidFill>
+                  <a:srgbClr val="FFFFFF"/>
+                </a:solidFill>
+                <a:latin typeface="Arial" pitchFamily="34" charset="0"/>
+                <a:ea typeface="Arial" pitchFamily="34" charset="-122"/>
+                <a:cs typeface="Arial" pitchFamily="34" charset="-120"/>
+              </a:rPr>
+              <a:t>106</a:t>
+            </a:r>
+            <a:endParaRPr lang="en-US" sz="1100" dirty="0"/>
+          </a:p>
+        </p:txBody>
+      </p:sp>
+      <p:sp>
+        <p:nvSpPr>
+          <p:cNvPr id="139" name="Shape 137"/>
+          <p:cNvSpPr/>
+          <p:nvPr/>
+        </p:nvSpPr>
+        <p:spPr>
+          <a:xfrm>
+            <a:off x="2065382" y="2320887"/>
+            <a:ext cx="457200" cy="457200"/>
+          </a:xfrm>
+          <a:prstGeom prst="ellipse">
+            <a:avLst/>
+          </a:prstGeom>
+          <a:solidFill>
+            <a:srgbClr val="1F3864"/>
+          </a:solidFill>
+          <a:ln w="15240">
+            <a:solidFill>
+              <a:srgbClr val="FFFFFF"/>
+            </a:solidFill>
+            <a:prstDash val="solid"/>
+          </a:ln>
+        </p:spPr>
+      </p:sp>
+      <p:sp>
+        <p:nvSpPr>
+          <p:cNvPr id="140" name="Text 138"/>
+          <p:cNvSpPr/>
+          <p:nvPr/>
+        </p:nvSpPr>
+        <p:spPr>
+          <a:xfrm>
+            <a:off x="2065382" y="2320887"/>
+            <a:ext cx="457200" cy="457200"/>
+          </a:xfrm>
+          <a:prstGeom prst="rect">
+            <a:avLst/>
+          </a:prstGeom>
+          <a:noFill/>
+          <a:ln/>
+        </p:spPr>
+        <p:txBody>
+          <a:bodyPr wrap="square" lIns="0" tIns="0" rIns="0" bIns="0" rtlCol="0" anchor="ctr"/>
+          <a:lstStyle/>
+          <a:p>
+            <a:pPr algn="ctr" indent="0" marL="0">
+              <a:buNone/>
+            </a:pPr>
+            <a:r>
+              <a:rPr lang="en-US" sz="1100" b="1" dirty="0">
+                <a:solidFill>
+                  <a:srgbClr val="FFFFFF"/>
+                </a:solidFill>
+                <a:latin typeface="Arial" pitchFamily="34" charset="0"/>
+                <a:ea typeface="Arial" pitchFamily="34" charset="-122"/>
+                <a:cs typeface="Arial" pitchFamily="34" charset="-120"/>
+              </a:rPr>
+              <a:t>119</a:t>
+            </a:r>
+            <a:endParaRPr lang="en-US" sz="1100" dirty="0"/>
+          </a:p>
+        </p:txBody>
+      </p:sp>
+      <p:sp>
+        <p:nvSpPr>
+          <p:cNvPr id="141" name="Shape 139"/>
+          <p:cNvSpPr/>
+          <p:nvPr/>
+        </p:nvSpPr>
+        <p:spPr>
+          <a:xfrm>
+            <a:off x="3999092" y="4409407"/>
+            <a:ext cx="457200" cy="457200"/>
+          </a:xfrm>
+          <a:prstGeom prst="ellipse">
+            <a:avLst/>
+          </a:prstGeom>
+          <a:solidFill>
+            <a:srgbClr val="1F3864"/>
+          </a:solidFill>
+          <a:ln w="15240">
+            <a:solidFill>
+              <a:srgbClr val="FFFFFF"/>
+            </a:solidFill>
+            <a:prstDash val="solid"/>
+          </a:ln>
+        </p:spPr>
+      </p:sp>
+      <p:sp>
+        <p:nvSpPr>
+          <p:cNvPr id="142" name="Text 140"/>
+          <p:cNvSpPr/>
+          <p:nvPr/>
+        </p:nvSpPr>
+        <p:spPr>
+          <a:xfrm>
+            <a:off x="3999092" y="4409407"/>
+            <a:ext cx="457200" cy="457200"/>
+          </a:xfrm>
+          <a:prstGeom prst="rect">
+            <a:avLst/>
+          </a:prstGeom>
+          <a:noFill/>
+          <a:ln/>
+        </p:spPr>
+        <p:txBody>
+          <a:bodyPr wrap="square" lIns="0" tIns="0" rIns="0" bIns="0" rtlCol="0" anchor="ctr"/>
+          <a:lstStyle/>
+          <a:p>
+            <a:pPr algn="ctr" indent="0" marL="0">
+              <a:buNone/>
+            </a:pPr>
+            <a:r>
+              <a:rPr lang="en-US" sz="1100" b="1" dirty="0">
+                <a:solidFill>
+                  <a:srgbClr val="FFFFFF"/>
+                </a:solidFill>
+                <a:latin typeface="Arial" pitchFamily="34" charset="0"/>
+                <a:ea typeface="Arial" pitchFamily="34" charset="-122"/>
+                <a:cs typeface="Arial" pitchFamily="34" charset="-120"/>
+              </a:rPr>
+              <a:t>134</a:t>
+            </a:r>
+            <a:endParaRPr lang="en-US" sz="1100" dirty="0"/>
+          </a:p>
+        </p:txBody>
+      </p:sp>
+      <p:sp>
+        <p:nvSpPr>
+          <p:cNvPr id="143" name="Shape 141"/>
+          <p:cNvSpPr/>
+          <p:nvPr/>
+        </p:nvSpPr>
+        <p:spPr>
+          <a:xfrm>
+            <a:off x="3999713" y="4136880"/>
+            <a:ext cx="457200" cy="457200"/>
+          </a:xfrm>
+          <a:prstGeom prst="ellipse">
+            <a:avLst/>
+          </a:prstGeom>
+          <a:solidFill>
+            <a:srgbClr val="1F3864"/>
+          </a:solidFill>
+          <a:ln w="15240">
+            <a:solidFill>
+              <a:srgbClr val="FFFFFF"/>
+            </a:solidFill>
+            <a:prstDash val="solid"/>
+          </a:ln>
+        </p:spPr>
+      </p:sp>
+      <p:sp>
+        <p:nvSpPr>
+          <p:cNvPr id="144" name="Text 142"/>
+          <p:cNvSpPr/>
+          <p:nvPr/>
+        </p:nvSpPr>
+        <p:spPr>
+          <a:xfrm>
+            <a:off x="3999713" y="4136880"/>
+            <a:ext cx="457200" cy="457200"/>
+          </a:xfrm>
+          <a:prstGeom prst="rect">
+            <a:avLst/>
+          </a:prstGeom>
+          <a:noFill/>
+          <a:ln/>
+        </p:spPr>
+        <p:txBody>
+          <a:bodyPr wrap="square" lIns="0" tIns="0" rIns="0" bIns="0" rtlCol="0" anchor="ctr"/>
+          <a:lstStyle/>
+          <a:p>
+            <a:pPr algn="ctr" indent="0" marL="0">
+              <a:buNone/>
+            </a:pPr>
+            <a:r>
+              <a:rPr lang="en-US" sz="1100" b="1" dirty="0">
+                <a:solidFill>
+                  <a:srgbClr val="FFFFFF"/>
+                </a:solidFill>
+                <a:latin typeface="Arial" pitchFamily="34" charset="0"/>
+                <a:ea typeface="Arial" pitchFamily="34" charset="-122"/>
+                <a:cs typeface="Arial" pitchFamily="34" charset="-120"/>
+              </a:rPr>
+              <a:t>150</a:t>
+            </a:r>
+            <a:endParaRPr lang="en-US" sz="1100" dirty="0"/>
+          </a:p>
+        </p:txBody>
+      </p:sp>
+      <p:sp>
+        <p:nvSpPr>
+          <p:cNvPr id="145" name="Shape 143"/>
+          <p:cNvSpPr/>
+          <p:nvPr/>
+        </p:nvSpPr>
+        <p:spPr>
+          <a:xfrm>
+            <a:off x="4160993" y="4076375"/>
+            <a:ext cx="457200" cy="457200"/>
+          </a:xfrm>
+          <a:prstGeom prst="ellipse">
+            <a:avLst/>
+          </a:prstGeom>
+          <a:solidFill>
+            <a:srgbClr val="1F3864"/>
+          </a:solidFill>
+          <a:ln w="15240">
+            <a:solidFill>
+              <a:srgbClr val="FFFFFF"/>
+            </a:solidFill>
+            <a:prstDash val="solid"/>
+          </a:ln>
+        </p:spPr>
+      </p:sp>
+      <p:sp>
+        <p:nvSpPr>
+          <p:cNvPr id="146" name="Text 144"/>
+          <p:cNvSpPr/>
+          <p:nvPr/>
+        </p:nvSpPr>
+        <p:spPr>
+          <a:xfrm>
+            <a:off x="4160993" y="4076375"/>
+            <a:ext cx="457200" cy="457200"/>
+          </a:xfrm>
+          <a:prstGeom prst="rect">
+            <a:avLst/>
+          </a:prstGeom>
+          <a:noFill/>
+          <a:ln/>
+        </p:spPr>
+        <p:txBody>
+          <a:bodyPr wrap="square" lIns="0" tIns="0" rIns="0" bIns="0" rtlCol="0" anchor="ctr"/>
+          <a:lstStyle/>
+          <a:p>
+            <a:pPr algn="ctr" indent="0" marL="0">
+              <a:buNone/>
+            </a:pPr>
+            <a:r>
+              <a:rPr lang="en-US" sz="1100" b="1" dirty="0">
+                <a:solidFill>
+                  <a:srgbClr val="FFFFFF"/>
+                </a:solidFill>
+                <a:latin typeface="Arial" pitchFamily="34" charset="0"/>
+                <a:ea typeface="Arial" pitchFamily="34" charset="-122"/>
+                <a:cs typeface="Arial" pitchFamily="34" charset="-120"/>
+              </a:rPr>
+              <a:t>181</a:t>
+            </a:r>
+            <a:endParaRPr lang="en-US" sz="1100" dirty="0"/>
+          </a:p>
+        </p:txBody>
+      </p:sp>
+      <p:sp>
+        <p:nvSpPr>
+          <p:cNvPr id="147" name="Shape 145"/>
+          <p:cNvSpPr/>
+          <p:nvPr/>
+        </p:nvSpPr>
+        <p:spPr>
+          <a:xfrm>
+            <a:off x="2964891" y="3292035"/>
+            <a:ext cx="457200" cy="457200"/>
+          </a:xfrm>
+          <a:prstGeom prst="ellipse">
+            <a:avLst/>
+          </a:prstGeom>
+          <a:solidFill>
+            <a:srgbClr val="1F3864"/>
+          </a:solidFill>
+          <a:ln w="15240">
+            <a:solidFill>
+              <a:srgbClr val="FFFFFF"/>
+            </a:solidFill>
+            <a:prstDash val="solid"/>
+          </a:ln>
+        </p:spPr>
+      </p:sp>
+      <p:sp>
+        <p:nvSpPr>
+          <p:cNvPr id="148" name="Text 146"/>
+          <p:cNvSpPr/>
+          <p:nvPr/>
+        </p:nvSpPr>
+        <p:spPr>
+          <a:xfrm>
+            <a:off x="2964891" y="3292035"/>
+            <a:ext cx="457200" cy="457200"/>
+          </a:xfrm>
+          <a:prstGeom prst="rect">
+            <a:avLst/>
+          </a:prstGeom>
+          <a:noFill/>
+          <a:ln/>
+        </p:spPr>
+        <p:txBody>
+          <a:bodyPr wrap="square" lIns="0" tIns="0" rIns="0" bIns="0" rtlCol="0" anchor="ctr"/>
+          <a:lstStyle/>
+          <a:p>
+            <a:pPr algn="ctr" indent="0" marL="0">
+              <a:buNone/>
+            </a:pPr>
+            <a:r>
+              <a:rPr lang="en-US" sz="1100" b="1" dirty="0">
+                <a:solidFill>
+                  <a:srgbClr val="FFFFFF"/>
+                </a:solidFill>
+                <a:latin typeface="Arial" pitchFamily="34" charset="0"/>
+                <a:ea typeface="Arial" pitchFamily="34" charset="-122"/>
+                <a:cs typeface="Arial" pitchFamily="34" charset="-120"/>
+              </a:rPr>
+              <a:t>194</a:t>
+            </a:r>
+            <a:endParaRPr lang="en-US" sz="1100" dirty="0"/>
+          </a:p>
+        </p:txBody>
+      </p:sp>
+      <p:sp>
+        <p:nvSpPr>
+          <p:cNvPr id="149" name="Shape 147"/>
+          <p:cNvSpPr/>
+          <p:nvPr/>
+        </p:nvSpPr>
+        <p:spPr>
+          <a:xfrm>
+            <a:off x="2105197" y="2397539"/>
+            <a:ext cx="457200" cy="457200"/>
+          </a:xfrm>
+          <a:prstGeom prst="ellipse">
+            <a:avLst/>
+          </a:prstGeom>
+          <a:solidFill>
+            <a:srgbClr val="1F3864"/>
+          </a:solidFill>
+          <a:ln w="15240">
+            <a:solidFill>
+              <a:srgbClr val="FFFFFF"/>
+            </a:solidFill>
+            <a:prstDash val="solid"/>
+          </a:ln>
+        </p:spPr>
+      </p:sp>
+      <p:sp>
+        <p:nvSpPr>
+          <p:cNvPr id="150" name="Text 148"/>
+          <p:cNvSpPr/>
+          <p:nvPr/>
+        </p:nvSpPr>
+        <p:spPr>
+          <a:xfrm>
+            <a:off x="2105197" y="2397539"/>
+            <a:ext cx="457200" cy="457200"/>
+          </a:xfrm>
+          <a:prstGeom prst="rect">
+            <a:avLst/>
+          </a:prstGeom>
+          <a:noFill/>
+          <a:ln/>
+        </p:spPr>
+        <p:txBody>
+          <a:bodyPr wrap="square" lIns="0" tIns="0" rIns="0" bIns="0" rtlCol="0" anchor="ctr"/>
+          <a:lstStyle/>
+          <a:p>
+            <a:pPr algn="ctr" indent="0" marL="0">
+              <a:buNone/>
+            </a:pPr>
+            <a:r>
+              <a:rPr lang="en-US" sz="1100" b="1" dirty="0">
+                <a:solidFill>
+                  <a:srgbClr val="FFFFFF"/>
+                </a:solidFill>
+                <a:latin typeface="Arial" pitchFamily="34" charset="0"/>
+                <a:ea typeface="Arial" pitchFamily="34" charset="-122"/>
+                <a:cs typeface="Arial" pitchFamily="34" charset="-120"/>
+              </a:rPr>
+              <a:t>230</a:t>
+            </a:r>
+            <a:endParaRPr lang="en-US" sz="1100" dirty="0"/>
+          </a:p>
+        </p:txBody>
+      </p:sp>
+      <p:sp>
+        <p:nvSpPr>
+          <p:cNvPr id="151" name="Shape 149"/>
+          <p:cNvSpPr/>
+          <p:nvPr/>
+        </p:nvSpPr>
+        <p:spPr>
+          <a:xfrm>
+            <a:off x="1663334" y="2196851"/>
+            <a:ext cx="457200" cy="457200"/>
+          </a:xfrm>
+          <a:prstGeom prst="ellipse">
+            <a:avLst/>
+          </a:prstGeom>
+          <a:solidFill>
+            <a:srgbClr val="1F3864"/>
+          </a:solidFill>
+          <a:ln w="15240">
+            <a:solidFill>
+              <a:srgbClr val="FFFFFF"/>
+            </a:solidFill>
+            <a:prstDash val="solid"/>
+          </a:ln>
+        </p:spPr>
+      </p:sp>
+      <p:sp>
+        <p:nvSpPr>
+          <p:cNvPr id="152" name="Text 150"/>
+          <p:cNvSpPr/>
+          <p:nvPr/>
+        </p:nvSpPr>
+        <p:spPr>
+          <a:xfrm>
+            <a:off x="1663334" y="2196851"/>
+            <a:ext cx="457200" cy="457200"/>
+          </a:xfrm>
+          <a:prstGeom prst="rect">
+            <a:avLst/>
+          </a:prstGeom>
+          <a:noFill/>
+          <a:ln/>
+        </p:spPr>
+        <p:txBody>
+          <a:bodyPr wrap="square" lIns="0" tIns="0" rIns="0" bIns="0" rtlCol="0" anchor="ctr"/>
+          <a:lstStyle/>
+          <a:p>
+            <a:pPr algn="ctr" indent="0" marL="0">
+              <a:buNone/>
+            </a:pPr>
+            <a:r>
+              <a:rPr lang="en-US" sz="1100" b="1" dirty="0">
+                <a:solidFill>
+                  <a:srgbClr val="FFFFFF"/>
+                </a:solidFill>
+                <a:latin typeface="Arial" pitchFamily="34" charset="0"/>
+                <a:ea typeface="Arial" pitchFamily="34" charset="-122"/>
+                <a:cs typeface="Arial" pitchFamily="34" charset="-120"/>
+              </a:rPr>
               <a:t>250</a:t>
             </a:r>
             <a:endParaRPr lang="en-US" sz="1100" dirty="0"/>
@@ -10936,7 +12344,391 @@
       </p:sp>
       <p:sp>
         <p:nvSpPr>
-          <p:cNvPr id="109" name="Text 107"/>
+          <p:cNvPr id="153" name="Shape 151"/>
+          <p:cNvSpPr/>
+          <p:nvPr/>
+        </p:nvSpPr>
+        <p:spPr>
+          <a:xfrm>
+            <a:off x="4013405" y="4722601"/>
+            <a:ext cx="457200" cy="457200"/>
+          </a:xfrm>
+          <a:prstGeom prst="ellipse">
+            <a:avLst/>
+          </a:prstGeom>
+          <a:solidFill>
+            <a:srgbClr val="1F3864"/>
+          </a:solidFill>
+          <a:ln w="15240">
+            <a:solidFill>
+              <a:srgbClr val="FFFFFF"/>
+            </a:solidFill>
+            <a:prstDash val="solid"/>
+          </a:ln>
+        </p:spPr>
+      </p:sp>
+      <p:sp>
+        <p:nvSpPr>
+          <p:cNvPr id="154" name="Text 152"/>
+          <p:cNvSpPr/>
+          <p:nvPr/>
+        </p:nvSpPr>
+        <p:spPr>
+          <a:xfrm>
+            <a:off x="4013405" y="4722601"/>
+            <a:ext cx="457200" cy="457200"/>
+          </a:xfrm>
+          <a:prstGeom prst="rect">
+            <a:avLst/>
+          </a:prstGeom>
+          <a:noFill/>
+          <a:ln/>
+        </p:spPr>
+        <p:txBody>
+          <a:bodyPr wrap="square" lIns="0" tIns="0" rIns="0" bIns="0" rtlCol="0" anchor="ctr"/>
+          <a:lstStyle/>
+          <a:p>
+            <a:pPr algn="ctr" indent="0" marL="0">
+              <a:buNone/>
+            </a:pPr>
+            <a:r>
+              <a:rPr lang="en-US" sz="1100" b="1" dirty="0">
+                <a:solidFill>
+                  <a:srgbClr val="FFFFFF"/>
+                </a:solidFill>
+                <a:latin typeface="Arial" pitchFamily="34" charset="0"/>
+                <a:ea typeface="Arial" pitchFamily="34" charset="-122"/>
+                <a:cs typeface="Arial" pitchFamily="34" charset="-120"/>
+              </a:rPr>
+              <a:t>250</a:t>
+            </a:r>
+            <a:endParaRPr lang="en-US" sz="1100" dirty="0"/>
+          </a:p>
+        </p:txBody>
+      </p:sp>
+      <p:sp>
+        <p:nvSpPr>
+          <p:cNvPr id="155" name="Shape 153"/>
+          <p:cNvSpPr/>
+          <p:nvPr/>
+        </p:nvSpPr>
+        <p:spPr>
+          <a:xfrm>
+            <a:off x="2484778" y="2760439"/>
+            <a:ext cx="457200" cy="457200"/>
+          </a:xfrm>
+          <a:prstGeom prst="ellipse">
+            <a:avLst/>
+          </a:prstGeom>
+          <a:solidFill>
+            <a:srgbClr val="1F3864"/>
+          </a:solidFill>
+          <a:ln w="15240">
+            <a:solidFill>
+              <a:srgbClr val="FFFFFF"/>
+            </a:solidFill>
+            <a:prstDash val="solid"/>
+          </a:ln>
+        </p:spPr>
+      </p:sp>
+      <p:sp>
+        <p:nvSpPr>
+          <p:cNvPr id="156" name="Text 154"/>
+          <p:cNvSpPr/>
+          <p:nvPr/>
+        </p:nvSpPr>
+        <p:spPr>
+          <a:xfrm>
+            <a:off x="2484778" y="2760439"/>
+            <a:ext cx="457200" cy="457200"/>
+          </a:xfrm>
+          <a:prstGeom prst="rect">
+            <a:avLst/>
+          </a:prstGeom>
+          <a:noFill/>
+          <a:ln/>
+        </p:spPr>
+        <p:txBody>
+          <a:bodyPr wrap="square" lIns="0" tIns="0" rIns="0" bIns="0" rtlCol="0" anchor="ctr"/>
+          <a:lstStyle/>
+          <a:p>
+            <a:pPr algn="ctr" indent="0" marL="0">
+              <a:buNone/>
+            </a:pPr>
+            <a:r>
+              <a:rPr lang="en-US" sz="1100" b="1" dirty="0">
+                <a:solidFill>
+                  <a:srgbClr val="FFFFFF"/>
+                </a:solidFill>
+                <a:latin typeface="Arial" pitchFamily="34" charset="0"/>
+                <a:ea typeface="Arial" pitchFamily="34" charset="-122"/>
+                <a:cs typeface="Arial" pitchFamily="34" charset="-120"/>
+              </a:rPr>
+              <a:t>250</a:t>
+            </a:r>
+            <a:endParaRPr lang="en-US" sz="1100" dirty="0"/>
+          </a:p>
+        </p:txBody>
+      </p:sp>
+      <p:sp>
+        <p:nvSpPr>
+          <p:cNvPr id="157" name="Shape 155"/>
+          <p:cNvSpPr/>
+          <p:nvPr/>
+        </p:nvSpPr>
+        <p:spPr>
+          <a:xfrm>
+            <a:off x="3933019" y="4578325"/>
+            <a:ext cx="457200" cy="457200"/>
+          </a:xfrm>
+          <a:prstGeom prst="ellipse">
+            <a:avLst/>
+          </a:prstGeom>
+          <a:solidFill>
+            <a:srgbClr val="1F3864"/>
+          </a:solidFill>
+          <a:ln w="15240">
+            <a:solidFill>
+              <a:srgbClr val="FFFFFF"/>
+            </a:solidFill>
+            <a:prstDash val="solid"/>
+          </a:ln>
+        </p:spPr>
+      </p:sp>
+      <p:sp>
+        <p:nvSpPr>
+          <p:cNvPr id="158" name="Text 156"/>
+          <p:cNvSpPr/>
+          <p:nvPr/>
+        </p:nvSpPr>
+        <p:spPr>
+          <a:xfrm>
+            <a:off x="3933019" y="4578325"/>
+            <a:ext cx="457200" cy="457200"/>
+          </a:xfrm>
+          <a:prstGeom prst="rect">
+            <a:avLst/>
+          </a:prstGeom>
+          <a:noFill/>
+          <a:ln/>
+        </p:spPr>
+        <p:txBody>
+          <a:bodyPr wrap="square" lIns="0" tIns="0" rIns="0" bIns="0" rtlCol="0" anchor="ctr"/>
+          <a:lstStyle/>
+          <a:p>
+            <a:pPr algn="ctr" indent="0" marL="0">
+              <a:buNone/>
+            </a:pPr>
+            <a:r>
+              <a:rPr lang="en-US" sz="1100" b="1" dirty="0">
+                <a:solidFill>
+                  <a:srgbClr val="FFFFFF"/>
+                </a:solidFill>
+                <a:latin typeface="Arial" pitchFamily="34" charset="0"/>
+                <a:ea typeface="Arial" pitchFamily="34" charset="-122"/>
+                <a:cs typeface="Arial" pitchFamily="34" charset="-120"/>
+              </a:rPr>
+              <a:t>250</a:t>
+            </a:r>
+            <a:endParaRPr lang="en-US" sz="1100" dirty="0"/>
+          </a:p>
+        </p:txBody>
+      </p:sp>
+      <p:sp>
+        <p:nvSpPr>
+          <p:cNvPr id="159" name="Shape 157"/>
+          <p:cNvSpPr/>
+          <p:nvPr/>
+        </p:nvSpPr>
+        <p:spPr>
+          <a:xfrm>
+            <a:off x="2401176" y="2127907"/>
+            <a:ext cx="457200" cy="457200"/>
+          </a:xfrm>
+          <a:prstGeom prst="ellipse">
+            <a:avLst/>
+          </a:prstGeom>
+          <a:solidFill>
+            <a:srgbClr val="1F3864"/>
+          </a:solidFill>
+          <a:ln w="15240">
+            <a:solidFill>
+              <a:srgbClr val="FFFFFF"/>
+            </a:solidFill>
+            <a:prstDash val="solid"/>
+          </a:ln>
+        </p:spPr>
+      </p:sp>
+      <p:sp>
+        <p:nvSpPr>
+          <p:cNvPr id="160" name="Text 158"/>
+          <p:cNvSpPr/>
+          <p:nvPr/>
+        </p:nvSpPr>
+        <p:spPr>
+          <a:xfrm>
+            <a:off x="2401176" y="2127907"/>
+            <a:ext cx="457200" cy="457200"/>
+          </a:xfrm>
+          <a:prstGeom prst="rect">
+            <a:avLst/>
+          </a:prstGeom>
+          <a:noFill/>
+          <a:ln/>
+        </p:spPr>
+        <p:txBody>
+          <a:bodyPr wrap="square" lIns="0" tIns="0" rIns="0" bIns="0" rtlCol="0" anchor="ctr"/>
+          <a:lstStyle/>
+          <a:p>
+            <a:pPr algn="ctr" indent="0" marL="0">
+              <a:buNone/>
+            </a:pPr>
+            <a:r>
+              <a:rPr lang="en-US" sz="1100" b="1" dirty="0">
+                <a:solidFill>
+                  <a:srgbClr val="FFFFFF"/>
+                </a:solidFill>
+                <a:latin typeface="Arial" pitchFamily="34" charset="0"/>
+                <a:ea typeface="Arial" pitchFamily="34" charset="-122"/>
+                <a:cs typeface="Arial" pitchFamily="34" charset="-120"/>
+              </a:rPr>
+              <a:t>250</a:t>
+            </a:r>
+            <a:endParaRPr lang="en-US" sz="1100" dirty="0"/>
+          </a:p>
+        </p:txBody>
+      </p:sp>
+      <p:sp>
+        <p:nvSpPr>
+          <p:cNvPr id="161" name="Shape 159"/>
+          <p:cNvSpPr/>
+          <p:nvPr/>
+        </p:nvSpPr>
+        <p:spPr>
+          <a:xfrm>
+            <a:off x="1263591" y="2444060"/>
+            <a:ext cx="457200" cy="457200"/>
+          </a:xfrm>
+          <a:prstGeom prst="ellipse">
+            <a:avLst/>
+          </a:prstGeom>
+          <a:solidFill>
+            <a:srgbClr val="1F3864"/>
+          </a:solidFill>
+          <a:ln w="15240">
+            <a:solidFill>
+              <a:srgbClr val="FFFFFF"/>
+            </a:solidFill>
+            <a:prstDash val="solid"/>
+          </a:ln>
+        </p:spPr>
+      </p:sp>
+      <p:sp>
+        <p:nvSpPr>
+          <p:cNvPr id="162" name="Text 160"/>
+          <p:cNvSpPr/>
+          <p:nvPr/>
+        </p:nvSpPr>
+        <p:spPr>
+          <a:xfrm>
+            <a:off x="1263591" y="2444060"/>
+            <a:ext cx="457200" cy="457200"/>
+          </a:xfrm>
+          <a:prstGeom prst="rect">
+            <a:avLst/>
+          </a:prstGeom>
+          <a:noFill/>
+          <a:ln/>
+        </p:spPr>
+        <p:txBody>
+          <a:bodyPr wrap="square" lIns="0" tIns="0" rIns="0" bIns="0" rtlCol="0" anchor="ctr"/>
+          <a:lstStyle/>
+          <a:p>
+            <a:pPr algn="ctr" indent="0" marL="0">
+              <a:buNone/>
+            </a:pPr>
+            <a:r>
+              <a:rPr lang="en-US" sz="1100" b="1" dirty="0">
+                <a:solidFill>
+                  <a:srgbClr val="FFFFFF"/>
+                </a:solidFill>
+                <a:latin typeface="Arial" pitchFamily="34" charset="0"/>
+                <a:ea typeface="Arial" pitchFamily="34" charset="-122"/>
+                <a:cs typeface="Arial" pitchFamily="34" charset="-120"/>
+              </a:rPr>
+              <a:t>250</a:t>
+            </a:r>
+            <a:endParaRPr lang="en-US" sz="1100" dirty="0"/>
+          </a:p>
+        </p:txBody>
+      </p:sp>
+      <p:sp>
+        <p:nvSpPr>
+          <p:cNvPr id="163" name="Shape 161"/>
+          <p:cNvSpPr/>
+          <p:nvPr/>
+        </p:nvSpPr>
+        <p:spPr>
+          <a:xfrm>
+            <a:off x="2145199" y="2421101"/>
+            <a:ext cx="457200" cy="457200"/>
+          </a:xfrm>
+          <a:prstGeom prst="ellipse">
+            <a:avLst/>
+          </a:prstGeom>
+          <a:solidFill>
+            <a:srgbClr val="1F3864"/>
+          </a:solidFill>
+          <a:ln w="15240">
+            <a:solidFill>
+              <a:srgbClr val="FFFFFF"/>
+            </a:solidFill>
+            <a:prstDash val="solid"/>
+          </a:ln>
+        </p:spPr>
+      </p:sp>
+      <p:sp>
+        <p:nvSpPr>
+          <p:cNvPr id="164" name="Text 162"/>
+          <p:cNvSpPr/>
+          <p:nvPr/>
+        </p:nvSpPr>
+        <p:spPr>
+          <a:xfrm>
+            <a:off x="2145199" y="2421101"/>
+            <a:ext cx="457200" cy="457200"/>
+          </a:xfrm>
+          <a:prstGeom prst="rect">
+            <a:avLst/>
+          </a:prstGeom>
+          <a:noFill/>
+          <a:ln/>
+        </p:spPr>
+        <p:txBody>
+          <a:bodyPr wrap="square" lIns="0" tIns="0" rIns="0" bIns="0" rtlCol="0" anchor="ctr"/>
+          <a:lstStyle/>
+          <a:p>
+            <a:pPr algn="ctr" indent="0" marL="0">
+              <a:buNone/>
+            </a:pPr>
+            <a:r>
+              <a:rPr lang="en-US" sz="1100" b="1" dirty="0">
+                <a:solidFill>
+                  <a:srgbClr val="FFFFFF"/>
+                </a:solidFill>
+                <a:latin typeface="Arial" pitchFamily="34" charset="0"/>
+                <a:ea typeface="Arial" pitchFamily="34" charset="-122"/>
+                <a:cs typeface="Arial" pitchFamily="34" charset="-120"/>
+              </a:rPr>
+              <a:t>250</a:t>
+            </a:r>
+            <a:endParaRPr lang="en-US" sz="1100" dirty="0"/>
+          </a:p>
+        </p:txBody>
+      </p:sp>
+      <p:sp>
+        <p:nvSpPr>
+          <p:cNvPr id="165" name="Text 163"/>
           <p:cNvSpPr/>
           <p:nvPr/>
         </p:nvSpPr>
@@ -10975,7 +12767,7 @@
       </p:sp>
       <p:sp>
         <p:nvSpPr>
-          <p:cNvPr id="110" name="Text 108"/>
+          <p:cNvPr id="166" name="Text 164"/>
           <p:cNvSpPr/>
           <p:nvPr/>
         </p:nvSpPr>
@@ -11006,7 +12798,7 @@
                 <a:ea typeface="Arial" pitchFamily="34" charset="-122"/>
                 <a:cs typeface="Arial" pitchFamily="34" charset="-120"/>
               </a:rPr>
-              <a:t>52 parkings · 1.416 plaatsen</a:t>
+              <a:t>80 parkings · 4.710 plaatsen</a:t>
             </a:r>
             <a:endParaRPr lang="en-US" sz="2200" dirty="0"/>
           </a:p>
@@ -11014,7 +12806,7 @@
       </p:sp>
       <p:sp>
         <p:nvSpPr>
-          <p:cNvPr id="111" name="Text 109"/>
+          <p:cNvPr id="167" name="Text 165"/>
           <p:cNvSpPr/>
           <p:nvPr/>
         </p:nvSpPr>
@@ -11053,7 +12845,7 @@
       </p:sp>
       <p:sp>
         <p:nvSpPr>
-          <p:cNvPr id="112" name="Text 110">
+          <p:cNvPr id="168" name="Text 166">
             <a:hlinkClick r:id="rId1" tooltip=""/>
           </p:cNvPr>
           <p:cNvSpPr/>
@@ -11101,7 +12893,7 @@
       </p:sp>
       <p:sp>
         <p:nvSpPr>
-          <p:cNvPr id="113" name="Shape 111"/>
+          <p:cNvPr id="169" name="Shape 167"/>
           <p:cNvSpPr/>
           <p:nvPr/>
         </p:nvSpPr>
@@ -11121,7 +12913,7 @@
       </p:sp>
       <p:pic>
         <p:nvPicPr>
-          <p:cNvPr id="114" name="Image 0" descr="preencoded.png">    </p:cNvPr>
+          <p:cNvPr id="170" name="Image 0" descr="preencoded.png">    </p:cNvPr>
           <p:cNvPicPr>
             <a:picLocks noChangeAspect="1"/>
           </p:cNvPicPr>
@@ -11145,7 +12937,7 @@
       </p:pic>
       <p:sp>
         <p:nvSpPr>
-          <p:cNvPr id="115" name="Text 112"/>
+          <p:cNvPr id="171" name="Text 168"/>
           <p:cNvSpPr/>
           <p:nvPr/>
         </p:nvSpPr>
@@ -11187,7 +12979,7 @@
       </p:sp>
       <p:sp>
         <p:nvSpPr>
-          <p:cNvPr id="116" name="Shape 113"/>
+          <p:cNvPr id="172" name="Shape 169"/>
           <p:cNvSpPr/>
           <p:nvPr/>
         </p:nvSpPr>
@@ -11207,7 +12999,7 @@
       </p:sp>
       <p:pic>
         <p:nvPicPr>
-          <p:cNvPr id="117" name="Image 1" descr="preencoded.png">    </p:cNvPr>
+          <p:cNvPr id="173" name="Image 1" descr="preencoded.png">    </p:cNvPr>
           <p:cNvPicPr>
             <a:picLocks noChangeAspect="1"/>
           </p:cNvPicPr>
@@ -11231,7 +13023,7 @@
       </p:pic>
       <p:sp>
         <p:nvSpPr>
-          <p:cNvPr id="118" name="Text 114"/>
+          <p:cNvPr id="174" name="Text 170"/>
           <p:cNvSpPr/>
           <p:nvPr/>
         </p:nvSpPr>
@@ -11273,7 +13065,7 @@
       </p:sp>
       <p:sp>
         <p:nvSpPr>
-          <p:cNvPr id="119" name="Shape 115"/>
+          <p:cNvPr id="175" name="Shape 171"/>
           <p:cNvSpPr/>
           <p:nvPr/>
         </p:nvSpPr>
@@ -11293,7 +13085,7 @@
       </p:sp>
       <p:pic>
         <p:nvPicPr>
-          <p:cNvPr id="120" name="Image 2" descr="preencoded.png">    </p:cNvPr>
+          <p:cNvPr id="176" name="Image 2" descr="preencoded.png">    </p:cNvPr>
           <p:cNvPicPr>
             <a:picLocks noChangeAspect="1"/>
           </p:cNvPicPr>
@@ -11317,7 +13109,7 @@
       </p:pic>
       <p:sp>
         <p:nvSpPr>
-          <p:cNvPr id="121" name="Text 116"/>
+          <p:cNvPr id="177" name="Text 172"/>
           <p:cNvSpPr/>
           <p:nvPr/>
         </p:nvSpPr>
@@ -11359,7 +13151,7 @@
       </p:sp>
       <p:sp>
         <p:nvSpPr>
-          <p:cNvPr id="122" name="Text 117"/>
+          <p:cNvPr id="178" name="Text 173"/>
           <p:cNvSpPr/>
           <p:nvPr/>
         </p:nvSpPr>
@@ -11398,7 +13190,7 @@
       </p:sp>
       <p:sp>
         <p:nvSpPr>
-          <p:cNvPr id="123" name="Text 118"/>
+          <p:cNvPr id="179" name="Text 174"/>
           <p:cNvSpPr/>
           <p:nvPr/>
         </p:nvSpPr>
@@ -12880,7 +14672,7 @@
                 <a:ea typeface="Arial" pitchFamily="34" charset="-122"/>
                 <a:cs typeface="Arial" pitchFamily="34" charset="-120"/>
               </a:rPr>
-              <a:t>1.416 auto’s op 52 slimme parkings </a:t>
+              <a:t>4.710 auto’s op 80 slimme parkings </a:t>
             </a:r>
             <a:pPr indent="0" marL="0">
               <a:lnSpc>

--- a/Fluctus_Laadplan_Zwevegem.pptx
+++ b/Fluctus_Laadplan_Zwevegem.pptx
@@ -117,7 +117,7 @@
 </p:presentation>
 </file>
 
-<file path=ppt/charts/chart3.xml><?xml version="1.0" encoding="utf-8"?>
+<file path=ppt/charts/chart1.xml><?xml version="1.0" encoding="utf-8"?>
 <c:chartSpace xmlns:c="http://schemas.openxmlformats.org/drawingml/2006/chart" xmlns:a="http://schemas.openxmlformats.org/drawingml/2006/main" xmlns:r="http://schemas.openxmlformats.org/officeDocument/2006/relationships">
   <c:date1904 val="0"/>
   <c:roundedCorners val="1"/>
@@ -219,10 +219,10 @@
                 <c:formatCode>General</c:formatCode>
                 <c:ptCount val="2"/>
                 <c:pt idx="0">
-                  <c:v>34</c:v>
+                  <c:v>49</c:v>
                 </c:pt>
                 <c:pt idx="1">
-                  <c:v>65</c:v>
+                  <c:v>71</c:v>
                 </c:pt>
               </c:numCache>
             </c:numRef>
@@ -6666,7 +6666,7 @@
                 <a:ea typeface="Arial" pitchFamily="34" charset="-122"/>
                 <a:cs typeface="Arial" pitchFamily="34" charset="-120"/>
               </a:rPr>
-              <a:t>De 4.710 wagens zijn de </a:t>
+              <a:t>De 8.419 wagens zijn de </a:t>
             </a:r>
             <a:pPr indent="0" marL="0">
               <a:buNone/>
@@ -6823,7 +6823,7 @@
                 <a:ea typeface="Arial" pitchFamily="34" charset="-122"/>
                 <a:cs typeface="Arial" pitchFamily="34" charset="-120"/>
               </a:rPr>
-              <a:t>4.710</a:t>
+              <a:t>8.419</a:t>
             </a:r>
             <a:endParaRPr lang="en-US" sz="3200" dirty="0"/>
           </a:p>
@@ -6935,7 +6935,7 @@
                 <a:ea typeface="Arial" pitchFamily="34" charset="-122"/>
                 <a:cs typeface="Arial" pitchFamily="34" charset="-120"/>
               </a:rPr>
-              <a:t>80</a:t>
+              <a:t>132</a:t>
             </a:r>
             <a:endParaRPr lang="en-US" sz="3200" dirty="0"/>
           </a:p>
@@ -7047,7 +7047,7 @@
                 <a:ea typeface="Arial" pitchFamily="34" charset="-122"/>
                 <a:cs typeface="Arial" pitchFamily="34" charset="-120"/>
               </a:rPr>
-              <a:t>€ 7,07 mln</a:t>
+              <a:t>€ 12,63 mln</a:t>
             </a:r>
             <a:endParaRPr lang="en-US" sz="3200" dirty="0"/>
           </a:p>
@@ -7159,7 +7159,7 @@
                 <a:ea typeface="Arial" pitchFamily="34" charset="-122"/>
                 <a:cs typeface="Arial" pitchFamily="34" charset="-120"/>
               </a:rPr>
-              <a:t>€ 14,13 mln</a:t>
+              <a:t>€ 25,26 mln</a:t>
             </a:r>
             <a:endParaRPr lang="en-US" sz="3200" dirty="0"/>
           </a:p>
@@ -7266,7 +7266,7 @@
                 <a:ea typeface="Arial" pitchFamily="34" charset="-122"/>
                 <a:cs typeface="Arial" pitchFamily="34" charset="-120"/>
               </a:rPr>
-              <a:t>4.710 wagens</a:t>
+              <a:t>8.419 wagens</a:t>
             </a:r>
             <a:pPr indent="0" marL="0">
               <a:buNone/>
@@ -7294,7 +7294,7 @@
                 <a:ea typeface="Arial" pitchFamily="34" charset="-122"/>
                 <a:cs typeface="Arial" pitchFamily="34" charset="-120"/>
               </a:rPr>
-              <a:t>€ 7,07 mln besparing / jaar</a:t>
+              <a:t>€ 12,63 mln besparing / jaar</a:t>
             </a:r>
             <a:endParaRPr lang="en-US" sz="1500" dirty="0"/>
           </a:p>
@@ -7333,7 +7333,7 @@
                 <a:ea typeface="Arial" pitchFamily="34" charset="-122"/>
                 <a:cs typeface="Arial" pitchFamily="34" charset="-120"/>
               </a:rPr>
-              <a:t>4.710 wagens</a:t>
+              <a:t>8.419 wagens</a:t>
             </a:r>
             <a:pPr indent="0" marL="0">
               <a:buNone/>
@@ -7361,7 +7361,7 @@
                 <a:ea typeface="Arial" pitchFamily="34" charset="-122"/>
                 <a:cs typeface="Arial" pitchFamily="34" charset="-120"/>
               </a:rPr>
-              <a:t>€ 14,13 mln investering</a:t>
+              <a:t>€ 25,26 mln investering</a:t>
             </a:r>
             <a:pPr indent="0" marL="0">
               <a:buNone/>
@@ -7589,7 +7589,7 @@
             </a:avLst>
           </a:prstGeom>
           <a:solidFill>
-            <a:srgbClr val="EAF0FA"/>
+            <a:srgbClr val="FFFFFF"/>
           </a:solidFill>
           <a:ln w="12700">
             <a:solidFill>
@@ -7606,4217 +7606,58 @@
           </a:effectLst>
         </p:spPr>
       </p:sp>
-      <p:sp>
-        <p:nvSpPr>
-          <p:cNvPr id="5" name="Shape 3"/>
-          <p:cNvSpPr/>
-          <p:nvPr/>
-        </p:nvSpPr>
-        <p:spPr>
-          <a:xfrm>
-            <a:off x="1660115" y="2467559"/>
-            <a:ext cx="256032" cy="256032"/>
-          </a:xfrm>
-          <a:prstGeom prst="ellipse">
-            <a:avLst/>
-          </a:prstGeom>
-          <a:solidFill>
-            <a:srgbClr val="888888"/>
-          </a:solidFill>
-          <a:ln w="15240">
-            <a:solidFill>
-              <a:srgbClr val="FFFFFF"/>
-            </a:solidFill>
-            <a:prstDash val="solid"/>
-          </a:ln>
-        </p:spPr>
-      </p:sp>
-      <p:sp>
-        <p:nvSpPr>
-          <p:cNvPr id="6" name="Text 4"/>
-          <p:cNvSpPr/>
-          <p:nvPr/>
-        </p:nvSpPr>
-        <p:spPr>
-          <a:xfrm>
-            <a:off x="1660115" y="2467559"/>
-            <a:ext cx="256032" cy="256032"/>
-          </a:xfrm>
-          <a:prstGeom prst="rect">
-            <a:avLst/>
-          </a:prstGeom>
-          <a:noFill/>
-          <a:ln/>
-        </p:spPr>
-        <p:txBody>
-          <a:bodyPr wrap="square" lIns="0" tIns="0" rIns="0" bIns="0" rtlCol="0" anchor="ctr"/>
-          <a:lstStyle/>
-          <a:p>
-            <a:pPr algn="ctr" indent="0" marL="0">
-              <a:buNone/>
-            </a:pPr>
-            <a:r>
-              <a:rPr lang="en-US" sz="900" b="1" dirty="0">
-                <a:solidFill>
-                  <a:srgbClr val="FFFFFF"/>
-                </a:solidFill>
-                <a:latin typeface="Arial" pitchFamily="34" charset="0"/>
-                <a:ea typeface="Arial" pitchFamily="34" charset="-122"/>
-                <a:cs typeface="Arial" pitchFamily="34" charset="-120"/>
-              </a:rPr>
-              <a:t>15</a:t>
-            </a:r>
-            <a:endParaRPr lang="en-US" sz="900" dirty="0"/>
-          </a:p>
-        </p:txBody>
-      </p:sp>
-      <p:sp>
-        <p:nvSpPr>
-          <p:cNvPr id="7" name="Shape 5"/>
-          <p:cNvSpPr/>
-          <p:nvPr/>
-        </p:nvSpPr>
-        <p:spPr>
-          <a:xfrm>
-            <a:off x="4324253" y="4531804"/>
-            <a:ext cx="256032" cy="256032"/>
-          </a:xfrm>
-          <a:prstGeom prst="ellipse">
-            <a:avLst/>
-          </a:prstGeom>
-          <a:solidFill>
-            <a:srgbClr val="888888"/>
-          </a:solidFill>
-          <a:ln w="15240">
-            <a:solidFill>
-              <a:srgbClr val="FFFFFF"/>
-            </a:solidFill>
-            <a:prstDash val="solid"/>
-          </a:ln>
-        </p:spPr>
-      </p:sp>
-      <p:sp>
-        <p:nvSpPr>
-          <p:cNvPr id="8" name="Text 6"/>
-          <p:cNvSpPr/>
-          <p:nvPr/>
-        </p:nvSpPr>
-        <p:spPr>
-          <a:xfrm>
-            <a:off x="4324253" y="4531804"/>
-            <a:ext cx="256032" cy="256032"/>
-          </a:xfrm>
-          <a:prstGeom prst="rect">
-            <a:avLst/>
-          </a:prstGeom>
-          <a:noFill/>
-          <a:ln/>
-        </p:spPr>
-        <p:txBody>
-          <a:bodyPr wrap="square" lIns="0" tIns="0" rIns="0" bIns="0" rtlCol="0" anchor="ctr"/>
-          <a:lstStyle/>
-          <a:p>
-            <a:pPr algn="ctr" indent="0" marL="0">
-              <a:buNone/>
-            </a:pPr>
-            <a:r>
-              <a:rPr lang="en-US" sz="900" b="1" dirty="0">
-                <a:solidFill>
-                  <a:srgbClr val="FFFFFF"/>
-                </a:solidFill>
-                <a:latin typeface="Arial" pitchFamily="34" charset="0"/>
-                <a:ea typeface="Arial" pitchFamily="34" charset="-122"/>
-                <a:cs typeface="Arial" pitchFamily="34" charset="-120"/>
-              </a:rPr>
-              <a:t>15</a:t>
-            </a:r>
-            <a:endParaRPr lang="en-US" sz="900" dirty="0"/>
-          </a:p>
-        </p:txBody>
-      </p:sp>
-      <p:sp>
-        <p:nvSpPr>
-          <p:cNvPr id="9" name="Shape 7"/>
-          <p:cNvSpPr/>
-          <p:nvPr/>
-        </p:nvSpPr>
-        <p:spPr>
-          <a:xfrm>
-            <a:off x="4178486" y="4848656"/>
-            <a:ext cx="256032" cy="256032"/>
-          </a:xfrm>
-          <a:prstGeom prst="ellipse">
-            <a:avLst/>
-          </a:prstGeom>
-          <a:solidFill>
-            <a:srgbClr val="888888"/>
-          </a:solidFill>
-          <a:ln w="15240">
-            <a:solidFill>
-              <a:srgbClr val="FFFFFF"/>
-            </a:solidFill>
-            <a:prstDash val="solid"/>
-          </a:ln>
-        </p:spPr>
-      </p:sp>
-      <p:sp>
-        <p:nvSpPr>
-          <p:cNvPr id="10" name="Text 8"/>
-          <p:cNvSpPr/>
-          <p:nvPr/>
-        </p:nvSpPr>
-        <p:spPr>
-          <a:xfrm>
-            <a:off x="4178486" y="4848656"/>
-            <a:ext cx="256032" cy="256032"/>
-          </a:xfrm>
-          <a:prstGeom prst="rect">
-            <a:avLst/>
-          </a:prstGeom>
-          <a:noFill/>
-          <a:ln/>
-        </p:spPr>
-        <p:txBody>
-          <a:bodyPr wrap="square" lIns="0" tIns="0" rIns="0" bIns="0" rtlCol="0" anchor="ctr"/>
-          <a:lstStyle/>
-          <a:p>
-            <a:pPr algn="ctr" indent="0" marL="0">
-              <a:buNone/>
-            </a:pPr>
-            <a:r>
-              <a:rPr lang="en-US" sz="900" b="1" dirty="0">
-                <a:solidFill>
-                  <a:srgbClr val="FFFFFF"/>
-                </a:solidFill>
-                <a:latin typeface="Arial" pitchFamily="34" charset="0"/>
-                <a:ea typeface="Arial" pitchFamily="34" charset="-122"/>
-                <a:cs typeface="Arial" pitchFamily="34" charset="-120"/>
-              </a:rPr>
-              <a:t>15</a:t>
-            </a:r>
-            <a:endParaRPr lang="en-US" sz="900" dirty="0"/>
-          </a:p>
-        </p:txBody>
-      </p:sp>
-      <p:sp>
-        <p:nvSpPr>
-          <p:cNvPr id="11" name="Shape 9"/>
-          <p:cNvSpPr/>
-          <p:nvPr/>
-        </p:nvSpPr>
-        <p:spPr>
-          <a:xfrm>
-            <a:off x="1777692" y="2440452"/>
-            <a:ext cx="256032" cy="256032"/>
-          </a:xfrm>
-          <a:prstGeom prst="ellipse">
-            <a:avLst/>
-          </a:prstGeom>
-          <a:solidFill>
-            <a:srgbClr val="888888"/>
-          </a:solidFill>
-          <a:ln w="15240">
-            <a:solidFill>
-              <a:srgbClr val="FFFFFF"/>
-            </a:solidFill>
-            <a:prstDash val="solid"/>
-          </a:ln>
-        </p:spPr>
-      </p:sp>
-      <p:sp>
-        <p:nvSpPr>
-          <p:cNvPr id="12" name="Text 10"/>
-          <p:cNvSpPr/>
-          <p:nvPr/>
-        </p:nvSpPr>
-        <p:spPr>
-          <a:xfrm>
-            <a:off x="1777692" y="2440452"/>
-            <a:ext cx="256032" cy="256032"/>
-          </a:xfrm>
-          <a:prstGeom prst="rect">
-            <a:avLst/>
-          </a:prstGeom>
-          <a:noFill/>
-          <a:ln/>
-        </p:spPr>
-        <p:txBody>
-          <a:bodyPr wrap="square" lIns="0" tIns="0" rIns="0" bIns="0" rtlCol="0" anchor="ctr"/>
-          <a:lstStyle/>
-          <a:p>
-            <a:pPr algn="ctr" indent="0" marL="0">
-              <a:buNone/>
-            </a:pPr>
-            <a:r>
-              <a:rPr lang="en-US" sz="900" b="1" dirty="0">
-                <a:solidFill>
-                  <a:srgbClr val="FFFFFF"/>
-                </a:solidFill>
-                <a:latin typeface="Arial" pitchFamily="34" charset="0"/>
-                <a:ea typeface="Arial" pitchFamily="34" charset="-122"/>
-                <a:cs typeface="Arial" pitchFamily="34" charset="-120"/>
-              </a:rPr>
-              <a:t>15</a:t>
-            </a:r>
-            <a:endParaRPr lang="en-US" sz="900" dirty="0"/>
-          </a:p>
-        </p:txBody>
-      </p:sp>
-      <p:sp>
-        <p:nvSpPr>
-          <p:cNvPr id="13" name="Shape 11"/>
-          <p:cNvSpPr/>
-          <p:nvPr/>
-        </p:nvSpPr>
-        <p:spPr>
-          <a:xfrm>
-            <a:off x="1755627" y="2461750"/>
-            <a:ext cx="256032" cy="256032"/>
-          </a:xfrm>
-          <a:prstGeom prst="ellipse">
-            <a:avLst/>
-          </a:prstGeom>
-          <a:solidFill>
-            <a:srgbClr val="888888"/>
-          </a:solidFill>
-          <a:ln w="15240">
-            <a:solidFill>
-              <a:srgbClr val="FFFFFF"/>
-            </a:solidFill>
-            <a:prstDash val="solid"/>
-          </a:ln>
-        </p:spPr>
-      </p:sp>
-      <p:sp>
-        <p:nvSpPr>
-          <p:cNvPr id="14" name="Text 12"/>
-          <p:cNvSpPr/>
-          <p:nvPr/>
-        </p:nvSpPr>
-        <p:spPr>
-          <a:xfrm>
-            <a:off x="1755627" y="2461750"/>
-            <a:ext cx="256032" cy="256032"/>
-          </a:xfrm>
-          <a:prstGeom prst="rect">
-            <a:avLst/>
-          </a:prstGeom>
-          <a:noFill/>
-          <a:ln/>
-        </p:spPr>
-        <p:txBody>
-          <a:bodyPr wrap="square" lIns="0" tIns="0" rIns="0" bIns="0" rtlCol="0" anchor="ctr"/>
-          <a:lstStyle/>
-          <a:p>
-            <a:pPr algn="ctr" indent="0" marL="0">
-              <a:buNone/>
-            </a:pPr>
-            <a:r>
-              <a:rPr lang="en-US" sz="900" b="1" dirty="0">
-                <a:solidFill>
-                  <a:srgbClr val="FFFFFF"/>
-                </a:solidFill>
-                <a:latin typeface="Arial" pitchFamily="34" charset="0"/>
-                <a:ea typeface="Arial" pitchFamily="34" charset="-122"/>
-                <a:cs typeface="Arial" pitchFamily="34" charset="-120"/>
-              </a:rPr>
-              <a:t>15</a:t>
-            </a:r>
-            <a:endParaRPr lang="en-US" sz="900" dirty="0"/>
-          </a:p>
-        </p:txBody>
-      </p:sp>
-      <p:sp>
-        <p:nvSpPr>
-          <p:cNvPr id="15" name="Shape 13"/>
-          <p:cNvSpPr/>
-          <p:nvPr/>
-        </p:nvSpPr>
-        <p:spPr>
-          <a:xfrm>
-            <a:off x="2382580" y="2157984"/>
-            <a:ext cx="256032" cy="256032"/>
-          </a:xfrm>
-          <a:prstGeom prst="ellipse">
-            <a:avLst/>
-          </a:prstGeom>
-          <a:solidFill>
-            <a:srgbClr val="888888"/>
-          </a:solidFill>
-          <a:ln w="15240">
-            <a:solidFill>
-              <a:srgbClr val="FFFFFF"/>
-            </a:solidFill>
-            <a:prstDash val="solid"/>
-          </a:ln>
-        </p:spPr>
-      </p:sp>
-      <p:sp>
-        <p:nvSpPr>
-          <p:cNvPr id="16" name="Text 14"/>
-          <p:cNvSpPr/>
-          <p:nvPr/>
-        </p:nvSpPr>
-        <p:spPr>
-          <a:xfrm>
-            <a:off x="2382580" y="2157984"/>
-            <a:ext cx="256032" cy="256032"/>
-          </a:xfrm>
-          <a:prstGeom prst="rect">
-            <a:avLst/>
-          </a:prstGeom>
-          <a:noFill/>
-          <a:ln/>
-        </p:spPr>
-        <p:txBody>
-          <a:bodyPr wrap="square" lIns="0" tIns="0" rIns="0" bIns="0" rtlCol="0" anchor="ctr"/>
-          <a:lstStyle/>
-          <a:p>
-            <a:pPr algn="ctr" indent="0" marL="0">
-              <a:buNone/>
-            </a:pPr>
-            <a:r>
-              <a:rPr lang="en-US" sz="900" b="1" dirty="0">
-                <a:solidFill>
-                  <a:srgbClr val="FFFFFF"/>
-                </a:solidFill>
-                <a:latin typeface="Arial" pitchFamily="34" charset="0"/>
-                <a:ea typeface="Arial" pitchFamily="34" charset="-122"/>
-                <a:cs typeface="Arial" pitchFamily="34" charset="-120"/>
-              </a:rPr>
-              <a:t>15</a:t>
-            </a:r>
-            <a:endParaRPr lang="en-US" sz="900" dirty="0"/>
-          </a:p>
-        </p:txBody>
-      </p:sp>
-      <p:sp>
-        <p:nvSpPr>
-          <p:cNvPr id="17" name="Shape 15"/>
-          <p:cNvSpPr/>
-          <p:nvPr/>
-        </p:nvSpPr>
-        <p:spPr>
-          <a:xfrm>
-            <a:off x="2399985" y="2159829"/>
-            <a:ext cx="256032" cy="256032"/>
-          </a:xfrm>
-          <a:prstGeom prst="ellipse">
-            <a:avLst/>
-          </a:prstGeom>
-          <a:solidFill>
-            <a:srgbClr val="888888"/>
-          </a:solidFill>
-          <a:ln w="15240">
-            <a:solidFill>
-              <a:srgbClr val="FFFFFF"/>
-            </a:solidFill>
-            <a:prstDash val="solid"/>
-          </a:ln>
-        </p:spPr>
-      </p:sp>
-      <p:sp>
-        <p:nvSpPr>
-          <p:cNvPr id="18" name="Text 16"/>
-          <p:cNvSpPr/>
-          <p:nvPr/>
-        </p:nvSpPr>
-        <p:spPr>
-          <a:xfrm>
-            <a:off x="2399985" y="2159829"/>
-            <a:ext cx="256032" cy="256032"/>
-          </a:xfrm>
-          <a:prstGeom prst="rect">
-            <a:avLst/>
-          </a:prstGeom>
-          <a:noFill/>
-          <a:ln/>
-        </p:spPr>
-        <p:txBody>
-          <a:bodyPr wrap="square" lIns="0" tIns="0" rIns="0" bIns="0" rtlCol="0" anchor="ctr"/>
-          <a:lstStyle/>
-          <a:p>
-            <a:pPr algn="ctr" indent="0" marL="0">
-              <a:buNone/>
-            </a:pPr>
-            <a:r>
-              <a:rPr lang="en-US" sz="900" b="1" dirty="0">
-                <a:solidFill>
-                  <a:srgbClr val="FFFFFF"/>
-                </a:solidFill>
-                <a:latin typeface="Arial" pitchFamily="34" charset="0"/>
-                <a:ea typeface="Arial" pitchFamily="34" charset="-122"/>
-                <a:cs typeface="Arial" pitchFamily="34" charset="-120"/>
-              </a:rPr>
-              <a:t>15</a:t>
-            </a:r>
-            <a:endParaRPr lang="en-US" sz="900" dirty="0"/>
-          </a:p>
-        </p:txBody>
-      </p:sp>
-      <p:sp>
-        <p:nvSpPr>
-          <p:cNvPr id="19" name="Shape 17"/>
-          <p:cNvSpPr/>
-          <p:nvPr/>
-        </p:nvSpPr>
-        <p:spPr>
-          <a:xfrm>
-            <a:off x="2559838" y="2262420"/>
-            <a:ext cx="256032" cy="256032"/>
-          </a:xfrm>
-          <a:prstGeom prst="ellipse">
-            <a:avLst/>
-          </a:prstGeom>
-          <a:solidFill>
-            <a:srgbClr val="888888"/>
-          </a:solidFill>
-          <a:ln w="15240">
-            <a:solidFill>
-              <a:srgbClr val="FFFFFF"/>
-            </a:solidFill>
-            <a:prstDash val="solid"/>
-          </a:ln>
-        </p:spPr>
-      </p:sp>
-      <p:sp>
-        <p:nvSpPr>
-          <p:cNvPr id="20" name="Text 18"/>
-          <p:cNvSpPr/>
-          <p:nvPr/>
-        </p:nvSpPr>
-        <p:spPr>
-          <a:xfrm>
-            <a:off x="2559838" y="2262420"/>
-            <a:ext cx="256032" cy="256032"/>
-          </a:xfrm>
-          <a:prstGeom prst="rect">
-            <a:avLst/>
-          </a:prstGeom>
-          <a:noFill/>
-          <a:ln/>
-        </p:spPr>
-        <p:txBody>
-          <a:bodyPr wrap="square" lIns="0" tIns="0" rIns="0" bIns="0" rtlCol="0" anchor="ctr"/>
-          <a:lstStyle/>
-          <a:p>
-            <a:pPr algn="ctr" indent="0" marL="0">
-              <a:buNone/>
-            </a:pPr>
-            <a:r>
-              <a:rPr lang="en-US" sz="900" b="1" dirty="0">
-                <a:solidFill>
-                  <a:srgbClr val="FFFFFF"/>
-                </a:solidFill>
-                <a:latin typeface="Arial" pitchFamily="34" charset="0"/>
-                <a:ea typeface="Arial" pitchFamily="34" charset="-122"/>
-                <a:cs typeface="Arial" pitchFamily="34" charset="-120"/>
-              </a:rPr>
-              <a:t>15</a:t>
-            </a:r>
-            <a:endParaRPr lang="en-US" sz="900" dirty="0"/>
-          </a:p>
-        </p:txBody>
-      </p:sp>
-      <p:sp>
-        <p:nvSpPr>
-          <p:cNvPr id="21" name="Shape 19"/>
-          <p:cNvSpPr/>
-          <p:nvPr/>
-        </p:nvSpPr>
-        <p:spPr>
-          <a:xfrm>
-            <a:off x="2520818" y="2288373"/>
-            <a:ext cx="256032" cy="256032"/>
-          </a:xfrm>
-          <a:prstGeom prst="ellipse">
-            <a:avLst/>
-          </a:prstGeom>
-          <a:solidFill>
-            <a:srgbClr val="888888"/>
-          </a:solidFill>
-          <a:ln w="15240">
-            <a:solidFill>
-              <a:srgbClr val="FFFFFF"/>
-            </a:solidFill>
-            <a:prstDash val="solid"/>
-          </a:ln>
-        </p:spPr>
-      </p:sp>
-      <p:sp>
-        <p:nvSpPr>
-          <p:cNvPr id="22" name="Text 20"/>
-          <p:cNvSpPr/>
-          <p:nvPr/>
-        </p:nvSpPr>
-        <p:spPr>
-          <a:xfrm>
-            <a:off x="2520818" y="2288373"/>
-            <a:ext cx="256032" cy="256032"/>
-          </a:xfrm>
-          <a:prstGeom prst="rect">
-            <a:avLst/>
-          </a:prstGeom>
-          <a:noFill/>
-          <a:ln/>
-        </p:spPr>
-        <p:txBody>
-          <a:bodyPr wrap="square" lIns="0" tIns="0" rIns="0" bIns="0" rtlCol="0" anchor="ctr"/>
-          <a:lstStyle/>
-          <a:p>
-            <a:pPr algn="ctr" indent="0" marL="0">
-              <a:buNone/>
-            </a:pPr>
-            <a:r>
-              <a:rPr lang="en-US" sz="900" b="1" dirty="0">
-                <a:solidFill>
-                  <a:srgbClr val="FFFFFF"/>
-                </a:solidFill>
-                <a:latin typeface="Arial" pitchFamily="34" charset="0"/>
-                <a:ea typeface="Arial" pitchFamily="34" charset="-122"/>
-                <a:cs typeface="Arial" pitchFamily="34" charset="-120"/>
-              </a:rPr>
-              <a:t>15</a:t>
-            </a:r>
-            <a:endParaRPr lang="en-US" sz="900" dirty="0"/>
-          </a:p>
-        </p:txBody>
-      </p:sp>
-      <p:sp>
-        <p:nvSpPr>
-          <p:cNvPr id="23" name="Shape 21"/>
-          <p:cNvSpPr/>
-          <p:nvPr/>
-        </p:nvSpPr>
-        <p:spPr>
-          <a:xfrm>
-            <a:off x="2537870" y="2292897"/>
-            <a:ext cx="256032" cy="256032"/>
-          </a:xfrm>
-          <a:prstGeom prst="ellipse">
-            <a:avLst/>
-          </a:prstGeom>
-          <a:solidFill>
-            <a:srgbClr val="888888"/>
-          </a:solidFill>
-          <a:ln w="15240">
-            <a:solidFill>
-              <a:srgbClr val="FFFFFF"/>
-            </a:solidFill>
-            <a:prstDash val="solid"/>
-          </a:ln>
-        </p:spPr>
-      </p:sp>
-      <p:sp>
-        <p:nvSpPr>
-          <p:cNvPr id="24" name="Text 22"/>
-          <p:cNvSpPr/>
-          <p:nvPr/>
-        </p:nvSpPr>
-        <p:spPr>
-          <a:xfrm>
-            <a:off x="2537870" y="2292897"/>
-            <a:ext cx="256032" cy="256032"/>
-          </a:xfrm>
-          <a:prstGeom prst="rect">
-            <a:avLst/>
-          </a:prstGeom>
-          <a:noFill/>
-          <a:ln/>
-        </p:spPr>
-        <p:txBody>
-          <a:bodyPr wrap="square" lIns="0" tIns="0" rIns="0" bIns="0" rtlCol="0" anchor="ctr"/>
-          <a:lstStyle/>
-          <a:p>
-            <a:pPr algn="ctr" indent="0" marL="0">
-              <a:buNone/>
-            </a:pPr>
-            <a:r>
-              <a:rPr lang="en-US" sz="900" b="1" dirty="0">
-                <a:solidFill>
-                  <a:srgbClr val="FFFFFF"/>
-                </a:solidFill>
-                <a:latin typeface="Arial" pitchFamily="34" charset="0"/>
-                <a:ea typeface="Arial" pitchFamily="34" charset="-122"/>
-                <a:cs typeface="Arial" pitchFamily="34" charset="-120"/>
-              </a:rPr>
-              <a:t>15</a:t>
-            </a:r>
-            <a:endParaRPr lang="en-US" sz="900" dirty="0"/>
-          </a:p>
-        </p:txBody>
-      </p:sp>
-      <p:sp>
-        <p:nvSpPr>
-          <p:cNvPr id="25" name="Shape 23"/>
-          <p:cNvSpPr/>
-          <p:nvPr/>
-        </p:nvSpPr>
-        <p:spPr>
-          <a:xfrm>
-            <a:off x="2568418" y="2271615"/>
-            <a:ext cx="256032" cy="256032"/>
-          </a:xfrm>
-          <a:prstGeom prst="ellipse">
-            <a:avLst/>
-          </a:prstGeom>
-          <a:solidFill>
-            <a:srgbClr val="888888"/>
-          </a:solidFill>
-          <a:ln w="15240">
-            <a:solidFill>
-              <a:srgbClr val="FFFFFF"/>
-            </a:solidFill>
-            <a:prstDash val="solid"/>
-          </a:ln>
-        </p:spPr>
-      </p:sp>
-      <p:sp>
-        <p:nvSpPr>
-          <p:cNvPr id="26" name="Text 24"/>
-          <p:cNvSpPr/>
-          <p:nvPr/>
-        </p:nvSpPr>
-        <p:spPr>
-          <a:xfrm>
-            <a:off x="2568418" y="2271615"/>
-            <a:ext cx="256032" cy="256032"/>
-          </a:xfrm>
-          <a:prstGeom prst="rect">
-            <a:avLst/>
-          </a:prstGeom>
-          <a:noFill/>
-          <a:ln/>
-        </p:spPr>
-        <p:txBody>
-          <a:bodyPr wrap="square" lIns="0" tIns="0" rIns="0" bIns="0" rtlCol="0" anchor="ctr"/>
-          <a:lstStyle/>
-          <a:p>
-            <a:pPr algn="ctr" indent="0" marL="0">
-              <a:buNone/>
-            </a:pPr>
-            <a:r>
-              <a:rPr lang="en-US" sz="900" b="1" dirty="0">
-                <a:solidFill>
-                  <a:srgbClr val="FFFFFF"/>
-                </a:solidFill>
-                <a:latin typeface="Arial" pitchFamily="34" charset="0"/>
-                <a:ea typeface="Arial" pitchFamily="34" charset="-122"/>
-                <a:cs typeface="Arial" pitchFamily="34" charset="-120"/>
-              </a:rPr>
-              <a:t>15</a:t>
-            </a:r>
-            <a:endParaRPr lang="en-US" sz="900" dirty="0"/>
-          </a:p>
-        </p:txBody>
-      </p:sp>
-      <p:sp>
-        <p:nvSpPr>
-          <p:cNvPr id="27" name="Shape 25"/>
-          <p:cNvSpPr/>
-          <p:nvPr/>
-        </p:nvSpPr>
-        <p:spPr>
-          <a:xfrm>
-            <a:off x="4177796" y="4908408"/>
-            <a:ext cx="256032" cy="256032"/>
-          </a:xfrm>
-          <a:prstGeom prst="ellipse">
-            <a:avLst/>
-          </a:prstGeom>
-          <a:solidFill>
-            <a:srgbClr val="888888"/>
-          </a:solidFill>
-          <a:ln w="15240">
-            <a:solidFill>
-              <a:srgbClr val="FFFFFF"/>
-            </a:solidFill>
-            <a:prstDash val="solid"/>
-          </a:ln>
-        </p:spPr>
-      </p:sp>
-      <p:sp>
-        <p:nvSpPr>
-          <p:cNvPr id="28" name="Text 26"/>
-          <p:cNvSpPr/>
-          <p:nvPr/>
-        </p:nvSpPr>
-        <p:spPr>
-          <a:xfrm>
-            <a:off x="4177796" y="4908408"/>
-            <a:ext cx="256032" cy="256032"/>
-          </a:xfrm>
-          <a:prstGeom prst="rect">
-            <a:avLst/>
-          </a:prstGeom>
-          <a:noFill/>
-          <a:ln/>
-        </p:spPr>
-        <p:txBody>
-          <a:bodyPr wrap="square" lIns="0" tIns="0" rIns="0" bIns="0" rtlCol="0" anchor="ctr"/>
-          <a:lstStyle/>
-          <a:p>
-            <a:pPr algn="ctr" indent="0" marL="0">
-              <a:buNone/>
-            </a:pPr>
-            <a:r>
-              <a:rPr lang="en-US" sz="900" b="1" dirty="0">
-                <a:solidFill>
-                  <a:srgbClr val="FFFFFF"/>
-                </a:solidFill>
-                <a:latin typeface="Arial" pitchFamily="34" charset="0"/>
-                <a:ea typeface="Arial" pitchFamily="34" charset="-122"/>
-                <a:cs typeface="Arial" pitchFamily="34" charset="-120"/>
-              </a:rPr>
-              <a:t>15</a:t>
-            </a:r>
-            <a:endParaRPr lang="en-US" sz="900" dirty="0"/>
-          </a:p>
-        </p:txBody>
-      </p:sp>
-      <p:sp>
-        <p:nvSpPr>
-          <p:cNvPr id="29" name="Shape 27"/>
-          <p:cNvSpPr/>
-          <p:nvPr/>
-        </p:nvSpPr>
-        <p:spPr>
-          <a:xfrm>
-            <a:off x="4110687" y="4872318"/>
-            <a:ext cx="256032" cy="256032"/>
-          </a:xfrm>
-          <a:prstGeom prst="ellipse">
-            <a:avLst/>
-          </a:prstGeom>
-          <a:solidFill>
-            <a:srgbClr val="888888"/>
-          </a:solidFill>
-          <a:ln w="15240">
-            <a:solidFill>
-              <a:srgbClr val="FFFFFF"/>
-            </a:solidFill>
-            <a:prstDash val="solid"/>
-          </a:ln>
-        </p:spPr>
-      </p:sp>
-      <p:sp>
-        <p:nvSpPr>
-          <p:cNvPr id="30" name="Text 28"/>
-          <p:cNvSpPr/>
-          <p:nvPr/>
-        </p:nvSpPr>
-        <p:spPr>
-          <a:xfrm>
-            <a:off x="4110687" y="4872318"/>
-            <a:ext cx="256032" cy="256032"/>
-          </a:xfrm>
-          <a:prstGeom prst="rect">
-            <a:avLst/>
-          </a:prstGeom>
-          <a:noFill/>
-          <a:ln/>
-        </p:spPr>
-        <p:txBody>
-          <a:bodyPr wrap="square" lIns="0" tIns="0" rIns="0" bIns="0" rtlCol="0" anchor="ctr"/>
-          <a:lstStyle/>
-          <a:p>
-            <a:pPr algn="ctr" indent="0" marL="0">
-              <a:buNone/>
-            </a:pPr>
-            <a:r>
-              <a:rPr lang="en-US" sz="900" b="1" dirty="0">
-                <a:solidFill>
-                  <a:srgbClr val="FFFFFF"/>
-                </a:solidFill>
-                <a:latin typeface="Arial" pitchFamily="34" charset="0"/>
-                <a:ea typeface="Arial" pitchFamily="34" charset="-122"/>
-                <a:cs typeface="Arial" pitchFamily="34" charset="-120"/>
-              </a:rPr>
-              <a:t>15</a:t>
-            </a:r>
-            <a:endParaRPr lang="en-US" sz="900" dirty="0"/>
-          </a:p>
-        </p:txBody>
-      </p:sp>
-      <p:sp>
-        <p:nvSpPr>
-          <p:cNvPr id="31" name="Shape 29"/>
-          <p:cNvSpPr/>
-          <p:nvPr/>
-        </p:nvSpPr>
-        <p:spPr>
-          <a:xfrm>
-            <a:off x="4099700" y="4866621"/>
-            <a:ext cx="256032" cy="256032"/>
-          </a:xfrm>
-          <a:prstGeom prst="ellipse">
-            <a:avLst/>
-          </a:prstGeom>
-          <a:solidFill>
-            <a:srgbClr val="888888"/>
-          </a:solidFill>
-          <a:ln w="15240">
-            <a:solidFill>
-              <a:srgbClr val="FFFFFF"/>
-            </a:solidFill>
-            <a:prstDash val="solid"/>
-          </a:ln>
-        </p:spPr>
-      </p:sp>
-      <p:sp>
-        <p:nvSpPr>
-          <p:cNvPr id="32" name="Text 30"/>
-          <p:cNvSpPr/>
-          <p:nvPr/>
-        </p:nvSpPr>
-        <p:spPr>
-          <a:xfrm>
-            <a:off x="4099700" y="4866621"/>
-            <a:ext cx="256032" cy="256032"/>
-          </a:xfrm>
-          <a:prstGeom prst="rect">
-            <a:avLst/>
-          </a:prstGeom>
-          <a:noFill/>
-          <a:ln/>
-        </p:spPr>
-        <p:txBody>
-          <a:bodyPr wrap="square" lIns="0" tIns="0" rIns="0" bIns="0" rtlCol="0" anchor="ctr"/>
-          <a:lstStyle/>
-          <a:p>
-            <a:pPr algn="ctr" indent="0" marL="0">
-              <a:buNone/>
-            </a:pPr>
-            <a:r>
-              <a:rPr lang="en-US" sz="900" b="1" dirty="0">
-                <a:solidFill>
-                  <a:srgbClr val="FFFFFF"/>
-                </a:solidFill>
-                <a:latin typeface="Arial" pitchFamily="34" charset="0"/>
-                <a:ea typeface="Arial" pitchFamily="34" charset="-122"/>
-                <a:cs typeface="Arial" pitchFamily="34" charset="-120"/>
-              </a:rPr>
-              <a:t>15</a:t>
-            </a:r>
-            <a:endParaRPr lang="en-US" sz="900" dirty="0"/>
-          </a:p>
-        </p:txBody>
-      </p:sp>
-      <p:sp>
-        <p:nvSpPr>
-          <p:cNvPr id="33" name="Shape 31"/>
-          <p:cNvSpPr/>
-          <p:nvPr/>
-        </p:nvSpPr>
-        <p:spPr>
-          <a:xfrm>
-            <a:off x="4076712" y="4842710"/>
-            <a:ext cx="256032" cy="256032"/>
-          </a:xfrm>
-          <a:prstGeom prst="ellipse">
-            <a:avLst/>
-          </a:prstGeom>
-          <a:solidFill>
-            <a:srgbClr val="888888"/>
-          </a:solidFill>
-          <a:ln w="15240">
-            <a:solidFill>
-              <a:srgbClr val="FFFFFF"/>
-            </a:solidFill>
-            <a:prstDash val="solid"/>
-          </a:ln>
-        </p:spPr>
-      </p:sp>
-      <p:sp>
-        <p:nvSpPr>
-          <p:cNvPr id="34" name="Text 32"/>
-          <p:cNvSpPr/>
-          <p:nvPr/>
-        </p:nvSpPr>
-        <p:spPr>
-          <a:xfrm>
-            <a:off x="4076712" y="4842710"/>
-            <a:ext cx="256032" cy="256032"/>
-          </a:xfrm>
-          <a:prstGeom prst="rect">
-            <a:avLst/>
-          </a:prstGeom>
-          <a:noFill/>
-          <a:ln/>
-        </p:spPr>
-        <p:txBody>
-          <a:bodyPr wrap="square" lIns="0" tIns="0" rIns="0" bIns="0" rtlCol="0" anchor="ctr"/>
-          <a:lstStyle/>
-          <a:p>
-            <a:pPr algn="ctr" indent="0" marL="0">
-              <a:buNone/>
-            </a:pPr>
-            <a:r>
-              <a:rPr lang="en-US" sz="900" b="1" dirty="0">
-                <a:solidFill>
-                  <a:srgbClr val="FFFFFF"/>
-                </a:solidFill>
-                <a:latin typeface="Arial" pitchFamily="34" charset="0"/>
-                <a:ea typeface="Arial" pitchFamily="34" charset="-122"/>
-                <a:cs typeface="Arial" pitchFamily="34" charset="-120"/>
-              </a:rPr>
-              <a:t>15</a:t>
-            </a:r>
-            <a:endParaRPr lang="en-US" sz="900" dirty="0"/>
-          </a:p>
-        </p:txBody>
-      </p:sp>
-      <p:sp>
-        <p:nvSpPr>
-          <p:cNvPr id="35" name="Shape 33"/>
-          <p:cNvSpPr/>
-          <p:nvPr/>
-        </p:nvSpPr>
-        <p:spPr>
-          <a:xfrm>
-            <a:off x="4128114" y="4769511"/>
-            <a:ext cx="256032" cy="256032"/>
-          </a:xfrm>
-          <a:prstGeom prst="ellipse">
-            <a:avLst/>
-          </a:prstGeom>
-          <a:solidFill>
-            <a:srgbClr val="888888"/>
-          </a:solidFill>
-          <a:ln w="15240">
-            <a:solidFill>
-              <a:srgbClr val="FFFFFF"/>
-            </a:solidFill>
-            <a:prstDash val="solid"/>
-          </a:ln>
-        </p:spPr>
-      </p:sp>
-      <p:sp>
-        <p:nvSpPr>
-          <p:cNvPr id="36" name="Text 34"/>
-          <p:cNvSpPr/>
-          <p:nvPr/>
-        </p:nvSpPr>
-        <p:spPr>
-          <a:xfrm>
-            <a:off x="4128114" y="4769511"/>
-            <a:ext cx="256032" cy="256032"/>
-          </a:xfrm>
-          <a:prstGeom prst="rect">
-            <a:avLst/>
-          </a:prstGeom>
-          <a:noFill/>
-          <a:ln/>
-        </p:spPr>
-        <p:txBody>
-          <a:bodyPr wrap="square" lIns="0" tIns="0" rIns="0" bIns="0" rtlCol="0" anchor="ctr"/>
-          <a:lstStyle/>
-          <a:p>
-            <a:pPr algn="ctr" indent="0" marL="0">
-              <a:buNone/>
-            </a:pPr>
-            <a:r>
-              <a:rPr lang="en-US" sz="900" b="1" dirty="0">
-                <a:solidFill>
-                  <a:srgbClr val="FFFFFF"/>
-                </a:solidFill>
-                <a:latin typeface="Arial" pitchFamily="34" charset="0"/>
-                <a:ea typeface="Arial" pitchFamily="34" charset="-122"/>
-                <a:cs typeface="Arial" pitchFamily="34" charset="-120"/>
-              </a:rPr>
-              <a:t>15</a:t>
-            </a:r>
-            <a:endParaRPr lang="en-US" sz="900" dirty="0"/>
-          </a:p>
-        </p:txBody>
-      </p:sp>
-      <p:sp>
-        <p:nvSpPr>
-          <p:cNvPr id="37" name="Shape 35"/>
-          <p:cNvSpPr/>
-          <p:nvPr/>
-        </p:nvSpPr>
-        <p:spPr>
-          <a:xfrm>
-            <a:off x="3999641" y="4813454"/>
-            <a:ext cx="256032" cy="256032"/>
-          </a:xfrm>
-          <a:prstGeom prst="ellipse">
-            <a:avLst/>
-          </a:prstGeom>
-          <a:solidFill>
-            <a:srgbClr val="888888"/>
-          </a:solidFill>
-          <a:ln w="15240">
-            <a:solidFill>
-              <a:srgbClr val="FFFFFF"/>
-            </a:solidFill>
-            <a:prstDash val="solid"/>
-          </a:ln>
-        </p:spPr>
-      </p:sp>
-      <p:sp>
-        <p:nvSpPr>
-          <p:cNvPr id="38" name="Text 36"/>
-          <p:cNvSpPr/>
-          <p:nvPr/>
-        </p:nvSpPr>
-        <p:spPr>
-          <a:xfrm>
-            <a:off x="3999641" y="4813454"/>
-            <a:ext cx="256032" cy="256032"/>
-          </a:xfrm>
-          <a:prstGeom prst="rect">
-            <a:avLst/>
-          </a:prstGeom>
-          <a:noFill/>
-          <a:ln/>
-        </p:spPr>
-        <p:txBody>
-          <a:bodyPr wrap="square" lIns="0" tIns="0" rIns="0" bIns="0" rtlCol="0" anchor="ctr"/>
-          <a:lstStyle/>
-          <a:p>
-            <a:pPr algn="ctr" indent="0" marL="0">
-              <a:buNone/>
-            </a:pPr>
-            <a:r>
-              <a:rPr lang="en-US" sz="900" b="1" dirty="0">
-                <a:solidFill>
-                  <a:srgbClr val="FFFFFF"/>
-                </a:solidFill>
-                <a:latin typeface="Arial" pitchFamily="34" charset="0"/>
-                <a:ea typeface="Arial" pitchFamily="34" charset="-122"/>
-                <a:cs typeface="Arial" pitchFamily="34" charset="-120"/>
-              </a:rPr>
-              <a:t>15</a:t>
-            </a:r>
-            <a:endParaRPr lang="en-US" sz="900" dirty="0"/>
-          </a:p>
-        </p:txBody>
-      </p:sp>
-      <p:sp>
-        <p:nvSpPr>
-          <p:cNvPr id="39" name="Shape 37"/>
-          <p:cNvSpPr/>
-          <p:nvPr/>
-        </p:nvSpPr>
-        <p:spPr>
-          <a:xfrm>
-            <a:off x="4025511" y="4807774"/>
-            <a:ext cx="256032" cy="256032"/>
-          </a:xfrm>
-          <a:prstGeom prst="ellipse">
-            <a:avLst/>
-          </a:prstGeom>
-          <a:solidFill>
-            <a:srgbClr val="888888"/>
-          </a:solidFill>
-          <a:ln w="15240">
-            <a:solidFill>
-              <a:srgbClr val="FFFFFF"/>
-            </a:solidFill>
-            <a:prstDash val="solid"/>
-          </a:ln>
-        </p:spPr>
-      </p:sp>
-      <p:sp>
-        <p:nvSpPr>
-          <p:cNvPr id="40" name="Text 38"/>
-          <p:cNvSpPr/>
-          <p:nvPr/>
-        </p:nvSpPr>
-        <p:spPr>
-          <a:xfrm>
-            <a:off x="4025511" y="4807774"/>
-            <a:ext cx="256032" cy="256032"/>
-          </a:xfrm>
-          <a:prstGeom prst="rect">
-            <a:avLst/>
-          </a:prstGeom>
-          <a:noFill/>
-          <a:ln/>
-        </p:spPr>
-        <p:txBody>
-          <a:bodyPr wrap="square" lIns="0" tIns="0" rIns="0" bIns="0" rtlCol="0" anchor="ctr"/>
-          <a:lstStyle/>
-          <a:p>
-            <a:pPr algn="ctr" indent="0" marL="0">
-              <a:buNone/>
-            </a:pPr>
-            <a:r>
-              <a:rPr lang="en-US" sz="900" b="1" dirty="0">
-                <a:solidFill>
-                  <a:srgbClr val="FFFFFF"/>
-                </a:solidFill>
-                <a:latin typeface="Arial" pitchFamily="34" charset="0"/>
-                <a:ea typeface="Arial" pitchFamily="34" charset="-122"/>
-                <a:cs typeface="Arial" pitchFamily="34" charset="-120"/>
-              </a:rPr>
-              <a:t>15</a:t>
-            </a:r>
-            <a:endParaRPr lang="en-US" sz="900" dirty="0"/>
-          </a:p>
-        </p:txBody>
-      </p:sp>
-      <p:sp>
-        <p:nvSpPr>
-          <p:cNvPr id="41" name="Shape 39"/>
-          <p:cNvSpPr/>
-          <p:nvPr/>
-        </p:nvSpPr>
-        <p:spPr>
-          <a:xfrm>
-            <a:off x="4480751" y="4814199"/>
-            <a:ext cx="256032" cy="256032"/>
-          </a:xfrm>
-          <a:prstGeom prst="ellipse">
-            <a:avLst/>
-          </a:prstGeom>
-          <a:solidFill>
-            <a:srgbClr val="888888"/>
-          </a:solidFill>
-          <a:ln w="15240">
-            <a:solidFill>
-              <a:srgbClr val="FFFFFF"/>
-            </a:solidFill>
-            <a:prstDash val="solid"/>
-          </a:ln>
-        </p:spPr>
-      </p:sp>
-      <p:sp>
-        <p:nvSpPr>
-          <p:cNvPr id="42" name="Text 40"/>
-          <p:cNvSpPr/>
-          <p:nvPr/>
-        </p:nvSpPr>
-        <p:spPr>
-          <a:xfrm>
-            <a:off x="4480751" y="4814199"/>
-            <a:ext cx="256032" cy="256032"/>
-          </a:xfrm>
-          <a:prstGeom prst="rect">
-            <a:avLst/>
-          </a:prstGeom>
-          <a:noFill/>
-          <a:ln/>
-        </p:spPr>
-        <p:txBody>
-          <a:bodyPr wrap="square" lIns="0" tIns="0" rIns="0" bIns="0" rtlCol="0" anchor="ctr"/>
-          <a:lstStyle/>
-          <a:p>
-            <a:pPr algn="ctr" indent="0" marL="0">
-              <a:buNone/>
-            </a:pPr>
-            <a:r>
-              <a:rPr lang="en-US" sz="900" b="1" dirty="0">
-                <a:solidFill>
-                  <a:srgbClr val="FFFFFF"/>
-                </a:solidFill>
-                <a:latin typeface="Arial" pitchFamily="34" charset="0"/>
-                <a:ea typeface="Arial" pitchFamily="34" charset="-122"/>
-                <a:cs typeface="Arial" pitchFamily="34" charset="-120"/>
-              </a:rPr>
-              <a:t>15</a:t>
-            </a:r>
-            <a:endParaRPr lang="en-US" sz="900" dirty="0"/>
-          </a:p>
-        </p:txBody>
-      </p:sp>
-      <p:sp>
-        <p:nvSpPr>
-          <p:cNvPr id="43" name="Shape 41"/>
-          <p:cNvSpPr/>
-          <p:nvPr/>
-        </p:nvSpPr>
-        <p:spPr>
-          <a:xfrm>
-            <a:off x="4070299" y="4528086"/>
-            <a:ext cx="256032" cy="256032"/>
-          </a:xfrm>
-          <a:prstGeom prst="ellipse">
-            <a:avLst/>
-          </a:prstGeom>
-          <a:solidFill>
-            <a:srgbClr val="888888"/>
-          </a:solidFill>
-          <a:ln w="15240">
-            <a:solidFill>
-              <a:srgbClr val="FFFFFF"/>
-            </a:solidFill>
-            <a:prstDash val="solid"/>
-          </a:ln>
-        </p:spPr>
-      </p:sp>
-      <p:sp>
-        <p:nvSpPr>
-          <p:cNvPr id="44" name="Text 42"/>
-          <p:cNvSpPr/>
-          <p:nvPr/>
-        </p:nvSpPr>
-        <p:spPr>
-          <a:xfrm>
-            <a:off x="4070299" y="4528086"/>
-            <a:ext cx="256032" cy="256032"/>
-          </a:xfrm>
-          <a:prstGeom prst="rect">
-            <a:avLst/>
-          </a:prstGeom>
-          <a:noFill/>
-          <a:ln/>
-        </p:spPr>
-        <p:txBody>
-          <a:bodyPr wrap="square" lIns="0" tIns="0" rIns="0" bIns="0" rtlCol="0" anchor="ctr"/>
-          <a:lstStyle/>
-          <a:p>
-            <a:pPr algn="ctr" indent="0" marL="0">
-              <a:buNone/>
-            </a:pPr>
-            <a:r>
-              <a:rPr lang="en-US" sz="900" b="1" dirty="0">
-                <a:solidFill>
-                  <a:srgbClr val="FFFFFF"/>
-                </a:solidFill>
-                <a:latin typeface="Arial" pitchFamily="34" charset="0"/>
-                <a:ea typeface="Arial" pitchFamily="34" charset="-122"/>
-                <a:cs typeface="Arial" pitchFamily="34" charset="-120"/>
-              </a:rPr>
-              <a:t>15</a:t>
-            </a:r>
-            <a:endParaRPr lang="en-US" sz="900" dirty="0"/>
-          </a:p>
-        </p:txBody>
-      </p:sp>
-      <p:sp>
-        <p:nvSpPr>
-          <p:cNvPr id="45" name="Shape 43"/>
-          <p:cNvSpPr/>
-          <p:nvPr/>
-        </p:nvSpPr>
-        <p:spPr>
-          <a:xfrm>
-            <a:off x="4060277" y="4514118"/>
-            <a:ext cx="256032" cy="256032"/>
-          </a:xfrm>
-          <a:prstGeom prst="ellipse">
-            <a:avLst/>
-          </a:prstGeom>
-          <a:solidFill>
-            <a:srgbClr val="888888"/>
-          </a:solidFill>
-          <a:ln w="15240">
-            <a:solidFill>
-              <a:srgbClr val="FFFFFF"/>
-            </a:solidFill>
-            <a:prstDash val="solid"/>
-          </a:ln>
-        </p:spPr>
-      </p:sp>
-      <p:sp>
-        <p:nvSpPr>
-          <p:cNvPr id="46" name="Text 44"/>
-          <p:cNvSpPr/>
-          <p:nvPr/>
-        </p:nvSpPr>
-        <p:spPr>
-          <a:xfrm>
-            <a:off x="4060277" y="4514118"/>
-            <a:ext cx="256032" cy="256032"/>
-          </a:xfrm>
-          <a:prstGeom prst="rect">
-            <a:avLst/>
-          </a:prstGeom>
-          <a:noFill/>
-          <a:ln/>
-        </p:spPr>
-        <p:txBody>
-          <a:bodyPr wrap="square" lIns="0" tIns="0" rIns="0" bIns="0" rtlCol="0" anchor="ctr"/>
-          <a:lstStyle/>
-          <a:p>
-            <a:pPr algn="ctr" indent="0" marL="0">
-              <a:buNone/>
-            </a:pPr>
-            <a:r>
-              <a:rPr lang="en-US" sz="900" b="1" dirty="0">
-                <a:solidFill>
-                  <a:srgbClr val="FFFFFF"/>
-                </a:solidFill>
-                <a:latin typeface="Arial" pitchFamily="34" charset="0"/>
-                <a:ea typeface="Arial" pitchFamily="34" charset="-122"/>
-                <a:cs typeface="Arial" pitchFamily="34" charset="-120"/>
-              </a:rPr>
-              <a:t>15</a:t>
-            </a:r>
-            <a:endParaRPr lang="en-US" sz="900" dirty="0"/>
-          </a:p>
-        </p:txBody>
-      </p:sp>
-      <p:sp>
-        <p:nvSpPr>
-          <p:cNvPr id="47" name="Shape 45"/>
-          <p:cNvSpPr/>
-          <p:nvPr/>
-        </p:nvSpPr>
-        <p:spPr>
-          <a:xfrm>
-            <a:off x="4051804" y="4506009"/>
-            <a:ext cx="256032" cy="256032"/>
-          </a:xfrm>
-          <a:prstGeom prst="ellipse">
-            <a:avLst/>
-          </a:prstGeom>
-          <a:solidFill>
-            <a:srgbClr val="888888"/>
-          </a:solidFill>
-          <a:ln w="15240">
-            <a:solidFill>
-              <a:srgbClr val="FFFFFF"/>
-            </a:solidFill>
-            <a:prstDash val="solid"/>
-          </a:ln>
-        </p:spPr>
-      </p:sp>
-      <p:sp>
-        <p:nvSpPr>
-          <p:cNvPr id="48" name="Text 46"/>
-          <p:cNvSpPr/>
-          <p:nvPr/>
-        </p:nvSpPr>
-        <p:spPr>
-          <a:xfrm>
-            <a:off x="4051804" y="4506009"/>
-            <a:ext cx="256032" cy="256032"/>
-          </a:xfrm>
-          <a:prstGeom prst="rect">
-            <a:avLst/>
-          </a:prstGeom>
-          <a:noFill/>
-          <a:ln/>
-        </p:spPr>
-        <p:txBody>
-          <a:bodyPr wrap="square" lIns="0" tIns="0" rIns="0" bIns="0" rtlCol="0" anchor="ctr"/>
-          <a:lstStyle/>
-          <a:p>
-            <a:pPr algn="ctr" indent="0" marL="0">
-              <a:buNone/>
-            </a:pPr>
-            <a:r>
-              <a:rPr lang="en-US" sz="900" b="1" dirty="0">
-                <a:solidFill>
-                  <a:srgbClr val="FFFFFF"/>
-                </a:solidFill>
-                <a:latin typeface="Arial" pitchFamily="34" charset="0"/>
-                <a:ea typeface="Arial" pitchFamily="34" charset="-122"/>
-                <a:cs typeface="Arial" pitchFamily="34" charset="-120"/>
-              </a:rPr>
-              <a:t>15</a:t>
-            </a:r>
-            <a:endParaRPr lang="en-US" sz="900" dirty="0"/>
-          </a:p>
-        </p:txBody>
-      </p:sp>
-      <p:sp>
-        <p:nvSpPr>
-          <p:cNvPr id="49" name="Shape 47"/>
-          <p:cNvSpPr/>
-          <p:nvPr/>
-        </p:nvSpPr>
-        <p:spPr>
-          <a:xfrm>
-            <a:off x="4152860" y="4524495"/>
-            <a:ext cx="256032" cy="256032"/>
-          </a:xfrm>
-          <a:prstGeom prst="ellipse">
-            <a:avLst/>
-          </a:prstGeom>
-          <a:solidFill>
-            <a:srgbClr val="888888"/>
-          </a:solidFill>
-          <a:ln w="15240">
-            <a:solidFill>
-              <a:srgbClr val="FFFFFF"/>
-            </a:solidFill>
-            <a:prstDash val="solid"/>
-          </a:ln>
-        </p:spPr>
-      </p:sp>
-      <p:sp>
-        <p:nvSpPr>
-          <p:cNvPr id="50" name="Text 48"/>
-          <p:cNvSpPr/>
-          <p:nvPr/>
-        </p:nvSpPr>
-        <p:spPr>
-          <a:xfrm>
-            <a:off x="4152860" y="4524495"/>
-            <a:ext cx="256032" cy="256032"/>
-          </a:xfrm>
-          <a:prstGeom prst="rect">
-            <a:avLst/>
-          </a:prstGeom>
-          <a:noFill/>
-          <a:ln/>
-        </p:spPr>
-        <p:txBody>
-          <a:bodyPr wrap="square" lIns="0" tIns="0" rIns="0" bIns="0" rtlCol="0" anchor="ctr"/>
-          <a:lstStyle/>
-          <a:p>
-            <a:pPr algn="ctr" indent="0" marL="0">
-              <a:buNone/>
-            </a:pPr>
-            <a:r>
-              <a:rPr lang="en-US" sz="900" b="1" dirty="0">
-                <a:solidFill>
-                  <a:srgbClr val="FFFFFF"/>
-                </a:solidFill>
-                <a:latin typeface="Arial" pitchFamily="34" charset="0"/>
-                <a:ea typeface="Arial" pitchFamily="34" charset="-122"/>
-                <a:cs typeface="Arial" pitchFamily="34" charset="-120"/>
-              </a:rPr>
-              <a:t>15</a:t>
-            </a:r>
-            <a:endParaRPr lang="en-US" sz="900" dirty="0"/>
-          </a:p>
-        </p:txBody>
-      </p:sp>
-      <p:sp>
-        <p:nvSpPr>
-          <p:cNvPr id="51" name="Shape 49"/>
-          <p:cNvSpPr/>
-          <p:nvPr/>
-        </p:nvSpPr>
-        <p:spPr>
-          <a:xfrm>
-            <a:off x="4030058" y="4483545"/>
-            <a:ext cx="256032" cy="256032"/>
-          </a:xfrm>
-          <a:prstGeom prst="ellipse">
-            <a:avLst/>
-          </a:prstGeom>
-          <a:solidFill>
-            <a:srgbClr val="888888"/>
-          </a:solidFill>
-          <a:ln w="15240">
-            <a:solidFill>
-              <a:srgbClr val="FFFFFF"/>
-            </a:solidFill>
-            <a:prstDash val="solid"/>
-          </a:ln>
-        </p:spPr>
-      </p:sp>
-      <p:sp>
-        <p:nvSpPr>
-          <p:cNvPr id="52" name="Text 50"/>
-          <p:cNvSpPr/>
-          <p:nvPr/>
-        </p:nvSpPr>
-        <p:spPr>
-          <a:xfrm>
-            <a:off x="4030058" y="4483545"/>
-            <a:ext cx="256032" cy="256032"/>
-          </a:xfrm>
-          <a:prstGeom prst="rect">
-            <a:avLst/>
-          </a:prstGeom>
-          <a:noFill/>
-          <a:ln/>
-        </p:spPr>
-        <p:txBody>
-          <a:bodyPr wrap="square" lIns="0" tIns="0" rIns="0" bIns="0" rtlCol="0" anchor="ctr"/>
-          <a:lstStyle/>
-          <a:p>
-            <a:pPr algn="ctr" indent="0" marL="0">
-              <a:buNone/>
-            </a:pPr>
-            <a:r>
-              <a:rPr lang="en-US" sz="900" b="1" dirty="0">
-                <a:solidFill>
-                  <a:srgbClr val="FFFFFF"/>
-                </a:solidFill>
-                <a:latin typeface="Arial" pitchFamily="34" charset="0"/>
-                <a:ea typeface="Arial" pitchFamily="34" charset="-122"/>
-                <a:cs typeface="Arial" pitchFamily="34" charset="-120"/>
-              </a:rPr>
-              <a:t>15</a:t>
-            </a:r>
-            <a:endParaRPr lang="en-US" sz="900" dirty="0"/>
-          </a:p>
-        </p:txBody>
-      </p:sp>
-      <p:sp>
-        <p:nvSpPr>
-          <p:cNvPr id="53" name="Shape 51"/>
-          <p:cNvSpPr/>
-          <p:nvPr/>
-        </p:nvSpPr>
-        <p:spPr>
-          <a:xfrm>
-            <a:off x="4061194" y="4485333"/>
-            <a:ext cx="256032" cy="256032"/>
-          </a:xfrm>
-          <a:prstGeom prst="ellipse">
-            <a:avLst/>
-          </a:prstGeom>
-          <a:solidFill>
-            <a:srgbClr val="888888"/>
-          </a:solidFill>
-          <a:ln w="15240">
-            <a:solidFill>
-              <a:srgbClr val="FFFFFF"/>
-            </a:solidFill>
-            <a:prstDash val="solid"/>
-          </a:ln>
-        </p:spPr>
-      </p:sp>
-      <p:sp>
-        <p:nvSpPr>
-          <p:cNvPr id="54" name="Text 52"/>
-          <p:cNvSpPr/>
-          <p:nvPr/>
-        </p:nvSpPr>
-        <p:spPr>
-          <a:xfrm>
-            <a:off x="4061194" y="4485333"/>
-            <a:ext cx="256032" cy="256032"/>
-          </a:xfrm>
-          <a:prstGeom prst="rect">
-            <a:avLst/>
-          </a:prstGeom>
-          <a:noFill/>
-          <a:ln/>
-        </p:spPr>
-        <p:txBody>
-          <a:bodyPr wrap="square" lIns="0" tIns="0" rIns="0" bIns="0" rtlCol="0" anchor="ctr"/>
-          <a:lstStyle/>
-          <a:p>
-            <a:pPr algn="ctr" indent="0" marL="0">
-              <a:buNone/>
-            </a:pPr>
-            <a:r>
-              <a:rPr lang="en-US" sz="900" b="1" dirty="0">
-                <a:solidFill>
-                  <a:srgbClr val="FFFFFF"/>
-                </a:solidFill>
-                <a:latin typeface="Arial" pitchFamily="34" charset="0"/>
-                <a:ea typeface="Arial" pitchFamily="34" charset="-122"/>
-                <a:cs typeface="Arial" pitchFamily="34" charset="-120"/>
-              </a:rPr>
-              <a:t>15</a:t>
-            </a:r>
-            <a:endParaRPr lang="en-US" sz="900" dirty="0"/>
-          </a:p>
-        </p:txBody>
-      </p:sp>
-      <p:sp>
-        <p:nvSpPr>
-          <p:cNvPr id="55" name="Shape 53"/>
-          <p:cNvSpPr/>
-          <p:nvPr/>
-        </p:nvSpPr>
-        <p:spPr>
-          <a:xfrm>
-            <a:off x="4016644" y="4463699"/>
-            <a:ext cx="256032" cy="256032"/>
-          </a:xfrm>
-          <a:prstGeom prst="ellipse">
-            <a:avLst/>
-          </a:prstGeom>
-          <a:solidFill>
-            <a:srgbClr val="888888"/>
-          </a:solidFill>
-          <a:ln w="15240">
-            <a:solidFill>
-              <a:srgbClr val="FFFFFF"/>
-            </a:solidFill>
-            <a:prstDash val="solid"/>
-          </a:ln>
-        </p:spPr>
-      </p:sp>
-      <p:sp>
-        <p:nvSpPr>
-          <p:cNvPr id="56" name="Text 54"/>
-          <p:cNvSpPr/>
-          <p:nvPr/>
-        </p:nvSpPr>
-        <p:spPr>
-          <a:xfrm>
-            <a:off x="4016644" y="4463699"/>
-            <a:ext cx="256032" cy="256032"/>
-          </a:xfrm>
-          <a:prstGeom prst="rect">
-            <a:avLst/>
-          </a:prstGeom>
-          <a:noFill/>
-          <a:ln/>
-        </p:spPr>
-        <p:txBody>
-          <a:bodyPr wrap="square" lIns="0" tIns="0" rIns="0" bIns="0" rtlCol="0" anchor="ctr"/>
-          <a:lstStyle/>
-          <a:p>
-            <a:pPr algn="ctr" indent="0" marL="0">
-              <a:buNone/>
-            </a:pPr>
-            <a:r>
-              <a:rPr lang="en-US" sz="900" b="1" dirty="0">
-                <a:solidFill>
-                  <a:srgbClr val="FFFFFF"/>
-                </a:solidFill>
-                <a:latin typeface="Arial" pitchFamily="34" charset="0"/>
-                <a:ea typeface="Arial" pitchFamily="34" charset="-122"/>
-                <a:cs typeface="Arial" pitchFamily="34" charset="-120"/>
-              </a:rPr>
-              <a:t>15</a:t>
-            </a:r>
-            <a:endParaRPr lang="en-US" sz="900" dirty="0"/>
-          </a:p>
-        </p:txBody>
-      </p:sp>
-      <p:sp>
-        <p:nvSpPr>
-          <p:cNvPr id="57" name="Shape 55"/>
-          <p:cNvSpPr/>
-          <p:nvPr/>
-        </p:nvSpPr>
-        <p:spPr>
-          <a:xfrm>
-            <a:off x="4049583" y="4463190"/>
-            <a:ext cx="256032" cy="256032"/>
-          </a:xfrm>
-          <a:prstGeom prst="ellipse">
-            <a:avLst/>
-          </a:prstGeom>
-          <a:solidFill>
-            <a:srgbClr val="888888"/>
-          </a:solidFill>
-          <a:ln w="15240">
-            <a:solidFill>
-              <a:srgbClr val="FFFFFF"/>
-            </a:solidFill>
-            <a:prstDash val="solid"/>
-          </a:ln>
-        </p:spPr>
-      </p:sp>
-      <p:sp>
-        <p:nvSpPr>
-          <p:cNvPr id="58" name="Text 56"/>
-          <p:cNvSpPr/>
-          <p:nvPr/>
-        </p:nvSpPr>
-        <p:spPr>
-          <a:xfrm>
-            <a:off x="4049583" y="4463190"/>
-            <a:ext cx="256032" cy="256032"/>
-          </a:xfrm>
-          <a:prstGeom prst="rect">
-            <a:avLst/>
-          </a:prstGeom>
-          <a:noFill/>
-          <a:ln/>
-        </p:spPr>
-        <p:txBody>
-          <a:bodyPr wrap="square" lIns="0" tIns="0" rIns="0" bIns="0" rtlCol="0" anchor="ctr"/>
-          <a:lstStyle/>
-          <a:p>
-            <a:pPr algn="ctr" indent="0" marL="0">
-              <a:buNone/>
-            </a:pPr>
-            <a:r>
-              <a:rPr lang="en-US" sz="900" b="1" dirty="0">
-                <a:solidFill>
-                  <a:srgbClr val="FFFFFF"/>
-                </a:solidFill>
-                <a:latin typeface="Arial" pitchFamily="34" charset="0"/>
-                <a:ea typeface="Arial" pitchFamily="34" charset="-122"/>
-                <a:cs typeface="Arial" pitchFamily="34" charset="-120"/>
-              </a:rPr>
-              <a:t>15</a:t>
-            </a:r>
-            <a:endParaRPr lang="en-US" sz="900" dirty="0"/>
-          </a:p>
-        </p:txBody>
-      </p:sp>
-      <p:sp>
-        <p:nvSpPr>
-          <p:cNvPr id="59" name="Shape 57"/>
-          <p:cNvSpPr/>
-          <p:nvPr/>
-        </p:nvSpPr>
-        <p:spPr>
-          <a:xfrm>
-            <a:off x="1951674" y="2986530"/>
-            <a:ext cx="256032" cy="256032"/>
-          </a:xfrm>
-          <a:prstGeom prst="ellipse">
-            <a:avLst/>
-          </a:prstGeom>
-          <a:solidFill>
-            <a:srgbClr val="888888"/>
-          </a:solidFill>
-          <a:ln w="15240">
-            <a:solidFill>
-              <a:srgbClr val="FFFFFF"/>
-            </a:solidFill>
-            <a:prstDash val="solid"/>
-          </a:ln>
-        </p:spPr>
-      </p:sp>
-      <p:sp>
-        <p:nvSpPr>
-          <p:cNvPr id="60" name="Text 58"/>
-          <p:cNvSpPr/>
-          <p:nvPr/>
-        </p:nvSpPr>
-        <p:spPr>
-          <a:xfrm>
-            <a:off x="1951674" y="2986530"/>
-            <a:ext cx="256032" cy="256032"/>
-          </a:xfrm>
-          <a:prstGeom prst="rect">
-            <a:avLst/>
-          </a:prstGeom>
-          <a:noFill/>
-          <a:ln/>
-        </p:spPr>
-        <p:txBody>
-          <a:bodyPr wrap="square" lIns="0" tIns="0" rIns="0" bIns="0" rtlCol="0" anchor="ctr"/>
-          <a:lstStyle/>
-          <a:p>
-            <a:pPr algn="ctr" indent="0" marL="0">
-              <a:buNone/>
-            </a:pPr>
-            <a:r>
-              <a:rPr lang="en-US" sz="900" b="1" dirty="0">
-                <a:solidFill>
-                  <a:srgbClr val="FFFFFF"/>
-                </a:solidFill>
-                <a:latin typeface="Arial" pitchFamily="34" charset="0"/>
-                <a:ea typeface="Arial" pitchFamily="34" charset="-122"/>
-                <a:cs typeface="Arial" pitchFamily="34" charset="-120"/>
-              </a:rPr>
-              <a:t>16</a:t>
-            </a:r>
-            <a:endParaRPr lang="en-US" sz="900" dirty="0"/>
-          </a:p>
-        </p:txBody>
-      </p:sp>
-      <p:sp>
-        <p:nvSpPr>
-          <p:cNvPr id="61" name="Shape 59"/>
-          <p:cNvSpPr/>
-          <p:nvPr/>
-        </p:nvSpPr>
-        <p:spPr>
-          <a:xfrm>
-            <a:off x="2166838" y="3042803"/>
-            <a:ext cx="256032" cy="256032"/>
-          </a:xfrm>
-          <a:prstGeom prst="ellipse">
-            <a:avLst/>
-          </a:prstGeom>
-          <a:solidFill>
-            <a:srgbClr val="888888"/>
-          </a:solidFill>
-          <a:ln w="15240">
-            <a:solidFill>
-              <a:srgbClr val="FFFFFF"/>
-            </a:solidFill>
-            <a:prstDash val="solid"/>
-          </a:ln>
-        </p:spPr>
-      </p:sp>
-      <p:sp>
-        <p:nvSpPr>
-          <p:cNvPr id="62" name="Text 60"/>
-          <p:cNvSpPr/>
-          <p:nvPr/>
-        </p:nvSpPr>
-        <p:spPr>
-          <a:xfrm>
-            <a:off x="2166838" y="3042803"/>
-            <a:ext cx="256032" cy="256032"/>
-          </a:xfrm>
-          <a:prstGeom prst="rect">
-            <a:avLst/>
-          </a:prstGeom>
-          <a:noFill/>
-          <a:ln/>
-        </p:spPr>
-        <p:txBody>
-          <a:bodyPr wrap="square" lIns="0" tIns="0" rIns="0" bIns="0" rtlCol="0" anchor="ctr"/>
-          <a:lstStyle/>
-          <a:p>
-            <a:pPr algn="ctr" indent="0" marL="0">
-              <a:buNone/>
-            </a:pPr>
-            <a:r>
-              <a:rPr lang="en-US" sz="900" b="1" dirty="0">
-                <a:solidFill>
-                  <a:srgbClr val="FFFFFF"/>
-                </a:solidFill>
-                <a:latin typeface="Arial" pitchFamily="34" charset="0"/>
-                <a:ea typeface="Arial" pitchFamily="34" charset="-122"/>
-                <a:cs typeface="Arial" pitchFamily="34" charset="-120"/>
-              </a:rPr>
-              <a:t>17</a:t>
-            </a:r>
-            <a:endParaRPr lang="en-US" sz="900" dirty="0"/>
-          </a:p>
-        </p:txBody>
-      </p:sp>
-      <p:sp>
-        <p:nvSpPr>
-          <p:cNvPr id="63" name="Shape 61"/>
-          <p:cNvSpPr/>
-          <p:nvPr/>
-        </p:nvSpPr>
-        <p:spPr>
-          <a:xfrm>
-            <a:off x="4141262" y="4098327"/>
-            <a:ext cx="256032" cy="256032"/>
-          </a:xfrm>
-          <a:prstGeom prst="ellipse">
-            <a:avLst/>
-          </a:prstGeom>
-          <a:solidFill>
-            <a:srgbClr val="888888"/>
-          </a:solidFill>
-          <a:ln w="15240">
-            <a:solidFill>
-              <a:srgbClr val="FFFFFF"/>
-            </a:solidFill>
-            <a:prstDash val="solid"/>
-          </a:ln>
-        </p:spPr>
-      </p:sp>
-      <p:sp>
-        <p:nvSpPr>
-          <p:cNvPr id="64" name="Text 62"/>
-          <p:cNvSpPr/>
-          <p:nvPr/>
-        </p:nvSpPr>
-        <p:spPr>
-          <a:xfrm>
-            <a:off x="4141262" y="4098327"/>
-            <a:ext cx="256032" cy="256032"/>
-          </a:xfrm>
-          <a:prstGeom prst="rect">
-            <a:avLst/>
-          </a:prstGeom>
-          <a:noFill/>
-          <a:ln/>
-        </p:spPr>
-        <p:txBody>
-          <a:bodyPr wrap="square" lIns="0" tIns="0" rIns="0" bIns="0" rtlCol="0" anchor="ctr"/>
-          <a:lstStyle/>
-          <a:p>
-            <a:pPr algn="ctr" indent="0" marL="0">
-              <a:buNone/>
-            </a:pPr>
-            <a:r>
-              <a:rPr lang="en-US" sz="900" b="1" dirty="0">
-                <a:solidFill>
-                  <a:srgbClr val="FFFFFF"/>
-                </a:solidFill>
-                <a:latin typeface="Arial" pitchFamily="34" charset="0"/>
-                <a:ea typeface="Arial" pitchFamily="34" charset="-122"/>
-                <a:cs typeface="Arial" pitchFamily="34" charset="-120"/>
-              </a:rPr>
-              <a:t>18</a:t>
-            </a:r>
-            <a:endParaRPr lang="en-US" sz="900" dirty="0"/>
-          </a:p>
-        </p:txBody>
-      </p:sp>
-      <p:sp>
-        <p:nvSpPr>
-          <p:cNvPr id="65" name="Shape 63"/>
-          <p:cNvSpPr/>
-          <p:nvPr/>
-        </p:nvSpPr>
-        <p:spPr>
-          <a:xfrm>
-            <a:off x="923544" y="2614451"/>
-            <a:ext cx="256032" cy="256032"/>
-          </a:xfrm>
-          <a:prstGeom prst="ellipse">
-            <a:avLst/>
-          </a:prstGeom>
-          <a:solidFill>
-            <a:srgbClr val="888888"/>
-          </a:solidFill>
-          <a:ln w="15240">
-            <a:solidFill>
-              <a:srgbClr val="FFFFFF"/>
-            </a:solidFill>
-            <a:prstDash val="solid"/>
-          </a:ln>
-        </p:spPr>
-      </p:sp>
-      <p:sp>
-        <p:nvSpPr>
-          <p:cNvPr id="66" name="Text 64"/>
-          <p:cNvSpPr/>
-          <p:nvPr/>
-        </p:nvSpPr>
-        <p:spPr>
-          <a:xfrm>
-            <a:off x="923544" y="2614451"/>
-            <a:ext cx="256032" cy="256032"/>
-          </a:xfrm>
-          <a:prstGeom prst="rect">
-            <a:avLst/>
-          </a:prstGeom>
-          <a:noFill/>
-          <a:ln/>
-        </p:spPr>
-        <p:txBody>
-          <a:bodyPr wrap="square" lIns="0" tIns="0" rIns="0" bIns="0" rtlCol="0" anchor="ctr"/>
-          <a:lstStyle/>
-          <a:p>
-            <a:pPr algn="ctr" indent="0" marL="0">
-              <a:buNone/>
-            </a:pPr>
-            <a:r>
-              <a:rPr lang="en-US" sz="900" b="1" dirty="0">
-                <a:solidFill>
-                  <a:srgbClr val="FFFFFF"/>
-                </a:solidFill>
-                <a:latin typeface="Arial" pitchFamily="34" charset="0"/>
-                <a:ea typeface="Arial" pitchFamily="34" charset="-122"/>
-                <a:cs typeface="Arial" pitchFamily="34" charset="-120"/>
-              </a:rPr>
-              <a:t>18</a:t>
-            </a:r>
-            <a:endParaRPr lang="en-US" sz="900" dirty="0"/>
-          </a:p>
-        </p:txBody>
-      </p:sp>
-      <p:sp>
-        <p:nvSpPr>
-          <p:cNvPr id="67" name="Shape 65"/>
-          <p:cNvSpPr/>
-          <p:nvPr/>
-        </p:nvSpPr>
-        <p:spPr>
-          <a:xfrm>
-            <a:off x="1312103" y="2692049"/>
-            <a:ext cx="256032" cy="256032"/>
-          </a:xfrm>
-          <a:prstGeom prst="ellipse">
-            <a:avLst/>
-          </a:prstGeom>
-          <a:solidFill>
-            <a:srgbClr val="888888"/>
-          </a:solidFill>
-          <a:ln w="15240">
-            <a:solidFill>
-              <a:srgbClr val="FFFFFF"/>
-            </a:solidFill>
-            <a:prstDash val="solid"/>
-          </a:ln>
-        </p:spPr>
-      </p:sp>
-      <p:sp>
-        <p:nvSpPr>
-          <p:cNvPr id="68" name="Text 66"/>
-          <p:cNvSpPr/>
-          <p:nvPr/>
-        </p:nvSpPr>
-        <p:spPr>
-          <a:xfrm>
-            <a:off x="1312103" y="2692049"/>
-            <a:ext cx="256032" cy="256032"/>
-          </a:xfrm>
-          <a:prstGeom prst="rect">
-            <a:avLst/>
-          </a:prstGeom>
-          <a:noFill/>
-          <a:ln/>
-        </p:spPr>
-        <p:txBody>
-          <a:bodyPr wrap="square" lIns="0" tIns="0" rIns="0" bIns="0" rtlCol="0" anchor="ctr"/>
-          <a:lstStyle/>
-          <a:p>
-            <a:pPr algn="ctr" indent="0" marL="0">
-              <a:buNone/>
-            </a:pPr>
-            <a:r>
-              <a:rPr lang="en-US" sz="900" b="1" dirty="0">
-                <a:solidFill>
-                  <a:srgbClr val="FFFFFF"/>
-                </a:solidFill>
-                <a:latin typeface="Arial" pitchFamily="34" charset="0"/>
-                <a:ea typeface="Arial" pitchFamily="34" charset="-122"/>
-                <a:cs typeface="Arial" pitchFamily="34" charset="-120"/>
-              </a:rPr>
-              <a:t>18</a:t>
-            </a:r>
-            <a:endParaRPr lang="en-US" sz="900" dirty="0"/>
-          </a:p>
-        </p:txBody>
-      </p:sp>
-      <p:sp>
-        <p:nvSpPr>
-          <p:cNvPr id="69" name="Shape 67"/>
-          <p:cNvSpPr/>
-          <p:nvPr/>
-        </p:nvSpPr>
-        <p:spPr>
-          <a:xfrm>
-            <a:off x="2324373" y="2212960"/>
-            <a:ext cx="256032" cy="256032"/>
-          </a:xfrm>
-          <a:prstGeom prst="ellipse">
-            <a:avLst/>
-          </a:prstGeom>
-          <a:solidFill>
-            <a:srgbClr val="888888"/>
-          </a:solidFill>
-          <a:ln w="15240">
-            <a:solidFill>
-              <a:srgbClr val="FFFFFF"/>
-            </a:solidFill>
-            <a:prstDash val="solid"/>
-          </a:ln>
-        </p:spPr>
-      </p:sp>
-      <p:sp>
-        <p:nvSpPr>
-          <p:cNvPr id="70" name="Text 68"/>
-          <p:cNvSpPr/>
-          <p:nvPr/>
-        </p:nvSpPr>
-        <p:spPr>
-          <a:xfrm>
-            <a:off x="2324373" y="2212960"/>
-            <a:ext cx="256032" cy="256032"/>
-          </a:xfrm>
-          <a:prstGeom prst="rect">
-            <a:avLst/>
-          </a:prstGeom>
-          <a:noFill/>
-          <a:ln/>
-        </p:spPr>
-        <p:txBody>
-          <a:bodyPr wrap="square" lIns="0" tIns="0" rIns="0" bIns="0" rtlCol="0" anchor="ctr"/>
-          <a:lstStyle/>
-          <a:p>
-            <a:pPr algn="ctr" indent="0" marL="0">
-              <a:buNone/>
-            </a:pPr>
-            <a:r>
-              <a:rPr lang="en-US" sz="900" b="1" dirty="0">
-                <a:solidFill>
-                  <a:srgbClr val="FFFFFF"/>
-                </a:solidFill>
-                <a:latin typeface="Arial" pitchFamily="34" charset="0"/>
-                <a:ea typeface="Arial" pitchFamily="34" charset="-122"/>
-                <a:cs typeface="Arial" pitchFamily="34" charset="-120"/>
-              </a:rPr>
-              <a:t>18</a:t>
-            </a:r>
-            <a:endParaRPr lang="en-US" sz="900" dirty="0"/>
-          </a:p>
-        </p:txBody>
-      </p:sp>
-      <p:sp>
-        <p:nvSpPr>
-          <p:cNvPr id="71" name="Shape 69"/>
-          <p:cNvSpPr/>
-          <p:nvPr/>
-        </p:nvSpPr>
-        <p:spPr>
-          <a:xfrm>
-            <a:off x="2808303" y="3076919"/>
-            <a:ext cx="256032" cy="256032"/>
-          </a:xfrm>
-          <a:prstGeom prst="ellipse">
-            <a:avLst/>
-          </a:prstGeom>
-          <a:solidFill>
-            <a:srgbClr val="888888"/>
-          </a:solidFill>
-          <a:ln w="15240">
-            <a:solidFill>
-              <a:srgbClr val="FFFFFF"/>
-            </a:solidFill>
-            <a:prstDash val="solid"/>
-          </a:ln>
-        </p:spPr>
-      </p:sp>
-      <p:sp>
-        <p:nvSpPr>
-          <p:cNvPr id="72" name="Text 70"/>
-          <p:cNvSpPr/>
-          <p:nvPr/>
-        </p:nvSpPr>
-        <p:spPr>
-          <a:xfrm>
-            <a:off x="2808303" y="3076919"/>
-            <a:ext cx="256032" cy="256032"/>
-          </a:xfrm>
-          <a:prstGeom prst="rect">
-            <a:avLst/>
-          </a:prstGeom>
-          <a:noFill/>
-          <a:ln/>
-        </p:spPr>
-        <p:txBody>
-          <a:bodyPr wrap="square" lIns="0" tIns="0" rIns="0" bIns="0" rtlCol="0" anchor="ctr"/>
-          <a:lstStyle/>
-          <a:p>
-            <a:pPr algn="ctr" indent="0" marL="0">
-              <a:buNone/>
-            </a:pPr>
-            <a:r>
-              <a:rPr lang="en-US" sz="900" b="1" dirty="0">
-                <a:solidFill>
-                  <a:srgbClr val="FFFFFF"/>
-                </a:solidFill>
-                <a:latin typeface="Arial" pitchFamily="34" charset="0"/>
-                <a:ea typeface="Arial" pitchFamily="34" charset="-122"/>
-                <a:cs typeface="Arial" pitchFamily="34" charset="-120"/>
-              </a:rPr>
-              <a:t>18</a:t>
-            </a:r>
-            <a:endParaRPr lang="en-US" sz="900" dirty="0"/>
-          </a:p>
-        </p:txBody>
-      </p:sp>
-      <p:sp>
-        <p:nvSpPr>
-          <p:cNvPr id="73" name="Shape 71"/>
-          <p:cNvSpPr/>
-          <p:nvPr/>
-        </p:nvSpPr>
-        <p:spPr>
-          <a:xfrm>
-            <a:off x="4309036" y="4528165"/>
-            <a:ext cx="256032" cy="256032"/>
-          </a:xfrm>
-          <a:prstGeom prst="ellipse">
-            <a:avLst/>
-          </a:prstGeom>
-          <a:solidFill>
-            <a:srgbClr val="888888"/>
-          </a:solidFill>
-          <a:ln w="15240">
-            <a:solidFill>
-              <a:srgbClr val="FFFFFF"/>
-            </a:solidFill>
-            <a:prstDash val="solid"/>
-          </a:ln>
-        </p:spPr>
-      </p:sp>
-      <p:sp>
-        <p:nvSpPr>
-          <p:cNvPr id="74" name="Text 72"/>
-          <p:cNvSpPr/>
-          <p:nvPr/>
-        </p:nvSpPr>
-        <p:spPr>
-          <a:xfrm>
-            <a:off x="4309036" y="4528165"/>
-            <a:ext cx="256032" cy="256032"/>
-          </a:xfrm>
-          <a:prstGeom prst="rect">
-            <a:avLst/>
-          </a:prstGeom>
-          <a:noFill/>
-          <a:ln/>
-        </p:spPr>
-        <p:txBody>
-          <a:bodyPr wrap="square" lIns="0" tIns="0" rIns="0" bIns="0" rtlCol="0" anchor="ctr"/>
-          <a:lstStyle/>
-          <a:p>
-            <a:pPr algn="ctr" indent="0" marL="0">
-              <a:buNone/>
-            </a:pPr>
-            <a:r>
-              <a:rPr lang="en-US" sz="900" b="1" dirty="0">
-                <a:solidFill>
-                  <a:srgbClr val="FFFFFF"/>
-                </a:solidFill>
-                <a:latin typeface="Arial" pitchFamily="34" charset="0"/>
-                <a:ea typeface="Arial" pitchFamily="34" charset="-122"/>
-                <a:cs typeface="Arial" pitchFamily="34" charset="-120"/>
-              </a:rPr>
-              <a:t>18</a:t>
-            </a:r>
-            <a:endParaRPr lang="en-US" sz="900" dirty="0"/>
-          </a:p>
-        </p:txBody>
-      </p:sp>
-      <p:sp>
-        <p:nvSpPr>
-          <p:cNvPr id="75" name="Shape 73"/>
-          <p:cNvSpPr/>
-          <p:nvPr/>
-        </p:nvSpPr>
-        <p:spPr>
-          <a:xfrm>
-            <a:off x="1903172" y="2385110"/>
-            <a:ext cx="256032" cy="256032"/>
-          </a:xfrm>
-          <a:prstGeom prst="ellipse">
-            <a:avLst/>
-          </a:prstGeom>
-          <a:solidFill>
-            <a:srgbClr val="888888"/>
-          </a:solidFill>
-          <a:ln w="15240">
-            <a:solidFill>
-              <a:srgbClr val="FFFFFF"/>
-            </a:solidFill>
-            <a:prstDash val="solid"/>
-          </a:ln>
-        </p:spPr>
-      </p:sp>
-      <p:sp>
-        <p:nvSpPr>
-          <p:cNvPr id="76" name="Text 74"/>
-          <p:cNvSpPr/>
-          <p:nvPr/>
-        </p:nvSpPr>
-        <p:spPr>
-          <a:xfrm>
-            <a:off x="1903172" y="2385110"/>
-            <a:ext cx="256032" cy="256032"/>
-          </a:xfrm>
-          <a:prstGeom prst="rect">
-            <a:avLst/>
-          </a:prstGeom>
-          <a:noFill/>
-          <a:ln/>
-        </p:spPr>
-        <p:txBody>
-          <a:bodyPr wrap="square" lIns="0" tIns="0" rIns="0" bIns="0" rtlCol="0" anchor="ctr"/>
-          <a:lstStyle/>
-          <a:p>
-            <a:pPr algn="ctr" indent="0" marL="0">
-              <a:buNone/>
-            </a:pPr>
-            <a:r>
-              <a:rPr lang="en-US" sz="900" b="1" dirty="0">
-                <a:solidFill>
-                  <a:srgbClr val="FFFFFF"/>
-                </a:solidFill>
-                <a:latin typeface="Arial" pitchFamily="34" charset="0"/>
-                <a:ea typeface="Arial" pitchFamily="34" charset="-122"/>
-                <a:cs typeface="Arial" pitchFamily="34" charset="-120"/>
-              </a:rPr>
-              <a:t>18</a:t>
-            </a:r>
-            <a:endParaRPr lang="en-US" sz="900" dirty="0"/>
-          </a:p>
-        </p:txBody>
-      </p:sp>
-      <p:sp>
-        <p:nvSpPr>
-          <p:cNvPr id="77" name="Shape 75"/>
-          <p:cNvSpPr/>
-          <p:nvPr/>
-        </p:nvSpPr>
-        <p:spPr>
-          <a:xfrm>
-            <a:off x="1994009" y="2973578"/>
-            <a:ext cx="256032" cy="256032"/>
-          </a:xfrm>
-          <a:prstGeom prst="ellipse">
-            <a:avLst/>
-          </a:prstGeom>
-          <a:solidFill>
-            <a:srgbClr val="888888"/>
-          </a:solidFill>
-          <a:ln w="15240">
-            <a:solidFill>
-              <a:srgbClr val="FFFFFF"/>
-            </a:solidFill>
-            <a:prstDash val="solid"/>
-          </a:ln>
-        </p:spPr>
-      </p:sp>
-      <p:sp>
-        <p:nvSpPr>
-          <p:cNvPr id="78" name="Text 76"/>
-          <p:cNvSpPr/>
-          <p:nvPr/>
-        </p:nvSpPr>
-        <p:spPr>
-          <a:xfrm>
-            <a:off x="1994009" y="2973578"/>
-            <a:ext cx="256032" cy="256032"/>
-          </a:xfrm>
-          <a:prstGeom prst="rect">
-            <a:avLst/>
-          </a:prstGeom>
-          <a:noFill/>
-          <a:ln/>
-        </p:spPr>
-        <p:txBody>
-          <a:bodyPr wrap="square" lIns="0" tIns="0" rIns="0" bIns="0" rtlCol="0" anchor="ctr"/>
-          <a:lstStyle/>
-          <a:p>
-            <a:pPr algn="ctr" indent="0" marL="0">
-              <a:buNone/>
-            </a:pPr>
-            <a:r>
-              <a:rPr lang="en-US" sz="900" b="1" dirty="0">
-                <a:solidFill>
-                  <a:srgbClr val="FFFFFF"/>
-                </a:solidFill>
-                <a:latin typeface="Arial" pitchFamily="34" charset="0"/>
-                <a:ea typeface="Arial" pitchFamily="34" charset="-122"/>
-                <a:cs typeface="Arial" pitchFamily="34" charset="-120"/>
-              </a:rPr>
-              <a:t>18</a:t>
-            </a:r>
-            <a:endParaRPr lang="en-US" sz="900" dirty="0"/>
-          </a:p>
-        </p:txBody>
-      </p:sp>
-      <p:sp>
-        <p:nvSpPr>
-          <p:cNvPr id="79" name="Shape 77"/>
-          <p:cNvSpPr/>
-          <p:nvPr/>
-        </p:nvSpPr>
-        <p:spPr>
-          <a:xfrm>
-            <a:off x="2108708" y="3016063"/>
-            <a:ext cx="256032" cy="256032"/>
-          </a:xfrm>
-          <a:prstGeom prst="ellipse">
-            <a:avLst/>
-          </a:prstGeom>
-          <a:solidFill>
-            <a:srgbClr val="888888"/>
-          </a:solidFill>
-          <a:ln w="15240">
-            <a:solidFill>
-              <a:srgbClr val="FFFFFF"/>
-            </a:solidFill>
-            <a:prstDash val="solid"/>
-          </a:ln>
-        </p:spPr>
-      </p:sp>
-      <p:sp>
-        <p:nvSpPr>
-          <p:cNvPr id="80" name="Text 78"/>
-          <p:cNvSpPr/>
-          <p:nvPr/>
-        </p:nvSpPr>
-        <p:spPr>
-          <a:xfrm>
-            <a:off x="2108708" y="3016063"/>
-            <a:ext cx="256032" cy="256032"/>
-          </a:xfrm>
-          <a:prstGeom prst="rect">
-            <a:avLst/>
-          </a:prstGeom>
-          <a:noFill/>
-          <a:ln/>
-        </p:spPr>
-        <p:txBody>
-          <a:bodyPr wrap="square" lIns="0" tIns="0" rIns="0" bIns="0" rtlCol="0" anchor="ctr"/>
-          <a:lstStyle/>
-          <a:p>
-            <a:pPr algn="ctr" indent="0" marL="0">
-              <a:buNone/>
-            </a:pPr>
-            <a:r>
-              <a:rPr lang="en-US" sz="900" b="1" dirty="0">
-                <a:solidFill>
-                  <a:srgbClr val="FFFFFF"/>
-                </a:solidFill>
-                <a:latin typeface="Arial" pitchFamily="34" charset="0"/>
-                <a:ea typeface="Arial" pitchFamily="34" charset="-122"/>
-                <a:cs typeface="Arial" pitchFamily="34" charset="-120"/>
-              </a:rPr>
-              <a:t>20</a:t>
-            </a:r>
-            <a:endParaRPr lang="en-US" sz="900" dirty="0"/>
-          </a:p>
-        </p:txBody>
-      </p:sp>
-      <p:sp>
-        <p:nvSpPr>
-          <p:cNvPr id="81" name="Shape 79"/>
-          <p:cNvSpPr/>
-          <p:nvPr/>
-        </p:nvSpPr>
-        <p:spPr>
-          <a:xfrm>
-            <a:off x="2127554" y="3027123"/>
-            <a:ext cx="256032" cy="256032"/>
-          </a:xfrm>
-          <a:prstGeom prst="ellipse">
-            <a:avLst/>
-          </a:prstGeom>
-          <a:solidFill>
-            <a:srgbClr val="888888"/>
-          </a:solidFill>
-          <a:ln w="15240">
-            <a:solidFill>
-              <a:srgbClr val="FFFFFF"/>
-            </a:solidFill>
-            <a:prstDash val="solid"/>
-          </a:ln>
-        </p:spPr>
-      </p:sp>
-      <p:sp>
-        <p:nvSpPr>
-          <p:cNvPr id="82" name="Text 80"/>
-          <p:cNvSpPr/>
-          <p:nvPr/>
-        </p:nvSpPr>
-        <p:spPr>
-          <a:xfrm>
-            <a:off x="2127554" y="3027123"/>
-            <a:ext cx="256032" cy="256032"/>
-          </a:xfrm>
-          <a:prstGeom prst="rect">
-            <a:avLst/>
-          </a:prstGeom>
-          <a:noFill/>
-          <a:ln/>
-        </p:spPr>
-        <p:txBody>
-          <a:bodyPr wrap="square" lIns="0" tIns="0" rIns="0" bIns="0" rtlCol="0" anchor="ctr"/>
-          <a:lstStyle/>
-          <a:p>
-            <a:pPr algn="ctr" indent="0" marL="0">
-              <a:buNone/>
-            </a:pPr>
-            <a:r>
-              <a:rPr lang="en-US" sz="900" b="1" dirty="0">
-                <a:solidFill>
-                  <a:srgbClr val="FFFFFF"/>
-                </a:solidFill>
-                <a:latin typeface="Arial" pitchFamily="34" charset="0"/>
-                <a:ea typeface="Arial" pitchFamily="34" charset="-122"/>
-                <a:cs typeface="Arial" pitchFamily="34" charset="-120"/>
-              </a:rPr>
-              <a:t>20</a:t>
-            </a:r>
-            <a:endParaRPr lang="en-US" sz="900" dirty="0"/>
-          </a:p>
-        </p:txBody>
-      </p:sp>
-      <p:sp>
-        <p:nvSpPr>
-          <p:cNvPr id="83" name="Shape 81"/>
-          <p:cNvSpPr/>
-          <p:nvPr/>
-        </p:nvSpPr>
-        <p:spPr>
-          <a:xfrm>
-            <a:off x="4255585" y="4862994"/>
-            <a:ext cx="256032" cy="256032"/>
-          </a:xfrm>
-          <a:prstGeom prst="ellipse">
-            <a:avLst/>
-          </a:prstGeom>
-          <a:solidFill>
-            <a:srgbClr val="888888"/>
-          </a:solidFill>
-          <a:ln w="15240">
-            <a:solidFill>
-              <a:srgbClr val="FFFFFF"/>
-            </a:solidFill>
-            <a:prstDash val="solid"/>
-          </a:ln>
-        </p:spPr>
-      </p:sp>
-      <p:sp>
-        <p:nvSpPr>
-          <p:cNvPr id="84" name="Text 82"/>
-          <p:cNvSpPr/>
-          <p:nvPr/>
-        </p:nvSpPr>
-        <p:spPr>
-          <a:xfrm>
-            <a:off x="4255585" y="4862994"/>
-            <a:ext cx="256032" cy="256032"/>
-          </a:xfrm>
-          <a:prstGeom prst="rect">
-            <a:avLst/>
-          </a:prstGeom>
-          <a:noFill/>
-          <a:ln/>
-        </p:spPr>
-        <p:txBody>
-          <a:bodyPr wrap="square" lIns="0" tIns="0" rIns="0" bIns="0" rtlCol="0" anchor="ctr"/>
-          <a:lstStyle/>
-          <a:p>
-            <a:pPr algn="ctr" indent="0" marL="0">
-              <a:buNone/>
-            </a:pPr>
-            <a:r>
-              <a:rPr lang="en-US" sz="900" b="1" dirty="0">
-                <a:solidFill>
-                  <a:srgbClr val="FFFFFF"/>
-                </a:solidFill>
-                <a:latin typeface="Arial" pitchFamily="34" charset="0"/>
-                <a:ea typeface="Arial" pitchFamily="34" charset="-122"/>
-                <a:cs typeface="Arial" pitchFamily="34" charset="-120"/>
-              </a:rPr>
-              <a:t>20</a:t>
-            </a:r>
-            <a:endParaRPr lang="en-US" sz="900" dirty="0"/>
-          </a:p>
-        </p:txBody>
-      </p:sp>
-      <p:sp>
-        <p:nvSpPr>
-          <p:cNvPr id="85" name="Shape 83"/>
-          <p:cNvSpPr/>
-          <p:nvPr/>
-        </p:nvSpPr>
-        <p:spPr>
-          <a:xfrm>
-            <a:off x="2395345" y="2622170"/>
-            <a:ext cx="256032" cy="256032"/>
-          </a:xfrm>
-          <a:prstGeom prst="ellipse">
-            <a:avLst/>
-          </a:prstGeom>
-          <a:solidFill>
-            <a:srgbClr val="888888"/>
-          </a:solidFill>
-          <a:ln w="15240">
-            <a:solidFill>
-              <a:srgbClr val="FFFFFF"/>
-            </a:solidFill>
-            <a:prstDash val="solid"/>
-          </a:ln>
-        </p:spPr>
-      </p:sp>
-      <p:sp>
-        <p:nvSpPr>
-          <p:cNvPr id="86" name="Text 84"/>
-          <p:cNvSpPr/>
-          <p:nvPr/>
-        </p:nvSpPr>
-        <p:spPr>
-          <a:xfrm>
-            <a:off x="2395345" y="2622170"/>
-            <a:ext cx="256032" cy="256032"/>
-          </a:xfrm>
-          <a:prstGeom prst="rect">
-            <a:avLst/>
-          </a:prstGeom>
-          <a:noFill/>
-          <a:ln/>
-        </p:spPr>
-        <p:txBody>
-          <a:bodyPr wrap="square" lIns="0" tIns="0" rIns="0" bIns="0" rtlCol="0" anchor="ctr"/>
-          <a:lstStyle/>
-          <a:p>
-            <a:pPr algn="ctr" indent="0" marL="0">
-              <a:buNone/>
-            </a:pPr>
-            <a:r>
-              <a:rPr lang="en-US" sz="900" b="1" dirty="0">
-                <a:solidFill>
-                  <a:srgbClr val="FFFFFF"/>
-                </a:solidFill>
-                <a:latin typeface="Arial" pitchFamily="34" charset="0"/>
-                <a:ea typeface="Arial" pitchFamily="34" charset="-122"/>
-                <a:cs typeface="Arial" pitchFamily="34" charset="-120"/>
-              </a:rPr>
-              <a:t>21</a:t>
-            </a:r>
-            <a:endParaRPr lang="en-US" sz="900" dirty="0"/>
-          </a:p>
-        </p:txBody>
-      </p:sp>
-      <p:sp>
-        <p:nvSpPr>
-          <p:cNvPr id="87" name="Shape 85"/>
-          <p:cNvSpPr/>
-          <p:nvPr/>
-        </p:nvSpPr>
-        <p:spPr>
-          <a:xfrm>
-            <a:off x="4211526" y="4171127"/>
-            <a:ext cx="256032" cy="256032"/>
-          </a:xfrm>
-          <a:prstGeom prst="ellipse">
-            <a:avLst/>
-          </a:prstGeom>
-          <a:solidFill>
-            <a:srgbClr val="888888"/>
-          </a:solidFill>
-          <a:ln w="15240">
-            <a:solidFill>
-              <a:srgbClr val="FFFFFF"/>
-            </a:solidFill>
-            <a:prstDash val="solid"/>
-          </a:ln>
-        </p:spPr>
-      </p:sp>
-      <p:sp>
-        <p:nvSpPr>
-          <p:cNvPr id="88" name="Text 86"/>
-          <p:cNvSpPr/>
-          <p:nvPr/>
-        </p:nvSpPr>
-        <p:spPr>
-          <a:xfrm>
-            <a:off x="4211526" y="4171127"/>
-            <a:ext cx="256032" cy="256032"/>
-          </a:xfrm>
-          <a:prstGeom prst="rect">
-            <a:avLst/>
-          </a:prstGeom>
-          <a:noFill/>
-          <a:ln/>
-        </p:spPr>
-        <p:txBody>
-          <a:bodyPr wrap="square" lIns="0" tIns="0" rIns="0" bIns="0" rtlCol="0" anchor="ctr"/>
-          <a:lstStyle/>
-          <a:p>
-            <a:pPr algn="ctr" indent="0" marL="0">
-              <a:buNone/>
-            </a:pPr>
-            <a:r>
-              <a:rPr lang="en-US" sz="900" b="1" dirty="0">
-                <a:solidFill>
-                  <a:srgbClr val="FFFFFF"/>
-                </a:solidFill>
-                <a:latin typeface="Arial" pitchFamily="34" charset="0"/>
-                <a:ea typeface="Arial" pitchFamily="34" charset="-122"/>
-                <a:cs typeface="Arial" pitchFamily="34" charset="-120"/>
-              </a:rPr>
-              <a:t>23</a:t>
-            </a:r>
-            <a:endParaRPr lang="en-US" sz="900" dirty="0"/>
-          </a:p>
-        </p:txBody>
-      </p:sp>
-      <p:sp>
-        <p:nvSpPr>
-          <p:cNvPr id="89" name="Shape 87"/>
-          <p:cNvSpPr/>
-          <p:nvPr/>
-        </p:nvSpPr>
-        <p:spPr>
-          <a:xfrm>
-            <a:off x="4117256" y="4051964"/>
-            <a:ext cx="310896" cy="310896"/>
-          </a:xfrm>
-          <a:prstGeom prst="ellipse">
-            <a:avLst/>
-          </a:prstGeom>
-          <a:solidFill>
-            <a:srgbClr val="9E480E"/>
-          </a:solidFill>
-          <a:ln w="15240">
-            <a:solidFill>
-              <a:srgbClr val="FFFFFF"/>
-            </a:solidFill>
-            <a:prstDash val="solid"/>
-          </a:ln>
-        </p:spPr>
-      </p:sp>
-      <p:sp>
-        <p:nvSpPr>
-          <p:cNvPr id="90" name="Text 88"/>
-          <p:cNvSpPr/>
-          <p:nvPr/>
-        </p:nvSpPr>
-        <p:spPr>
-          <a:xfrm>
-            <a:off x="4117256" y="4051964"/>
-            <a:ext cx="310896" cy="310896"/>
-          </a:xfrm>
-          <a:prstGeom prst="rect">
-            <a:avLst/>
-          </a:prstGeom>
-          <a:noFill/>
-          <a:ln/>
-        </p:spPr>
-        <p:txBody>
-          <a:bodyPr wrap="square" lIns="0" tIns="0" rIns="0" bIns="0" rtlCol="0" anchor="ctr"/>
-          <a:lstStyle/>
-          <a:p>
-            <a:pPr algn="ctr" indent="0" marL="0">
-              <a:buNone/>
-            </a:pPr>
-            <a:r>
-              <a:rPr lang="en-US" sz="900" b="1" dirty="0">
-                <a:solidFill>
-                  <a:srgbClr val="FFFFFF"/>
-                </a:solidFill>
-                <a:latin typeface="Arial" pitchFamily="34" charset="0"/>
-                <a:ea typeface="Arial" pitchFamily="34" charset="-122"/>
-                <a:cs typeface="Arial" pitchFamily="34" charset="-120"/>
-              </a:rPr>
-              <a:t>28</a:t>
-            </a:r>
-            <a:endParaRPr lang="en-US" sz="900" dirty="0"/>
-          </a:p>
-        </p:txBody>
-      </p:sp>
-      <p:sp>
-        <p:nvSpPr>
-          <p:cNvPr id="91" name="Shape 89"/>
-          <p:cNvSpPr/>
-          <p:nvPr/>
-        </p:nvSpPr>
-        <p:spPr>
-          <a:xfrm>
-            <a:off x="2152584" y="2578831"/>
-            <a:ext cx="310896" cy="310896"/>
-          </a:xfrm>
-          <a:prstGeom prst="ellipse">
-            <a:avLst/>
-          </a:prstGeom>
-          <a:solidFill>
-            <a:srgbClr val="9E480E"/>
-          </a:solidFill>
-          <a:ln w="15240">
-            <a:solidFill>
-              <a:srgbClr val="FFFFFF"/>
-            </a:solidFill>
-            <a:prstDash val="solid"/>
-          </a:ln>
-        </p:spPr>
-      </p:sp>
-      <p:sp>
-        <p:nvSpPr>
-          <p:cNvPr id="92" name="Text 90"/>
-          <p:cNvSpPr/>
-          <p:nvPr/>
-        </p:nvSpPr>
-        <p:spPr>
-          <a:xfrm>
-            <a:off x="2152584" y="2578831"/>
-            <a:ext cx="310896" cy="310896"/>
-          </a:xfrm>
-          <a:prstGeom prst="rect">
-            <a:avLst/>
-          </a:prstGeom>
-          <a:noFill/>
-          <a:ln/>
-        </p:spPr>
-        <p:txBody>
-          <a:bodyPr wrap="square" lIns="0" tIns="0" rIns="0" bIns="0" rtlCol="0" anchor="ctr"/>
-          <a:lstStyle/>
-          <a:p>
-            <a:pPr algn="ctr" indent="0" marL="0">
-              <a:buNone/>
-            </a:pPr>
-            <a:r>
-              <a:rPr lang="en-US" sz="900" b="1" dirty="0">
-                <a:solidFill>
-                  <a:srgbClr val="FFFFFF"/>
-                </a:solidFill>
-                <a:latin typeface="Arial" pitchFamily="34" charset="0"/>
-                <a:ea typeface="Arial" pitchFamily="34" charset="-122"/>
-                <a:cs typeface="Arial" pitchFamily="34" charset="-120"/>
-              </a:rPr>
-              <a:t>31</a:t>
-            </a:r>
-            <a:endParaRPr lang="en-US" sz="900" dirty="0"/>
-          </a:p>
-        </p:txBody>
-      </p:sp>
-      <p:sp>
-        <p:nvSpPr>
-          <p:cNvPr id="93" name="Shape 91"/>
-          <p:cNvSpPr/>
-          <p:nvPr/>
-        </p:nvSpPr>
-        <p:spPr>
-          <a:xfrm>
-            <a:off x="2152117" y="3025166"/>
-            <a:ext cx="310896" cy="310896"/>
-          </a:xfrm>
-          <a:prstGeom prst="ellipse">
-            <a:avLst/>
-          </a:prstGeom>
-          <a:solidFill>
-            <a:srgbClr val="9E480E"/>
-          </a:solidFill>
-          <a:ln w="15240">
-            <a:solidFill>
-              <a:srgbClr val="FFFFFF"/>
-            </a:solidFill>
-            <a:prstDash val="solid"/>
-          </a:ln>
-        </p:spPr>
-      </p:sp>
-      <p:sp>
-        <p:nvSpPr>
-          <p:cNvPr id="94" name="Text 92"/>
-          <p:cNvSpPr/>
-          <p:nvPr/>
-        </p:nvSpPr>
-        <p:spPr>
-          <a:xfrm>
-            <a:off x="2152117" y="3025166"/>
-            <a:ext cx="310896" cy="310896"/>
-          </a:xfrm>
-          <a:prstGeom prst="rect">
-            <a:avLst/>
-          </a:prstGeom>
-          <a:noFill/>
-          <a:ln/>
-        </p:spPr>
-        <p:txBody>
-          <a:bodyPr wrap="square" lIns="0" tIns="0" rIns="0" bIns="0" rtlCol="0" anchor="ctr"/>
-          <a:lstStyle/>
-          <a:p>
-            <a:pPr algn="ctr" indent="0" marL="0">
-              <a:buNone/>
-            </a:pPr>
-            <a:r>
-              <a:rPr lang="en-US" sz="900" b="1" dirty="0">
-                <a:solidFill>
-                  <a:srgbClr val="FFFFFF"/>
-                </a:solidFill>
-                <a:latin typeface="Arial" pitchFamily="34" charset="0"/>
-                <a:ea typeface="Arial" pitchFamily="34" charset="-122"/>
-                <a:cs typeface="Arial" pitchFamily="34" charset="-120"/>
-              </a:rPr>
-              <a:t>33</a:t>
-            </a:r>
-            <a:endParaRPr lang="en-US" sz="900" dirty="0"/>
-          </a:p>
-        </p:txBody>
-      </p:sp>
-      <p:sp>
-        <p:nvSpPr>
-          <p:cNvPr id="95" name="Shape 93"/>
-          <p:cNvSpPr/>
-          <p:nvPr/>
-        </p:nvSpPr>
-        <p:spPr>
-          <a:xfrm>
-            <a:off x="1951019" y="2781569"/>
-            <a:ext cx="310896" cy="310896"/>
-          </a:xfrm>
-          <a:prstGeom prst="ellipse">
-            <a:avLst/>
-          </a:prstGeom>
-          <a:solidFill>
-            <a:srgbClr val="9E480E"/>
-          </a:solidFill>
-          <a:ln w="15240">
-            <a:solidFill>
-              <a:srgbClr val="FFFFFF"/>
-            </a:solidFill>
-            <a:prstDash val="solid"/>
-          </a:ln>
-        </p:spPr>
-      </p:sp>
-      <p:sp>
-        <p:nvSpPr>
-          <p:cNvPr id="96" name="Text 94"/>
-          <p:cNvSpPr/>
-          <p:nvPr/>
-        </p:nvSpPr>
-        <p:spPr>
-          <a:xfrm>
-            <a:off x="1951019" y="2781569"/>
-            <a:ext cx="310896" cy="310896"/>
-          </a:xfrm>
-          <a:prstGeom prst="rect">
-            <a:avLst/>
-          </a:prstGeom>
-          <a:noFill/>
-          <a:ln/>
-        </p:spPr>
-        <p:txBody>
-          <a:bodyPr wrap="square" lIns="0" tIns="0" rIns="0" bIns="0" rtlCol="0" anchor="ctr"/>
-          <a:lstStyle/>
-          <a:p>
-            <a:pPr algn="ctr" indent="0" marL="0">
-              <a:buNone/>
-            </a:pPr>
-            <a:r>
-              <a:rPr lang="en-US" sz="900" b="1" dirty="0">
-                <a:solidFill>
-                  <a:srgbClr val="FFFFFF"/>
-                </a:solidFill>
-                <a:latin typeface="Arial" pitchFamily="34" charset="0"/>
-                <a:ea typeface="Arial" pitchFamily="34" charset="-122"/>
-                <a:cs typeface="Arial" pitchFamily="34" charset="-120"/>
-              </a:rPr>
-              <a:t>33</a:t>
-            </a:r>
-            <a:endParaRPr lang="en-US" sz="900" dirty="0"/>
-          </a:p>
-        </p:txBody>
-      </p:sp>
-      <p:sp>
-        <p:nvSpPr>
-          <p:cNvPr id="97" name="Shape 95"/>
-          <p:cNvSpPr/>
-          <p:nvPr/>
-        </p:nvSpPr>
-        <p:spPr>
-          <a:xfrm>
-            <a:off x="2112913" y="2507215"/>
-            <a:ext cx="310896" cy="310896"/>
-          </a:xfrm>
-          <a:prstGeom prst="ellipse">
-            <a:avLst/>
-          </a:prstGeom>
-          <a:solidFill>
-            <a:srgbClr val="9E480E"/>
-          </a:solidFill>
-          <a:ln w="15240">
-            <a:solidFill>
-              <a:srgbClr val="FFFFFF"/>
-            </a:solidFill>
-            <a:prstDash val="solid"/>
-          </a:ln>
-        </p:spPr>
-      </p:sp>
-      <p:sp>
-        <p:nvSpPr>
-          <p:cNvPr id="98" name="Text 96"/>
-          <p:cNvSpPr/>
-          <p:nvPr/>
-        </p:nvSpPr>
-        <p:spPr>
-          <a:xfrm>
-            <a:off x="2112913" y="2507215"/>
-            <a:ext cx="310896" cy="310896"/>
-          </a:xfrm>
-          <a:prstGeom prst="rect">
-            <a:avLst/>
-          </a:prstGeom>
-          <a:noFill/>
-          <a:ln/>
-        </p:spPr>
-        <p:txBody>
-          <a:bodyPr wrap="square" lIns="0" tIns="0" rIns="0" bIns="0" rtlCol="0" anchor="ctr"/>
-          <a:lstStyle/>
-          <a:p>
-            <a:pPr algn="ctr" indent="0" marL="0">
-              <a:buNone/>
-            </a:pPr>
-            <a:r>
-              <a:rPr lang="en-US" sz="900" b="1" dirty="0">
-                <a:solidFill>
-                  <a:srgbClr val="FFFFFF"/>
-                </a:solidFill>
-                <a:latin typeface="Arial" pitchFamily="34" charset="0"/>
-                <a:ea typeface="Arial" pitchFamily="34" charset="-122"/>
-                <a:cs typeface="Arial" pitchFamily="34" charset="-120"/>
-              </a:rPr>
-              <a:t>33</a:t>
-            </a:r>
-            <a:endParaRPr lang="en-US" sz="900" dirty="0"/>
-          </a:p>
-        </p:txBody>
-      </p:sp>
-      <p:sp>
-        <p:nvSpPr>
-          <p:cNvPr id="99" name="Shape 97"/>
-          <p:cNvSpPr/>
-          <p:nvPr/>
-        </p:nvSpPr>
-        <p:spPr>
-          <a:xfrm>
-            <a:off x="1934412" y="2969913"/>
-            <a:ext cx="310896" cy="310896"/>
-          </a:xfrm>
-          <a:prstGeom prst="ellipse">
-            <a:avLst/>
-          </a:prstGeom>
-          <a:solidFill>
-            <a:srgbClr val="9E480E"/>
-          </a:solidFill>
-          <a:ln w="15240">
-            <a:solidFill>
-              <a:srgbClr val="FFFFFF"/>
-            </a:solidFill>
-            <a:prstDash val="solid"/>
-          </a:ln>
-        </p:spPr>
-      </p:sp>
-      <p:sp>
-        <p:nvSpPr>
-          <p:cNvPr id="100" name="Text 98"/>
-          <p:cNvSpPr/>
-          <p:nvPr/>
-        </p:nvSpPr>
-        <p:spPr>
-          <a:xfrm>
-            <a:off x="1934412" y="2969913"/>
-            <a:ext cx="310896" cy="310896"/>
-          </a:xfrm>
-          <a:prstGeom prst="rect">
-            <a:avLst/>
-          </a:prstGeom>
-          <a:noFill/>
-          <a:ln/>
-        </p:spPr>
-        <p:txBody>
-          <a:bodyPr wrap="square" lIns="0" tIns="0" rIns="0" bIns="0" rtlCol="0" anchor="ctr"/>
-          <a:lstStyle/>
-          <a:p>
-            <a:pPr algn="ctr" indent="0" marL="0">
-              <a:buNone/>
-            </a:pPr>
-            <a:r>
-              <a:rPr lang="en-US" sz="900" b="1" dirty="0">
-                <a:solidFill>
-                  <a:srgbClr val="FFFFFF"/>
-                </a:solidFill>
-                <a:latin typeface="Arial" pitchFamily="34" charset="0"/>
-                <a:ea typeface="Arial" pitchFamily="34" charset="-122"/>
-                <a:cs typeface="Arial" pitchFamily="34" charset="-120"/>
-              </a:rPr>
-              <a:t>37</a:t>
-            </a:r>
-            <a:endParaRPr lang="en-US" sz="900" dirty="0"/>
-          </a:p>
-        </p:txBody>
-      </p:sp>
-      <p:sp>
-        <p:nvSpPr>
-          <p:cNvPr id="101" name="Shape 99"/>
-          <p:cNvSpPr/>
-          <p:nvPr/>
-        </p:nvSpPr>
-        <p:spPr>
-          <a:xfrm>
-            <a:off x="4763939" y="2661278"/>
-            <a:ext cx="310896" cy="310896"/>
-          </a:xfrm>
-          <a:prstGeom prst="ellipse">
-            <a:avLst/>
-          </a:prstGeom>
-          <a:solidFill>
-            <a:srgbClr val="9E480E"/>
-          </a:solidFill>
-          <a:ln w="15240">
-            <a:solidFill>
-              <a:srgbClr val="FFFFFF"/>
-            </a:solidFill>
-            <a:prstDash val="solid"/>
-          </a:ln>
-        </p:spPr>
-      </p:sp>
-      <p:sp>
-        <p:nvSpPr>
-          <p:cNvPr id="102" name="Text 100"/>
-          <p:cNvSpPr/>
-          <p:nvPr/>
-        </p:nvSpPr>
-        <p:spPr>
-          <a:xfrm>
-            <a:off x="4763939" y="2661278"/>
-            <a:ext cx="310896" cy="310896"/>
-          </a:xfrm>
-          <a:prstGeom prst="rect">
-            <a:avLst/>
-          </a:prstGeom>
-          <a:noFill/>
-          <a:ln/>
-        </p:spPr>
-        <p:txBody>
-          <a:bodyPr wrap="square" lIns="0" tIns="0" rIns="0" bIns="0" rtlCol="0" anchor="ctr"/>
-          <a:lstStyle/>
-          <a:p>
-            <a:pPr algn="ctr" indent="0" marL="0">
-              <a:buNone/>
-            </a:pPr>
-            <a:r>
-              <a:rPr lang="en-US" sz="900" b="1" dirty="0">
-                <a:solidFill>
-                  <a:srgbClr val="FFFFFF"/>
-                </a:solidFill>
-                <a:latin typeface="Arial" pitchFamily="34" charset="0"/>
-                <a:ea typeface="Arial" pitchFamily="34" charset="-122"/>
-                <a:cs typeface="Arial" pitchFamily="34" charset="-120"/>
-              </a:rPr>
-              <a:t>38</a:t>
-            </a:r>
-            <a:endParaRPr lang="en-US" sz="900" dirty="0"/>
-          </a:p>
-        </p:txBody>
-      </p:sp>
-      <p:sp>
-        <p:nvSpPr>
-          <p:cNvPr id="103" name="Shape 101"/>
-          <p:cNvSpPr/>
-          <p:nvPr/>
-        </p:nvSpPr>
-        <p:spPr>
-          <a:xfrm>
-            <a:off x="2074055" y="2992936"/>
-            <a:ext cx="310896" cy="310896"/>
-          </a:xfrm>
-          <a:prstGeom prst="ellipse">
-            <a:avLst/>
-          </a:prstGeom>
-          <a:solidFill>
-            <a:srgbClr val="9E480E"/>
-          </a:solidFill>
-          <a:ln w="15240">
-            <a:solidFill>
-              <a:srgbClr val="FFFFFF"/>
-            </a:solidFill>
-            <a:prstDash val="solid"/>
-          </a:ln>
-        </p:spPr>
-      </p:sp>
-      <p:sp>
-        <p:nvSpPr>
-          <p:cNvPr id="104" name="Text 102"/>
-          <p:cNvSpPr/>
-          <p:nvPr/>
-        </p:nvSpPr>
-        <p:spPr>
-          <a:xfrm>
-            <a:off x="2074055" y="2992936"/>
-            <a:ext cx="310896" cy="310896"/>
-          </a:xfrm>
-          <a:prstGeom prst="rect">
-            <a:avLst/>
-          </a:prstGeom>
-          <a:noFill/>
-          <a:ln/>
-        </p:spPr>
-        <p:txBody>
-          <a:bodyPr wrap="square" lIns="0" tIns="0" rIns="0" bIns="0" rtlCol="0" anchor="ctr"/>
-          <a:lstStyle/>
-          <a:p>
-            <a:pPr algn="ctr" indent="0" marL="0">
-              <a:buNone/>
-            </a:pPr>
-            <a:r>
-              <a:rPr lang="en-US" sz="900" b="1" dirty="0">
-                <a:solidFill>
-                  <a:srgbClr val="FFFFFF"/>
-                </a:solidFill>
-                <a:latin typeface="Arial" pitchFamily="34" charset="0"/>
-                <a:ea typeface="Arial" pitchFamily="34" charset="-122"/>
-                <a:cs typeface="Arial" pitchFamily="34" charset="-120"/>
-              </a:rPr>
-              <a:t>40</a:t>
-            </a:r>
-            <a:endParaRPr lang="en-US" sz="900" dirty="0"/>
-          </a:p>
-        </p:txBody>
-      </p:sp>
-      <p:sp>
-        <p:nvSpPr>
-          <p:cNvPr id="105" name="Shape 103"/>
-          <p:cNvSpPr/>
-          <p:nvPr/>
-        </p:nvSpPr>
-        <p:spPr>
-          <a:xfrm>
-            <a:off x="2081643" y="3025475"/>
-            <a:ext cx="310896" cy="310896"/>
-          </a:xfrm>
-          <a:prstGeom prst="ellipse">
-            <a:avLst/>
-          </a:prstGeom>
-          <a:solidFill>
-            <a:srgbClr val="9E480E"/>
-          </a:solidFill>
-          <a:ln w="15240">
-            <a:solidFill>
-              <a:srgbClr val="FFFFFF"/>
-            </a:solidFill>
-            <a:prstDash val="solid"/>
-          </a:ln>
-        </p:spPr>
-      </p:sp>
-      <p:sp>
-        <p:nvSpPr>
-          <p:cNvPr id="106" name="Text 104"/>
-          <p:cNvSpPr/>
-          <p:nvPr/>
-        </p:nvSpPr>
-        <p:spPr>
-          <a:xfrm>
-            <a:off x="2081643" y="3025475"/>
-            <a:ext cx="310896" cy="310896"/>
-          </a:xfrm>
-          <a:prstGeom prst="rect">
-            <a:avLst/>
-          </a:prstGeom>
-          <a:noFill/>
-          <a:ln/>
-        </p:spPr>
-        <p:txBody>
-          <a:bodyPr wrap="square" lIns="0" tIns="0" rIns="0" bIns="0" rtlCol="0" anchor="ctr"/>
-          <a:lstStyle/>
-          <a:p>
-            <a:pPr algn="ctr" indent="0" marL="0">
-              <a:buNone/>
-            </a:pPr>
-            <a:r>
-              <a:rPr lang="en-US" sz="900" b="1" dirty="0">
-                <a:solidFill>
-                  <a:srgbClr val="FFFFFF"/>
-                </a:solidFill>
-                <a:latin typeface="Arial" pitchFamily="34" charset="0"/>
-                <a:ea typeface="Arial" pitchFamily="34" charset="-122"/>
-                <a:cs typeface="Arial" pitchFamily="34" charset="-120"/>
-              </a:rPr>
-              <a:t>40</a:t>
-            </a:r>
-            <a:endParaRPr lang="en-US" sz="900" dirty="0"/>
-          </a:p>
-        </p:txBody>
-      </p:sp>
-      <p:sp>
-        <p:nvSpPr>
-          <p:cNvPr id="107" name="Shape 105"/>
-          <p:cNvSpPr/>
-          <p:nvPr/>
-        </p:nvSpPr>
-        <p:spPr>
-          <a:xfrm>
-            <a:off x="2091538" y="3004349"/>
-            <a:ext cx="310896" cy="310896"/>
-          </a:xfrm>
-          <a:prstGeom prst="ellipse">
-            <a:avLst/>
-          </a:prstGeom>
-          <a:solidFill>
-            <a:srgbClr val="9E480E"/>
-          </a:solidFill>
-          <a:ln w="15240">
-            <a:solidFill>
-              <a:srgbClr val="FFFFFF"/>
-            </a:solidFill>
-            <a:prstDash val="solid"/>
-          </a:ln>
-        </p:spPr>
-      </p:sp>
-      <p:sp>
-        <p:nvSpPr>
-          <p:cNvPr id="108" name="Text 106"/>
-          <p:cNvSpPr/>
-          <p:nvPr/>
-        </p:nvSpPr>
-        <p:spPr>
-          <a:xfrm>
-            <a:off x="2091538" y="3004349"/>
-            <a:ext cx="310896" cy="310896"/>
-          </a:xfrm>
-          <a:prstGeom prst="rect">
-            <a:avLst/>
-          </a:prstGeom>
-          <a:noFill/>
-          <a:ln/>
-        </p:spPr>
-        <p:txBody>
-          <a:bodyPr wrap="square" lIns="0" tIns="0" rIns="0" bIns="0" rtlCol="0" anchor="ctr"/>
-          <a:lstStyle/>
-          <a:p>
-            <a:pPr algn="ctr" indent="0" marL="0">
-              <a:buNone/>
-            </a:pPr>
-            <a:r>
-              <a:rPr lang="en-US" sz="900" b="1" dirty="0">
-                <a:solidFill>
-                  <a:srgbClr val="FFFFFF"/>
-                </a:solidFill>
-                <a:latin typeface="Arial" pitchFamily="34" charset="0"/>
-                <a:ea typeface="Arial" pitchFamily="34" charset="-122"/>
-                <a:cs typeface="Arial" pitchFamily="34" charset="-120"/>
-              </a:rPr>
-              <a:t>40</a:t>
-            </a:r>
-            <a:endParaRPr lang="en-US" sz="900" dirty="0"/>
-          </a:p>
-        </p:txBody>
-      </p:sp>
-      <p:sp>
-        <p:nvSpPr>
-          <p:cNvPr id="109" name="Shape 107"/>
-          <p:cNvSpPr/>
-          <p:nvPr/>
-        </p:nvSpPr>
-        <p:spPr>
-          <a:xfrm>
-            <a:off x="4846946" y="4198126"/>
-            <a:ext cx="310896" cy="310896"/>
-          </a:xfrm>
-          <a:prstGeom prst="ellipse">
-            <a:avLst/>
-          </a:prstGeom>
-          <a:solidFill>
-            <a:srgbClr val="9E480E"/>
-          </a:solidFill>
-          <a:ln w="15240">
-            <a:solidFill>
-              <a:srgbClr val="FFFFFF"/>
-            </a:solidFill>
-            <a:prstDash val="solid"/>
-          </a:ln>
-        </p:spPr>
-      </p:sp>
-      <p:sp>
-        <p:nvSpPr>
-          <p:cNvPr id="110" name="Text 108"/>
-          <p:cNvSpPr/>
-          <p:nvPr/>
-        </p:nvSpPr>
-        <p:spPr>
-          <a:xfrm>
-            <a:off x="4846946" y="4198126"/>
-            <a:ext cx="310896" cy="310896"/>
-          </a:xfrm>
-          <a:prstGeom prst="rect">
-            <a:avLst/>
-          </a:prstGeom>
-          <a:noFill/>
-          <a:ln/>
-        </p:spPr>
-        <p:txBody>
-          <a:bodyPr wrap="square" lIns="0" tIns="0" rIns="0" bIns="0" rtlCol="0" anchor="ctr"/>
-          <a:lstStyle/>
-          <a:p>
-            <a:pPr algn="ctr" indent="0" marL="0">
-              <a:buNone/>
-            </a:pPr>
-            <a:r>
-              <a:rPr lang="en-US" sz="900" b="1" dirty="0">
-                <a:solidFill>
-                  <a:srgbClr val="FFFFFF"/>
-                </a:solidFill>
-                <a:latin typeface="Arial" pitchFamily="34" charset="0"/>
-                <a:ea typeface="Arial" pitchFamily="34" charset="-122"/>
-                <a:cs typeface="Arial" pitchFamily="34" charset="-120"/>
-              </a:rPr>
-              <a:t>40</a:t>
-            </a:r>
-            <a:endParaRPr lang="en-US" sz="900" dirty="0"/>
-          </a:p>
-        </p:txBody>
-      </p:sp>
-      <p:sp>
-        <p:nvSpPr>
-          <p:cNvPr id="111" name="Shape 109"/>
-          <p:cNvSpPr/>
-          <p:nvPr/>
-        </p:nvSpPr>
-        <p:spPr>
-          <a:xfrm>
-            <a:off x="5422392" y="2982286"/>
-            <a:ext cx="310896" cy="310896"/>
-          </a:xfrm>
-          <a:prstGeom prst="ellipse">
-            <a:avLst/>
-          </a:prstGeom>
-          <a:solidFill>
-            <a:srgbClr val="9E480E"/>
-          </a:solidFill>
-          <a:ln w="15240">
-            <a:solidFill>
-              <a:srgbClr val="FFFFFF"/>
-            </a:solidFill>
-            <a:prstDash val="solid"/>
-          </a:ln>
-        </p:spPr>
-      </p:sp>
-      <p:sp>
-        <p:nvSpPr>
-          <p:cNvPr id="112" name="Text 110"/>
-          <p:cNvSpPr/>
-          <p:nvPr/>
-        </p:nvSpPr>
-        <p:spPr>
-          <a:xfrm>
-            <a:off x="5422392" y="2982286"/>
-            <a:ext cx="310896" cy="310896"/>
-          </a:xfrm>
-          <a:prstGeom prst="rect">
-            <a:avLst/>
-          </a:prstGeom>
-          <a:noFill/>
-          <a:ln/>
-        </p:spPr>
-        <p:txBody>
-          <a:bodyPr wrap="square" lIns="0" tIns="0" rIns="0" bIns="0" rtlCol="0" anchor="ctr"/>
-          <a:lstStyle/>
-          <a:p>
-            <a:pPr algn="ctr" indent="0" marL="0">
-              <a:buNone/>
-            </a:pPr>
-            <a:r>
-              <a:rPr lang="en-US" sz="900" b="1" dirty="0">
-                <a:solidFill>
-                  <a:srgbClr val="FFFFFF"/>
-                </a:solidFill>
-                <a:latin typeface="Arial" pitchFamily="34" charset="0"/>
-                <a:ea typeface="Arial" pitchFamily="34" charset="-122"/>
-                <a:cs typeface="Arial" pitchFamily="34" charset="-120"/>
-              </a:rPr>
-              <a:t>40</a:t>
-            </a:r>
-            <a:endParaRPr lang="en-US" sz="900" dirty="0"/>
-          </a:p>
-        </p:txBody>
-      </p:sp>
-      <p:sp>
-        <p:nvSpPr>
-          <p:cNvPr id="113" name="Shape 111"/>
-          <p:cNvSpPr/>
-          <p:nvPr/>
-        </p:nvSpPr>
-        <p:spPr>
-          <a:xfrm>
-            <a:off x="4245992" y="4078783"/>
-            <a:ext cx="310896" cy="310896"/>
-          </a:xfrm>
-          <a:prstGeom prst="ellipse">
-            <a:avLst/>
-          </a:prstGeom>
-          <a:solidFill>
-            <a:srgbClr val="9E480E"/>
-          </a:solidFill>
-          <a:ln w="15240">
-            <a:solidFill>
-              <a:srgbClr val="FFFFFF"/>
-            </a:solidFill>
-            <a:prstDash val="solid"/>
-          </a:ln>
-        </p:spPr>
-      </p:sp>
-      <p:sp>
-        <p:nvSpPr>
-          <p:cNvPr id="114" name="Text 112"/>
-          <p:cNvSpPr/>
-          <p:nvPr/>
-        </p:nvSpPr>
-        <p:spPr>
-          <a:xfrm>
-            <a:off x="4245992" y="4078783"/>
-            <a:ext cx="310896" cy="310896"/>
-          </a:xfrm>
-          <a:prstGeom prst="rect">
-            <a:avLst/>
-          </a:prstGeom>
-          <a:noFill/>
-          <a:ln/>
-        </p:spPr>
-        <p:txBody>
-          <a:bodyPr wrap="square" lIns="0" tIns="0" rIns="0" bIns="0" rtlCol="0" anchor="ctr"/>
-          <a:lstStyle/>
-          <a:p>
-            <a:pPr algn="ctr" indent="0" marL="0">
-              <a:buNone/>
-            </a:pPr>
-            <a:r>
-              <a:rPr lang="en-US" sz="900" b="1" dirty="0">
-                <a:solidFill>
-                  <a:srgbClr val="FFFFFF"/>
-                </a:solidFill>
-                <a:latin typeface="Arial" pitchFamily="34" charset="0"/>
-                <a:ea typeface="Arial" pitchFamily="34" charset="-122"/>
-                <a:cs typeface="Arial" pitchFamily="34" charset="-120"/>
-              </a:rPr>
-              <a:t>42</a:t>
-            </a:r>
-            <a:endParaRPr lang="en-US" sz="900" dirty="0"/>
-          </a:p>
-        </p:txBody>
-      </p:sp>
-      <p:sp>
-        <p:nvSpPr>
-          <p:cNvPr id="115" name="Shape 113"/>
-          <p:cNvSpPr/>
-          <p:nvPr/>
-        </p:nvSpPr>
-        <p:spPr>
-          <a:xfrm>
-            <a:off x="1669793" y="2504952"/>
-            <a:ext cx="310896" cy="310896"/>
-          </a:xfrm>
-          <a:prstGeom prst="ellipse">
-            <a:avLst/>
-          </a:prstGeom>
-          <a:solidFill>
-            <a:srgbClr val="9E480E"/>
-          </a:solidFill>
-          <a:ln w="15240">
-            <a:solidFill>
-              <a:srgbClr val="FFFFFF"/>
-            </a:solidFill>
-            <a:prstDash val="solid"/>
-          </a:ln>
-        </p:spPr>
-      </p:sp>
-      <p:sp>
-        <p:nvSpPr>
-          <p:cNvPr id="116" name="Text 114"/>
-          <p:cNvSpPr/>
-          <p:nvPr/>
-        </p:nvSpPr>
-        <p:spPr>
-          <a:xfrm>
-            <a:off x="1669793" y="2504952"/>
-            <a:ext cx="310896" cy="310896"/>
-          </a:xfrm>
-          <a:prstGeom prst="rect">
-            <a:avLst/>
-          </a:prstGeom>
-          <a:noFill/>
-          <a:ln/>
-        </p:spPr>
-        <p:txBody>
-          <a:bodyPr wrap="square" lIns="0" tIns="0" rIns="0" bIns="0" rtlCol="0" anchor="ctr"/>
-          <a:lstStyle/>
-          <a:p>
-            <a:pPr algn="ctr" indent="0" marL="0">
-              <a:buNone/>
-            </a:pPr>
-            <a:r>
-              <a:rPr lang="en-US" sz="900" b="1" dirty="0">
-                <a:solidFill>
-                  <a:srgbClr val="FFFFFF"/>
-                </a:solidFill>
-                <a:latin typeface="Arial" pitchFamily="34" charset="0"/>
-                <a:ea typeface="Arial" pitchFamily="34" charset="-122"/>
-                <a:cs typeface="Arial" pitchFamily="34" charset="-120"/>
-              </a:rPr>
-              <a:t>46</a:t>
-            </a:r>
-            <a:endParaRPr lang="en-US" sz="900" dirty="0"/>
-          </a:p>
-        </p:txBody>
-      </p:sp>
-      <p:sp>
-        <p:nvSpPr>
-          <p:cNvPr id="117" name="Shape 115"/>
-          <p:cNvSpPr/>
-          <p:nvPr/>
-        </p:nvSpPr>
-        <p:spPr>
-          <a:xfrm>
-            <a:off x="2038425" y="2475186"/>
-            <a:ext cx="310896" cy="310896"/>
-          </a:xfrm>
-          <a:prstGeom prst="ellipse">
-            <a:avLst/>
-          </a:prstGeom>
-          <a:solidFill>
-            <a:srgbClr val="9E480E"/>
-          </a:solidFill>
-          <a:ln w="15240">
-            <a:solidFill>
-              <a:srgbClr val="FFFFFF"/>
-            </a:solidFill>
-            <a:prstDash val="solid"/>
-          </a:ln>
-        </p:spPr>
-      </p:sp>
-      <p:sp>
-        <p:nvSpPr>
-          <p:cNvPr id="118" name="Text 116"/>
-          <p:cNvSpPr/>
-          <p:nvPr/>
-        </p:nvSpPr>
-        <p:spPr>
-          <a:xfrm>
-            <a:off x="2038425" y="2475186"/>
-            <a:ext cx="310896" cy="310896"/>
-          </a:xfrm>
-          <a:prstGeom prst="rect">
-            <a:avLst/>
-          </a:prstGeom>
-          <a:noFill/>
-          <a:ln/>
-        </p:spPr>
-        <p:txBody>
-          <a:bodyPr wrap="square" lIns="0" tIns="0" rIns="0" bIns="0" rtlCol="0" anchor="ctr"/>
-          <a:lstStyle/>
-          <a:p>
-            <a:pPr algn="ctr" indent="0" marL="0">
-              <a:buNone/>
-            </a:pPr>
-            <a:r>
-              <a:rPr lang="en-US" sz="900" b="1" dirty="0">
-                <a:solidFill>
-                  <a:srgbClr val="FFFFFF"/>
-                </a:solidFill>
-                <a:latin typeface="Arial" pitchFamily="34" charset="0"/>
-                <a:ea typeface="Arial" pitchFamily="34" charset="-122"/>
-                <a:cs typeface="Arial" pitchFamily="34" charset="-120"/>
-              </a:rPr>
-              <a:t>46</a:t>
-            </a:r>
-            <a:endParaRPr lang="en-US" sz="900" dirty="0"/>
-          </a:p>
-        </p:txBody>
-      </p:sp>
-      <p:sp>
-        <p:nvSpPr>
-          <p:cNvPr id="119" name="Shape 117"/>
-          <p:cNvSpPr/>
-          <p:nvPr/>
-        </p:nvSpPr>
-        <p:spPr>
-          <a:xfrm>
-            <a:off x="1988713" y="2784257"/>
-            <a:ext cx="310896" cy="310896"/>
-          </a:xfrm>
-          <a:prstGeom prst="ellipse">
-            <a:avLst/>
-          </a:prstGeom>
-          <a:solidFill>
-            <a:srgbClr val="9E480E"/>
-          </a:solidFill>
-          <a:ln w="15240">
-            <a:solidFill>
-              <a:srgbClr val="FFFFFF"/>
-            </a:solidFill>
-            <a:prstDash val="solid"/>
-          </a:ln>
-        </p:spPr>
-      </p:sp>
-      <p:sp>
-        <p:nvSpPr>
-          <p:cNvPr id="120" name="Text 118"/>
-          <p:cNvSpPr/>
-          <p:nvPr/>
-        </p:nvSpPr>
-        <p:spPr>
-          <a:xfrm>
-            <a:off x="1988713" y="2784257"/>
-            <a:ext cx="310896" cy="310896"/>
-          </a:xfrm>
-          <a:prstGeom prst="rect">
-            <a:avLst/>
-          </a:prstGeom>
-          <a:noFill/>
-          <a:ln/>
-        </p:spPr>
-        <p:txBody>
-          <a:bodyPr wrap="square" lIns="0" tIns="0" rIns="0" bIns="0" rtlCol="0" anchor="ctr"/>
-          <a:lstStyle/>
-          <a:p>
-            <a:pPr algn="ctr" indent="0" marL="0">
-              <a:buNone/>
-            </a:pPr>
-            <a:r>
-              <a:rPr lang="en-US" sz="900" b="1" dirty="0">
-                <a:solidFill>
-                  <a:srgbClr val="FFFFFF"/>
-                </a:solidFill>
-                <a:latin typeface="Arial" pitchFamily="34" charset="0"/>
-                <a:ea typeface="Arial" pitchFamily="34" charset="-122"/>
-                <a:cs typeface="Arial" pitchFamily="34" charset="-120"/>
-              </a:rPr>
-              <a:t>47</a:t>
-            </a:r>
-            <a:endParaRPr lang="en-US" sz="900" dirty="0"/>
-          </a:p>
-        </p:txBody>
-      </p:sp>
-      <p:sp>
-        <p:nvSpPr>
-          <p:cNvPr id="121" name="Shape 119"/>
-          <p:cNvSpPr/>
-          <p:nvPr/>
-        </p:nvSpPr>
-        <p:spPr>
-          <a:xfrm>
-            <a:off x="3967123" y="3934124"/>
-            <a:ext cx="384048" cy="384048"/>
-          </a:xfrm>
-          <a:prstGeom prst="ellipse">
-            <a:avLst/>
-          </a:prstGeom>
-          <a:solidFill>
-            <a:srgbClr val="05B050"/>
-          </a:solidFill>
-          <a:ln w="15240">
-            <a:solidFill>
-              <a:srgbClr val="FFFFFF"/>
-            </a:solidFill>
-            <a:prstDash val="solid"/>
-          </a:ln>
-        </p:spPr>
-      </p:sp>
-      <p:sp>
-        <p:nvSpPr>
-          <p:cNvPr id="122" name="Text 120"/>
-          <p:cNvSpPr/>
-          <p:nvPr/>
-        </p:nvSpPr>
-        <p:spPr>
-          <a:xfrm>
-            <a:off x="3967123" y="3934124"/>
-            <a:ext cx="384048" cy="384048"/>
-          </a:xfrm>
-          <a:prstGeom prst="rect">
-            <a:avLst/>
-          </a:prstGeom>
-          <a:noFill/>
-          <a:ln/>
-        </p:spPr>
-        <p:txBody>
-          <a:bodyPr wrap="square" lIns="0" tIns="0" rIns="0" bIns="0" rtlCol="0" anchor="ctr"/>
-          <a:lstStyle/>
-          <a:p>
-            <a:pPr algn="ctr" indent="0" marL="0">
-              <a:buNone/>
-            </a:pPr>
-            <a:r>
-              <a:rPr lang="en-US" sz="900" b="1" dirty="0">
-                <a:solidFill>
-                  <a:srgbClr val="FFFFFF"/>
-                </a:solidFill>
-                <a:latin typeface="Arial" pitchFamily="34" charset="0"/>
-                <a:ea typeface="Arial" pitchFamily="34" charset="-122"/>
-                <a:cs typeface="Arial" pitchFamily="34" charset="-120"/>
-              </a:rPr>
-              <a:t>52</a:t>
-            </a:r>
-            <a:endParaRPr lang="en-US" sz="900" dirty="0"/>
-          </a:p>
-        </p:txBody>
-      </p:sp>
-      <p:sp>
-        <p:nvSpPr>
-          <p:cNvPr id="123" name="Shape 121"/>
-          <p:cNvSpPr/>
-          <p:nvPr/>
-        </p:nvSpPr>
-        <p:spPr>
-          <a:xfrm>
-            <a:off x="2046395" y="2505505"/>
-            <a:ext cx="384048" cy="384048"/>
-          </a:xfrm>
-          <a:prstGeom prst="ellipse">
-            <a:avLst/>
-          </a:prstGeom>
-          <a:solidFill>
-            <a:srgbClr val="05B050"/>
-          </a:solidFill>
-          <a:ln w="15240">
-            <a:solidFill>
-              <a:srgbClr val="FFFFFF"/>
-            </a:solidFill>
-            <a:prstDash val="solid"/>
-          </a:ln>
-        </p:spPr>
-      </p:sp>
-      <p:sp>
-        <p:nvSpPr>
-          <p:cNvPr id="124" name="Text 122"/>
-          <p:cNvSpPr/>
-          <p:nvPr/>
-        </p:nvSpPr>
-        <p:spPr>
-          <a:xfrm>
-            <a:off x="2046395" y="2505505"/>
-            <a:ext cx="384048" cy="384048"/>
-          </a:xfrm>
-          <a:prstGeom prst="rect">
-            <a:avLst/>
-          </a:prstGeom>
-          <a:noFill/>
-          <a:ln/>
-        </p:spPr>
-        <p:txBody>
-          <a:bodyPr wrap="square" lIns="0" tIns="0" rIns="0" bIns="0" rtlCol="0" anchor="ctr"/>
-          <a:lstStyle/>
-          <a:p>
-            <a:pPr algn="ctr" indent="0" marL="0">
-              <a:buNone/>
-            </a:pPr>
-            <a:r>
-              <a:rPr lang="en-US" sz="900" b="1" dirty="0">
-                <a:solidFill>
-                  <a:srgbClr val="FFFFFF"/>
-                </a:solidFill>
-                <a:latin typeface="Arial" pitchFamily="34" charset="0"/>
-                <a:ea typeface="Arial" pitchFamily="34" charset="-122"/>
-                <a:cs typeface="Arial" pitchFamily="34" charset="-120"/>
-              </a:rPr>
-              <a:t>53</a:t>
-            </a:r>
-            <a:endParaRPr lang="en-US" sz="900" dirty="0"/>
-          </a:p>
-        </p:txBody>
-      </p:sp>
-      <p:sp>
-        <p:nvSpPr>
-          <p:cNvPr id="125" name="Shape 123"/>
-          <p:cNvSpPr/>
-          <p:nvPr/>
-        </p:nvSpPr>
-        <p:spPr>
-          <a:xfrm>
-            <a:off x="4053977" y="2359483"/>
-            <a:ext cx="384048" cy="384048"/>
-          </a:xfrm>
-          <a:prstGeom prst="ellipse">
-            <a:avLst/>
-          </a:prstGeom>
-          <a:solidFill>
-            <a:srgbClr val="05B050"/>
-          </a:solidFill>
-          <a:ln w="15240">
-            <a:solidFill>
-              <a:srgbClr val="FFFFFF"/>
-            </a:solidFill>
-            <a:prstDash val="solid"/>
-          </a:ln>
-        </p:spPr>
-      </p:sp>
-      <p:sp>
-        <p:nvSpPr>
-          <p:cNvPr id="126" name="Text 124"/>
-          <p:cNvSpPr/>
-          <p:nvPr/>
-        </p:nvSpPr>
-        <p:spPr>
-          <a:xfrm>
-            <a:off x="4053977" y="2359483"/>
-            <a:ext cx="384048" cy="384048"/>
-          </a:xfrm>
-          <a:prstGeom prst="rect">
-            <a:avLst/>
-          </a:prstGeom>
-          <a:noFill/>
-          <a:ln/>
-        </p:spPr>
-        <p:txBody>
-          <a:bodyPr wrap="square" lIns="0" tIns="0" rIns="0" bIns="0" rtlCol="0" anchor="ctr"/>
-          <a:lstStyle/>
-          <a:p>
-            <a:pPr algn="ctr" indent="0" marL="0">
-              <a:buNone/>
-            </a:pPr>
-            <a:r>
-              <a:rPr lang="en-US" sz="900" b="1" dirty="0">
-                <a:solidFill>
-                  <a:srgbClr val="FFFFFF"/>
-                </a:solidFill>
-                <a:latin typeface="Arial" pitchFamily="34" charset="0"/>
-                <a:ea typeface="Arial" pitchFamily="34" charset="-122"/>
-                <a:cs typeface="Arial" pitchFamily="34" charset="-120"/>
-              </a:rPr>
-              <a:t>55</a:t>
-            </a:r>
-            <a:endParaRPr lang="en-US" sz="900" dirty="0"/>
-          </a:p>
-        </p:txBody>
-      </p:sp>
-      <p:sp>
-        <p:nvSpPr>
-          <p:cNvPr id="127" name="Shape 125"/>
-          <p:cNvSpPr/>
-          <p:nvPr/>
-        </p:nvSpPr>
-        <p:spPr>
-          <a:xfrm>
-            <a:off x="1318007" y="2288736"/>
-            <a:ext cx="384048" cy="384048"/>
-          </a:xfrm>
-          <a:prstGeom prst="ellipse">
-            <a:avLst/>
-          </a:prstGeom>
-          <a:solidFill>
-            <a:srgbClr val="05B050"/>
-          </a:solidFill>
-          <a:ln w="15240">
-            <a:solidFill>
-              <a:srgbClr val="FFFFFF"/>
-            </a:solidFill>
-            <a:prstDash val="solid"/>
-          </a:ln>
-        </p:spPr>
-      </p:sp>
-      <p:sp>
-        <p:nvSpPr>
-          <p:cNvPr id="128" name="Text 126"/>
-          <p:cNvSpPr/>
-          <p:nvPr/>
-        </p:nvSpPr>
-        <p:spPr>
-          <a:xfrm>
-            <a:off x="1318007" y="2288736"/>
-            <a:ext cx="384048" cy="384048"/>
-          </a:xfrm>
-          <a:prstGeom prst="rect">
-            <a:avLst/>
-          </a:prstGeom>
-          <a:noFill/>
-          <a:ln/>
-        </p:spPr>
-        <p:txBody>
-          <a:bodyPr wrap="square" lIns="0" tIns="0" rIns="0" bIns="0" rtlCol="0" anchor="ctr"/>
-          <a:lstStyle/>
-          <a:p>
-            <a:pPr algn="ctr" indent="0" marL="0">
-              <a:buNone/>
-            </a:pPr>
-            <a:r>
-              <a:rPr lang="en-US" sz="900" b="1" dirty="0">
-                <a:solidFill>
-                  <a:srgbClr val="FFFFFF"/>
-                </a:solidFill>
-                <a:latin typeface="Arial" pitchFamily="34" charset="0"/>
-                <a:ea typeface="Arial" pitchFamily="34" charset="-122"/>
-                <a:cs typeface="Arial" pitchFamily="34" charset="-120"/>
-              </a:rPr>
-              <a:t>60</a:t>
-            </a:r>
-            <a:endParaRPr lang="en-US" sz="900" dirty="0"/>
-          </a:p>
-        </p:txBody>
-      </p:sp>
-      <p:sp>
-        <p:nvSpPr>
-          <p:cNvPr id="129" name="Shape 127"/>
-          <p:cNvSpPr/>
-          <p:nvPr/>
-        </p:nvSpPr>
-        <p:spPr>
-          <a:xfrm>
-            <a:off x="3092594" y="5413248"/>
-            <a:ext cx="384048" cy="384048"/>
-          </a:xfrm>
-          <a:prstGeom prst="ellipse">
-            <a:avLst/>
-          </a:prstGeom>
-          <a:solidFill>
-            <a:srgbClr val="05B050"/>
-          </a:solidFill>
-          <a:ln w="15240">
-            <a:solidFill>
-              <a:srgbClr val="FFFFFF"/>
-            </a:solidFill>
-            <a:prstDash val="solid"/>
-          </a:ln>
-        </p:spPr>
-      </p:sp>
-      <p:sp>
-        <p:nvSpPr>
-          <p:cNvPr id="130" name="Text 128"/>
-          <p:cNvSpPr/>
-          <p:nvPr/>
-        </p:nvSpPr>
-        <p:spPr>
-          <a:xfrm>
-            <a:off x="3092594" y="5413248"/>
-            <a:ext cx="384048" cy="384048"/>
-          </a:xfrm>
-          <a:prstGeom prst="rect">
-            <a:avLst/>
-          </a:prstGeom>
-          <a:noFill/>
-          <a:ln/>
-        </p:spPr>
-        <p:txBody>
-          <a:bodyPr wrap="square" lIns="0" tIns="0" rIns="0" bIns="0" rtlCol="0" anchor="ctr"/>
-          <a:lstStyle/>
-          <a:p>
-            <a:pPr algn="ctr" indent="0" marL="0">
-              <a:buNone/>
-            </a:pPr>
-            <a:r>
-              <a:rPr lang="en-US" sz="900" b="1" dirty="0">
-                <a:solidFill>
-                  <a:srgbClr val="FFFFFF"/>
-                </a:solidFill>
-                <a:latin typeface="Arial" pitchFamily="34" charset="0"/>
-                <a:ea typeface="Arial" pitchFamily="34" charset="-122"/>
-                <a:cs typeface="Arial" pitchFamily="34" charset="-120"/>
-              </a:rPr>
-              <a:t>74</a:t>
-            </a:r>
-            <a:endParaRPr lang="en-US" sz="900" dirty="0"/>
-          </a:p>
-        </p:txBody>
-      </p:sp>
-      <p:sp>
-        <p:nvSpPr>
-          <p:cNvPr id="131" name="Shape 129"/>
-          <p:cNvSpPr/>
-          <p:nvPr/>
-        </p:nvSpPr>
-        <p:spPr>
-          <a:xfrm>
-            <a:off x="2635580" y="3303044"/>
-            <a:ext cx="384048" cy="384048"/>
-          </a:xfrm>
-          <a:prstGeom prst="ellipse">
-            <a:avLst/>
-          </a:prstGeom>
-          <a:solidFill>
-            <a:srgbClr val="05B050"/>
-          </a:solidFill>
-          <a:ln w="15240">
-            <a:solidFill>
-              <a:srgbClr val="FFFFFF"/>
-            </a:solidFill>
-            <a:prstDash val="solid"/>
-          </a:ln>
-        </p:spPr>
-      </p:sp>
-      <p:sp>
-        <p:nvSpPr>
-          <p:cNvPr id="132" name="Text 130"/>
-          <p:cNvSpPr/>
-          <p:nvPr/>
-        </p:nvSpPr>
-        <p:spPr>
-          <a:xfrm>
-            <a:off x="2635580" y="3303044"/>
-            <a:ext cx="384048" cy="384048"/>
-          </a:xfrm>
-          <a:prstGeom prst="rect">
-            <a:avLst/>
-          </a:prstGeom>
-          <a:noFill/>
-          <a:ln/>
-        </p:spPr>
-        <p:txBody>
-          <a:bodyPr wrap="square" lIns="0" tIns="0" rIns="0" bIns="0" rtlCol="0" anchor="ctr"/>
-          <a:lstStyle/>
-          <a:p>
-            <a:pPr algn="ctr" indent="0" marL="0">
-              <a:buNone/>
-            </a:pPr>
-            <a:r>
-              <a:rPr lang="en-US" sz="900" b="1" dirty="0">
-                <a:solidFill>
-                  <a:srgbClr val="FFFFFF"/>
-                </a:solidFill>
-                <a:latin typeface="Arial" pitchFamily="34" charset="0"/>
-                <a:ea typeface="Arial" pitchFamily="34" charset="-122"/>
-                <a:cs typeface="Arial" pitchFamily="34" charset="-120"/>
-              </a:rPr>
-              <a:t>75</a:t>
-            </a:r>
-            <a:endParaRPr lang="en-US" sz="900" dirty="0"/>
-          </a:p>
-        </p:txBody>
-      </p:sp>
-      <p:sp>
-        <p:nvSpPr>
-          <p:cNvPr id="133" name="Shape 131"/>
-          <p:cNvSpPr/>
-          <p:nvPr/>
-        </p:nvSpPr>
-        <p:spPr>
-          <a:xfrm>
-            <a:off x="1563153" y="2418225"/>
-            <a:ext cx="384048" cy="384048"/>
-          </a:xfrm>
-          <a:prstGeom prst="ellipse">
-            <a:avLst/>
-          </a:prstGeom>
-          <a:solidFill>
-            <a:srgbClr val="05B050"/>
-          </a:solidFill>
-          <a:ln w="15240">
-            <a:solidFill>
-              <a:srgbClr val="FFFFFF"/>
-            </a:solidFill>
-            <a:prstDash val="solid"/>
-          </a:ln>
-        </p:spPr>
-      </p:sp>
-      <p:sp>
-        <p:nvSpPr>
-          <p:cNvPr id="134" name="Text 132"/>
-          <p:cNvSpPr/>
-          <p:nvPr/>
-        </p:nvSpPr>
-        <p:spPr>
-          <a:xfrm>
-            <a:off x="1563153" y="2418225"/>
-            <a:ext cx="384048" cy="384048"/>
-          </a:xfrm>
-          <a:prstGeom prst="rect">
-            <a:avLst/>
-          </a:prstGeom>
-          <a:noFill/>
-          <a:ln/>
-        </p:spPr>
-        <p:txBody>
-          <a:bodyPr wrap="square" lIns="0" tIns="0" rIns="0" bIns="0" rtlCol="0" anchor="ctr"/>
-          <a:lstStyle/>
-          <a:p>
-            <a:pPr algn="ctr" indent="0" marL="0">
-              <a:buNone/>
-            </a:pPr>
-            <a:r>
-              <a:rPr lang="en-US" sz="900" b="1" dirty="0">
-                <a:solidFill>
-                  <a:srgbClr val="FFFFFF"/>
-                </a:solidFill>
-                <a:latin typeface="Arial" pitchFamily="34" charset="0"/>
-                <a:ea typeface="Arial" pitchFamily="34" charset="-122"/>
-                <a:cs typeface="Arial" pitchFamily="34" charset="-120"/>
-              </a:rPr>
-              <a:t>77</a:t>
-            </a:r>
-            <a:endParaRPr lang="en-US" sz="900" dirty="0"/>
-          </a:p>
-        </p:txBody>
-      </p:sp>
-      <p:sp>
-        <p:nvSpPr>
-          <p:cNvPr id="135" name="Shape 133"/>
-          <p:cNvSpPr/>
-          <p:nvPr/>
-        </p:nvSpPr>
-        <p:spPr>
-          <a:xfrm>
-            <a:off x="2250622" y="2440889"/>
-            <a:ext cx="457200" cy="457200"/>
-          </a:xfrm>
-          <a:prstGeom prst="ellipse">
+      <p:pic>
+        <p:nvPicPr>
+          <p:cNvPr id="5" name="Image 0" descr="preencoded.png">    </p:cNvPr>
+          <p:cNvPicPr>
+            <a:picLocks noChangeAspect="1"/>
+          </p:cNvPicPr>
+          <p:nvPr/>
+        </p:nvPicPr>
+        <p:blipFill>
+          <a:blip r:embed="rId1"/>
+          <a:stretch>
+            <a:fillRect/>
+          </a:stretch>
+        </p:blipFill>
+        <p:spPr>
+          <a:xfrm>
+            <a:off x="704088" y="1938528"/>
+            <a:ext cx="5221224" cy="4014216"/>
+          </a:xfrm>
+          <a:prstGeom prst="rect">
+            <a:avLst/>
+          </a:prstGeom>
+        </p:spPr>
+      </p:pic>
+      <p:sp>
+        <p:nvSpPr>
+          <p:cNvPr id="6" name="Text 3"/>
+          <p:cNvSpPr/>
+          <p:nvPr/>
+        </p:nvSpPr>
+        <p:spPr>
+          <a:xfrm>
+            <a:off x="704088" y="5559552"/>
+            <a:ext cx="5221224" cy="365760"/>
+          </a:xfrm>
+          <a:prstGeom prst="rect">
             <a:avLst/>
           </a:prstGeom>
           <a:solidFill>
             <a:srgbClr val="1F3864"/>
           </a:solidFill>
-          <a:ln w="15240">
-            <a:solidFill>
-              <a:srgbClr val="FFFFFF"/>
-            </a:solidFill>
-            <a:prstDash val="solid"/>
-          </a:ln>
-        </p:spPr>
-      </p:sp>
-      <p:sp>
-        <p:nvSpPr>
-          <p:cNvPr id="136" name="Text 134"/>
-          <p:cNvSpPr/>
-          <p:nvPr/>
-        </p:nvSpPr>
-        <p:spPr>
-          <a:xfrm>
-            <a:off x="2250622" y="2440889"/>
-            <a:ext cx="457200" cy="457200"/>
-          </a:xfrm>
-          <a:prstGeom prst="rect">
-            <a:avLst/>
-          </a:prstGeom>
-          <a:noFill/>
-          <a:ln/>
-        </p:spPr>
-        <p:txBody>
-          <a:bodyPr wrap="square" lIns="0" tIns="0" rIns="0" bIns="0" rtlCol="0" anchor="ctr"/>
-          <a:lstStyle/>
-          <a:p>
-            <a:pPr algn="ctr" indent="0" marL="0">
-              <a:buNone/>
-            </a:pPr>
-            <a:r>
-              <a:rPr lang="en-US" sz="1100" b="1" dirty="0">
+          <a:ln/>
+        </p:spPr>
+        <p:txBody>
+          <a:bodyPr wrap="square" lIns="635" tIns="635" rIns="635" bIns="635" rtlCol="0" anchor="ctr"/>
+          <a:lstStyle/>
+          <a:p>
+            <a:pPr indent="0" marL="0">
+              <a:buNone/>
+            </a:pPr>
+            <a:r>
+              <a:rPr lang="en-US" sz="950" i="1" dirty="0">
                 <a:solidFill>
                   <a:srgbClr val="FFFFFF"/>
                 </a:solidFill>
@@ -11824,950 +7665,15 @@
                 <a:ea typeface="Arial" pitchFamily="34" charset="-122"/>
                 <a:cs typeface="Arial" pitchFamily="34" charset="-120"/>
               </a:rPr>
-              <a:t>100</a:t>
-            </a:r>
-            <a:endParaRPr lang="en-US" sz="1100" dirty="0"/>
-          </a:p>
-        </p:txBody>
-      </p:sp>
-      <p:sp>
-        <p:nvSpPr>
-          <p:cNvPr id="137" name="Shape 135"/>
-          <p:cNvSpPr/>
-          <p:nvPr/>
-        </p:nvSpPr>
-        <p:spPr>
-          <a:xfrm>
-            <a:off x="4374779" y="2463006"/>
-            <a:ext cx="457200" cy="457200"/>
-          </a:xfrm>
-          <a:prstGeom prst="ellipse">
-            <a:avLst/>
-          </a:prstGeom>
-          <a:solidFill>
-            <a:srgbClr val="1F3864"/>
-          </a:solidFill>
-          <a:ln w="15240">
-            <a:solidFill>
-              <a:srgbClr val="FFFFFF"/>
-            </a:solidFill>
-            <a:prstDash val="solid"/>
-          </a:ln>
-        </p:spPr>
-      </p:sp>
-      <p:sp>
-        <p:nvSpPr>
-          <p:cNvPr id="138" name="Text 136"/>
-          <p:cNvSpPr/>
-          <p:nvPr/>
-        </p:nvSpPr>
-        <p:spPr>
-          <a:xfrm>
-            <a:off x="4374779" y="2463006"/>
-            <a:ext cx="457200" cy="457200"/>
-          </a:xfrm>
-          <a:prstGeom prst="rect">
-            <a:avLst/>
-          </a:prstGeom>
-          <a:noFill/>
-          <a:ln/>
-        </p:spPr>
-        <p:txBody>
-          <a:bodyPr wrap="square" lIns="0" tIns="0" rIns="0" bIns="0" rtlCol="0" anchor="ctr"/>
-          <a:lstStyle/>
-          <a:p>
-            <a:pPr algn="ctr" indent="0" marL="0">
-              <a:buNone/>
-            </a:pPr>
-            <a:r>
-              <a:rPr lang="en-US" sz="1100" b="1" dirty="0">
-                <a:solidFill>
-                  <a:srgbClr val="FFFFFF"/>
-                </a:solidFill>
-                <a:latin typeface="Arial" pitchFamily="34" charset="0"/>
-                <a:ea typeface="Arial" pitchFamily="34" charset="-122"/>
-                <a:cs typeface="Arial" pitchFamily="34" charset="-120"/>
-              </a:rPr>
-              <a:t>106</a:t>
-            </a:r>
-            <a:endParaRPr lang="en-US" sz="1100" dirty="0"/>
-          </a:p>
-        </p:txBody>
-      </p:sp>
-      <p:sp>
-        <p:nvSpPr>
-          <p:cNvPr id="139" name="Shape 137"/>
-          <p:cNvSpPr/>
-          <p:nvPr/>
-        </p:nvSpPr>
-        <p:spPr>
-          <a:xfrm>
-            <a:off x="2065382" y="2320887"/>
-            <a:ext cx="457200" cy="457200"/>
-          </a:xfrm>
-          <a:prstGeom prst="ellipse">
-            <a:avLst/>
-          </a:prstGeom>
-          <a:solidFill>
-            <a:srgbClr val="1F3864"/>
-          </a:solidFill>
-          <a:ln w="15240">
-            <a:solidFill>
-              <a:srgbClr val="FFFFFF"/>
-            </a:solidFill>
-            <a:prstDash val="solid"/>
-          </a:ln>
-        </p:spPr>
-      </p:sp>
-      <p:sp>
-        <p:nvSpPr>
-          <p:cNvPr id="140" name="Text 138"/>
-          <p:cNvSpPr/>
-          <p:nvPr/>
-        </p:nvSpPr>
-        <p:spPr>
-          <a:xfrm>
-            <a:off x="2065382" y="2320887"/>
-            <a:ext cx="457200" cy="457200"/>
-          </a:xfrm>
-          <a:prstGeom prst="rect">
-            <a:avLst/>
-          </a:prstGeom>
-          <a:noFill/>
-          <a:ln/>
-        </p:spPr>
-        <p:txBody>
-          <a:bodyPr wrap="square" lIns="0" tIns="0" rIns="0" bIns="0" rtlCol="0" anchor="ctr"/>
-          <a:lstStyle/>
-          <a:p>
-            <a:pPr algn="ctr" indent="0" marL="0">
-              <a:buNone/>
-            </a:pPr>
-            <a:r>
-              <a:rPr lang="en-US" sz="1100" b="1" dirty="0">
-                <a:solidFill>
-                  <a:srgbClr val="FFFFFF"/>
-                </a:solidFill>
-                <a:latin typeface="Arial" pitchFamily="34" charset="0"/>
-                <a:ea typeface="Arial" pitchFamily="34" charset="-122"/>
-                <a:cs typeface="Arial" pitchFamily="34" charset="-120"/>
-              </a:rPr>
-              <a:t>119</a:t>
-            </a:r>
-            <a:endParaRPr lang="en-US" sz="1100" dirty="0"/>
-          </a:p>
-        </p:txBody>
-      </p:sp>
-      <p:sp>
-        <p:nvSpPr>
-          <p:cNvPr id="141" name="Shape 139"/>
-          <p:cNvSpPr/>
-          <p:nvPr/>
-        </p:nvSpPr>
-        <p:spPr>
-          <a:xfrm>
-            <a:off x="3999092" y="4409407"/>
-            <a:ext cx="457200" cy="457200"/>
-          </a:xfrm>
-          <a:prstGeom prst="ellipse">
-            <a:avLst/>
-          </a:prstGeom>
-          <a:solidFill>
-            <a:srgbClr val="1F3864"/>
-          </a:solidFill>
-          <a:ln w="15240">
-            <a:solidFill>
-              <a:srgbClr val="FFFFFF"/>
-            </a:solidFill>
-            <a:prstDash val="solid"/>
-          </a:ln>
-        </p:spPr>
-      </p:sp>
-      <p:sp>
-        <p:nvSpPr>
-          <p:cNvPr id="142" name="Text 140"/>
-          <p:cNvSpPr/>
-          <p:nvPr/>
-        </p:nvSpPr>
-        <p:spPr>
-          <a:xfrm>
-            <a:off x="3999092" y="4409407"/>
-            <a:ext cx="457200" cy="457200"/>
-          </a:xfrm>
-          <a:prstGeom prst="rect">
-            <a:avLst/>
-          </a:prstGeom>
-          <a:noFill/>
-          <a:ln/>
-        </p:spPr>
-        <p:txBody>
-          <a:bodyPr wrap="square" lIns="0" tIns="0" rIns="0" bIns="0" rtlCol="0" anchor="ctr"/>
-          <a:lstStyle/>
-          <a:p>
-            <a:pPr algn="ctr" indent="0" marL="0">
-              <a:buNone/>
-            </a:pPr>
-            <a:r>
-              <a:rPr lang="en-US" sz="1100" b="1" dirty="0">
-                <a:solidFill>
-                  <a:srgbClr val="FFFFFF"/>
-                </a:solidFill>
-                <a:latin typeface="Arial" pitchFamily="34" charset="0"/>
-                <a:ea typeface="Arial" pitchFamily="34" charset="-122"/>
-                <a:cs typeface="Arial" pitchFamily="34" charset="-120"/>
-              </a:rPr>
-              <a:t>134</a:t>
-            </a:r>
-            <a:endParaRPr lang="en-US" sz="1100" dirty="0"/>
-          </a:p>
-        </p:txBody>
-      </p:sp>
-      <p:sp>
-        <p:nvSpPr>
-          <p:cNvPr id="143" name="Shape 141"/>
-          <p:cNvSpPr/>
-          <p:nvPr/>
-        </p:nvSpPr>
-        <p:spPr>
-          <a:xfrm>
-            <a:off x="3999713" y="4136880"/>
-            <a:ext cx="457200" cy="457200"/>
-          </a:xfrm>
-          <a:prstGeom prst="ellipse">
-            <a:avLst/>
-          </a:prstGeom>
-          <a:solidFill>
-            <a:srgbClr val="1F3864"/>
-          </a:solidFill>
-          <a:ln w="15240">
-            <a:solidFill>
-              <a:srgbClr val="FFFFFF"/>
-            </a:solidFill>
-            <a:prstDash val="solid"/>
-          </a:ln>
-        </p:spPr>
-      </p:sp>
-      <p:sp>
-        <p:nvSpPr>
-          <p:cNvPr id="144" name="Text 142"/>
-          <p:cNvSpPr/>
-          <p:nvPr/>
-        </p:nvSpPr>
-        <p:spPr>
-          <a:xfrm>
-            <a:off x="3999713" y="4136880"/>
-            <a:ext cx="457200" cy="457200"/>
-          </a:xfrm>
-          <a:prstGeom prst="rect">
-            <a:avLst/>
-          </a:prstGeom>
-          <a:noFill/>
-          <a:ln/>
-        </p:spPr>
-        <p:txBody>
-          <a:bodyPr wrap="square" lIns="0" tIns="0" rIns="0" bIns="0" rtlCol="0" anchor="ctr"/>
-          <a:lstStyle/>
-          <a:p>
-            <a:pPr algn="ctr" indent="0" marL="0">
-              <a:buNone/>
-            </a:pPr>
-            <a:r>
-              <a:rPr lang="en-US" sz="1100" b="1" dirty="0">
-                <a:solidFill>
-                  <a:srgbClr val="FFFFFF"/>
-                </a:solidFill>
-                <a:latin typeface="Arial" pitchFamily="34" charset="0"/>
-                <a:ea typeface="Arial" pitchFamily="34" charset="-122"/>
-                <a:cs typeface="Arial" pitchFamily="34" charset="-120"/>
-              </a:rPr>
-              <a:t>150</a:t>
-            </a:r>
-            <a:endParaRPr lang="en-US" sz="1100" dirty="0"/>
-          </a:p>
-        </p:txBody>
-      </p:sp>
-      <p:sp>
-        <p:nvSpPr>
-          <p:cNvPr id="145" name="Shape 143"/>
-          <p:cNvSpPr/>
-          <p:nvPr/>
-        </p:nvSpPr>
-        <p:spPr>
-          <a:xfrm>
-            <a:off x="4160993" y="4076375"/>
-            <a:ext cx="457200" cy="457200"/>
-          </a:xfrm>
-          <a:prstGeom prst="ellipse">
-            <a:avLst/>
-          </a:prstGeom>
-          <a:solidFill>
-            <a:srgbClr val="1F3864"/>
-          </a:solidFill>
-          <a:ln w="15240">
-            <a:solidFill>
-              <a:srgbClr val="FFFFFF"/>
-            </a:solidFill>
-            <a:prstDash val="solid"/>
-          </a:ln>
-        </p:spPr>
-      </p:sp>
-      <p:sp>
-        <p:nvSpPr>
-          <p:cNvPr id="146" name="Text 144"/>
-          <p:cNvSpPr/>
-          <p:nvPr/>
-        </p:nvSpPr>
-        <p:spPr>
-          <a:xfrm>
-            <a:off x="4160993" y="4076375"/>
-            <a:ext cx="457200" cy="457200"/>
-          </a:xfrm>
-          <a:prstGeom prst="rect">
-            <a:avLst/>
-          </a:prstGeom>
-          <a:noFill/>
-          <a:ln/>
-        </p:spPr>
-        <p:txBody>
-          <a:bodyPr wrap="square" lIns="0" tIns="0" rIns="0" bIns="0" rtlCol="0" anchor="ctr"/>
-          <a:lstStyle/>
-          <a:p>
-            <a:pPr algn="ctr" indent="0" marL="0">
-              <a:buNone/>
-            </a:pPr>
-            <a:r>
-              <a:rPr lang="en-US" sz="1100" b="1" dirty="0">
-                <a:solidFill>
-                  <a:srgbClr val="FFFFFF"/>
-                </a:solidFill>
-                <a:latin typeface="Arial" pitchFamily="34" charset="0"/>
-                <a:ea typeface="Arial" pitchFamily="34" charset="-122"/>
-                <a:cs typeface="Arial" pitchFamily="34" charset="-120"/>
-              </a:rPr>
-              <a:t>181</a:t>
-            </a:r>
-            <a:endParaRPr lang="en-US" sz="1100" dirty="0"/>
-          </a:p>
-        </p:txBody>
-      </p:sp>
-      <p:sp>
-        <p:nvSpPr>
-          <p:cNvPr id="147" name="Shape 145"/>
-          <p:cNvSpPr/>
-          <p:nvPr/>
-        </p:nvSpPr>
-        <p:spPr>
-          <a:xfrm>
-            <a:off x="2964891" y="3292035"/>
-            <a:ext cx="457200" cy="457200"/>
-          </a:xfrm>
-          <a:prstGeom prst="ellipse">
-            <a:avLst/>
-          </a:prstGeom>
-          <a:solidFill>
-            <a:srgbClr val="1F3864"/>
-          </a:solidFill>
-          <a:ln w="15240">
-            <a:solidFill>
-              <a:srgbClr val="FFFFFF"/>
-            </a:solidFill>
-            <a:prstDash val="solid"/>
-          </a:ln>
-        </p:spPr>
-      </p:sp>
-      <p:sp>
-        <p:nvSpPr>
-          <p:cNvPr id="148" name="Text 146"/>
-          <p:cNvSpPr/>
-          <p:nvPr/>
-        </p:nvSpPr>
-        <p:spPr>
-          <a:xfrm>
-            <a:off x="2964891" y="3292035"/>
-            <a:ext cx="457200" cy="457200"/>
-          </a:xfrm>
-          <a:prstGeom prst="rect">
-            <a:avLst/>
-          </a:prstGeom>
-          <a:noFill/>
-          <a:ln/>
-        </p:spPr>
-        <p:txBody>
-          <a:bodyPr wrap="square" lIns="0" tIns="0" rIns="0" bIns="0" rtlCol="0" anchor="ctr"/>
-          <a:lstStyle/>
-          <a:p>
-            <a:pPr algn="ctr" indent="0" marL="0">
-              <a:buNone/>
-            </a:pPr>
-            <a:r>
-              <a:rPr lang="en-US" sz="1100" b="1" dirty="0">
-                <a:solidFill>
-                  <a:srgbClr val="FFFFFF"/>
-                </a:solidFill>
-                <a:latin typeface="Arial" pitchFamily="34" charset="0"/>
-                <a:ea typeface="Arial" pitchFamily="34" charset="-122"/>
-                <a:cs typeface="Arial" pitchFamily="34" charset="-120"/>
-              </a:rPr>
-              <a:t>194</a:t>
-            </a:r>
-            <a:endParaRPr lang="en-US" sz="1100" dirty="0"/>
-          </a:p>
-        </p:txBody>
-      </p:sp>
-      <p:sp>
-        <p:nvSpPr>
-          <p:cNvPr id="149" name="Shape 147"/>
-          <p:cNvSpPr/>
-          <p:nvPr/>
-        </p:nvSpPr>
-        <p:spPr>
-          <a:xfrm>
-            <a:off x="2105197" y="2397539"/>
-            <a:ext cx="457200" cy="457200"/>
-          </a:xfrm>
-          <a:prstGeom prst="ellipse">
-            <a:avLst/>
-          </a:prstGeom>
-          <a:solidFill>
-            <a:srgbClr val="1F3864"/>
-          </a:solidFill>
-          <a:ln w="15240">
-            <a:solidFill>
-              <a:srgbClr val="FFFFFF"/>
-            </a:solidFill>
-            <a:prstDash val="solid"/>
-          </a:ln>
-        </p:spPr>
-      </p:sp>
-      <p:sp>
-        <p:nvSpPr>
-          <p:cNvPr id="150" name="Text 148"/>
-          <p:cNvSpPr/>
-          <p:nvPr/>
-        </p:nvSpPr>
-        <p:spPr>
-          <a:xfrm>
-            <a:off x="2105197" y="2397539"/>
-            <a:ext cx="457200" cy="457200"/>
-          </a:xfrm>
-          <a:prstGeom prst="rect">
-            <a:avLst/>
-          </a:prstGeom>
-          <a:noFill/>
-          <a:ln/>
-        </p:spPr>
-        <p:txBody>
-          <a:bodyPr wrap="square" lIns="0" tIns="0" rIns="0" bIns="0" rtlCol="0" anchor="ctr"/>
-          <a:lstStyle/>
-          <a:p>
-            <a:pPr algn="ctr" indent="0" marL="0">
-              <a:buNone/>
-            </a:pPr>
-            <a:r>
-              <a:rPr lang="en-US" sz="1100" b="1" dirty="0">
-                <a:solidFill>
-                  <a:srgbClr val="FFFFFF"/>
-                </a:solidFill>
-                <a:latin typeface="Arial" pitchFamily="34" charset="0"/>
-                <a:ea typeface="Arial" pitchFamily="34" charset="-122"/>
-                <a:cs typeface="Arial" pitchFamily="34" charset="-120"/>
-              </a:rPr>
-              <a:t>230</a:t>
-            </a:r>
-            <a:endParaRPr lang="en-US" sz="1100" dirty="0"/>
-          </a:p>
-        </p:txBody>
-      </p:sp>
-      <p:sp>
-        <p:nvSpPr>
-          <p:cNvPr id="151" name="Shape 149"/>
-          <p:cNvSpPr/>
-          <p:nvPr/>
-        </p:nvSpPr>
-        <p:spPr>
-          <a:xfrm>
-            <a:off x="1663334" y="2196851"/>
-            <a:ext cx="457200" cy="457200"/>
-          </a:xfrm>
-          <a:prstGeom prst="ellipse">
-            <a:avLst/>
-          </a:prstGeom>
-          <a:solidFill>
-            <a:srgbClr val="1F3864"/>
-          </a:solidFill>
-          <a:ln w="15240">
-            <a:solidFill>
-              <a:srgbClr val="FFFFFF"/>
-            </a:solidFill>
-            <a:prstDash val="solid"/>
-          </a:ln>
-        </p:spPr>
-      </p:sp>
-      <p:sp>
-        <p:nvSpPr>
-          <p:cNvPr id="152" name="Text 150"/>
-          <p:cNvSpPr/>
-          <p:nvPr/>
-        </p:nvSpPr>
-        <p:spPr>
-          <a:xfrm>
-            <a:off x="1663334" y="2196851"/>
-            <a:ext cx="457200" cy="457200"/>
-          </a:xfrm>
-          <a:prstGeom prst="rect">
-            <a:avLst/>
-          </a:prstGeom>
-          <a:noFill/>
-          <a:ln/>
-        </p:spPr>
-        <p:txBody>
-          <a:bodyPr wrap="square" lIns="0" tIns="0" rIns="0" bIns="0" rtlCol="0" anchor="ctr"/>
-          <a:lstStyle/>
-          <a:p>
-            <a:pPr algn="ctr" indent="0" marL="0">
-              <a:buNone/>
-            </a:pPr>
-            <a:r>
-              <a:rPr lang="en-US" sz="1100" b="1" dirty="0">
-                <a:solidFill>
-                  <a:srgbClr val="FFFFFF"/>
-                </a:solidFill>
-                <a:latin typeface="Arial" pitchFamily="34" charset="0"/>
-                <a:ea typeface="Arial" pitchFamily="34" charset="-122"/>
-                <a:cs typeface="Arial" pitchFamily="34" charset="-120"/>
-              </a:rPr>
-              <a:t>250</a:t>
-            </a:r>
-            <a:endParaRPr lang="en-US" sz="1100" dirty="0"/>
-          </a:p>
-        </p:txBody>
-      </p:sp>
-      <p:sp>
-        <p:nvSpPr>
-          <p:cNvPr id="153" name="Shape 151"/>
-          <p:cNvSpPr/>
-          <p:nvPr/>
-        </p:nvSpPr>
-        <p:spPr>
-          <a:xfrm>
-            <a:off x="4013405" y="4722601"/>
-            <a:ext cx="457200" cy="457200"/>
-          </a:xfrm>
-          <a:prstGeom prst="ellipse">
-            <a:avLst/>
-          </a:prstGeom>
-          <a:solidFill>
-            <a:srgbClr val="1F3864"/>
-          </a:solidFill>
-          <a:ln w="15240">
-            <a:solidFill>
-              <a:srgbClr val="FFFFFF"/>
-            </a:solidFill>
-            <a:prstDash val="solid"/>
-          </a:ln>
-        </p:spPr>
-      </p:sp>
-      <p:sp>
-        <p:nvSpPr>
-          <p:cNvPr id="154" name="Text 152"/>
-          <p:cNvSpPr/>
-          <p:nvPr/>
-        </p:nvSpPr>
-        <p:spPr>
-          <a:xfrm>
-            <a:off x="4013405" y="4722601"/>
-            <a:ext cx="457200" cy="457200"/>
-          </a:xfrm>
-          <a:prstGeom prst="rect">
-            <a:avLst/>
-          </a:prstGeom>
-          <a:noFill/>
-          <a:ln/>
-        </p:spPr>
-        <p:txBody>
-          <a:bodyPr wrap="square" lIns="0" tIns="0" rIns="0" bIns="0" rtlCol="0" anchor="ctr"/>
-          <a:lstStyle/>
-          <a:p>
-            <a:pPr algn="ctr" indent="0" marL="0">
-              <a:buNone/>
-            </a:pPr>
-            <a:r>
-              <a:rPr lang="en-US" sz="1100" b="1" dirty="0">
-                <a:solidFill>
-                  <a:srgbClr val="FFFFFF"/>
-                </a:solidFill>
-                <a:latin typeface="Arial" pitchFamily="34" charset="0"/>
-                <a:ea typeface="Arial" pitchFamily="34" charset="-122"/>
-                <a:cs typeface="Arial" pitchFamily="34" charset="-120"/>
-              </a:rPr>
-              <a:t>250</a:t>
-            </a:r>
-            <a:endParaRPr lang="en-US" sz="1100" dirty="0"/>
-          </a:p>
-        </p:txBody>
-      </p:sp>
-      <p:sp>
-        <p:nvSpPr>
-          <p:cNvPr id="155" name="Shape 153"/>
-          <p:cNvSpPr/>
-          <p:nvPr/>
-        </p:nvSpPr>
-        <p:spPr>
-          <a:xfrm>
-            <a:off x="2484778" y="2760439"/>
-            <a:ext cx="457200" cy="457200"/>
-          </a:xfrm>
-          <a:prstGeom prst="ellipse">
-            <a:avLst/>
-          </a:prstGeom>
-          <a:solidFill>
-            <a:srgbClr val="1F3864"/>
-          </a:solidFill>
-          <a:ln w="15240">
-            <a:solidFill>
-              <a:srgbClr val="FFFFFF"/>
-            </a:solidFill>
-            <a:prstDash val="solid"/>
-          </a:ln>
-        </p:spPr>
-      </p:sp>
-      <p:sp>
-        <p:nvSpPr>
-          <p:cNvPr id="156" name="Text 154"/>
-          <p:cNvSpPr/>
-          <p:nvPr/>
-        </p:nvSpPr>
-        <p:spPr>
-          <a:xfrm>
-            <a:off x="2484778" y="2760439"/>
-            <a:ext cx="457200" cy="457200"/>
-          </a:xfrm>
-          <a:prstGeom prst="rect">
-            <a:avLst/>
-          </a:prstGeom>
-          <a:noFill/>
-          <a:ln/>
-        </p:spPr>
-        <p:txBody>
-          <a:bodyPr wrap="square" lIns="0" tIns="0" rIns="0" bIns="0" rtlCol="0" anchor="ctr"/>
-          <a:lstStyle/>
-          <a:p>
-            <a:pPr algn="ctr" indent="0" marL="0">
-              <a:buNone/>
-            </a:pPr>
-            <a:r>
-              <a:rPr lang="en-US" sz="1100" b="1" dirty="0">
-                <a:solidFill>
-                  <a:srgbClr val="FFFFFF"/>
-                </a:solidFill>
-                <a:latin typeface="Arial" pitchFamily="34" charset="0"/>
-                <a:ea typeface="Arial" pitchFamily="34" charset="-122"/>
-                <a:cs typeface="Arial" pitchFamily="34" charset="-120"/>
-              </a:rPr>
-              <a:t>250</a:t>
-            </a:r>
-            <a:endParaRPr lang="en-US" sz="1100" dirty="0"/>
-          </a:p>
-        </p:txBody>
-      </p:sp>
-      <p:sp>
-        <p:nvSpPr>
-          <p:cNvPr id="157" name="Shape 155"/>
-          <p:cNvSpPr/>
-          <p:nvPr/>
-        </p:nvSpPr>
-        <p:spPr>
-          <a:xfrm>
-            <a:off x="3933019" y="4578325"/>
-            <a:ext cx="457200" cy="457200"/>
-          </a:xfrm>
-          <a:prstGeom prst="ellipse">
-            <a:avLst/>
-          </a:prstGeom>
-          <a:solidFill>
-            <a:srgbClr val="1F3864"/>
-          </a:solidFill>
-          <a:ln w="15240">
-            <a:solidFill>
-              <a:srgbClr val="FFFFFF"/>
-            </a:solidFill>
-            <a:prstDash val="solid"/>
-          </a:ln>
-        </p:spPr>
-      </p:sp>
-      <p:sp>
-        <p:nvSpPr>
-          <p:cNvPr id="158" name="Text 156"/>
-          <p:cNvSpPr/>
-          <p:nvPr/>
-        </p:nvSpPr>
-        <p:spPr>
-          <a:xfrm>
-            <a:off x="3933019" y="4578325"/>
-            <a:ext cx="457200" cy="457200"/>
-          </a:xfrm>
-          <a:prstGeom prst="rect">
-            <a:avLst/>
-          </a:prstGeom>
-          <a:noFill/>
-          <a:ln/>
-        </p:spPr>
-        <p:txBody>
-          <a:bodyPr wrap="square" lIns="0" tIns="0" rIns="0" bIns="0" rtlCol="0" anchor="ctr"/>
-          <a:lstStyle/>
-          <a:p>
-            <a:pPr algn="ctr" indent="0" marL="0">
-              <a:buNone/>
-            </a:pPr>
-            <a:r>
-              <a:rPr lang="en-US" sz="1100" b="1" dirty="0">
-                <a:solidFill>
-                  <a:srgbClr val="FFFFFF"/>
-                </a:solidFill>
-                <a:latin typeface="Arial" pitchFamily="34" charset="0"/>
-                <a:ea typeface="Arial" pitchFamily="34" charset="-122"/>
-                <a:cs typeface="Arial" pitchFamily="34" charset="-120"/>
-              </a:rPr>
-              <a:t>250</a:t>
-            </a:r>
-            <a:endParaRPr lang="en-US" sz="1100" dirty="0"/>
-          </a:p>
-        </p:txBody>
-      </p:sp>
-      <p:sp>
-        <p:nvSpPr>
-          <p:cNvPr id="159" name="Shape 157"/>
-          <p:cNvSpPr/>
-          <p:nvPr/>
-        </p:nvSpPr>
-        <p:spPr>
-          <a:xfrm>
-            <a:off x="2401176" y="2127907"/>
-            <a:ext cx="457200" cy="457200"/>
-          </a:xfrm>
-          <a:prstGeom prst="ellipse">
-            <a:avLst/>
-          </a:prstGeom>
-          <a:solidFill>
-            <a:srgbClr val="1F3864"/>
-          </a:solidFill>
-          <a:ln w="15240">
-            <a:solidFill>
-              <a:srgbClr val="FFFFFF"/>
-            </a:solidFill>
-            <a:prstDash val="solid"/>
-          </a:ln>
-        </p:spPr>
-      </p:sp>
-      <p:sp>
-        <p:nvSpPr>
-          <p:cNvPr id="160" name="Text 158"/>
-          <p:cNvSpPr/>
-          <p:nvPr/>
-        </p:nvSpPr>
-        <p:spPr>
-          <a:xfrm>
-            <a:off x="2401176" y="2127907"/>
-            <a:ext cx="457200" cy="457200"/>
-          </a:xfrm>
-          <a:prstGeom prst="rect">
-            <a:avLst/>
-          </a:prstGeom>
-          <a:noFill/>
-          <a:ln/>
-        </p:spPr>
-        <p:txBody>
-          <a:bodyPr wrap="square" lIns="0" tIns="0" rIns="0" bIns="0" rtlCol="0" anchor="ctr"/>
-          <a:lstStyle/>
-          <a:p>
-            <a:pPr algn="ctr" indent="0" marL="0">
-              <a:buNone/>
-            </a:pPr>
-            <a:r>
-              <a:rPr lang="en-US" sz="1100" b="1" dirty="0">
-                <a:solidFill>
-                  <a:srgbClr val="FFFFFF"/>
-                </a:solidFill>
-                <a:latin typeface="Arial" pitchFamily="34" charset="0"/>
-                <a:ea typeface="Arial" pitchFamily="34" charset="-122"/>
-                <a:cs typeface="Arial" pitchFamily="34" charset="-120"/>
-              </a:rPr>
-              <a:t>250</a:t>
-            </a:r>
-            <a:endParaRPr lang="en-US" sz="1100" dirty="0"/>
-          </a:p>
-        </p:txBody>
-      </p:sp>
-      <p:sp>
-        <p:nvSpPr>
-          <p:cNvPr id="161" name="Shape 159"/>
-          <p:cNvSpPr/>
-          <p:nvPr/>
-        </p:nvSpPr>
-        <p:spPr>
-          <a:xfrm>
-            <a:off x="1263591" y="2444060"/>
-            <a:ext cx="457200" cy="457200"/>
-          </a:xfrm>
-          <a:prstGeom prst="ellipse">
-            <a:avLst/>
-          </a:prstGeom>
-          <a:solidFill>
-            <a:srgbClr val="1F3864"/>
-          </a:solidFill>
-          <a:ln w="15240">
-            <a:solidFill>
-              <a:srgbClr val="FFFFFF"/>
-            </a:solidFill>
-            <a:prstDash val="solid"/>
-          </a:ln>
-        </p:spPr>
-      </p:sp>
-      <p:sp>
-        <p:nvSpPr>
-          <p:cNvPr id="162" name="Text 160"/>
-          <p:cNvSpPr/>
-          <p:nvPr/>
-        </p:nvSpPr>
-        <p:spPr>
-          <a:xfrm>
-            <a:off x="1263591" y="2444060"/>
-            <a:ext cx="457200" cy="457200"/>
-          </a:xfrm>
-          <a:prstGeom prst="rect">
-            <a:avLst/>
-          </a:prstGeom>
-          <a:noFill/>
-          <a:ln/>
-        </p:spPr>
-        <p:txBody>
-          <a:bodyPr wrap="square" lIns="0" tIns="0" rIns="0" bIns="0" rtlCol="0" anchor="ctr"/>
-          <a:lstStyle/>
-          <a:p>
-            <a:pPr algn="ctr" indent="0" marL="0">
-              <a:buNone/>
-            </a:pPr>
-            <a:r>
-              <a:rPr lang="en-US" sz="1100" b="1" dirty="0">
-                <a:solidFill>
-                  <a:srgbClr val="FFFFFF"/>
-                </a:solidFill>
-                <a:latin typeface="Arial" pitchFamily="34" charset="0"/>
-                <a:ea typeface="Arial" pitchFamily="34" charset="-122"/>
-                <a:cs typeface="Arial" pitchFamily="34" charset="-120"/>
-              </a:rPr>
-              <a:t>250</a:t>
-            </a:r>
-            <a:endParaRPr lang="en-US" sz="1100" dirty="0"/>
-          </a:p>
-        </p:txBody>
-      </p:sp>
-      <p:sp>
-        <p:nvSpPr>
-          <p:cNvPr id="163" name="Shape 161"/>
-          <p:cNvSpPr/>
-          <p:nvPr/>
-        </p:nvSpPr>
-        <p:spPr>
-          <a:xfrm>
-            <a:off x="2145199" y="2421101"/>
-            <a:ext cx="457200" cy="457200"/>
-          </a:xfrm>
-          <a:prstGeom prst="ellipse">
-            <a:avLst/>
-          </a:prstGeom>
-          <a:solidFill>
-            <a:srgbClr val="1F3864"/>
-          </a:solidFill>
-          <a:ln w="15240">
-            <a:solidFill>
-              <a:srgbClr val="FFFFFF"/>
-            </a:solidFill>
-            <a:prstDash val="solid"/>
-          </a:ln>
-        </p:spPr>
-      </p:sp>
-      <p:sp>
-        <p:nvSpPr>
-          <p:cNvPr id="164" name="Text 162"/>
-          <p:cNvSpPr/>
-          <p:nvPr/>
-        </p:nvSpPr>
-        <p:spPr>
-          <a:xfrm>
-            <a:off x="2145199" y="2421101"/>
-            <a:ext cx="457200" cy="457200"/>
-          </a:xfrm>
-          <a:prstGeom prst="rect">
-            <a:avLst/>
-          </a:prstGeom>
-          <a:noFill/>
-          <a:ln/>
-        </p:spPr>
-        <p:txBody>
-          <a:bodyPr wrap="square" lIns="0" tIns="0" rIns="0" bIns="0" rtlCol="0" anchor="ctr"/>
-          <a:lstStyle/>
-          <a:p>
-            <a:pPr algn="ctr" indent="0" marL="0">
-              <a:buNone/>
-            </a:pPr>
-            <a:r>
-              <a:rPr lang="en-US" sz="1100" b="1" dirty="0">
-                <a:solidFill>
-                  <a:srgbClr val="FFFFFF"/>
-                </a:solidFill>
-                <a:latin typeface="Arial" pitchFamily="34" charset="0"/>
-                <a:ea typeface="Arial" pitchFamily="34" charset="-122"/>
-                <a:cs typeface="Arial" pitchFamily="34" charset="-120"/>
-              </a:rPr>
-              <a:t>250</a:t>
-            </a:r>
-            <a:endParaRPr lang="en-US" sz="1100" dirty="0"/>
-          </a:p>
-        </p:txBody>
-      </p:sp>
-      <p:sp>
-        <p:nvSpPr>
-          <p:cNvPr id="165" name="Text 163"/>
-          <p:cNvSpPr/>
-          <p:nvPr/>
-        </p:nvSpPr>
-        <p:spPr>
-          <a:xfrm>
-            <a:off x="868680" y="5605272"/>
-            <a:ext cx="4892040" cy="320040"/>
-          </a:xfrm>
-          <a:prstGeom prst="rect">
-            <a:avLst/>
-          </a:prstGeom>
-          <a:noFill/>
-          <a:ln/>
-        </p:spPr>
-        <p:txBody>
-          <a:bodyPr wrap="square" lIns="0" tIns="0" rIns="0" bIns="0" rtlCol="0" anchor="ctr"/>
-          <a:lstStyle/>
-          <a:p>
-            <a:pPr indent="0" marL="0">
-              <a:buNone/>
-            </a:pPr>
-            <a:r>
-              <a:rPr lang="en-US" sz="1000" i="1" dirty="0">
-                <a:solidFill>
-                  <a:srgbClr val="5A6473"/>
-                </a:solidFill>
-                <a:latin typeface="Arial" pitchFamily="34" charset="0"/>
-                <a:ea typeface="Arial" pitchFamily="34" charset="-122"/>
-                <a:cs typeface="Arial" pitchFamily="34" charset="-120"/>
-              </a:rPr>
-              <a:t>Schematische spreiding — interactieve kaart via de link.</a:t>
-            </a:r>
-            <a:endParaRPr lang="en-US" sz="1000" dirty="0"/>
-          </a:p>
-        </p:txBody>
-      </p:sp>
-      <p:sp>
-        <p:nvSpPr>
-          <p:cNvPr id="166" name="Text 164"/>
+              <a:t>Volledige gemeente · gemeentegrens in Fluctus-blauw · interactieve kaart via de link.</a:t>
+            </a:r>
+            <a:endParaRPr lang="en-US" sz="950" dirty="0"/>
+          </a:p>
+        </p:txBody>
+      </p:sp>
+      <p:sp>
+        <p:nvSpPr>
+          <p:cNvPr id="7" name="Text 4"/>
           <p:cNvSpPr/>
           <p:nvPr/>
         </p:nvSpPr>
@@ -12798,7 +7704,7 @@
                 <a:ea typeface="Arial" pitchFamily="34" charset="-122"/>
                 <a:cs typeface="Arial" pitchFamily="34" charset="-120"/>
               </a:rPr>
-              <a:t>80 parkings · 4.710 plaatsen</a:t>
+              <a:t>132 parkings · 8.419 plaatsen</a:t>
             </a:r>
             <a:endParaRPr lang="en-US" sz="2200" dirty="0"/>
           </a:p>
@@ -12806,7 +7712,7 @@
       </p:sp>
       <p:sp>
         <p:nvSpPr>
-          <p:cNvPr id="167" name="Text 165"/>
+          <p:cNvPr id="8" name="Text 5"/>
           <p:cNvSpPr/>
           <p:nvPr/>
         </p:nvSpPr>
@@ -12845,8 +7751,8 @@
       </p:sp>
       <p:sp>
         <p:nvSpPr>
-          <p:cNvPr id="168" name="Text 166">
-            <a:hlinkClick r:id="rId1" tooltip=""/>
+          <p:cNvPr id="9" name="Text 6">
+            <a:hlinkClick r:id="rId2" tooltip=""/>
           </p:cNvPr>
           <p:cNvSpPr/>
           <p:nvPr/>
@@ -12877,7 +7783,7 @@
                 <a:latin typeface="Arial" pitchFamily="34" charset="0"/>
                 <a:ea typeface="Arial" pitchFamily="34" charset="-122"/>
                 <a:cs typeface="Arial" pitchFamily="34" charset="-120"/>
-                <a:hlinkClick r:id="rId1" invalidUrl="" action="" tgtFrame="" tooltip="" history="1" highlightClick="0" endSnd="0">
+                <a:hlinkClick r:id="rId2" invalidUrl="" action="" tgtFrame="" tooltip="" history="1" highlightClick="0" endSnd="0">
                   <a:extLst>
                     <a:ext uri="{A12FA001-AC4F-418D-AE19-62706E023703}">
                       <ahyp:hlinkClr xmlns:ahyp="http://schemas.microsoft.com/office/drawing/2018/hyperlinkcolor" val="tx"/>
@@ -12893,7 +7799,7 @@
       </p:sp>
       <p:sp>
         <p:nvSpPr>
-          <p:cNvPr id="169" name="Shape 167"/>
+          <p:cNvPr id="10" name="Shape 7"/>
           <p:cNvSpPr/>
           <p:nvPr/>
         </p:nvSpPr>
@@ -12913,93 +7819,7 @@
       </p:sp>
       <p:pic>
         <p:nvPicPr>
-          <p:cNvPr id="170" name="Image 0" descr="preencoded.png">    </p:cNvPr>
-          <p:cNvPicPr>
-            <a:picLocks noChangeAspect="1"/>
-          </p:cNvPicPr>
-          <p:nvPr/>
-        </p:nvPicPr>
-        <p:blipFill>
-          <a:blip r:embed="rId2"/>
-          <a:stretch>
-            <a:fillRect/>
-          </a:stretch>
-        </p:blipFill>
-        <p:spPr>
-          <a:xfrm>
-            <a:off x="6401532" y="3841212"/>
-            <a:ext cx="254569" cy="254569"/>
-          </a:xfrm>
-          <a:prstGeom prst="rect">
-            <a:avLst/>
-          </a:prstGeom>
-        </p:spPr>
-      </p:pic>
-      <p:sp>
-        <p:nvSpPr>
-          <p:cNvPr id="171" name="Text 168"/>
-          <p:cNvSpPr/>
-          <p:nvPr/>
-        </p:nvSpPr>
-        <p:spPr>
-          <a:xfrm>
-            <a:off x="6949440" y="3639312"/>
-            <a:ext cx="4663440" cy="777240"/>
-          </a:xfrm>
-          <a:prstGeom prst="rect">
-            <a:avLst/>
-          </a:prstGeom>
-          <a:noFill/>
-          <a:ln/>
-        </p:spPr>
-        <p:txBody>
-          <a:bodyPr wrap="square" lIns="0" tIns="0" rIns="0" bIns="0" rtlCol="0" anchor="ctr"/>
-          <a:lstStyle/>
-          <a:p>
-            <a:pPr indent="0" marL="0">
-              <a:lnSpc>
-                <a:spcPct val="105000"/>
-              </a:lnSpc>
-              <a:buNone/>
-            </a:pPr>
-            <a:r>
-              <a:rPr lang="en-US" sz="1350" dirty="0">
-                <a:solidFill>
-                  <a:srgbClr val="1A1A1A"/>
-                </a:solidFill>
-                <a:latin typeface="Arial" pitchFamily="34" charset="0"/>
-                <a:ea typeface="Arial" pitchFamily="34" charset="-122"/>
-                <a:cs typeface="Arial" pitchFamily="34" charset="-120"/>
-              </a:rPr>
-              <a:t>Productie, logistiek, retail en garages — telkens met een onderbenutte aansluiting.</a:t>
-            </a:r>
-            <a:endParaRPr lang="en-US" sz="1350" dirty="0"/>
-          </a:p>
-        </p:txBody>
-      </p:sp>
-      <p:sp>
-        <p:nvSpPr>
-          <p:cNvPr id="172" name="Shape 169"/>
-          <p:cNvSpPr/>
-          <p:nvPr/>
-        </p:nvSpPr>
-        <p:spPr>
-          <a:xfrm>
-            <a:off x="6263640" y="4489704"/>
-            <a:ext cx="530352" cy="530352"/>
-          </a:xfrm>
-          <a:prstGeom prst="ellipse">
-            <a:avLst/>
-          </a:prstGeom>
-          <a:solidFill>
-            <a:srgbClr val="E7F6EC"/>
-          </a:solidFill>
-          <a:ln/>
-        </p:spPr>
-      </p:sp>
-      <p:pic>
-        <p:nvPicPr>
-          <p:cNvPr id="173" name="Image 1" descr="preencoded.png">    </p:cNvPr>
+          <p:cNvPr id="11" name="Image 1" descr="preencoded.png">    </p:cNvPr>
           <p:cNvPicPr>
             <a:picLocks noChangeAspect="1"/>
           </p:cNvPicPr>
@@ -13013,7 +7833,7 @@
         </p:blipFill>
         <p:spPr>
           <a:xfrm>
-            <a:off x="6401532" y="4627596"/>
+            <a:off x="6401532" y="3841212"/>
             <a:ext cx="254569" cy="254569"/>
           </a:xfrm>
           <a:prstGeom prst="rect">
@@ -13023,13 +7843,13 @@
       </p:pic>
       <p:sp>
         <p:nvSpPr>
-          <p:cNvPr id="174" name="Text 170"/>
-          <p:cNvSpPr/>
-          <p:nvPr/>
-        </p:nvSpPr>
-        <p:spPr>
-          <a:xfrm>
-            <a:off x="6949440" y="4425696"/>
+          <p:cNvPr id="12" name="Text 8"/>
+          <p:cNvSpPr/>
+          <p:nvPr/>
+        </p:nvSpPr>
+        <p:spPr>
+          <a:xfrm>
+            <a:off x="6949440" y="3639312"/>
             <a:ext cx="4663440" cy="777240"/>
           </a:xfrm>
           <a:prstGeom prst="rect">
@@ -13057,7 +7877,7 @@
                 <a:ea typeface="Arial" pitchFamily="34" charset="-122"/>
                 <a:cs typeface="Arial" pitchFamily="34" charset="-120"/>
               </a:rPr>
-              <a:t>Geschat aantal plaatsen per site bepaalt de laad- en batterijcapaciteit.</a:t>
+              <a:t>Productie, logistiek, retail en garages — telkens met een onderbenutte aansluiting.</a:t>
             </a:r>
             <a:endParaRPr lang="en-US" sz="1350" dirty="0"/>
           </a:p>
@@ -13065,13 +7885,13 @@
       </p:sp>
       <p:sp>
         <p:nvSpPr>
-          <p:cNvPr id="175" name="Shape 171"/>
-          <p:cNvSpPr/>
-          <p:nvPr/>
-        </p:nvSpPr>
-        <p:spPr>
-          <a:xfrm>
-            <a:off x="6263640" y="5276088"/>
+          <p:cNvPr id="13" name="Shape 9"/>
+          <p:cNvSpPr/>
+          <p:nvPr/>
+        </p:nvSpPr>
+        <p:spPr>
+          <a:xfrm>
+            <a:off x="6263640" y="4489704"/>
             <a:ext cx="530352" cy="530352"/>
           </a:xfrm>
           <a:prstGeom prst="ellipse">
@@ -13085,7 +7905,7 @@
       </p:sp>
       <p:pic>
         <p:nvPicPr>
-          <p:cNvPr id="176" name="Image 2" descr="preencoded.png">    </p:cNvPr>
+          <p:cNvPr id="14" name="Image 2" descr="preencoded.png">    </p:cNvPr>
           <p:cNvPicPr>
             <a:picLocks noChangeAspect="1"/>
           </p:cNvPicPr>
@@ -13099,7 +7919,7 @@
         </p:blipFill>
         <p:spPr>
           <a:xfrm>
-            <a:off x="6401532" y="5413980"/>
+            <a:off x="6401532" y="4627596"/>
             <a:ext cx="254569" cy="254569"/>
           </a:xfrm>
           <a:prstGeom prst="rect">
@@ -13109,13 +7929,13 @@
       </p:pic>
       <p:sp>
         <p:nvSpPr>
-          <p:cNvPr id="177" name="Text 172"/>
-          <p:cNvSpPr/>
-          <p:nvPr/>
-        </p:nvSpPr>
-        <p:spPr>
-          <a:xfrm>
-            <a:off x="6949440" y="5212080"/>
+          <p:cNvPr id="15" name="Text 10"/>
+          <p:cNvSpPr/>
+          <p:nvPr/>
+        </p:nvSpPr>
+        <p:spPr>
+          <a:xfrm>
+            <a:off x="6949440" y="4425696"/>
             <a:ext cx="4663440" cy="777240"/>
           </a:xfrm>
           <a:prstGeom prst="rect">
@@ -13143,6 +7963,92 @@
                 <a:ea typeface="Arial" pitchFamily="34" charset="-122"/>
                 <a:cs typeface="Arial" pitchFamily="34" charset="-120"/>
               </a:rPr>
+              <a:t>Geschat aantal plaatsen per site bepaalt de laad- en batterijcapaciteit.</a:t>
+            </a:r>
+            <a:endParaRPr lang="en-US" sz="1350" dirty="0"/>
+          </a:p>
+        </p:txBody>
+      </p:sp>
+      <p:sp>
+        <p:nvSpPr>
+          <p:cNvPr id="16" name="Shape 11"/>
+          <p:cNvSpPr/>
+          <p:nvPr/>
+        </p:nvSpPr>
+        <p:spPr>
+          <a:xfrm>
+            <a:off x="6263640" y="5276088"/>
+            <a:ext cx="530352" cy="530352"/>
+          </a:xfrm>
+          <a:prstGeom prst="ellipse">
+            <a:avLst/>
+          </a:prstGeom>
+          <a:solidFill>
+            <a:srgbClr val="E7F6EC"/>
+          </a:solidFill>
+          <a:ln/>
+        </p:spPr>
+      </p:sp>
+      <p:pic>
+        <p:nvPicPr>
+          <p:cNvPr id="17" name="Image 3" descr="preencoded.png">    </p:cNvPr>
+          <p:cNvPicPr>
+            <a:picLocks noChangeAspect="1"/>
+          </p:cNvPicPr>
+          <p:nvPr/>
+        </p:nvPicPr>
+        <p:blipFill>
+          <a:blip r:embed="rId5"/>
+          <a:stretch>
+            <a:fillRect/>
+          </a:stretch>
+        </p:blipFill>
+        <p:spPr>
+          <a:xfrm>
+            <a:off x="6401532" y="5413980"/>
+            <a:ext cx="254569" cy="254569"/>
+          </a:xfrm>
+          <a:prstGeom prst="rect">
+            <a:avLst/>
+          </a:prstGeom>
+        </p:spPr>
+      </p:pic>
+      <p:sp>
+        <p:nvSpPr>
+          <p:cNvPr id="18" name="Text 12"/>
+          <p:cNvSpPr/>
+          <p:nvPr/>
+        </p:nvSpPr>
+        <p:spPr>
+          <a:xfrm>
+            <a:off x="6949440" y="5212080"/>
+            <a:ext cx="4663440" cy="777240"/>
+          </a:xfrm>
+          <a:prstGeom prst="rect">
+            <a:avLst/>
+          </a:prstGeom>
+          <a:noFill/>
+          <a:ln/>
+        </p:spPr>
+        <p:txBody>
+          <a:bodyPr wrap="square" lIns="0" tIns="0" rIns="0" bIns="0" rtlCol="0" anchor="ctr"/>
+          <a:lstStyle/>
+          <a:p>
+            <a:pPr indent="0" marL="0">
+              <a:lnSpc>
+                <a:spcPct val="105000"/>
+              </a:lnSpc>
+              <a:buNone/>
+            </a:pPr>
+            <a:r>
+              <a:rPr lang="en-US" sz="1350" dirty="0">
+                <a:solidFill>
+                  <a:srgbClr val="1A1A1A"/>
+                </a:solidFill>
+                <a:latin typeface="Arial" pitchFamily="34" charset="0"/>
+                <a:ea typeface="Arial" pitchFamily="34" charset="-122"/>
+                <a:cs typeface="Arial" pitchFamily="34" charset="-120"/>
+              </a:rPr>
               <a:t>De kaart is de basis voor prioritering en gefaseerde uitrol.</a:t>
             </a:r>
             <a:endParaRPr lang="en-US" sz="1350" dirty="0"/>
@@ -13151,7 +8057,7 @@
       </p:sp>
       <p:sp>
         <p:nvSpPr>
-          <p:cNvPr id="178" name="Text 173"/>
+          <p:cNvPr id="19" name="Text 13"/>
           <p:cNvSpPr/>
           <p:nvPr/>
         </p:nvSpPr>
@@ -13190,7 +8096,7 @@
       </p:sp>
       <p:sp>
         <p:nvSpPr>
-          <p:cNvPr id="179" name="Text 174"/>
+          <p:cNvPr id="20" name="Text 14"/>
           <p:cNvSpPr/>
           <p:nvPr/>
         </p:nvSpPr>
@@ -14672,7 +9578,7 @@
                 <a:ea typeface="Arial" pitchFamily="34" charset="-122"/>
                 <a:cs typeface="Arial" pitchFamily="34" charset="-120"/>
               </a:rPr>
-              <a:t>4.710 auto’s op 80 slimme parkings </a:t>
+              <a:t>8.419 auto’s op 132 slimme parkings </a:t>
             </a:r>
             <a:pPr indent="0" marL="0">
               <a:lnSpc>
@@ -14689,7 +9595,7 @@
                 <a:ea typeface="Arial" pitchFamily="34" charset="-122"/>
                 <a:cs typeface="Arial" pitchFamily="34" charset="-120"/>
               </a:rPr>
-              <a:t>verhogen de loadfactor van 34% naar 65% en remmen de congestie af.</a:t>
+              <a:t>verhogen de loadfactor van 49% naar 71% en remmen de congestie af.</a:t>
             </a:r>
             <a:endParaRPr lang="en-US" sz="1400" dirty="0"/>
           </a:p>
@@ -14698,6 +9604,48 @@
       <p:sp>
         <p:nvSpPr>
           <p:cNvPr id="9" name="Text 6"/>
+          <p:cNvSpPr/>
+          <p:nvPr/>
+        </p:nvSpPr>
+        <p:spPr>
+          <a:xfrm>
+            <a:off x="640080" y="5650992"/>
+            <a:ext cx="6126480" cy="320040"/>
+          </a:xfrm>
+          <a:prstGeom prst="rect">
+            <a:avLst/>
+          </a:prstGeom>
+          <a:noFill/>
+          <a:ln/>
+        </p:spPr>
+        <p:txBody>
+          <a:bodyPr wrap="square" lIns="0" tIns="0" rIns="0" bIns="0" rtlCol="0" anchor="ctr"/>
+          <a:lstStyle/>
+          <a:p>
+            <a:pPr indent="0" marL="0">
+              <a:lnSpc>
+                <a:spcPct val="100000"/>
+              </a:lnSpc>
+              <a:buNone/>
+            </a:pPr>
+            <a:r>
+              <a:rPr lang="en-US" sz="900" i="1" dirty="0">
+                <a:solidFill>
+                  <a:srgbClr val="5A6473"/>
+                </a:solidFill>
+                <a:latin typeface="Arial" pitchFamily="34" charset="0"/>
+                <a:ea typeface="Arial" pitchFamily="34" charset="-122"/>
+                <a:cs typeface="Arial" pitchFamily="34" charset="-120"/>
+              </a:rPr>
+              <a:t>* Loadfactor t.o.v. referentiestation: kopstation AVLGM380 (380 kV), 6.6 km van Zwevegem.</a:t>
+            </a:r>
+            <a:endParaRPr lang="en-US" sz="900" dirty="0"/>
+          </a:p>
+        </p:txBody>
+      </p:sp>
+      <p:sp>
+        <p:nvSpPr>
+          <p:cNvPr id="10" name="Text 7"/>
           <p:cNvSpPr/>
           <p:nvPr/>
         </p:nvSpPr>
@@ -14736,7 +9684,7 @@
       </p:sp>
       <p:graphicFrame>
         <p:nvGraphicFramePr>
-          <p:cNvPr id="10" name="Chart 0" descr=""/>
+          <p:cNvPr id="11" name="Chart 0" descr=""/>
           <p:cNvGraphicFramePr/>
           <p:nvPr/>
         </p:nvGraphicFramePr>
@@ -14752,7 +9700,7 @@
       </p:graphicFrame>
       <p:sp>
         <p:nvSpPr>
-          <p:cNvPr id="11" name="Text 7"/>
+          <p:cNvPr id="12" name="Text 8"/>
           <p:cNvSpPr/>
           <p:nvPr/>
         </p:nvSpPr>
@@ -14786,7 +9734,7 @@
                 <a:ea typeface="Arial" pitchFamily="34" charset="-122"/>
                 <a:cs typeface="Arial" pitchFamily="34" charset="-120"/>
               </a:rPr>
-              <a:t>Loadfactor van station RUIEN 70 (70 kV) — dichtste kopstation bij Zwevegem, op ± 7.9 km (laagste load van de cluster &lt;5 km). Flex ≈ 12 MW (11 kW/wagen + 10 kW batterij) op 60 MW firm capacity.</a:t>
+              <a:t>Loadfactor van station AVLGM380 (380 kV) — dichtste kopstation bij Zwevegem, op ± 6.6 km. Flex ≈ 60 MW (11 kW/wagen + 10 kW batterij) op 300 MW firm capacity.</a:t>
             </a:r>
             <a:endParaRPr lang="en-US" sz="950" dirty="0"/>
           </a:p>
@@ -14794,7 +9742,7 @@
       </p:sp>
       <p:sp>
         <p:nvSpPr>
-          <p:cNvPr id="12" name="Text 8"/>
+          <p:cNvPr id="13" name="Text 9"/>
           <p:cNvSpPr/>
           <p:nvPr/>
         </p:nvSpPr>
@@ -14833,7 +9781,7 @@
       </p:sp>
       <p:sp>
         <p:nvSpPr>
-          <p:cNvPr id="13" name="Text 9"/>
+          <p:cNvPr id="14" name="Text 10"/>
           <p:cNvSpPr/>
           <p:nvPr/>
         </p:nvSpPr>

--- a/Fluctus_Laadplan_Zwevegem.pptx
+++ b/Fluctus_Laadplan_Zwevegem.pptx
@@ -219,10 +219,10 @@
                 <c:formatCode>General</c:formatCode>
                 <c:ptCount val="2"/>
                 <c:pt idx="0">
-                  <c:v>49</c:v>
+                  <c:v>34</c:v>
                 </c:pt>
                 <c:pt idx="1">
-                  <c:v>71</c:v>
+                  <c:v>65</c:v>
                 </c:pt>
               </c:numCache>
             </c:numRef>
@@ -6666,7 +6666,7 @@
                 <a:ea typeface="Arial" pitchFamily="34" charset="-122"/>
                 <a:cs typeface="Arial" pitchFamily="34" charset="-120"/>
               </a:rPr>
-              <a:t>De 8.419 wagens zijn de </a:t>
+              <a:t>De 2.134 wagens zijn de </a:t>
             </a:r>
             <a:pPr indent="0" marL="0">
               <a:buNone/>
@@ -6823,7 +6823,7 @@
                 <a:ea typeface="Arial" pitchFamily="34" charset="-122"/>
                 <a:cs typeface="Arial" pitchFamily="34" charset="-120"/>
               </a:rPr>
-              <a:t>8.419</a:t>
+              <a:t>2.134</a:t>
             </a:r>
             <a:endParaRPr lang="en-US" sz="3200" dirty="0"/>
           </a:p>
@@ -6935,7 +6935,7 @@
                 <a:ea typeface="Arial" pitchFamily="34" charset="-122"/>
                 <a:cs typeface="Arial" pitchFamily="34" charset="-120"/>
               </a:rPr>
-              <a:t>132</a:t>
+              <a:t>80</a:t>
             </a:r>
             <a:endParaRPr lang="en-US" sz="3200" dirty="0"/>
           </a:p>
@@ -7047,7 +7047,7 @@
                 <a:ea typeface="Arial" pitchFamily="34" charset="-122"/>
                 <a:cs typeface="Arial" pitchFamily="34" charset="-120"/>
               </a:rPr>
-              <a:t>€ 12,63 mln</a:t>
+              <a:t>€ 3,20 mln</a:t>
             </a:r>
             <a:endParaRPr lang="en-US" sz="3200" dirty="0"/>
           </a:p>
@@ -7159,7 +7159,7 @@
                 <a:ea typeface="Arial" pitchFamily="34" charset="-122"/>
                 <a:cs typeface="Arial" pitchFamily="34" charset="-120"/>
               </a:rPr>
-              <a:t>€ 25,26 mln</a:t>
+              <a:t>€ 6,40 mln</a:t>
             </a:r>
             <a:endParaRPr lang="en-US" sz="3200" dirty="0"/>
           </a:p>
@@ -7266,7 +7266,7 @@
                 <a:ea typeface="Arial" pitchFamily="34" charset="-122"/>
                 <a:cs typeface="Arial" pitchFamily="34" charset="-120"/>
               </a:rPr>
-              <a:t>8.419 wagens</a:t>
+              <a:t>2.134 wagens</a:t>
             </a:r>
             <a:pPr indent="0" marL="0">
               <a:buNone/>
@@ -7294,7 +7294,7 @@
                 <a:ea typeface="Arial" pitchFamily="34" charset="-122"/>
                 <a:cs typeface="Arial" pitchFamily="34" charset="-120"/>
               </a:rPr>
-              <a:t>€ 12,63 mln besparing / jaar</a:t>
+              <a:t>€ 3,20 mln besparing / jaar</a:t>
             </a:r>
             <a:endParaRPr lang="en-US" sz="1500" dirty="0"/>
           </a:p>
@@ -7333,7 +7333,7 @@
                 <a:ea typeface="Arial" pitchFamily="34" charset="-122"/>
                 <a:cs typeface="Arial" pitchFamily="34" charset="-120"/>
               </a:rPr>
-              <a:t>8.419 wagens</a:t>
+              <a:t>2.134 wagens</a:t>
             </a:r>
             <a:pPr indent="0" marL="0">
               <a:buNone/>
@@ -7361,7 +7361,7 @@
                 <a:ea typeface="Arial" pitchFamily="34" charset="-122"/>
                 <a:cs typeface="Arial" pitchFamily="34" charset="-120"/>
               </a:rPr>
-              <a:t>€ 25,26 mln investering</a:t>
+              <a:t>€ 6,40 mln investering</a:t>
             </a:r>
             <a:pPr indent="0" marL="0">
               <a:buNone/>
@@ -7704,7 +7704,7 @@
                 <a:ea typeface="Arial" pitchFamily="34" charset="-122"/>
                 <a:cs typeface="Arial" pitchFamily="34" charset="-120"/>
               </a:rPr>
-              <a:t>132 parkings · 8.419 plaatsen</a:t>
+              <a:t>80 parkings · 2.134 plaatsen</a:t>
             </a:r>
             <a:endParaRPr lang="en-US" sz="2200" dirty="0"/>
           </a:p>
@@ -9578,7 +9578,7 @@
                 <a:ea typeface="Arial" pitchFamily="34" charset="-122"/>
                 <a:cs typeface="Arial" pitchFamily="34" charset="-120"/>
               </a:rPr>
-              <a:t>8.419 auto’s op 132 slimme parkings </a:t>
+              <a:t>2.134 auto’s op 80 slimme parkings </a:t>
             </a:r>
             <a:pPr indent="0" marL="0">
               <a:lnSpc>
@@ -9595,7 +9595,7 @@
                 <a:ea typeface="Arial" pitchFamily="34" charset="-122"/>
                 <a:cs typeface="Arial" pitchFamily="34" charset="-120"/>
               </a:rPr>
-              <a:t>verhogen de loadfactor van 49% naar 71% en remmen de congestie af.</a:t>
+              <a:t>verhogen de loadfactor van 34% naar 65% en remmen de congestie af.</a:t>
             </a:r>
             <a:endParaRPr lang="en-US" sz="1400" dirty="0"/>
           </a:p>
@@ -9637,7 +9637,7 @@
                 <a:ea typeface="Arial" pitchFamily="34" charset="-122"/>
                 <a:cs typeface="Arial" pitchFamily="34" charset="-120"/>
               </a:rPr>
-              <a:t>* Loadfactor t.o.v. referentiestation: kopstation AVLGM380 (380 kV), 6.6 km van Zwevegem.</a:t>
+              <a:t>* Loadfactor t.o.v. referentiestation: kopstation RUIEN 70 (70 kV), 7.9 km van Zwevegem (laagste load van de cluster &lt;5 km).</a:t>
             </a:r>
             <a:endParaRPr lang="en-US" sz="900" dirty="0"/>
           </a:p>
@@ -9734,7 +9734,7 @@
                 <a:ea typeface="Arial" pitchFamily="34" charset="-122"/>
                 <a:cs typeface="Arial" pitchFamily="34" charset="-120"/>
               </a:rPr>
-              <a:t>Loadfactor van station AVLGM380 (380 kV) — dichtste kopstation bij Zwevegem, op ± 6.6 km. Flex ≈ 60 MW (11 kW/wagen + 10 kW batterij) op 300 MW firm capacity.</a:t>
+              <a:t>Loadfactor van station RUIEN 70 (70 kV) — dichtste kopstation bij Zwevegem, op ± 7.9 km (laagste load van de cluster &lt;5 km). Flex ≈ 12 MW (11 kW/wagen + 10 kW batterij) op 60 MW firm capacity.</a:t>
             </a:r>
             <a:endParaRPr lang="en-US" sz="950" dirty="0"/>
           </a:p>

--- a/Fluctus_Laadplan_Zwevegem.pptx
+++ b/Fluctus_Laadplan_Zwevegem.pptx
@@ -6666,7 +6666,7 @@
                 <a:ea typeface="Arial" pitchFamily="34" charset="-122"/>
                 <a:cs typeface="Arial" pitchFamily="34" charset="-120"/>
               </a:rPr>
-              <a:t>De 2.134 wagens zijn de </a:t>
+              <a:t>De 3.455 wagens zijn de </a:t>
             </a:r>
             <a:pPr indent="0" marL="0">
               <a:buNone/>
@@ -6823,7 +6823,7 @@
                 <a:ea typeface="Arial" pitchFamily="34" charset="-122"/>
                 <a:cs typeface="Arial" pitchFamily="34" charset="-120"/>
               </a:rPr>
-              <a:t>2.134</a:t>
+              <a:t>3.455</a:t>
             </a:r>
             <a:endParaRPr lang="en-US" sz="3200" dirty="0"/>
           </a:p>
@@ -6935,7 +6935,7 @@
                 <a:ea typeface="Arial" pitchFamily="34" charset="-122"/>
                 <a:cs typeface="Arial" pitchFamily="34" charset="-120"/>
               </a:rPr>
-              <a:t>80</a:t>
+              <a:t>132</a:t>
             </a:r>
             <a:endParaRPr lang="en-US" sz="3200" dirty="0"/>
           </a:p>
@@ -7047,7 +7047,7 @@
                 <a:ea typeface="Arial" pitchFamily="34" charset="-122"/>
                 <a:cs typeface="Arial" pitchFamily="34" charset="-120"/>
               </a:rPr>
-              <a:t>€ 3,20 mln</a:t>
+              <a:t>€ 5,18 mln</a:t>
             </a:r>
             <a:endParaRPr lang="en-US" sz="3200" dirty="0"/>
           </a:p>
@@ -7159,7 +7159,7 @@
                 <a:ea typeface="Arial" pitchFamily="34" charset="-122"/>
                 <a:cs typeface="Arial" pitchFamily="34" charset="-120"/>
               </a:rPr>
-              <a:t>€ 6,40 mln</a:t>
+              <a:t>€ 10,37 mln</a:t>
             </a:r>
             <a:endParaRPr lang="en-US" sz="3200" dirty="0"/>
           </a:p>
@@ -7266,7 +7266,7 @@
                 <a:ea typeface="Arial" pitchFamily="34" charset="-122"/>
                 <a:cs typeface="Arial" pitchFamily="34" charset="-120"/>
               </a:rPr>
-              <a:t>2.134 wagens</a:t>
+              <a:t>3.455 wagens</a:t>
             </a:r>
             <a:pPr indent="0" marL="0">
               <a:buNone/>
@@ -7294,7 +7294,7 @@
                 <a:ea typeface="Arial" pitchFamily="34" charset="-122"/>
                 <a:cs typeface="Arial" pitchFamily="34" charset="-120"/>
               </a:rPr>
-              <a:t>€ 3,20 mln besparing / jaar</a:t>
+              <a:t>€ 5,18 mln besparing / jaar</a:t>
             </a:r>
             <a:endParaRPr lang="en-US" sz="1500" dirty="0"/>
           </a:p>
@@ -7333,7 +7333,7 @@
                 <a:ea typeface="Arial" pitchFamily="34" charset="-122"/>
                 <a:cs typeface="Arial" pitchFamily="34" charset="-120"/>
               </a:rPr>
-              <a:t>2.134 wagens</a:t>
+              <a:t>3.455 wagens</a:t>
             </a:r>
             <a:pPr indent="0" marL="0">
               <a:buNone/>
@@ -7361,7 +7361,7 @@
                 <a:ea typeface="Arial" pitchFamily="34" charset="-122"/>
                 <a:cs typeface="Arial" pitchFamily="34" charset="-120"/>
               </a:rPr>
-              <a:t>€ 6,40 mln investering</a:t>
+              <a:t>€ 10,37 mln investering</a:t>
             </a:r>
             <a:pPr indent="0" marL="0">
               <a:buNone/>
@@ -7704,7 +7704,7 @@
                 <a:ea typeface="Arial" pitchFamily="34" charset="-122"/>
                 <a:cs typeface="Arial" pitchFamily="34" charset="-120"/>
               </a:rPr>
-              <a:t>80 parkings · 2.134 plaatsen</a:t>
+              <a:t>132 parkings · 3.455 plaatsen</a:t>
             </a:r>
             <a:endParaRPr lang="en-US" sz="2200" dirty="0"/>
           </a:p>
@@ -9578,7 +9578,7 @@
                 <a:ea typeface="Arial" pitchFamily="34" charset="-122"/>
                 <a:cs typeface="Arial" pitchFamily="34" charset="-120"/>
               </a:rPr>
-              <a:t>2.134 auto’s op 80 slimme parkings </a:t>
+              <a:t>3.455 auto’s op 132 slimme parkings </a:t>
             </a:r>
             <a:pPr indent="0" marL="0">
               <a:lnSpc>

--- a/Fluctus_Laadplan_Zwevegem.pptx
+++ b/Fluctus_Laadplan_Zwevegem.pptx
@@ -6666,7 +6666,7 @@
                 <a:ea typeface="Arial" pitchFamily="34" charset="-122"/>
                 <a:cs typeface="Arial" pitchFamily="34" charset="-120"/>
               </a:rPr>
-              <a:t>De 3.455 wagens zijn de </a:t>
+              <a:t>De 2.134 wagens zijn de </a:t>
             </a:r>
             <a:pPr indent="0" marL="0">
               <a:buNone/>
@@ -6823,7 +6823,7 @@
                 <a:ea typeface="Arial" pitchFamily="34" charset="-122"/>
                 <a:cs typeface="Arial" pitchFamily="34" charset="-120"/>
               </a:rPr>
-              <a:t>3.455</a:t>
+              <a:t>2.134</a:t>
             </a:r>
             <a:endParaRPr lang="en-US" sz="3200" dirty="0"/>
           </a:p>
@@ -6935,7 +6935,7 @@
                 <a:ea typeface="Arial" pitchFamily="34" charset="-122"/>
                 <a:cs typeface="Arial" pitchFamily="34" charset="-120"/>
               </a:rPr>
-              <a:t>132</a:t>
+              <a:t>80</a:t>
             </a:r>
             <a:endParaRPr lang="en-US" sz="3200" dirty="0"/>
           </a:p>
@@ -7047,7 +7047,7 @@
                 <a:ea typeface="Arial" pitchFamily="34" charset="-122"/>
                 <a:cs typeface="Arial" pitchFamily="34" charset="-120"/>
               </a:rPr>
-              <a:t>€ 5,18 mln</a:t>
+              <a:t>€ 3,20 mln</a:t>
             </a:r>
             <a:endParaRPr lang="en-US" sz="3200" dirty="0"/>
           </a:p>
@@ -7159,7 +7159,7 @@
                 <a:ea typeface="Arial" pitchFamily="34" charset="-122"/>
                 <a:cs typeface="Arial" pitchFamily="34" charset="-120"/>
               </a:rPr>
-              <a:t>€ 10,37 mln</a:t>
+              <a:t>€ 6,40 mln</a:t>
             </a:r>
             <a:endParaRPr lang="en-US" sz="3200" dirty="0"/>
           </a:p>
@@ -7266,7 +7266,7 @@
                 <a:ea typeface="Arial" pitchFamily="34" charset="-122"/>
                 <a:cs typeface="Arial" pitchFamily="34" charset="-120"/>
               </a:rPr>
-              <a:t>3.455 wagens</a:t>
+              <a:t>2.134 wagens</a:t>
             </a:r>
             <a:pPr indent="0" marL="0">
               <a:buNone/>
@@ -7294,7 +7294,7 @@
                 <a:ea typeface="Arial" pitchFamily="34" charset="-122"/>
                 <a:cs typeface="Arial" pitchFamily="34" charset="-120"/>
               </a:rPr>
-              <a:t>€ 5,18 mln besparing / jaar</a:t>
+              <a:t>€ 3,20 mln besparing / jaar</a:t>
             </a:r>
             <a:endParaRPr lang="en-US" sz="1500" dirty="0"/>
           </a:p>
@@ -7333,7 +7333,7 @@
                 <a:ea typeface="Arial" pitchFamily="34" charset="-122"/>
                 <a:cs typeface="Arial" pitchFamily="34" charset="-120"/>
               </a:rPr>
-              <a:t>3.455 wagens</a:t>
+              <a:t>2.134 wagens</a:t>
             </a:r>
             <a:pPr indent="0" marL="0">
               <a:buNone/>
@@ -7361,7 +7361,7 @@
                 <a:ea typeface="Arial" pitchFamily="34" charset="-122"/>
                 <a:cs typeface="Arial" pitchFamily="34" charset="-120"/>
               </a:rPr>
-              <a:t>€ 10,37 mln investering</a:t>
+              <a:t>€ 6,40 mln investering</a:t>
             </a:r>
             <a:pPr indent="0" marL="0">
               <a:buNone/>
@@ -7704,7 +7704,7 @@
                 <a:ea typeface="Arial" pitchFamily="34" charset="-122"/>
                 <a:cs typeface="Arial" pitchFamily="34" charset="-120"/>
               </a:rPr>
-              <a:t>132 parkings · 3.455 plaatsen</a:t>
+              <a:t>80 parkings · 2.134 plaatsen</a:t>
             </a:r>
             <a:endParaRPr lang="en-US" sz="2200" dirty="0"/>
           </a:p>
@@ -9578,7 +9578,7 @@
                 <a:ea typeface="Arial" pitchFamily="34" charset="-122"/>
                 <a:cs typeface="Arial" pitchFamily="34" charset="-120"/>
               </a:rPr>
-              <a:t>3.455 auto’s op 132 slimme parkings </a:t>
+              <a:t>2.134 auto’s op 80 slimme parkings </a:t>
             </a:r>
             <a:pPr indent="0" marL="0">
               <a:lnSpc>

--- a/Fluctus_Laadplan_Zwevegem.pptx
+++ b/Fluctus_Laadplan_Zwevegem.pptx
@@ -219,10 +219,10 @@
                 <c:formatCode>General</c:formatCode>
                 <c:ptCount val="2"/>
                 <c:pt idx="0">
-                  <c:v>34</c:v>
+                  <c:v>32</c:v>
                 </c:pt>
                 <c:pt idx="1">
-                  <c:v>65</c:v>
+                  <c:v>64</c:v>
                 </c:pt>
               </c:numCache>
             </c:numRef>
@@ -7638,8 +7638,8 @@
         </p:nvSpPr>
         <p:spPr>
           <a:xfrm>
-            <a:off x="704088" y="5559552"/>
-            <a:ext cx="5221224" cy="365760"/>
+            <a:off x="704088" y="5431536"/>
+            <a:ext cx="5221224" cy="521208"/>
           </a:xfrm>
           <a:prstGeom prst="rect">
             <a:avLst/>
@@ -7654,10 +7654,13 @@
           <a:lstStyle/>
           <a:p>
             <a:pPr indent="0" marL="0">
-              <a:buNone/>
-            </a:pPr>
-            <a:r>
-              <a:rPr lang="en-US" sz="950" i="1" dirty="0">
+              <a:lnSpc>
+                <a:spcPct val="100000"/>
+              </a:lnSpc>
+              <a:buNone/>
+            </a:pPr>
+            <a:r>
+              <a:rPr lang="en-US" sz="900" i="1" dirty="0">
                 <a:solidFill>
                   <a:srgbClr val="FFFFFF"/>
                 </a:solidFill>
@@ -7665,9 +7668,9 @@
                 <a:ea typeface="Arial" pitchFamily="34" charset="-122"/>
                 <a:cs typeface="Arial" pitchFamily="34" charset="-120"/>
               </a:rPr>
-              <a:t>Volledige gemeente · gemeentegrens in Fluctus-blauw · interactieve kaart via de link.</a:t>
-            </a:r>
-            <a:endParaRPr lang="en-US" sz="950" dirty="0"/>
+              <a:t>Gemeentegrens in blauw · gele stip = MS-cabine · oranje rand = parking net buiten de gemeente · interactieve kaart via de link.</a:t>
+            </a:r>
+            <a:endParaRPr lang="en-US" sz="900" dirty="0"/>
           </a:p>
         </p:txBody>
       </p:sp>
@@ -9595,7 +9598,7 @@
                 <a:ea typeface="Arial" pitchFamily="34" charset="-122"/>
                 <a:cs typeface="Arial" pitchFamily="34" charset="-120"/>
               </a:rPr>
-              <a:t>verhogen de loadfactor van 34% naar 65% en remmen de congestie af.</a:t>
+              <a:t>verhogen de loadfactor van 32% naar 64% en remmen de congestie af.</a:t>
             </a:r>
             <a:endParaRPr lang="en-US" sz="1400" dirty="0"/>
           </a:p>
@@ -9637,7 +9640,7 @@
                 <a:ea typeface="Arial" pitchFamily="34" charset="-122"/>
                 <a:cs typeface="Arial" pitchFamily="34" charset="-120"/>
               </a:rPr>
-              <a:t>* Loadfactor t.o.v. referentiestation: kopstation RUIEN 70 (70 kV), 7.9 km van Zwevegem (laagste load van de cluster &lt;5 km).</a:t>
+              <a:t>* Loadfactor t.o.v. referentiestation: kopstation KOOST 70 (70 kV), 3.8 km van Zwevegem.</a:t>
             </a:r>
             <a:endParaRPr lang="en-US" sz="900" dirty="0"/>
           </a:p>
@@ -9734,7 +9737,7 @@
                 <a:ea typeface="Arial" pitchFamily="34" charset="-122"/>
                 <a:cs typeface="Arial" pitchFamily="34" charset="-120"/>
               </a:rPr>
-              <a:t>Loadfactor van station RUIEN 70 (70 kV) — dichtste kopstation bij Zwevegem, op ± 7.9 km (laagste load van de cluster &lt;5 km). Flex ≈ 12 MW (11 kW/wagen + 10 kW batterij) op 60 MW firm capacity.</a:t>
+              <a:t>Loadfactor van station KOOST 70 (70 kV) — dichtste kopstation bij Zwevegem, op ± 3.8 km. Flex ≈ 10 MW (11 kW/wagen + 10 kW batterij) op 50 MW firm capacity.</a:t>
             </a:r>
             <a:endParaRPr lang="en-US" sz="950" dirty="0"/>
           </a:p>

--- a/Fluctus_Laadplan_Zwevegem.pptx
+++ b/Fluctus_Laadplan_Zwevegem.pptx
@@ -219,10 +219,10 @@
                 <c:formatCode>General</c:formatCode>
                 <c:ptCount val="2"/>
                 <c:pt idx="0">
-                  <c:v>32</c:v>
+                  <c:v>31</c:v>
                 </c:pt>
                 <c:pt idx="1">
-                  <c:v>64</c:v>
+                  <c:v>63</c:v>
                 </c:pt>
               </c:numCache>
             </c:numRef>
@@ -9598,7 +9598,7 @@
                 <a:ea typeface="Arial" pitchFamily="34" charset="-122"/>
                 <a:cs typeface="Arial" pitchFamily="34" charset="-120"/>
               </a:rPr>
-              <a:t>verhogen de loadfactor van 32% naar 64% en remmen de congestie af.</a:t>
+              <a:t>verhogen de loadfactor van 31% naar 63% en remmen de congestie af.</a:t>
             </a:r>
             <a:endParaRPr lang="en-US" sz="1400" dirty="0"/>
           </a:p>
@@ -9640,7 +9640,7 @@
                 <a:ea typeface="Arial" pitchFamily="34" charset="-122"/>
                 <a:cs typeface="Arial" pitchFamily="34" charset="-120"/>
               </a:rPr>
-              <a:t>* Loadfactor t.o.v. referentiestation: kopstation KOOST 70 (70 kV), 3.8 km van Zwevegem.</a:t>
+              <a:t>* Loadfactor t.o.v. referentiestation: kopstation HAREL 36 (36 kV), 7.1 km van Zwevegem (laagste load van de cluster &lt;5 km).</a:t>
             </a:r>
             <a:endParaRPr lang="en-US" sz="900" dirty="0"/>
           </a:p>
@@ -9737,7 +9737,7 @@
                 <a:ea typeface="Arial" pitchFamily="34" charset="-122"/>
                 <a:cs typeface="Arial" pitchFamily="34" charset="-120"/>
               </a:rPr>
-              <a:t>Loadfactor van station KOOST 70 (70 kV) — dichtste kopstation bij Zwevegem, op ± 3.8 km. Flex ≈ 10 MW (11 kW/wagen + 10 kW batterij) op 50 MW firm capacity.</a:t>
+              <a:t>Loadfactor van station HAREL 36 (36 kV) — dichtste kopstation bij Zwevegem, op ± 7.1 km (laagste load van de cluster &lt;5 km). Flex ≈ 12 MW (11 kW/wagen + 10 kW batterij) op 60 MW firm capacity.</a:t>
             </a:r>
             <a:endParaRPr lang="en-US" sz="950" dirty="0"/>
           </a:p>

--- a/Fluctus_Laadplan_Zwevegem.pptx
+++ b/Fluctus_Laadplan_Zwevegem.pptx
@@ -219,10 +219,10 @@
                 <c:formatCode>General</c:formatCode>
                 <c:ptCount val="2"/>
                 <c:pt idx="0">
-                  <c:v>31</c:v>
+                  <c:v>32</c:v>
                 </c:pt>
                 <c:pt idx="1">
-                  <c:v>63</c:v>
+                  <c:v>64</c:v>
                 </c:pt>
               </c:numCache>
             </c:numRef>
@@ -9598,7 +9598,7 @@
                 <a:ea typeface="Arial" pitchFamily="34" charset="-122"/>
                 <a:cs typeface="Arial" pitchFamily="34" charset="-120"/>
               </a:rPr>
-              <a:t>verhogen de loadfactor van 31% naar 63% en remmen de congestie af.</a:t>
+              <a:t>verhogen de loadfactor van 32% naar 64% en remmen de congestie af.</a:t>
             </a:r>
             <a:endParaRPr lang="en-US" sz="1400" dirty="0"/>
           </a:p>
@@ -9640,7 +9640,7 @@
                 <a:ea typeface="Arial" pitchFamily="34" charset="-122"/>
                 <a:cs typeface="Arial" pitchFamily="34" charset="-120"/>
               </a:rPr>
-              <a:t>* Loadfactor t.o.v. referentiestation: kopstation HAREL 36 (36 kV), 7.1 km van Zwevegem (laagste load van de cluster &lt;5 km).</a:t>
+              <a:t>* Loadfactor t.o.v. referentiestation: kopstation KOOST 70 (70 kV), 3.8 km van Zwevegem.</a:t>
             </a:r>
             <a:endParaRPr lang="en-US" sz="900" dirty="0"/>
           </a:p>
@@ -9737,7 +9737,7 @@
                 <a:ea typeface="Arial" pitchFamily="34" charset="-122"/>
                 <a:cs typeface="Arial" pitchFamily="34" charset="-120"/>
               </a:rPr>
-              <a:t>Loadfactor van station HAREL 36 (36 kV) — dichtste kopstation bij Zwevegem, op ± 7.1 km (laagste load van de cluster &lt;5 km). Flex ≈ 12 MW (11 kW/wagen + 10 kW batterij) op 60 MW firm capacity.</a:t>
+              <a:t>Loadfactor van station KOOST 70 (70 kV) — dichtste kopstation bij Zwevegem, op ± 3.8 km. Flex ≈ 10 MW (11 kW/wagen + 10 kW batterij) op 50 MW firm capacity.</a:t>
             </a:r>
             <a:endParaRPr lang="en-US" sz="950" dirty="0"/>
           </a:p>

--- a/Fluctus_Laadplan_Zwevegem.pptx
+++ b/Fluctus_Laadplan_Zwevegem.pptx
@@ -219,10 +219,10 @@
                 <c:formatCode>General</c:formatCode>
                 <c:ptCount val="2"/>
                 <c:pt idx="0">
-                  <c:v>32</c:v>
+                  <c:v>31</c:v>
                 </c:pt>
                 <c:pt idx="1">
-                  <c:v>64</c:v>
+                  <c:v>63</c:v>
                 </c:pt>
               </c:numCache>
             </c:numRef>
@@ -6680,8 +6680,11 @@
                 <a:ea typeface="Arial" pitchFamily="34" charset="-122"/>
                 <a:cs typeface="Arial" pitchFamily="34" charset="-120"/>
               </a:rPr>
-              <a:t>personeelswagens van bedrijven in Zwevegem</a:t>
-            </a:r>
+              <a:t>personeelswagens van bedrijven in en rond Zwevegem</a:t>
+            </a:r>
+            <a:pPr indent="0" marL="0">
+              <a:buNone/>
+            </a:pPr>
             <a:pPr indent="0" marL="0">
               <a:buNone/>
             </a:pPr>
@@ -6974,7 +6977,7 @@
                 <a:ea typeface="Arial" pitchFamily="34" charset="-122"/>
                 <a:cs typeface="Arial" pitchFamily="34" charset="-120"/>
               </a:rPr>
-              <a:t>geschikte bedrijfsparkings</a:t>
+              <a:t>bedrijfsparkings in en rond de gemeente</a:t>
             </a:r>
             <a:endParaRPr lang="en-US" sz="1200" dirty="0"/>
           </a:p>
@@ -9598,7 +9601,7 @@
                 <a:ea typeface="Arial" pitchFamily="34" charset="-122"/>
                 <a:cs typeface="Arial" pitchFamily="34" charset="-120"/>
               </a:rPr>
-              <a:t>verhogen de loadfactor van 32% naar 64% en remmen de congestie af.</a:t>
+              <a:t>verhogen de loadfactor van 31% naar 63% en remmen de congestie af.</a:t>
             </a:r>
             <a:endParaRPr lang="en-US" sz="1400" dirty="0"/>
           </a:p>
@@ -9640,7 +9643,7 @@
                 <a:ea typeface="Arial" pitchFamily="34" charset="-122"/>
                 <a:cs typeface="Arial" pitchFamily="34" charset="-120"/>
               </a:rPr>
-              <a:t>* Loadfactor t.o.v. referentiestation: kopstation KOOST 70 (70 kV), 3.8 km van Zwevegem.</a:t>
+              <a:t>* Loadfactor t.o.v. referentiestation: kopstation HAREL 36 (36 kV), 7.1 km van Zwevegem (laagste load van de cluster &lt;5 km).</a:t>
             </a:r>
             <a:endParaRPr lang="en-US" sz="900" dirty="0"/>
           </a:p>
@@ -9737,7 +9740,7 @@
                 <a:ea typeface="Arial" pitchFamily="34" charset="-122"/>
                 <a:cs typeface="Arial" pitchFamily="34" charset="-120"/>
               </a:rPr>
-              <a:t>Loadfactor van station KOOST 70 (70 kV) — dichtste kopstation bij Zwevegem, op ± 3.8 km. Flex ≈ 10 MW (11 kW/wagen + 10 kW batterij) op 50 MW firm capacity.</a:t>
+              <a:t>Loadfactor van station HAREL 36 (36 kV) — dichtste kopstation bij Zwevegem, op ± 7.1 km (laagste load van de cluster &lt;5 km). Flex ≈ 12 MW (11 kW/wagen + 10 kW batterij) op 60 MW firm capacity.</a:t>
             </a:r>
             <a:endParaRPr lang="en-US" sz="950" dirty="0"/>
           </a:p>

--- a/Fluctus_Laadplan_Zwevegem.pptx
+++ b/Fluctus_Laadplan_Zwevegem.pptx
@@ -219,10 +219,10 @@
                 <c:formatCode>General</c:formatCode>
                 <c:ptCount val="2"/>
                 <c:pt idx="0">
-                  <c:v>31</c:v>
+                  <c:v>32</c:v>
                 </c:pt>
                 <c:pt idx="1">
-                  <c:v>63</c:v>
+                  <c:v>64</c:v>
                 </c:pt>
               </c:numCache>
             </c:numRef>
@@ -6666,7 +6666,7 @@
                 <a:ea typeface="Arial" pitchFamily="34" charset="-122"/>
                 <a:cs typeface="Arial" pitchFamily="34" charset="-120"/>
               </a:rPr>
-              <a:t>De 2.134 wagens zijn de </a:t>
+              <a:t>De 8.446 wagens zijn de </a:t>
             </a:r>
             <a:pPr indent="0" marL="0">
               <a:buNone/>
@@ -6685,6 +6685,17 @@
             <a:pPr indent="0" marL="0">
               <a:buNone/>
             </a:pPr>
+            <a:r>
+              <a:rPr lang="en-US" sz="1500" dirty="0">
+                <a:solidFill>
+                  <a:srgbClr val="1A1A1A"/>
+                </a:solidFill>
+                <a:latin typeface="Arial" pitchFamily="34" charset="0"/>
+                <a:ea typeface="Arial" pitchFamily="34" charset="-122"/>
+                <a:cs typeface="Arial" pitchFamily="34" charset="-120"/>
+              </a:rPr>
+              <a:t> (de gemeente zelf + 163 parkings in de band van ±2 km rond de grens)</a:t>
+            </a:r>
             <a:pPr indent="0" marL="0">
               <a:buNone/>
             </a:pPr>
@@ -6826,7 +6837,7 @@
                 <a:ea typeface="Arial" pitchFamily="34" charset="-122"/>
                 <a:cs typeface="Arial" pitchFamily="34" charset="-120"/>
               </a:rPr>
-              <a:t>2.134</a:t>
+              <a:t>8.446</a:t>
             </a:r>
             <a:endParaRPr lang="en-US" sz="3200" dirty="0"/>
           </a:p>
@@ -6938,7 +6949,7 @@
                 <a:ea typeface="Arial" pitchFamily="34" charset="-122"/>
                 <a:cs typeface="Arial" pitchFamily="34" charset="-120"/>
               </a:rPr>
-              <a:t>80</a:t>
+              <a:t>243</a:t>
             </a:r>
             <a:endParaRPr lang="en-US" sz="3200" dirty="0"/>
           </a:p>
@@ -7050,7 +7061,7 @@
                 <a:ea typeface="Arial" pitchFamily="34" charset="-122"/>
                 <a:cs typeface="Arial" pitchFamily="34" charset="-120"/>
               </a:rPr>
-              <a:t>€ 3,20 mln</a:t>
+              <a:t>€ 12,67 mln</a:t>
             </a:r>
             <a:endParaRPr lang="en-US" sz="3200" dirty="0"/>
           </a:p>
@@ -7162,7 +7173,7 @@
                 <a:ea typeface="Arial" pitchFamily="34" charset="-122"/>
                 <a:cs typeface="Arial" pitchFamily="34" charset="-120"/>
               </a:rPr>
-              <a:t>€ 6,40 mln</a:t>
+              <a:t>€ 25,34 mln</a:t>
             </a:r>
             <a:endParaRPr lang="en-US" sz="3200" dirty="0"/>
           </a:p>
@@ -7269,7 +7280,7 @@
                 <a:ea typeface="Arial" pitchFamily="34" charset="-122"/>
                 <a:cs typeface="Arial" pitchFamily="34" charset="-120"/>
               </a:rPr>
-              <a:t>2.134 wagens</a:t>
+              <a:t>8.446 wagens</a:t>
             </a:r>
             <a:pPr indent="0" marL="0">
               <a:buNone/>
@@ -7297,7 +7308,7 @@
                 <a:ea typeface="Arial" pitchFamily="34" charset="-122"/>
                 <a:cs typeface="Arial" pitchFamily="34" charset="-120"/>
               </a:rPr>
-              <a:t>€ 3,20 mln besparing / jaar</a:t>
+              <a:t>€ 12,67 mln besparing / jaar</a:t>
             </a:r>
             <a:endParaRPr lang="en-US" sz="1500" dirty="0"/>
           </a:p>
@@ -7336,7 +7347,7 @@
                 <a:ea typeface="Arial" pitchFamily="34" charset="-122"/>
                 <a:cs typeface="Arial" pitchFamily="34" charset="-120"/>
               </a:rPr>
-              <a:t>2.134 wagens</a:t>
+              <a:t>8.446 wagens</a:t>
             </a:r>
             <a:pPr indent="0" marL="0">
               <a:buNone/>
@@ -7364,7 +7375,7 @@
                 <a:ea typeface="Arial" pitchFamily="34" charset="-122"/>
                 <a:cs typeface="Arial" pitchFamily="34" charset="-120"/>
               </a:rPr>
-              <a:t>€ 6,40 mln investering</a:t>
+              <a:t>€ 25,34 mln investering</a:t>
             </a:r>
             <a:pPr indent="0" marL="0">
               <a:buNone/>
@@ -7710,7 +7721,7 @@
                 <a:ea typeface="Arial" pitchFamily="34" charset="-122"/>
                 <a:cs typeface="Arial" pitchFamily="34" charset="-120"/>
               </a:rPr>
-              <a:t>80 parkings · 2.134 plaatsen</a:t>
+              <a:t>243 parkings · 8.446 plaatsen</a:t>
             </a:r>
             <a:endParaRPr lang="en-US" sz="2200" dirty="0"/>
           </a:p>
@@ -9584,7 +9595,7 @@
                 <a:ea typeface="Arial" pitchFamily="34" charset="-122"/>
                 <a:cs typeface="Arial" pitchFamily="34" charset="-120"/>
               </a:rPr>
-              <a:t>2.134 auto’s op 80 slimme parkings </a:t>
+              <a:t>8.446 auto’s op 243 slimme parkings </a:t>
             </a:r>
             <a:pPr indent="0" marL="0">
               <a:lnSpc>
@@ -9601,7 +9612,7 @@
                 <a:ea typeface="Arial" pitchFamily="34" charset="-122"/>
                 <a:cs typeface="Arial" pitchFamily="34" charset="-120"/>
               </a:rPr>
-              <a:t>verhogen de loadfactor van 31% naar 63% en remmen de congestie af.</a:t>
+              <a:t>verhogen de loadfactor van 32% naar 64% en remmen de congestie af.</a:t>
             </a:r>
             <a:endParaRPr lang="en-US" sz="1400" dirty="0"/>
           </a:p>
@@ -9643,7 +9654,7 @@
                 <a:ea typeface="Arial" pitchFamily="34" charset="-122"/>
                 <a:cs typeface="Arial" pitchFamily="34" charset="-120"/>
               </a:rPr>
-              <a:t>* Loadfactor t.o.v. referentiestation: kopstation HAREL 36 (36 kV), 7.1 km van Zwevegem (laagste load van de cluster &lt;5 km).</a:t>
+              <a:t>* Loadfactor t.o.v. referentiestation: kopstation KOOST 70 (70 kV), 3.8 km van Zwevegem.</a:t>
             </a:r>
             <a:endParaRPr lang="en-US" sz="900" dirty="0"/>
           </a:p>
@@ -9740,7 +9751,7 @@
                 <a:ea typeface="Arial" pitchFamily="34" charset="-122"/>
                 <a:cs typeface="Arial" pitchFamily="34" charset="-120"/>
               </a:rPr>
-              <a:t>Loadfactor van station HAREL 36 (36 kV) — dichtste kopstation bij Zwevegem, op ± 7.1 km (laagste load van de cluster &lt;5 km). Flex ≈ 12 MW (11 kW/wagen + 10 kW batterij) op 60 MW firm capacity.</a:t>
+              <a:t>Loadfactor van station KOOST 70 (70 kV) — dichtste kopstation bij Zwevegem, op ± 3.8 km. Flex ≈ 10 MW (11 kW/wagen + 10 kW batterij) op 50 MW firm capacity.</a:t>
             </a:r>
             <a:endParaRPr lang="en-US" sz="950" dirty="0"/>
           </a:p>

--- a/Fluctus_Laadplan_Zwevegem.pptx
+++ b/Fluctus_Laadplan_Zwevegem.pptx
@@ -219,10 +219,10 @@
                 <c:formatCode>General</c:formatCode>
                 <c:ptCount val="2"/>
                 <c:pt idx="0">
-                  <c:v>32</c:v>
+                  <c:v>31</c:v>
                 </c:pt>
                 <c:pt idx="1">
-                  <c:v>64</c:v>
+                  <c:v>63</c:v>
                 </c:pt>
               </c:numCache>
             </c:numRef>
@@ -9595,7 +9595,7 @@
                 <a:ea typeface="Arial" pitchFamily="34" charset="-122"/>
                 <a:cs typeface="Arial" pitchFamily="34" charset="-120"/>
               </a:rPr>
-              <a:t>8.446 auto’s op 243 slimme parkings </a:t>
+              <a:t>2.134 auto’s op 80 slimme parkings in Zwevegem </a:t>
             </a:r>
             <a:pPr indent="0" marL="0">
               <a:lnSpc>
@@ -9612,7 +9612,7 @@
                 <a:ea typeface="Arial" pitchFamily="34" charset="-122"/>
                 <a:cs typeface="Arial" pitchFamily="34" charset="-120"/>
               </a:rPr>
-              <a:t>verhogen de loadfactor van 32% naar 64% en remmen de congestie af.</a:t>
+              <a:t>verhogen de loadfactor van 31% naar 63% en remmen de congestie af.</a:t>
             </a:r>
             <a:endParaRPr lang="en-US" sz="1400" dirty="0"/>
           </a:p>
@@ -9654,7 +9654,7 @@
                 <a:ea typeface="Arial" pitchFamily="34" charset="-122"/>
                 <a:cs typeface="Arial" pitchFamily="34" charset="-120"/>
               </a:rPr>
-              <a:t>* Loadfactor t.o.v. referentiestation: kopstation KOOST 70 (70 kV), 3.8 km van Zwevegem.</a:t>
+              <a:t>* Loadfactor t.o.v. referentiestation: kopstation HAREL 36 (36 kV), 7.1 km van Zwevegem (laagste load van de cluster &lt;5 km).</a:t>
             </a:r>
             <a:endParaRPr lang="en-US" sz="900" dirty="0"/>
           </a:p>
@@ -9751,7 +9751,7 @@
                 <a:ea typeface="Arial" pitchFamily="34" charset="-122"/>
                 <a:cs typeface="Arial" pitchFamily="34" charset="-120"/>
               </a:rPr>
-              <a:t>Loadfactor van station KOOST 70 (70 kV) — dichtste kopstation bij Zwevegem, op ± 3.8 km. Flex ≈ 10 MW (11 kW/wagen + 10 kW batterij) op 50 MW firm capacity.</a:t>
+              <a:t>Loadfactor van station HAREL 36 (36 kV) — dichtste kopstation bij Zwevegem, op ± 7.1 km (laagste load van de cluster &lt;5 km). Flex ≈ 12 MW (11 kW/wagen + 10 kW batterij) op 60 MW firm capacity.</a:t>
             </a:r>
             <a:endParaRPr lang="en-US" sz="950" dirty="0"/>
           </a:p>

--- a/Fluctus_Laadplan_Zwevegem.pptx
+++ b/Fluctus_Laadplan_Zwevegem.pptx
@@ -9654,7 +9654,7 @@
                 <a:ea typeface="Arial" pitchFamily="34" charset="-122"/>
                 <a:cs typeface="Arial" pitchFamily="34" charset="-120"/>
               </a:rPr>
-              <a:t>* Loadfactor t.o.v. referentiestation: kopstation HAREL 36 (36 kV), 7.1 km van Zwevegem (laagste load van de cluster &lt;5 km).</a:t>
+              <a:t>* Loadfactor t.o.v. referentiestation: kopstation HAREL 36 (36 kV), 7.1 km van Zwevegem (laagste load van de cluster &lt;5 km). · v3</a:t>
             </a:r>
             <a:endParaRPr lang="en-US" sz="900" dirty="0"/>
           </a:p>

--- a/Fluctus_Laadplan_Zwevegem.pptx
+++ b/Fluctus_Laadplan_Zwevegem.pptx
@@ -16,9 +16,10 @@
     <p:sldId id="264" r:id="rId10"/>
     <p:sldId id="265" r:id="rId11"/>
     <p:sldId id="266" r:id="rId12"/>
+    <p:sldId id="267" r:id="rId13"/>
   </p:sldIdLst>
   <p:notesMasterIdLst>
-    <p:notesMasterId r:id="rId13"/>
+    <p:notesMasterId r:id="rId14"/>
   </p:notesMasterIdLst>
   <p:sldSz cx="12192000" cy="6858000"/>
   <p:notesSz cx="6858000" cy="12192000"/>
@@ -972,6 +973,94 @@
             <a:fld id="{F7021451-1387-4CA6-816F-3879F97B5CBC}" type="slidenum">
               <a:rPr lang="en-US"/>
               <a:t>11</a:t>
+            </a:fld>
+            <a:endParaRPr lang="en-US"/>
+          </a:p>
+        </p:txBody>
+      </p:sp>
+    </p:spTree>
+    <p:extLst>
+      <p:ext uri="{BB962C8B-B14F-4D97-AF65-F5344CB8AC3E}">
+        <p14:creationId xmlns:p14="http://schemas.microsoft.com/office/powerpoint/2010/main" val="1024086991"/>
+      </p:ext>
+    </p:extLst>
+  </p:cSld>
+  <p:clrMapOvr>
+    <a:masterClrMapping/>
+  </p:clrMapOvr>
+</p:notes>
+</file>
+
+<file path=ppt/notesSlides/notesSlide12.xml><?xml version="1.0" encoding="utf-8"?>
+<p:notes xmlns:a="http://schemas.openxmlformats.org/drawingml/2006/main" xmlns:r="http://schemas.openxmlformats.org/officeDocument/2006/relationships" xmlns:p="http://schemas.openxmlformats.org/presentationml/2006/main">
+  <p:cSld>
+    <p:spTree>
+      <p:nvGrpSpPr>
+        <p:cNvPr id="1" name=""/>
+        <p:cNvGrpSpPr/>
+        <p:nvPr/>
+      </p:nvGrpSpPr>
+      <p:grpSpPr>
+        <a:xfrm>
+          <a:off x="0" y="0"/>
+          <a:ext cx="0" cy="0"/>
+          <a:chOff x="0" y="0"/>
+          <a:chExt cx="0" cy="0"/>
+        </a:xfrm>
+      </p:grpSpPr>
+      <p:sp>
+        <p:nvSpPr>
+          <p:cNvPr id="2" name="Slide Image Placeholder 1"/>
+          <p:cNvSpPr>
+            <a:spLocks noGrp="1" noRot="1" noChangeAspect="1"/>
+          </p:cNvSpPr>
+          <p:nvPr>
+            <p:ph type="sldImg"/>
+          </p:nvPr>
+        </p:nvSpPr>
+        <p:spPr/>
+      </p:sp>
+      <p:sp>
+        <p:nvSpPr>
+          <p:cNvPr id="3" name="Notes Placeholder 2"/>
+          <p:cNvSpPr>
+            <a:spLocks noGrp="1"/>
+          </p:cNvSpPr>
+          <p:nvPr>
+            <p:ph type="body" idx="1"/>
+          </p:nvPr>
+        </p:nvSpPr>
+        <p:spPr/>
+        <p:txBody>
+          <a:bodyPr/>
+          <a:lstStyle/>
+          <a:p>
+            <a:r>
+              <a:rPr lang="en-US" dirty="0"/>
+              <a:t/>
+            </a:r>
+            <a:endParaRPr lang="en-US" dirty="0"/>
+          </a:p>
+        </p:txBody>
+      </p:sp>
+      <p:sp>
+        <p:nvSpPr>
+          <p:cNvPr id="4" name="Slide Number Placeholder 3"/>
+          <p:cNvSpPr>
+            <a:spLocks noGrp="1"/>
+          </p:cNvSpPr>
+          <p:nvPr>
+            <p:ph type="sldNum" sz="quarter" idx="10"/>
+          </p:nvPr>
+        </p:nvSpPr>
+        <p:spPr/>
+        <p:txBody>
+          <a:bodyPr/>
+          <a:lstStyle/>
+          <a:p>
+            <a:fld id="{F7021451-1387-4CA6-816F-3879F97B5CBC}" type="slidenum">
+              <a:rPr lang="en-US"/>
+              <a:t>12</a:t>
             </a:fld>
             <a:endParaRPr lang="en-US"/>
           </a:p>
@@ -2171,8 +2260,8 @@
         </p:nvSpPr>
         <p:spPr>
           <a:xfrm>
-            <a:off x="640080" y="2514600"/>
-            <a:ext cx="8412480" cy="1737360"/>
+            <a:off x="640080" y="2331720"/>
+            <a:ext cx="8412480" cy="1554480"/>
           </a:xfrm>
           <a:prstGeom prst="rect">
             <a:avLst/>
@@ -2233,24 +2322,27 @@
         </p:nvSpPr>
         <p:spPr>
           <a:xfrm>
-            <a:off x="658368" y="4434840"/>
-            <a:ext cx="8229600" cy="640080"/>
-          </a:xfrm>
-          <a:prstGeom prst="rect">
-            <a:avLst/>
-          </a:prstGeom>
-          <a:noFill/>
-          <a:ln/>
-        </p:spPr>
-        <p:txBody>
-          <a:bodyPr wrap="square" lIns="0" tIns="0" rIns="0" bIns="0" rtlCol="0" anchor="ctr"/>
-          <a:lstStyle/>
-          <a:p>
-            <a:pPr indent="0" marL="0">
-              <a:buNone/>
-            </a:pPr>
-            <a:r>
-              <a:rPr lang="en-US" sz="1600" dirty="0">
+            <a:off x="658368" y="3977640"/>
+            <a:ext cx="8686800" cy="1143000"/>
+          </a:xfrm>
+          <a:prstGeom prst="rect">
+            <a:avLst/>
+          </a:prstGeom>
+          <a:noFill/>
+          <a:ln/>
+        </p:spPr>
+        <p:txBody>
+          <a:bodyPr wrap="square" lIns="0" tIns="0" rIns="0" bIns="0" rtlCol="0" anchor="ctr"/>
+          <a:lstStyle/>
+          <a:p>
+            <a:pPr indent="0" marL="0">
+              <a:lnSpc>
+                <a:spcPct val="112000"/>
+              </a:lnSpc>
+              <a:buNone/>
+            </a:pPr>
+            <a:r>
+              <a:rPr lang="en-US" sz="1500" dirty="0">
                 <a:solidFill>
                   <a:srgbClr val="C9D6EC"/>
                 </a:solidFill>
@@ -2258,9 +2350,27 @@
                 <a:ea typeface="Arial" pitchFamily="34" charset="-122"/>
                 <a:cs typeface="Arial" pitchFamily="34" charset="-120"/>
               </a:rPr>
-              <a:t>Meer laden, lagere netkosten, sterker net — uitgewerkt voor Zwevegem.</a:t>
-            </a:r>
-            <a:endParaRPr lang="en-US" sz="1600" dirty="0"/>
+              <a:t>Meer laden, lagere netkosten, sterker net.
+</a:t>
+            </a:r>
+            <a:pPr indent="0" marL="0">
+              <a:lnSpc>
+                <a:spcPct val="112000"/>
+              </a:lnSpc>
+              <a:buNone/>
+            </a:pPr>
+            <a:r>
+              <a:rPr lang="en-US" sz="1500" i="1" dirty="0">
+                <a:solidFill>
+                  <a:srgbClr val="9FB4D9"/>
+                </a:solidFill>
+                <a:latin typeface="Arial" pitchFamily="34" charset="0"/>
+                <a:ea typeface="Arial" pitchFamily="34" charset="-122"/>
+                <a:cs typeface="Arial" pitchFamily="34" charset="-120"/>
+              </a:rPr>
+              <a:t>We kijken verder dan laden alleen: ook de impact van elektrische mobiliteit op de kost per kilometer én op de lokale congestie in Zwevegem.</a:t>
+            </a:r>
+            <a:endParaRPr lang="en-US" sz="1500" dirty="0"/>
           </a:p>
         </p:txBody>
       </p:sp>
@@ -2272,7 +2382,7 @@
         </p:nvSpPr>
         <p:spPr>
           <a:xfrm>
-            <a:off x="658368" y="5257800"/>
+            <a:off x="658368" y="5440680"/>
             <a:ext cx="457200" cy="457200"/>
           </a:xfrm>
           <a:prstGeom prst="ellipse">
@@ -2300,7 +2410,7 @@
         </p:blipFill>
         <p:spPr>
           <a:xfrm>
-            <a:off x="777240" y="5376672"/>
+            <a:off x="777240" y="5559552"/>
             <a:ext cx="219456" cy="219456"/>
           </a:xfrm>
           <a:prstGeom prst="rect">
@@ -2316,7 +2426,7 @@
         </p:nvSpPr>
         <p:spPr>
           <a:xfrm>
-            <a:off x="1280160" y="5321808"/>
+            <a:off x="1280160" y="5504688"/>
             <a:ext cx="6400800" cy="365760"/>
           </a:xfrm>
           <a:prstGeom prst="rect">
@@ -3110,6 +3220,856 @@
     <p:bg>
       <p:bgPr>
         <a:solidFill>
+          <a:srgbClr val="FFFFFF"/>
+        </a:solidFill>
+      </p:bgPr>
+    </p:bg>
+    <p:spTree>
+      <p:nvGrpSpPr>
+        <p:cNvPr id="1" name=""/>
+        <p:cNvGrpSpPr/>
+        <p:nvPr/>
+      </p:nvGrpSpPr>
+      <p:grpSpPr>
+        <a:xfrm>
+          <a:off x="0" y="0"/>
+          <a:ext cx="0" cy="0"/>
+          <a:chOff x="0" y="0"/>
+          <a:chExt cx="0" cy="0"/>
+        </a:xfrm>
+      </p:grpSpPr>
+      <p:sp>
+        <p:nvSpPr>
+          <p:cNvPr id="2" name="Text 0"/>
+          <p:cNvSpPr/>
+          <p:nvPr/>
+        </p:nvSpPr>
+        <p:spPr>
+          <a:xfrm>
+            <a:off x="640080" y="548640"/>
+            <a:ext cx="8229600" cy="274320"/>
+          </a:xfrm>
+          <a:prstGeom prst="rect">
+            <a:avLst/>
+          </a:prstGeom>
+          <a:noFill/>
+          <a:ln/>
+        </p:spPr>
+        <p:txBody>
+          <a:bodyPr wrap="square" lIns="0" tIns="0" rIns="0" bIns="0" rtlCol="0" anchor="ctr"/>
+          <a:lstStyle/>
+          <a:p>
+            <a:pPr indent="0" marL="0">
+              <a:buNone/>
+            </a:pPr>
+            <a:r>
+              <a:rPr lang="en-US" sz="1200" b="1" spc="300" kern="0" dirty="0">
+                <a:solidFill>
+                  <a:srgbClr val="05B050"/>
+                </a:solidFill>
+                <a:latin typeface="Arial" pitchFamily="34" charset="0"/>
+                <a:ea typeface="Arial" pitchFamily="34" charset="-122"/>
+                <a:cs typeface="Arial" pitchFamily="34" charset="-120"/>
+              </a:rPr>
+              <a:t>SAMENVATTING</a:t>
+            </a:r>
+            <a:endParaRPr lang="en-US" sz="1200" dirty="0"/>
+          </a:p>
+        </p:txBody>
+      </p:sp>
+      <p:sp>
+        <p:nvSpPr>
+          <p:cNvPr id="3" name="Text 1"/>
+          <p:cNvSpPr/>
+          <p:nvPr/>
+        </p:nvSpPr>
+        <p:spPr>
+          <a:xfrm>
+            <a:off x="640080" y="868680"/>
+            <a:ext cx="11064240" cy="822960"/>
+          </a:xfrm>
+          <a:prstGeom prst="rect">
+            <a:avLst/>
+          </a:prstGeom>
+          <a:noFill/>
+          <a:ln/>
+        </p:spPr>
+        <p:txBody>
+          <a:bodyPr wrap="square" lIns="0" tIns="0" rIns="0" bIns="0" rtlCol="0" anchor="ctr"/>
+          <a:lstStyle/>
+          <a:p>
+            <a:pPr indent="0" marL="0">
+              <a:lnSpc>
+                <a:spcPct val="95000"/>
+              </a:lnSpc>
+              <a:buNone/>
+            </a:pPr>
+            <a:r>
+              <a:rPr lang="en-US" sz="3000" b="1" dirty="0">
+                <a:solidFill>
+                  <a:srgbClr val="1F3864"/>
+                </a:solidFill>
+                <a:latin typeface="Arial" pitchFamily="34" charset="0"/>
+                <a:ea typeface="Arial" pitchFamily="34" charset="-122"/>
+                <a:cs typeface="Arial" pitchFamily="34" charset="-120"/>
+              </a:rPr>
+              <a:t>Wat hebben we vandaag geleerd?</a:t>
+            </a:r>
+            <a:endParaRPr lang="en-US" sz="3000" dirty="0"/>
+          </a:p>
+        </p:txBody>
+      </p:sp>
+      <p:sp>
+        <p:nvSpPr>
+          <p:cNvPr id="4" name="Shape 2"/>
+          <p:cNvSpPr/>
+          <p:nvPr/>
+        </p:nvSpPr>
+        <p:spPr>
+          <a:xfrm>
+            <a:off x="640080" y="2103120"/>
+            <a:ext cx="3611880" cy="3291840"/>
+          </a:xfrm>
+          <a:prstGeom prst="roundRect">
+            <a:avLst>
+              <a:gd name="adj" fmla="val 2778"/>
+            </a:avLst>
+          </a:prstGeom>
+          <a:solidFill>
+            <a:srgbClr val="FFFFFF"/>
+          </a:solidFill>
+          <a:ln w="12700">
+            <a:solidFill>
+              <a:srgbClr val="DDE3EA"/>
+            </a:solidFill>
+            <a:prstDash val="solid"/>
+          </a:ln>
+          <a:effectLst>
+            <a:outerShdw sx="100000" sy="100000" kx="0" ky="0" algn="bl" rotWithShape="0" blurRad="114300" dist="38100" dir="5400000">
+              <a:srgbClr val="000000">
+                <a:alpha val="10000"/>
+              </a:srgbClr>
+            </a:outerShdw>
+          </a:effectLst>
+        </p:spPr>
+      </p:sp>
+      <p:sp>
+        <p:nvSpPr>
+          <p:cNvPr id="5" name="Shape 3"/>
+          <p:cNvSpPr/>
+          <p:nvPr/>
+        </p:nvSpPr>
+        <p:spPr>
+          <a:xfrm>
+            <a:off x="932688" y="2395728"/>
+            <a:ext cx="777240" cy="777240"/>
+          </a:xfrm>
+          <a:prstGeom prst="ellipse">
+            <a:avLst/>
+          </a:prstGeom>
+          <a:solidFill>
+            <a:srgbClr val="EAF0FA"/>
+          </a:solidFill>
+          <a:ln/>
+        </p:spPr>
+      </p:sp>
+      <p:pic>
+        <p:nvPicPr>
+          <p:cNvPr id="6" name="Image 0" descr="preencoded.png">    </p:cNvPr>
+          <p:cNvPicPr>
+            <a:picLocks noChangeAspect="1"/>
+          </p:cNvPicPr>
+          <p:nvPr/>
+        </p:nvPicPr>
+        <p:blipFill>
+          <a:blip r:embed="rId1"/>
+          <a:stretch>
+            <a:fillRect/>
+          </a:stretch>
+        </p:blipFill>
+        <p:spPr>
+          <a:xfrm>
+            <a:off x="1134770" y="2597810"/>
+            <a:ext cx="373075" cy="373075"/>
+          </a:xfrm>
+          <a:prstGeom prst="rect">
+            <a:avLst/>
+          </a:prstGeom>
+        </p:spPr>
+      </p:pic>
+      <p:sp>
+        <p:nvSpPr>
+          <p:cNvPr id="7" name="Text 4"/>
+          <p:cNvSpPr/>
+          <p:nvPr/>
+        </p:nvSpPr>
+        <p:spPr>
+          <a:xfrm>
+            <a:off x="3474720" y="2377440"/>
+            <a:ext cx="548640" cy="548640"/>
+          </a:xfrm>
+          <a:prstGeom prst="rect">
+            <a:avLst/>
+          </a:prstGeom>
+          <a:noFill/>
+          <a:ln/>
+        </p:spPr>
+        <p:txBody>
+          <a:bodyPr wrap="square" lIns="0" tIns="0" rIns="0" bIns="0" rtlCol="0" anchor="ctr"/>
+          <a:lstStyle/>
+          <a:p>
+            <a:pPr algn="r" indent="0" marL="0">
+              <a:buNone/>
+            </a:pPr>
+            <a:r>
+              <a:rPr lang="en-US" sz="3000" b="1" dirty="0">
+                <a:solidFill>
+                  <a:srgbClr val="DDE3EA"/>
+                </a:solidFill>
+                <a:latin typeface="Arial" pitchFamily="34" charset="0"/>
+                <a:ea typeface="Arial" pitchFamily="34" charset="-122"/>
+                <a:cs typeface="Arial" pitchFamily="34" charset="-120"/>
+              </a:rPr>
+              <a:t>1</a:t>
+            </a:r>
+            <a:endParaRPr lang="en-US" sz="3000" dirty="0"/>
+          </a:p>
+        </p:txBody>
+      </p:sp>
+      <p:sp>
+        <p:nvSpPr>
+          <p:cNvPr id="8" name="Text 5"/>
+          <p:cNvSpPr/>
+          <p:nvPr/>
+        </p:nvSpPr>
+        <p:spPr>
+          <a:xfrm>
+            <a:off x="932688" y="3429000"/>
+            <a:ext cx="3063240" cy="731520"/>
+          </a:xfrm>
+          <a:prstGeom prst="rect">
+            <a:avLst/>
+          </a:prstGeom>
+          <a:noFill/>
+          <a:ln/>
+        </p:spPr>
+        <p:txBody>
+          <a:bodyPr wrap="square" lIns="0" tIns="0" rIns="0" bIns="0" rtlCol="0" anchor="ctr"/>
+          <a:lstStyle/>
+          <a:p>
+            <a:pPr indent="0" marL="0">
+              <a:lnSpc>
+                <a:spcPct val="98000"/>
+              </a:lnSpc>
+              <a:buNone/>
+            </a:pPr>
+            <a:r>
+              <a:rPr lang="en-US" sz="1900" b="1" dirty="0">
+                <a:solidFill>
+                  <a:srgbClr val="1F3864"/>
+                </a:solidFill>
+                <a:latin typeface="Arial" pitchFamily="34" charset="0"/>
+                <a:ea typeface="Arial" pitchFamily="34" charset="-122"/>
+                <a:cs typeface="Arial" pitchFamily="34" charset="-120"/>
+              </a:rPr>
+              <a:t>Drastisch lagere km-kost</a:t>
+            </a:r>
+            <a:endParaRPr lang="en-US" sz="1900" dirty="0"/>
+          </a:p>
+        </p:txBody>
+      </p:sp>
+      <p:sp>
+        <p:nvSpPr>
+          <p:cNvPr id="9" name="Text 6"/>
+          <p:cNvSpPr/>
+          <p:nvPr/>
+        </p:nvSpPr>
+        <p:spPr>
+          <a:xfrm>
+            <a:off x="932688" y="4206240"/>
+            <a:ext cx="3063240" cy="1051560"/>
+          </a:xfrm>
+          <a:prstGeom prst="rect">
+            <a:avLst/>
+          </a:prstGeom>
+          <a:noFill/>
+          <a:ln/>
+        </p:spPr>
+        <p:txBody>
+          <a:bodyPr wrap="square" lIns="0" tIns="0" rIns="0" bIns="0" rtlCol="0" anchor="ctr"/>
+          <a:lstStyle/>
+          <a:p>
+            <a:pPr indent="0" marL="0">
+              <a:lnSpc>
+                <a:spcPct val="108000"/>
+              </a:lnSpc>
+              <a:buNone/>
+            </a:pPr>
+            <a:r>
+              <a:rPr lang="en-US" sz="1350" dirty="0">
+                <a:solidFill>
+                  <a:srgbClr val="5A6473"/>
+                </a:solidFill>
+                <a:latin typeface="Arial" pitchFamily="34" charset="0"/>
+                <a:ea typeface="Arial" pitchFamily="34" charset="-122"/>
+                <a:cs typeface="Arial" pitchFamily="34" charset="-120"/>
+              </a:rPr>
+              <a:t>Slim laden verlaagt de kost per kilometer in Zwevegem drastisch.</a:t>
+            </a:r>
+            <a:endParaRPr lang="en-US" sz="1350" dirty="0"/>
+          </a:p>
+        </p:txBody>
+      </p:sp>
+      <p:sp>
+        <p:nvSpPr>
+          <p:cNvPr id="10" name="Shape 7"/>
+          <p:cNvSpPr/>
+          <p:nvPr/>
+        </p:nvSpPr>
+        <p:spPr>
+          <a:xfrm>
+            <a:off x="4608576" y="2103120"/>
+            <a:ext cx="3611880" cy="3291840"/>
+          </a:xfrm>
+          <a:prstGeom prst="roundRect">
+            <a:avLst>
+              <a:gd name="adj" fmla="val 2778"/>
+            </a:avLst>
+          </a:prstGeom>
+          <a:solidFill>
+            <a:srgbClr val="FFFFFF"/>
+          </a:solidFill>
+          <a:ln w="12700">
+            <a:solidFill>
+              <a:srgbClr val="DDE3EA"/>
+            </a:solidFill>
+            <a:prstDash val="solid"/>
+          </a:ln>
+          <a:effectLst>
+            <a:outerShdw sx="100000" sy="100000" kx="0" ky="0" algn="bl" rotWithShape="0" blurRad="114300" dist="38100" dir="5400000">
+              <a:srgbClr val="000000">
+                <a:alpha val="10000"/>
+              </a:srgbClr>
+            </a:outerShdw>
+          </a:effectLst>
+        </p:spPr>
+      </p:sp>
+      <p:sp>
+        <p:nvSpPr>
+          <p:cNvPr id="11" name="Shape 8"/>
+          <p:cNvSpPr/>
+          <p:nvPr/>
+        </p:nvSpPr>
+        <p:spPr>
+          <a:xfrm>
+            <a:off x="4901184" y="2395728"/>
+            <a:ext cx="777240" cy="777240"/>
+          </a:xfrm>
+          <a:prstGeom prst="ellipse">
+            <a:avLst/>
+          </a:prstGeom>
+          <a:solidFill>
+            <a:srgbClr val="E7F6EC"/>
+          </a:solidFill>
+          <a:ln/>
+        </p:spPr>
+      </p:sp>
+      <p:pic>
+        <p:nvPicPr>
+          <p:cNvPr id="12" name="Image 1" descr="preencoded.png">    </p:cNvPr>
+          <p:cNvPicPr>
+            <a:picLocks noChangeAspect="1"/>
+          </p:cNvPicPr>
+          <p:nvPr/>
+        </p:nvPicPr>
+        <p:blipFill>
+          <a:blip r:embed="rId2"/>
+          <a:stretch>
+            <a:fillRect/>
+          </a:stretch>
+        </p:blipFill>
+        <p:spPr>
+          <a:xfrm>
+            <a:off x="5103266" y="2597810"/>
+            <a:ext cx="373075" cy="373075"/>
+          </a:xfrm>
+          <a:prstGeom prst="rect">
+            <a:avLst/>
+          </a:prstGeom>
+        </p:spPr>
+      </p:pic>
+      <p:sp>
+        <p:nvSpPr>
+          <p:cNvPr id="13" name="Text 9"/>
+          <p:cNvSpPr/>
+          <p:nvPr/>
+        </p:nvSpPr>
+        <p:spPr>
+          <a:xfrm>
+            <a:off x="7443216" y="2377440"/>
+            <a:ext cx="548640" cy="548640"/>
+          </a:xfrm>
+          <a:prstGeom prst="rect">
+            <a:avLst/>
+          </a:prstGeom>
+          <a:noFill/>
+          <a:ln/>
+        </p:spPr>
+        <p:txBody>
+          <a:bodyPr wrap="square" lIns="0" tIns="0" rIns="0" bIns="0" rtlCol="0" anchor="ctr"/>
+          <a:lstStyle/>
+          <a:p>
+            <a:pPr algn="r" indent="0" marL="0">
+              <a:buNone/>
+            </a:pPr>
+            <a:r>
+              <a:rPr lang="en-US" sz="3000" b="1" dirty="0">
+                <a:solidFill>
+                  <a:srgbClr val="DDE3EA"/>
+                </a:solidFill>
+                <a:latin typeface="Arial" pitchFamily="34" charset="0"/>
+                <a:ea typeface="Arial" pitchFamily="34" charset="-122"/>
+                <a:cs typeface="Arial" pitchFamily="34" charset="-120"/>
+              </a:rPr>
+              <a:t>2</a:t>
+            </a:r>
+            <a:endParaRPr lang="en-US" sz="3000" dirty="0"/>
+          </a:p>
+        </p:txBody>
+      </p:sp>
+      <p:sp>
+        <p:nvSpPr>
+          <p:cNvPr id="14" name="Text 10"/>
+          <p:cNvSpPr/>
+          <p:nvPr/>
+        </p:nvSpPr>
+        <p:spPr>
+          <a:xfrm>
+            <a:off x="4901184" y="3429000"/>
+            <a:ext cx="3063240" cy="731520"/>
+          </a:xfrm>
+          <a:prstGeom prst="rect">
+            <a:avLst/>
+          </a:prstGeom>
+          <a:noFill/>
+          <a:ln/>
+        </p:spPr>
+        <p:txBody>
+          <a:bodyPr wrap="square" lIns="0" tIns="0" rIns="0" bIns="0" rtlCol="0" anchor="ctr"/>
+          <a:lstStyle/>
+          <a:p>
+            <a:pPr indent="0" marL="0">
+              <a:lnSpc>
+                <a:spcPct val="98000"/>
+              </a:lnSpc>
+              <a:buNone/>
+            </a:pPr>
+            <a:r>
+              <a:rPr lang="en-US" sz="1900" b="1" dirty="0">
+                <a:solidFill>
+                  <a:srgbClr val="05B050"/>
+                </a:solidFill>
+                <a:latin typeface="Arial" pitchFamily="34" charset="0"/>
+                <a:ea typeface="Arial" pitchFamily="34" charset="-122"/>
+                <a:cs typeface="Arial" pitchFamily="34" charset="-120"/>
+              </a:rPr>
+              <a:t>Congestie voorkomen</a:t>
+            </a:r>
+            <a:endParaRPr lang="en-US" sz="1900" dirty="0"/>
+          </a:p>
+        </p:txBody>
+      </p:sp>
+      <p:sp>
+        <p:nvSpPr>
+          <p:cNvPr id="15" name="Text 11"/>
+          <p:cNvSpPr/>
+          <p:nvPr/>
+        </p:nvSpPr>
+        <p:spPr>
+          <a:xfrm>
+            <a:off x="4901184" y="4206240"/>
+            <a:ext cx="3063240" cy="1051560"/>
+          </a:xfrm>
+          <a:prstGeom prst="rect">
+            <a:avLst/>
+          </a:prstGeom>
+          <a:noFill/>
+          <a:ln/>
+        </p:spPr>
+        <p:txBody>
+          <a:bodyPr wrap="square" lIns="0" tIns="0" rIns="0" bIns="0" rtlCol="0" anchor="ctr"/>
+          <a:lstStyle/>
+          <a:p>
+            <a:pPr indent="0" marL="0">
+              <a:lnSpc>
+                <a:spcPct val="108000"/>
+              </a:lnSpc>
+              <a:buNone/>
+            </a:pPr>
+            <a:r>
+              <a:rPr lang="en-US" sz="1350" b="1" dirty="0">
+                <a:solidFill>
+                  <a:srgbClr val="05B050"/>
+                </a:solidFill>
+                <a:latin typeface="Arial" pitchFamily="34" charset="0"/>
+                <a:ea typeface="Arial" pitchFamily="34" charset="-122"/>
+                <a:cs typeface="Arial" pitchFamily="34" charset="-120"/>
+              </a:rPr>
+              <a:t>+103% meer energie</a:t>
+            </a:r>
+            <a:pPr indent="0" marL="0">
+              <a:lnSpc>
+                <a:spcPct val="108000"/>
+              </a:lnSpc>
+              <a:buNone/>
+            </a:pPr>
+            <a:r>
+              <a:rPr lang="en-US" sz="1350" dirty="0">
+                <a:solidFill>
+                  <a:srgbClr val="5A6473"/>
+                </a:solidFill>
+                <a:latin typeface="Arial" pitchFamily="34" charset="0"/>
+                <a:ea typeface="Arial" pitchFamily="34" charset="-122"/>
+                <a:cs typeface="Arial" pitchFamily="34" charset="-120"/>
+              </a:rPr>
+              <a:t> zonder uitbreiding van het net.</a:t>
+            </a:r>
+            <a:endParaRPr lang="en-US" sz="1350" dirty="0"/>
+          </a:p>
+        </p:txBody>
+      </p:sp>
+      <p:sp>
+        <p:nvSpPr>
+          <p:cNvPr id="16" name="Shape 12"/>
+          <p:cNvSpPr/>
+          <p:nvPr/>
+        </p:nvSpPr>
+        <p:spPr>
+          <a:xfrm>
+            <a:off x="8577072" y="2103120"/>
+            <a:ext cx="3611880" cy="3291840"/>
+          </a:xfrm>
+          <a:prstGeom prst="roundRect">
+            <a:avLst>
+              <a:gd name="adj" fmla="val 2778"/>
+            </a:avLst>
+          </a:prstGeom>
+          <a:solidFill>
+            <a:srgbClr val="FFFFFF"/>
+          </a:solidFill>
+          <a:ln w="12700">
+            <a:solidFill>
+              <a:srgbClr val="DDE3EA"/>
+            </a:solidFill>
+            <a:prstDash val="solid"/>
+          </a:ln>
+          <a:effectLst>
+            <a:outerShdw sx="100000" sy="100000" kx="0" ky="0" algn="bl" rotWithShape="0" blurRad="114300" dist="38100" dir="5400000">
+              <a:srgbClr val="000000">
+                <a:alpha val="10000"/>
+              </a:srgbClr>
+            </a:outerShdw>
+          </a:effectLst>
+        </p:spPr>
+      </p:sp>
+      <p:sp>
+        <p:nvSpPr>
+          <p:cNvPr id="17" name="Shape 13"/>
+          <p:cNvSpPr/>
+          <p:nvPr/>
+        </p:nvSpPr>
+        <p:spPr>
+          <a:xfrm>
+            <a:off x="8869680" y="2395728"/>
+            <a:ext cx="777240" cy="777240"/>
+          </a:xfrm>
+          <a:prstGeom prst="ellipse">
+            <a:avLst/>
+          </a:prstGeom>
+          <a:solidFill>
+            <a:srgbClr val="F7EDE3"/>
+          </a:solidFill>
+          <a:ln/>
+        </p:spPr>
+      </p:sp>
+      <p:pic>
+        <p:nvPicPr>
+          <p:cNvPr id="18" name="Image 2" descr="preencoded.png">    </p:cNvPr>
+          <p:cNvPicPr>
+            <a:picLocks noChangeAspect="1"/>
+          </p:cNvPicPr>
+          <p:nvPr/>
+        </p:nvPicPr>
+        <p:blipFill>
+          <a:blip r:embed="rId3"/>
+          <a:stretch>
+            <a:fillRect/>
+          </a:stretch>
+        </p:blipFill>
+        <p:spPr>
+          <a:xfrm>
+            <a:off x="9071762" y="2597810"/>
+            <a:ext cx="373075" cy="373075"/>
+          </a:xfrm>
+          <a:prstGeom prst="rect">
+            <a:avLst/>
+          </a:prstGeom>
+        </p:spPr>
+      </p:pic>
+      <p:sp>
+        <p:nvSpPr>
+          <p:cNvPr id="19" name="Text 14"/>
+          <p:cNvSpPr/>
+          <p:nvPr/>
+        </p:nvSpPr>
+        <p:spPr>
+          <a:xfrm>
+            <a:off x="11411712" y="2377440"/>
+            <a:ext cx="548640" cy="548640"/>
+          </a:xfrm>
+          <a:prstGeom prst="rect">
+            <a:avLst/>
+          </a:prstGeom>
+          <a:noFill/>
+          <a:ln/>
+        </p:spPr>
+        <p:txBody>
+          <a:bodyPr wrap="square" lIns="0" tIns="0" rIns="0" bIns="0" rtlCol="0" anchor="ctr"/>
+          <a:lstStyle/>
+          <a:p>
+            <a:pPr algn="r" indent="0" marL="0">
+              <a:buNone/>
+            </a:pPr>
+            <a:r>
+              <a:rPr lang="en-US" sz="3000" b="1" dirty="0">
+                <a:solidFill>
+                  <a:srgbClr val="DDE3EA"/>
+                </a:solidFill>
+                <a:latin typeface="Arial" pitchFamily="34" charset="0"/>
+                <a:ea typeface="Arial" pitchFamily="34" charset="-122"/>
+                <a:cs typeface="Arial" pitchFamily="34" charset="-120"/>
+              </a:rPr>
+              <a:t>3</a:t>
+            </a:r>
+            <a:endParaRPr lang="en-US" sz="3000" dirty="0"/>
+          </a:p>
+        </p:txBody>
+      </p:sp>
+      <p:sp>
+        <p:nvSpPr>
+          <p:cNvPr id="20" name="Text 15"/>
+          <p:cNvSpPr/>
+          <p:nvPr/>
+        </p:nvSpPr>
+        <p:spPr>
+          <a:xfrm>
+            <a:off x="8869680" y="3429000"/>
+            <a:ext cx="3063240" cy="731520"/>
+          </a:xfrm>
+          <a:prstGeom prst="rect">
+            <a:avLst/>
+          </a:prstGeom>
+          <a:noFill/>
+          <a:ln/>
+        </p:spPr>
+        <p:txBody>
+          <a:bodyPr wrap="square" lIns="0" tIns="0" rIns="0" bIns="0" rtlCol="0" anchor="ctr"/>
+          <a:lstStyle/>
+          <a:p>
+            <a:pPr indent="0" marL="0">
+              <a:lnSpc>
+                <a:spcPct val="98000"/>
+              </a:lnSpc>
+              <a:buNone/>
+            </a:pPr>
+            <a:r>
+              <a:rPr lang="en-US" sz="1900" b="1" dirty="0">
+                <a:solidFill>
+                  <a:srgbClr val="9E480E"/>
+                </a:solidFill>
+                <a:latin typeface="Arial" pitchFamily="34" charset="0"/>
+                <a:ea typeface="Arial" pitchFamily="34" charset="-122"/>
+                <a:cs typeface="Arial" pitchFamily="34" charset="-120"/>
+              </a:rPr>
+              <a:t>Lokaal voor lokaal</a:t>
+            </a:r>
+            <a:endParaRPr lang="en-US" sz="1900" dirty="0"/>
+          </a:p>
+        </p:txBody>
+      </p:sp>
+      <p:sp>
+        <p:nvSpPr>
+          <p:cNvPr id="21" name="Text 16"/>
+          <p:cNvSpPr/>
+          <p:nvPr/>
+        </p:nvSpPr>
+        <p:spPr>
+          <a:xfrm>
+            <a:off x="8869680" y="4206240"/>
+            <a:ext cx="3063240" cy="1051560"/>
+          </a:xfrm>
+          <a:prstGeom prst="rect">
+            <a:avLst/>
+          </a:prstGeom>
+          <a:noFill/>
+          <a:ln/>
+        </p:spPr>
+        <p:txBody>
+          <a:bodyPr wrap="square" lIns="0" tIns="0" rIns="0" bIns="0" rtlCol="0" anchor="ctr"/>
+          <a:lstStyle/>
+          <a:p>
+            <a:pPr indent="0" marL="0">
+              <a:lnSpc>
+                <a:spcPct val="108000"/>
+              </a:lnSpc>
+              <a:buNone/>
+            </a:pPr>
+            <a:r>
+              <a:rPr lang="en-US" sz="1350" dirty="0">
+                <a:solidFill>
+                  <a:srgbClr val="5A6473"/>
+                </a:solidFill>
+                <a:latin typeface="Arial" pitchFamily="34" charset="0"/>
+                <a:ea typeface="Arial" pitchFamily="34" charset="-122"/>
+                <a:cs typeface="Arial" pitchFamily="34" charset="-120"/>
+              </a:rPr>
+              <a:t>Lokale injectie wordt lokaal verbruikt — eigen wind en zon voor eigen laden.</a:t>
+            </a:r>
+            <a:endParaRPr lang="en-US" sz="1350" dirty="0"/>
+          </a:p>
+        </p:txBody>
+      </p:sp>
+      <p:sp>
+        <p:nvSpPr>
+          <p:cNvPr id="22" name="Text 17"/>
+          <p:cNvSpPr/>
+          <p:nvPr/>
+        </p:nvSpPr>
+        <p:spPr>
+          <a:xfrm>
+            <a:off x="640080" y="5669280"/>
+            <a:ext cx="10972800" cy="457200"/>
+          </a:xfrm>
+          <a:prstGeom prst="rect">
+            <a:avLst/>
+          </a:prstGeom>
+          <a:noFill/>
+          <a:ln/>
+        </p:spPr>
+        <p:txBody>
+          <a:bodyPr wrap="square" lIns="0" tIns="0" rIns="0" bIns="0" rtlCol="0" anchor="ctr"/>
+          <a:lstStyle/>
+          <a:p>
+            <a:pPr indent="0" marL="0">
+              <a:buNone/>
+            </a:pPr>
+            <a:r>
+              <a:rPr lang="en-US" sz="1400" i="1" dirty="0">
+                <a:solidFill>
+                  <a:srgbClr val="1A1A1A"/>
+                </a:solidFill>
+                <a:latin typeface="Arial" pitchFamily="34" charset="0"/>
+                <a:ea typeface="Arial" pitchFamily="34" charset="-122"/>
+                <a:cs typeface="Arial" pitchFamily="34" charset="-120"/>
+              </a:rPr>
+              <a:t>Slim laden = goedkoper rijden, minder congestie én lokale energie lokaal benut.</a:t>
+            </a:r>
+            <a:endParaRPr lang="en-US" sz="1400" dirty="0"/>
+          </a:p>
+        </p:txBody>
+      </p:sp>
+      <p:sp>
+        <p:nvSpPr>
+          <p:cNvPr id="23" name="Text 18"/>
+          <p:cNvSpPr/>
+          <p:nvPr/>
+        </p:nvSpPr>
+        <p:spPr>
+          <a:xfrm>
+            <a:off x="11365992" y="6400800"/>
+            <a:ext cx="457200" cy="274320"/>
+          </a:xfrm>
+          <a:prstGeom prst="rect">
+            <a:avLst/>
+          </a:prstGeom>
+          <a:noFill/>
+          <a:ln/>
+        </p:spPr>
+        <p:txBody>
+          <a:bodyPr wrap="square" lIns="0" tIns="0" rIns="0" bIns="0" rtlCol="0" anchor="ctr"/>
+          <a:lstStyle/>
+          <a:p>
+            <a:pPr algn="r" indent="0" marL="0">
+              <a:buNone/>
+            </a:pPr>
+            <a:r>
+              <a:rPr lang="en-US" sz="1000" dirty="0">
+                <a:solidFill>
+                  <a:srgbClr val="5A6473"/>
+                </a:solidFill>
+                <a:latin typeface="Arial" pitchFamily="34" charset="0"/>
+                <a:ea typeface="Arial" pitchFamily="34" charset="-122"/>
+                <a:cs typeface="Arial" pitchFamily="34" charset="-120"/>
+              </a:rPr>
+              <a:t>11</a:t>
+            </a:r>
+            <a:endParaRPr lang="en-US" sz="1000" dirty="0"/>
+          </a:p>
+        </p:txBody>
+      </p:sp>
+      <p:sp>
+        <p:nvSpPr>
+          <p:cNvPr id="24" name="Text 19"/>
+          <p:cNvSpPr/>
+          <p:nvPr/>
+        </p:nvSpPr>
+        <p:spPr>
+          <a:xfrm>
+            <a:off x="548640" y="6400800"/>
+            <a:ext cx="1828800" cy="274320"/>
+          </a:xfrm>
+          <a:prstGeom prst="rect">
+            <a:avLst/>
+          </a:prstGeom>
+          <a:noFill/>
+          <a:ln/>
+        </p:spPr>
+        <p:txBody>
+          <a:bodyPr wrap="square" lIns="0" tIns="0" rIns="0" bIns="0" rtlCol="0" anchor="ctr"/>
+          <a:lstStyle/>
+          <a:p>
+            <a:pPr indent="0" marL="0">
+              <a:buNone/>
+            </a:pPr>
+            <a:r>
+              <a:rPr lang="en-US" sz="1000" dirty="0">
+                <a:solidFill>
+                  <a:srgbClr val="5A6473"/>
+                </a:solidFill>
+                <a:latin typeface="Arial" pitchFamily="34" charset="0"/>
+                <a:ea typeface="Arial" pitchFamily="34" charset="-122"/>
+                <a:cs typeface="Arial" pitchFamily="34" charset="-120"/>
+              </a:rPr>
+              <a:t>fluctus.net</a:t>
+            </a:r>
+            <a:endParaRPr lang="en-US" sz="1000" dirty="0"/>
+          </a:p>
+        </p:txBody>
+      </p:sp>
+    </p:spTree>
+  </p:cSld>
+  <p:clrMapOvr>
+    <a:masterClrMapping/>
+  </p:clrMapOvr>
+</p:sld>
+</file>
+
+<file path=ppt/slides/slide12.xml><?xml version="1.0" encoding="utf-8"?>
+<p:sld xmlns:a="http://schemas.openxmlformats.org/drawingml/2006/main" xmlns:r="http://schemas.openxmlformats.org/officeDocument/2006/relationships" xmlns:p="http://schemas.openxmlformats.org/presentationml/2006/main">
+  <p:cSld name="Slide 12">
+    <p:bg>
+      <p:bgPr>
+        <a:solidFill>
           <a:srgbClr val="1F3864"/>
         </a:solidFill>
       </p:bgPr>
@@ -4758,7 +5718,7 @@
             <a:avLst/>
           </a:prstGeom>
           <a:solidFill>
-            <a:srgbClr val="EAF0FA"/>
+            <a:srgbClr val="F7EDE3"/>
           </a:solidFill>
           <a:ln/>
         </p:spPr>
@@ -4820,7 +5780,7 @@
                 <a:ea typeface="Arial" pitchFamily="34" charset="-122"/>
                 <a:cs typeface="Arial" pitchFamily="34" charset="-120"/>
               </a:rPr>
-              <a:t>Twee smaken, beide suboptimaal</a:t>
+              <a:t>Vlucht naar publieke superchargers</a:t>
             </a:r>
             <a:endParaRPr lang="en-US" sz="1700" dirty="0"/>
           </a:p>
@@ -4859,7 +5819,7 @@
                 <a:ea typeface="Arial" pitchFamily="34" charset="-122"/>
                 <a:cs typeface="Arial" pitchFamily="34" charset="-120"/>
               </a:rPr>
-              <a:t>Strategieën mikken ofwel op laden buiten de werkuren, ofwel op supersnelladen. Geen van beide benut de aansluiting waar ze al sterk is.</a:t>
+              <a:t>Werknemers wijken uit naar publieke snelladers. Dat drijft de kost op én overbelast pleinen met beperkte capaciteit, met performantieverlies tot gevolg.</a:t>
             </a:r>
             <a:endParaRPr lang="en-US" sz="1300" dirty="0"/>
           </a:p>
@@ -4914,7 +5874,7 @@
             <a:avLst/>
           </a:prstGeom>
           <a:solidFill>
-            <a:srgbClr val="F7EDE3"/>
+            <a:srgbClr val="EAF0FA"/>
           </a:solidFill>
           <a:ln/>
         </p:spPr>
@@ -4976,7 +5936,7 @@
                 <a:ea typeface="Arial" pitchFamily="34" charset="-122"/>
                 <a:cs typeface="Arial" pitchFamily="34" charset="-120"/>
               </a:rPr>
-              <a:t>Vlucht naar publieke superchargers</a:t>
+              <a:t>Twee smaken, beide suboptimaal</a:t>
             </a:r>
             <a:endParaRPr lang="en-US" sz="1700" dirty="0"/>
           </a:p>
@@ -5015,7 +5975,27 @@
                 <a:ea typeface="Arial" pitchFamily="34" charset="-122"/>
                 <a:cs typeface="Arial" pitchFamily="34" charset="-120"/>
               </a:rPr>
-              <a:t>Werknemers wijken uit naar publieke snelladers. Dat drijft de kost op én overbelast pleinen met beperkte capaciteit, met performantieverlies tot gevolg.</a:t>
+              <a:t>Strategieën mikken ofwel op laden buiten de werkuren, ofwel op supersnelladen.</a:t>
+            </a:r>
+            <a:pPr indent="0" marL="0">
+              <a:buNone/>
+            </a:pPr>
+            <a:endParaRPr lang="en-US" sz="1300" dirty="0"/>
+          </a:p>
+          <a:p>
+            <a:pPr indent="0" marL="0">
+              <a:buNone/>
+            </a:pPr>
+            <a:r>
+              <a:rPr lang="en-US" sz="1300" b="1" i="1" dirty="0">
+                <a:solidFill>
+                  <a:srgbClr val="5A6473"/>
+                </a:solidFill>
+                <a:latin typeface="Arial" pitchFamily="34" charset="0"/>
+                <a:ea typeface="Arial" pitchFamily="34" charset="-122"/>
+                <a:cs typeface="Arial" pitchFamily="34" charset="-120"/>
+              </a:rPr>
+              <a:t>Geen van beide benut de aansluiting waar ze al sterk is.</a:t>
             </a:r>
             <a:endParaRPr lang="en-US" sz="1300" dirty="0"/>
           </a:p>
@@ -6666,7 +7646,7 @@
                 <a:ea typeface="Arial" pitchFamily="34" charset="-122"/>
                 <a:cs typeface="Arial" pitchFamily="34" charset="-120"/>
               </a:rPr>
-              <a:t>De 8.446 wagens zijn de </a:t>
+              <a:t>De 2.134 wagens zijn de </a:t>
             </a:r>
             <a:pPr indent="0" marL="0">
               <a:buNone/>
@@ -6685,17 +7665,6 @@
             <a:pPr indent="0" marL="0">
               <a:buNone/>
             </a:pPr>
-            <a:r>
-              <a:rPr lang="en-US" sz="1500" dirty="0">
-                <a:solidFill>
-                  <a:srgbClr val="1A1A1A"/>
-                </a:solidFill>
-                <a:latin typeface="Arial" pitchFamily="34" charset="0"/>
-                <a:ea typeface="Arial" pitchFamily="34" charset="-122"/>
-                <a:cs typeface="Arial" pitchFamily="34" charset="-120"/>
-              </a:rPr>
-              <a:t> (de gemeente zelf + 163 parkings in de band van ±2 km rond de grens)</a:t>
-            </a:r>
             <a:pPr indent="0" marL="0">
               <a:buNone/>
             </a:pPr>
@@ -6837,7 +7806,7 @@
                 <a:ea typeface="Arial" pitchFamily="34" charset="-122"/>
                 <a:cs typeface="Arial" pitchFamily="34" charset="-120"/>
               </a:rPr>
-              <a:t>8.446</a:t>
+              <a:t>2.134</a:t>
             </a:r>
             <a:endParaRPr lang="en-US" sz="3200" dirty="0"/>
           </a:p>
@@ -6949,7 +7918,7 @@
                 <a:ea typeface="Arial" pitchFamily="34" charset="-122"/>
                 <a:cs typeface="Arial" pitchFamily="34" charset="-120"/>
               </a:rPr>
-              <a:t>243</a:t>
+              <a:t>80</a:t>
             </a:r>
             <a:endParaRPr lang="en-US" sz="3200" dirty="0"/>
           </a:p>
@@ -7061,7 +8030,7 @@
                 <a:ea typeface="Arial" pitchFamily="34" charset="-122"/>
                 <a:cs typeface="Arial" pitchFamily="34" charset="-120"/>
               </a:rPr>
-              <a:t>€ 12,67 mln</a:t>
+              <a:t>€ 3,20 mln</a:t>
             </a:r>
             <a:endParaRPr lang="en-US" sz="3200" dirty="0"/>
           </a:p>
@@ -7173,7 +8142,7 @@
                 <a:ea typeface="Arial" pitchFamily="34" charset="-122"/>
                 <a:cs typeface="Arial" pitchFamily="34" charset="-120"/>
               </a:rPr>
-              <a:t>€ 25,34 mln</a:t>
+              <a:t>€ 6,40 mln</a:t>
             </a:r>
             <a:endParaRPr lang="en-US" sz="3200" dirty="0"/>
           </a:p>
@@ -7280,7 +8249,7 @@
                 <a:ea typeface="Arial" pitchFamily="34" charset="-122"/>
                 <a:cs typeface="Arial" pitchFamily="34" charset="-120"/>
               </a:rPr>
-              <a:t>8.446 wagens</a:t>
+              <a:t>2.134 wagens</a:t>
             </a:r>
             <a:pPr indent="0" marL="0">
               <a:buNone/>
@@ -7308,7 +8277,7 @@
                 <a:ea typeface="Arial" pitchFamily="34" charset="-122"/>
                 <a:cs typeface="Arial" pitchFamily="34" charset="-120"/>
               </a:rPr>
-              <a:t>€ 12,67 mln besparing / jaar</a:t>
+              <a:t>€ 3,20 mln besparing / jaar</a:t>
             </a:r>
             <a:endParaRPr lang="en-US" sz="1500" dirty="0"/>
           </a:p>
@@ -7347,7 +8316,7 @@
                 <a:ea typeface="Arial" pitchFamily="34" charset="-122"/>
                 <a:cs typeface="Arial" pitchFamily="34" charset="-120"/>
               </a:rPr>
-              <a:t>8.446 wagens</a:t>
+              <a:t>2.134 wagens</a:t>
             </a:r>
             <a:pPr indent="0" marL="0">
               <a:buNone/>
@@ -7375,7 +8344,7 @@
                 <a:ea typeface="Arial" pitchFamily="34" charset="-122"/>
                 <a:cs typeface="Arial" pitchFamily="34" charset="-120"/>
               </a:rPr>
-              <a:t>€ 25,34 mln investering</a:t>
+              <a:t>€ 6,40 mln investering</a:t>
             </a:r>
             <a:pPr indent="0" marL="0">
               <a:buNone/>
@@ -7721,7 +8690,7 @@
                 <a:ea typeface="Arial" pitchFamily="34" charset="-122"/>
                 <a:cs typeface="Arial" pitchFamily="34" charset="-120"/>
               </a:rPr>
-              <a:t>243 parkings · 8.446 plaatsen</a:t>
+              <a:t>80 parkings · 2.134 plaatsen</a:t>
             </a:r>
             <a:endParaRPr lang="en-US" sz="2200" dirty="0"/>
           </a:p>
@@ -8733,7 +9702,7 @@
         <p:spPr>
           <a:xfrm>
             <a:off x="6217920" y="1920240"/>
-            <a:ext cx="2578608" cy="3794760"/>
+            <a:ext cx="2578608" cy="4297680"/>
           </a:xfrm>
           <a:prstGeom prst="roundRect">
             <a:avLst>
@@ -8884,7 +9853,7 @@
         <p:spPr>
           <a:xfrm>
             <a:off x="6473952" y="3520440"/>
-            <a:ext cx="2121408" cy="2103120"/>
+            <a:ext cx="2121408" cy="868680"/>
           </a:xfrm>
           <a:prstGeom prst="rect">
             <a:avLst/>
@@ -8898,11 +9867,8 @@
           <a:p>
             <a:pPr indent="0" marL="0">
               <a:lnSpc>
-                <a:spcPct val="104000"/>
+                <a:spcPct val="105000"/>
               </a:lnSpc>
-              <a:spcAft>
-                <a:spcPts val="700"/>
-              </a:spcAft>
               <a:buNone/>
             </a:pPr>
             <a:r>
@@ -8914,36 +9880,77 @@
                 <a:ea typeface="Arial" pitchFamily="34" charset="-122"/>
                 <a:cs typeface="Arial" pitchFamily="34" charset="-120"/>
               </a:rPr>
-              <a:t>Alle laadoplossingen, batterijen en aansluiting — steeds op maat.</a:t>
+              <a:t>Aankoop, leasing (operationeel) of concessie. Aankoopcentrale voor entiteiten met aanbesteding.</a:t>
             </a:r>
             <a:endParaRPr lang="en-US" sz="1150" dirty="0"/>
           </a:p>
-          <a:p>
-            <a:pPr indent="0" marL="0">
-              <a:lnSpc>
-                <a:spcPct val="104000"/>
-              </a:lnSpc>
-              <a:buNone/>
-            </a:pPr>
-            <a:r>
-              <a:rPr lang="en-US" sz="1150" dirty="0">
-                <a:solidFill>
-                  <a:srgbClr val="DCE6F5"/>
-                </a:solidFill>
-                <a:latin typeface="Arial" pitchFamily="34" charset="0"/>
-                <a:ea typeface="Arial" pitchFamily="34" charset="-122"/>
-                <a:cs typeface="Arial" pitchFamily="34" charset="-120"/>
-              </a:rPr>
-              <a:t>Aankoop, </a:t>
-            </a:r>
-            <a:pPr indent="0" marL="0">
-              <a:lnSpc>
-                <a:spcPct val="104000"/>
-              </a:lnSpc>
-              <a:buNone/>
-            </a:pPr>
-            <a:r>
-              <a:rPr lang="en-US" sz="1150" b="1" dirty="0">
+        </p:txBody>
+      </p:sp>
+      <p:sp>
+        <p:nvSpPr>
+          <p:cNvPr id="22" name="Text 17"/>
+          <p:cNvSpPr/>
+          <p:nvPr/>
+        </p:nvSpPr>
+        <p:spPr>
+          <a:xfrm>
+            <a:off x="6473952" y="4553712"/>
+            <a:ext cx="1709928" cy="310896"/>
+          </a:xfrm>
+          <a:prstGeom prst="rect">
+            <a:avLst/>
+          </a:prstGeom>
+          <a:noFill/>
+          <a:ln/>
+        </p:spPr>
+        <p:txBody>
+          <a:bodyPr wrap="square" lIns="0" tIns="0" rIns="0" bIns="0" rtlCol="0" anchor="ctr"/>
+          <a:lstStyle/>
+          <a:p>
+            <a:pPr algn="l" indent="0" marL="0">
+              <a:buNone/>
+            </a:pPr>
+            <a:r>
+              <a:rPr lang="en-US" sz="1250" dirty="0">
+                <a:solidFill>
+                  <a:srgbClr val="FFFFFF"/>
+                </a:solidFill>
+                <a:latin typeface="Arial" pitchFamily="34" charset="0"/>
+                <a:ea typeface="Arial" pitchFamily="34" charset="-122"/>
+                <a:cs typeface="Arial" pitchFamily="34" charset="-120"/>
+              </a:rPr>
+              <a:t>Aankoop</a:t>
+            </a:r>
+            <a:endParaRPr lang="en-US" sz="1250" dirty="0"/>
+          </a:p>
+        </p:txBody>
+      </p:sp>
+      <p:sp>
+        <p:nvSpPr>
+          <p:cNvPr id="23" name="Text 18"/>
+          <p:cNvSpPr/>
+          <p:nvPr/>
+        </p:nvSpPr>
+        <p:spPr>
+          <a:xfrm>
+            <a:off x="8083296" y="4553712"/>
+            <a:ext cx="457200" cy="310896"/>
+          </a:xfrm>
+          <a:prstGeom prst="rect">
+            <a:avLst/>
+          </a:prstGeom>
+          <a:noFill/>
+          <a:ln/>
+        </p:spPr>
+        <p:txBody>
+          <a:bodyPr wrap="square" lIns="0" tIns="0" rIns="0" bIns="0" rtlCol="0" anchor="ctr"/>
+          <a:lstStyle/>
+          <a:p>
+            <a:pPr algn="r" indent="0" marL="0">
+              <a:buNone/>
+            </a:pPr>
+            <a:r>
+              <a:rPr lang="en-US" sz="1500" b="1" dirty="0">
                 <a:solidFill>
                   <a:srgbClr val="9FE7B8"/>
                 </a:solidFill>
@@ -8951,33 +9958,77 @@
                 <a:ea typeface="Arial" pitchFamily="34" charset="-122"/>
                 <a:cs typeface="Arial" pitchFamily="34" charset="-120"/>
               </a:rPr>
-              <a:t>leasing</a:t>
-            </a:r>
-            <a:pPr indent="0" marL="0">
-              <a:lnSpc>
-                <a:spcPct val="104000"/>
-              </a:lnSpc>
-              <a:buNone/>
-            </a:pPr>
-            <a:r>
-              <a:rPr lang="en-US" sz="1150" dirty="0">
-                <a:solidFill>
-                  <a:srgbClr val="DCE6F5"/>
-                </a:solidFill>
-                <a:latin typeface="Arial" pitchFamily="34" charset="0"/>
-                <a:ea typeface="Arial" pitchFamily="34" charset="-122"/>
-                <a:cs typeface="Arial" pitchFamily="34" charset="-120"/>
-              </a:rPr>
-              <a:t> (operationeel) of </a:t>
-            </a:r>
-            <a:pPr indent="0" marL="0">
-              <a:lnSpc>
-                <a:spcPct val="104000"/>
-              </a:lnSpc>
-              <a:buNone/>
-            </a:pPr>
-            <a:r>
-              <a:rPr lang="en-US" sz="1150" b="1" dirty="0">
+              <a:t>✓</a:t>
+            </a:r>
+            <a:endParaRPr lang="en-US" sz="1500" dirty="0"/>
+          </a:p>
+        </p:txBody>
+      </p:sp>
+      <p:sp>
+        <p:nvSpPr>
+          <p:cNvPr id="24" name="Text 19"/>
+          <p:cNvSpPr/>
+          <p:nvPr/>
+        </p:nvSpPr>
+        <p:spPr>
+          <a:xfrm>
+            <a:off x="6473952" y="4919472"/>
+            <a:ext cx="1709928" cy="310896"/>
+          </a:xfrm>
+          <a:prstGeom prst="rect">
+            <a:avLst/>
+          </a:prstGeom>
+          <a:noFill/>
+          <a:ln/>
+        </p:spPr>
+        <p:txBody>
+          <a:bodyPr wrap="square" lIns="0" tIns="0" rIns="0" bIns="0" rtlCol="0" anchor="ctr"/>
+          <a:lstStyle/>
+          <a:p>
+            <a:pPr algn="l" indent="0" marL="0">
+              <a:buNone/>
+            </a:pPr>
+            <a:r>
+              <a:rPr lang="en-US" sz="1250" dirty="0">
+                <a:solidFill>
+                  <a:srgbClr val="FFFFFF"/>
+                </a:solidFill>
+                <a:latin typeface="Arial" pitchFamily="34" charset="0"/>
+                <a:ea typeface="Arial" pitchFamily="34" charset="-122"/>
+                <a:cs typeface="Arial" pitchFamily="34" charset="-120"/>
+              </a:rPr>
+              <a:t>Leasing</a:t>
+            </a:r>
+            <a:endParaRPr lang="en-US" sz="1250" dirty="0"/>
+          </a:p>
+        </p:txBody>
+      </p:sp>
+      <p:sp>
+        <p:nvSpPr>
+          <p:cNvPr id="25" name="Text 20"/>
+          <p:cNvSpPr/>
+          <p:nvPr/>
+        </p:nvSpPr>
+        <p:spPr>
+          <a:xfrm>
+            <a:off x="8083296" y="4919472"/>
+            <a:ext cx="457200" cy="310896"/>
+          </a:xfrm>
+          <a:prstGeom prst="rect">
+            <a:avLst/>
+          </a:prstGeom>
+          <a:noFill/>
+          <a:ln/>
+        </p:spPr>
+        <p:txBody>
+          <a:bodyPr wrap="square" lIns="0" tIns="0" rIns="0" bIns="0" rtlCol="0" anchor="ctr"/>
+          <a:lstStyle/>
+          <a:p>
+            <a:pPr algn="r" indent="0" marL="0">
+              <a:buNone/>
+            </a:pPr>
+            <a:r>
+              <a:rPr lang="en-US" sz="1500" b="1" dirty="0">
                 <a:solidFill>
                   <a:srgbClr val="9FE7B8"/>
                 </a:solidFill>
@@ -8985,39 +10036,77 @@
                 <a:ea typeface="Arial" pitchFamily="34" charset="-122"/>
                 <a:cs typeface="Arial" pitchFamily="34" charset="-120"/>
               </a:rPr>
-              <a:t>concessie</a:t>
-            </a:r>
-            <a:pPr indent="0" marL="0">
-              <a:lnSpc>
-                <a:spcPct val="104000"/>
-              </a:lnSpc>
-              <a:spcAft>
-                <a:spcPts val="700"/>
-              </a:spcAft>
-              <a:buNone/>
-            </a:pPr>
-            <a:r>
-              <a:rPr lang="en-US" sz="1150" dirty="0">
-                <a:solidFill>
-                  <a:srgbClr val="DCE6F5"/>
-                </a:solidFill>
-                <a:latin typeface="Arial" pitchFamily="34" charset="0"/>
-                <a:ea typeface="Arial" pitchFamily="34" charset="-122"/>
-                <a:cs typeface="Arial" pitchFamily="34" charset="-120"/>
-              </a:rPr>
-              <a:t>.</a:t>
-            </a:r>
-            <a:endParaRPr lang="en-US" sz="1150" dirty="0"/>
-          </a:p>
-          <a:p>
-            <a:pPr indent="0" marL="0">
-              <a:lnSpc>
-                <a:spcPct val="104000"/>
-              </a:lnSpc>
-              <a:buNone/>
-            </a:pPr>
-            <a:r>
-              <a:rPr lang="en-US" sz="1150" b="1" dirty="0">
+              <a:t>✓</a:t>
+            </a:r>
+            <a:endParaRPr lang="en-US" sz="1500" dirty="0"/>
+          </a:p>
+        </p:txBody>
+      </p:sp>
+      <p:sp>
+        <p:nvSpPr>
+          <p:cNvPr id="26" name="Text 21"/>
+          <p:cNvSpPr/>
+          <p:nvPr/>
+        </p:nvSpPr>
+        <p:spPr>
+          <a:xfrm>
+            <a:off x="6473952" y="5285232"/>
+            <a:ext cx="1709928" cy="310896"/>
+          </a:xfrm>
+          <a:prstGeom prst="rect">
+            <a:avLst/>
+          </a:prstGeom>
+          <a:noFill/>
+          <a:ln/>
+        </p:spPr>
+        <p:txBody>
+          <a:bodyPr wrap="square" lIns="0" tIns="0" rIns="0" bIns="0" rtlCol="0" anchor="ctr"/>
+          <a:lstStyle/>
+          <a:p>
+            <a:pPr algn="l" indent="0" marL="0">
+              <a:buNone/>
+            </a:pPr>
+            <a:r>
+              <a:rPr lang="en-US" sz="1250" dirty="0">
+                <a:solidFill>
+                  <a:srgbClr val="FFFFFF"/>
+                </a:solidFill>
+                <a:latin typeface="Arial" pitchFamily="34" charset="0"/>
+                <a:ea typeface="Arial" pitchFamily="34" charset="-122"/>
+                <a:cs typeface="Arial" pitchFamily="34" charset="-120"/>
+              </a:rPr>
+              <a:t>Concessie</a:t>
+            </a:r>
+            <a:endParaRPr lang="en-US" sz="1250" dirty="0"/>
+          </a:p>
+        </p:txBody>
+      </p:sp>
+      <p:sp>
+        <p:nvSpPr>
+          <p:cNvPr id="27" name="Text 22"/>
+          <p:cNvSpPr/>
+          <p:nvPr/>
+        </p:nvSpPr>
+        <p:spPr>
+          <a:xfrm>
+            <a:off x="8083296" y="5285232"/>
+            <a:ext cx="457200" cy="310896"/>
+          </a:xfrm>
+          <a:prstGeom prst="rect">
+            <a:avLst/>
+          </a:prstGeom>
+          <a:noFill/>
+          <a:ln/>
+        </p:spPr>
+        <p:txBody>
+          <a:bodyPr wrap="square" lIns="0" tIns="0" rIns="0" bIns="0" rtlCol="0" anchor="ctr"/>
+          <a:lstStyle/>
+          <a:p>
+            <a:pPr algn="r" indent="0" marL="0">
+              <a:buNone/>
+            </a:pPr>
+            <a:r>
+              <a:rPr lang="en-US" sz="1500" b="1" dirty="0">
                 <a:solidFill>
                   <a:srgbClr val="9FE7B8"/>
                 </a:solidFill>
@@ -9025,32 +10114,93 @@
                 <a:ea typeface="Arial" pitchFamily="34" charset="-122"/>
                 <a:cs typeface="Arial" pitchFamily="34" charset="-120"/>
               </a:rPr>
+              <a:t>✓</a:t>
+            </a:r>
+            <a:endParaRPr lang="en-US" sz="1500" dirty="0"/>
+          </a:p>
+        </p:txBody>
+      </p:sp>
+      <p:sp>
+        <p:nvSpPr>
+          <p:cNvPr id="28" name="Text 23"/>
+          <p:cNvSpPr/>
+          <p:nvPr/>
+        </p:nvSpPr>
+        <p:spPr>
+          <a:xfrm>
+            <a:off x="6473952" y="5650992"/>
+            <a:ext cx="1709928" cy="310896"/>
+          </a:xfrm>
+          <a:prstGeom prst="rect">
+            <a:avLst/>
+          </a:prstGeom>
+          <a:noFill/>
+          <a:ln/>
+        </p:spPr>
+        <p:txBody>
+          <a:bodyPr wrap="square" lIns="0" tIns="0" rIns="0" bIns="0" rtlCol="0" anchor="ctr"/>
+          <a:lstStyle/>
+          <a:p>
+            <a:pPr algn="l" indent="0" marL="0">
+              <a:buNone/>
+            </a:pPr>
+            <a:r>
+              <a:rPr lang="en-US" sz="1250" dirty="0">
+                <a:solidFill>
+                  <a:srgbClr val="FFFFFF"/>
+                </a:solidFill>
+                <a:latin typeface="Arial" pitchFamily="34" charset="0"/>
+                <a:ea typeface="Arial" pitchFamily="34" charset="-122"/>
+                <a:cs typeface="Arial" pitchFamily="34" charset="-120"/>
+              </a:rPr>
               <a:t>Aankoopcentrale</a:t>
             </a:r>
-            <a:pPr indent="0" marL="0">
-              <a:lnSpc>
-                <a:spcPct val="104000"/>
-              </a:lnSpc>
-              <a:buNone/>
-            </a:pPr>
-            <a:r>
-              <a:rPr lang="en-US" sz="1150" dirty="0">
-                <a:solidFill>
-                  <a:srgbClr val="DCE6F5"/>
-                </a:solidFill>
-                <a:latin typeface="Arial" pitchFamily="34" charset="0"/>
-                <a:ea typeface="Arial" pitchFamily="34" charset="-122"/>
-                <a:cs typeface="Arial" pitchFamily="34" charset="-120"/>
-              </a:rPr>
-              <a:t> voor entiteiten met aanbesteding.</a:t>
-            </a:r>
-            <a:endParaRPr lang="en-US" sz="1150" dirty="0"/>
-          </a:p>
-        </p:txBody>
-      </p:sp>
-      <p:sp>
-        <p:nvSpPr>
-          <p:cNvPr id="22" name="Shape 17"/>
+            <a:endParaRPr lang="en-US" sz="1250" dirty="0"/>
+          </a:p>
+        </p:txBody>
+      </p:sp>
+      <p:sp>
+        <p:nvSpPr>
+          <p:cNvPr id="29" name="Text 24"/>
+          <p:cNvSpPr/>
+          <p:nvPr/>
+        </p:nvSpPr>
+        <p:spPr>
+          <a:xfrm>
+            <a:off x="8083296" y="5650992"/>
+            <a:ext cx="457200" cy="310896"/>
+          </a:xfrm>
+          <a:prstGeom prst="rect">
+            <a:avLst/>
+          </a:prstGeom>
+          <a:noFill/>
+          <a:ln/>
+        </p:spPr>
+        <p:txBody>
+          <a:bodyPr wrap="square" lIns="0" tIns="0" rIns="0" bIns="0" rtlCol="0" anchor="ctr"/>
+          <a:lstStyle/>
+          <a:p>
+            <a:pPr algn="r" indent="0" marL="0">
+              <a:buNone/>
+            </a:pPr>
+            <a:r>
+              <a:rPr lang="en-US" sz="1500" b="1" dirty="0">
+                <a:solidFill>
+                  <a:srgbClr val="9FE7B8"/>
+                </a:solidFill>
+                <a:latin typeface="Arial" pitchFamily="34" charset="0"/>
+                <a:ea typeface="Arial" pitchFamily="34" charset="-122"/>
+                <a:cs typeface="Arial" pitchFamily="34" charset="-120"/>
+              </a:rPr>
+              <a:t>✓</a:t>
+            </a:r>
+            <a:endParaRPr lang="en-US" sz="1500" dirty="0"/>
+          </a:p>
+        </p:txBody>
+      </p:sp>
+      <p:sp>
+        <p:nvSpPr>
+          <p:cNvPr id="30" name="Shape 25"/>
           <p:cNvSpPr/>
           <p:nvPr/>
         </p:nvSpPr>
@@ -9084,7 +10234,7 @@
       </p:sp>
       <p:sp>
         <p:nvSpPr>
-          <p:cNvPr id="23" name="Shape 18"/>
+          <p:cNvPr id="31" name="Shape 26"/>
           <p:cNvSpPr/>
           <p:nvPr/>
         </p:nvSpPr>
@@ -9104,7 +10254,7 @@
       </p:sp>
       <p:pic>
         <p:nvPicPr>
-          <p:cNvPr id="24" name="Image 3" descr="preencoded.png">    </p:cNvPr>
+          <p:cNvPr id="32" name="Image 3" descr="preencoded.png">    </p:cNvPr>
           <p:cNvPicPr>
             <a:picLocks noChangeAspect="1"/>
           </p:cNvPicPr>
@@ -9128,7 +10278,7 @@
       </p:pic>
       <p:sp>
         <p:nvSpPr>
-          <p:cNvPr id="25" name="Text 19"/>
+          <p:cNvPr id="33" name="Text 27"/>
           <p:cNvSpPr/>
           <p:nvPr/>
         </p:nvSpPr>
@@ -9167,7 +10317,7 @@
       </p:sp>
       <p:sp>
         <p:nvSpPr>
-          <p:cNvPr id="26" name="Text 20"/>
+          <p:cNvPr id="34" name="Text 28"/>
           <p:cNvSpPr/>
           <p:nvPr/>
         </p:nvSpPr>
@@ -9206,7 +10356,7 @@
       </p:sp>
       <p:sp>
         <p:nvSpPr>
-          <p:cNvPr id="27" name="Text 21"/>
+          <p:cNvPr id="35" name="Text 29"/>
           <p:cNvSpPr/>
           <p:nvPr/>
         </p:nvSpPr>
@@ -9245,7 +10395,7 @@
       </p:sp>
       <p:sp>
         <p:nvSpPr>
-          <p:cNvPr id="28" name="Text 22"/>
+          <p:cNvPr id="36" name="Text 30"/>
           <p:cNvSpPr/>
           <p:nvPr/>
         </p:nvSpPr>
@@ -9284,7 +10434,7 @@
       </p:sp>
       <p:sp>
         <p:nvSpPr>
-          <p:cNvPr id="29" name="Text 23"/>
+          <p:cNvPr id="37" name="Text 31"/>
           <p:cNvSpPr/>
           <p:nvPr/>
         </p:nvSpPr>
@@ -9626,8 +10776,8 @@
         </p:nvSpPr>
         <p:spPr>
           <a:xfrm>
-            <a:off x="640080" y="5650992"/>
-            <a:ext cx="6126480" cy="320040"/>
+            <a:off x="640080" y="5486400"/>
+            <a:ext cx="6126480" cy="292608"/>
           </a:xfrm>
           <a:prstGeom prst="rect">
             <a:avLst/>
@@ -9654,7 +10804,7 @@
                 <a:ea typeface="Arial" pitchFamily="34" charset="-122"/>
                 <a:cs typeface="Arial" pitchFamily="34" charset="-120"/>
               </a:rPr>
-              <a:t>* Loadfactor t.o.v. referentiestation: kopstation HAREL 36 (36 kV), 7.1 km van Zwevegem (laagste load van de cluster &lt;5 km). · v3</a:t>
+              <a:t>* Loadfactor t.o.v. referentiestation: kopstation HAREL 36 (36 kV), 7.1 km van Zwevegem (laagste load van de cluster &lt;5 km). · v4</a:t>
             </a:r>
             <a:endParaRPr lang="en-US" sz="900" dirty="0"/>
           </a:p>
@@ -9707,7 +10857,7 @@
         </p:nvGraphicFramePr>
         <p:xfrm>
           <a:off x="7040880" y="2286000"/>
-          <a:ext cx="4572000" cy="2834640"/>
+          <a:ext cx="4572000" cy="2743200"/>
         </p:xfrm>
         <a:graphic xmlns:a="http://schemas.openxmlformats.org/drawingml/2006/main">
           <a:graphicData uri="http://schemas.openxmlformats.org/drawingml/2006/chart">
@@ -9723,8 +10873,8 @@
         </p:nvSpPr>
         <p:spPr>
           <a:xfrm>
-            <a:off x="7040880" y="5257800"/>
-            <a:ext cx="4572000" cy="868680"/>
+            <a:off x="7040880" y="5120640"/>
+            <a:ext cx="4572000" cy="777240"/>
           </a:xfrm>
           <a:prstGeom prst="rect">
             <a:avLst/>
@@ -9759,7 +10909,103 @@
       </p:sp>
       <p:sp>
         <p:nvSpPr>
-          <p:cNvPr id="13" name="Text 9"/>
+          <p:cNvPr id="13" name="Shape 9"/>
+          <p:cNvSpPr/>
+          <p:nvPr/>
+        </p:nvSpPr>
+        <p:spPr>
+          <a:xfrm>
+            <a:off x="640080" y="5943600"/>
+            <a:ext cx="10908792" cy="457200"/>
+          </a:xfrm>
+          <a:prstGeom prst="roundRect">
+            <a:avLst>
+              <a:gd name="adj" fmla="val 16000"/>
+            </a:avLst>
+          </a:prstGeom>
+          <a:solidFill>
+            <a:srgbClr val="1F3864"/>
+          </a:solidFill>
+          <a:ln/>
+          <a:effectLst>
+            <a:outerShdw sx="100000" sy="100000" kx="0" ky="0" algn="bl" rotWithShape="0" blurRad="114300" dist="38100" dir="5400000">
+              <a:srgbClr val="000000">
+                <a:alpha val="10000"/>
+              </a:srgbClr>
+            </a:outerShdw>
+          </a:effectLst>
+        </p:spPr>
+      </p:sp>
+      <p:sp>
+        <p:nvSpPr>
+          <p:cNvPr id="14" name="Text 10"/>
+          <p:cNvSpPr/>
+          <p:nvPr/>
+        </p:nvSpPr>
+        <p:spPr>
+          <a:xfrm>
+            <a:off x="822960" y="5961888"/>
+            <a:ext cx="10515600" cy="420624"/>
+          </a:xfrm>
+          <a:prstGeom prst="rect">
+            <a:avLst/>
+          </a:prstGeom>
+          <a:noFill/>
+          <a:ln/>
+        </p:spPr>
+        <p:txBody>
+          <a:bodyPr wrap="square" lIns="0" tIns="0" rIns="0" bIns="0" rtlCol="0" anchor="ctr"/>
+          <a:lstStyle/>
+          <a:p>
+            <a:pPr algn="ctr" indent="0" marL="0">
+              <a:buNone/>
+            </a:pPr>
+            <a:r>
+              <a:rPr lang="en-US" sz="1450" b="1" dirty="0">
+                <a:solidFill>
+                  <a:srgbClr val="FFFFFF"/>
+                </a:solidFill>
+                <a:latin typeface="Arial" pitchFamily="34" charset="0"/>
+                <a:ea typeface="Arial" pitchFamily="34" charset="-122"/>
+                <a:cs typeface="Arial" pitchFamily="34" charset="-120"/>
+              </a:rPr>
+              <a:t>Een slim laadplein zorgt voor een stijging van de bruikbare energie voor bedrijven en gezinnen in Zwevegem met </a:t>
+            </a:r>
+            <a:pPr algn="ctr" indent="0" marL="0">
+              <a:buNone/>
+            </a:pPr>
+            <a:r>
+              <a:rPr lang="en-US" sz="1450" b="1" dirty="0">
+                <a:solidFill>
+                  <a:srgbClr val="9FE7B8"/>
+                </a:solidFill>
+                <a:latin typeface="Arial" pitchFamily="34" charset="0"/>
+                <a:ea typeface="Arial" pitchFamily="34" charset="-122"/>
+                <a:cs typeface="Arial" pitchFamily="34" charset="-120"/>
+              </a:rPr>
+              <a:t>+103%</a:t>
+            </a:r>
+            <a:pPr algn="ctr" indent="0" marL="0">
+              <a:buNone/>
+            </a:pPr>
+            <a:r>
+              <a:rPr lang="en-US" sz="1450" b="1" dirty="0">
+                <a:solidFill>
+                  <a:srgbClr val="FFFFFF"/>
+                </a:solidFill>
+                <a:latin typeface="Arial" pitchFamily="34" charset="0"/>
+                <a:ea typeface="Arial" pitchFamily="34" charset="-122"/>
+                <a:cs typeface="Arial" pitchFamily="34" charset="-120"/>
+              </a:rPr>
+              <a:t>.</a:t>
+            </a:r>
+            <a:endParaRPr lang="en-US" sz="1450" dirty="0"/>
+          </a:p>
+        </p:txBody>
+      </p:sp>
+      <p:sp>
+        <p:nvSpPr>
+          <p:cNvPr id="15" name="Text 11"/>
           <p:cNvSpPr/>
           <p:nvPr/>
         </p:nvSpPr>
@@ -9798,7 +11044,7 @@
       </p:sp>
       <p:sp>
         <p:nvSpPr>
-          <p:cNvPr id="14" name="Text 10"/>
+          <p:cNvPr id="16" name="Text 12"/>
           <p:cNvSpPr/>
           <p:nvPr/>
         </p:nvSpPr>

--- a/Fluctus_Laadplan_Zwevegem.pptx
+++ b/Fluctus_Laadplan_Zwevegem.pptx
@@ -7646,7 +7646,7 @@
                 <a:ea typeface="Arial" pitchFamily="34" charset="-122"/>
                 <a:cs typeface="Arial" pitchFamily="34" charset="-120"/>
               </a:rPr>
-              <a:t>De 2.134 wagens zijn de </a:t>
+              <a:t>De 8.446 wagens zijn de </a:t>
             </a:r>
             <a:pPr indent="0" marL="0">
               <a:buNone/>
@@ -7665,6 +7665,17 @@
             <a:pPr indent="0" marL="0">
               <a:buNone/>
             </a:pPr>
+            <a:r>
+              <a:rPr lang="en-US" sz="1500" dirty="0">
+                <a:solidFill>
+                  <a:srgbClr val="1A1A1A"/>
+                </a:solidFill>
+                <a:latin typeface="Arial" pitchFamily="34" charset="0"/>
+                <a:ea typeface="Arial" pitchFamily="34" charset="-122"/>
+                <a:cs typeface="Arial" pitchFamily="34" charset="-120"/>
+              </a:rPr>
+              <a:t> (de gemeente zelf + 163 parkings in de band van ±2 km rond de grens)</a:t>
+            </a:r>
             <a:pPr indent="0" marL="0">
               <a:buNone/>
             </a:pPr>
@@ -7806,7 +7817,7 @@
                 <a:ea typeface="Arial" pitchFamily="34" charset="-122"/>
                 <a:cs typeface="Arial" pitchFamily="34" charset="-120"/>
               </a:rPr>
-              <a:t>2.134</a:t>
+              <a:t>8.446</a:t>
             </a:r>
             <a:endParaRPr lang="en-US" sz="3200" dirty="0"/>
           </a:p>
@@ -7918,7 +7929,7 @@
                 <a:ea typeface="Arial" pitchFamily="34" charset="-122"/>
                 <a:cs typeface="Arial" pitchFamily="34" charset="-120"/>
               </a:rPr>
-              <a:t>80</a:t>
+              <a:t>243</a:t>
             </a:r>
             <a:endParaRPr lang="en-US" sz="3200" dirty="0"/>
           </a:p>
@@ -8030,7 +8041,7 @@
                 <a:ea typeface="Arial" pitchFamily="34" charset="-122"/>
                 <a:cs typeface="Arial" pitchFamily="34" charset="-120"/>
               </a:rPr>
-              <a:t>€ 3,20 mln</a:t>
+              <a:t>€ 12,67 mln</a:t>
             </a:r>
             <a:endParaRPr lang="en-US" sz="3200" dirty="0"/>
           </a:p>
@@ -8142,7 +8153,7 @@
                 <a:ea typeface="Arial" pitchFamily="34" charset="-122"/>
                 <a:cs typeface="Arial" pitchFamily="34" charset="-120"/>
               </a:rPr>
-              <a:t>€ 6,40 mln</a:t>
+              <a:t>€ 25,34 mln</a:t>
             </a:r>
             <a:endParaRPr lang="en-US" sz="3200" dirty="0"/>
           </a:p>
@@ -8249,7 +8260,7 @@
                 <a:ea typeface="Arial" pitchFamily="34" charset="-122"/>
                 <a:cs typeface="Arial" pitchFamily="34" charset="-120"/>
               </a:rPr>
-              <a:t>2.134 wagens</a:t>
+              <a:t>8.446 wagens</a:t>
             </a:r>
             <a:pPr indent="0" marL="0">
               <a:buNone/>
@@ -8277,7 +8288,7 @@
                 <a:ea typeface="Arial" pitchFamily="34" charset="-122"/>
                 <a:cs typeface="Arial" pitchFamily="34" charset="-120"/>
               </a:rPr>
-              <a:t>€ 3,20 mln besparing / jaar</a:t>
+              <a:t>€ 12,67 mln besparing / jaar</a:t>
             </a:r>
             <a:endParaRPr lang="en-US" sz="1500" dirty="0"/>
           </a:p>
@@ -8316,7 +8327,7 @@
                 <a:ea typeface="Arial" pitchFamily="34" charset="-122"/>
                 <a:cs typeface="Arial" pitchFamily="34" charset="-120"/>
               </a:rPr>
-              <a:t>2.134 wagens</a:t>
+              <a:t>8.446 wagens</a:t>
             </a:r>
             <a:pPr indent="0" marL="0">
               <a:buNone/>
@@ -8344,7 +8355,7 @@
                 <a:ea typeface="Arial" pitchFamily="34" charset="-122"/>
                 <a:cs typeface="Arial" pitchFamily="34" charset="-120"/>
               </a:rPr>
-              <a:t>€ 6,40 mln investering</a:t>
+              <a:t>€ 25,34 mln investering</a:t>
             </a:r>
             <a:pPr indent="0" marL="0">
               <a:buNone/>
@@ -8690,7 +8701,7 @@
                 <a:ea typeface="Arial" pitchFamily="34" charset="-122"/>
                 <a:cs typeface="Arial" pitchFamily="34" charset="-120"/>
               </a:rPr>
-              <a:t>80 parkings · 2.134 plaatsen</a:t>
+              <a:t>243 parkings · 8.446 plaatsen</a:t>
             </a:r>
             <a:endParaRPr lang="en-US" sz="2200" dirty="0"/>
           </a:p>

--- a/Fluctus_Laadplan_Zwevegem.pptx
+++ b/Fluctus_Laadplan_Zwevegem.pptx
@@ -118,7 +118,7 @@
 </p:presentation>
 </file>
 
-<file path=ppt/charts/chart1.xml><?xml version="1.0" encoding="utf-8"?>
+<file path=ppt/charts/chart2.xml><?xml version="1.0" encoding="utf-8"?>
 <c:chartSpace xmlns:c="http://schemas.openxmlformats.org/drawingml/2006/chart" xmlns:a="http://schemas.openxmlformats.org/drawingml/2006/main" xmlns:r="http://schemas.openxmlformats.org/officeDocument/2006/relationships">
   <c:date1904 val="0"/>
   <c:roundedCorners val="1"/>
@@ -158,7 +158,7 @@
               <a:lstStyle/>
               <a:p>
                 <a:pPr>
-                  <a:defRPr b="1" i="0" strike="noStrike" sz="1400" u="none">
+                  <a:defRPr b="1" i="0" strike="noStrike" sz="1300" u="none">
                     <a:solidFill>
                       <a:srgbClr val="1A1A1A"/>
                     </a:solidFill>
@@ -220,10 +220,10 @@
                 <c:formatCode>General</c:formatCode>
                 <c:ptCount val="2"/>
                 <c:pt idx="0">
-                  <c:v>31</c:v>
+                  <c:v>34</c:v>
                 </c:pt>
                 <c:pt idx="1">
-                  <c:v>63</c:v>
+                  <c:v>34</c:v>
                 </c:pt>
               </c:numCache>
             </c:numRef>
@@ -236,7 +236,7 @@
             <a:lstStyle/>
             <a:p>
               <a:pPr>
-                <a:defRPr b="1" i="0" strike="noStrike" sz="1400" u="none">
+                <a:defRPr b="1" i="0" strike="noStrike" sz="1300" u="none">
                   <a:solidFill>
                     <a:srgbClr val="1A1A1A"/>
                   </a:solidFill>
@@ -284,7 +284,7 @@
           <a:lstStyle/>
           <a:p>
             <a:pPr>
-              <a:defRPr sz="1200" b="0" i="0" u="none" strike="noStrike">
+              <a:defRPr sz="1100" b="0" i="0" u="none" strike="noStrike">
                 <a:solidFill>
                   <a:srgbClr val="1A1A1A"/>
                 </a:solidFill>
@@ -304,7 +304,7 @@
         <c:axId val="2094734552"/>
         <c:scaling>
           <c:orientation val="minMax"/>
-          <c:max val="80"/>
+          <c:max val="50"/>
           <c:min val="0"/>
         </c:scaling>
         <c:delete val="0"/>
@@ -2260,7 +2260,7 @@
         </p:nvSpPr>
         <p:spPr>
           <a:xfrm>
-            <a:off x="640080" y="2331720"/>
+            <a:off x="640080" y="2468880"/>
             <a:ext cx="8412480" cy="1554480"/>
           </a:xfrm>
           <a:prstGeom prst="rect">
@@ -2288,7 +2288,7 @@
                 <a:ea typeface="Arial" pitchFamily="34" charset="-122"/>
                 <a:cs typeface="Arial" pitchFamily="34" charset="-120"/>
               </a:rPr>
-              <a:t>Toekomstvast laadplan</a:t>
+              <a:t>Meer EV in</a:t>
             </a:r>
             <a:endParaRPr lang="en-US" sz="4600" dirty="0"/>
           </a:p>
@@ -2308,7 +2308,7 @@
                 <a:ea typeface="Arial" pitchFamily="34" charset="-122"/>
                 <a:cs typeface="Arial" pitchFamily="34" charset="-120"/>
               </a:rPr>
-              <a:t>voor Zwevegem</a:t>
+              <a:t>Zwevegem</a:t>
             </a:r>
             <a:endParaRPr lang="en-US" sz="4600" dirty="0"/>
           </a:p>
@@ -2322,8 +2322,8 @@
         </p:nvSpPr>
         <p:spPr>
           <a:xfrm>
-            <a:off x="658368" y="3977640"/>
-            <a:ext cx="8686800" cy="1143000"/>
+            <a:off x="4572000" y="3246120"/>
+            <a:ext cx="7132320" cy="1371600"/>
           </a:xfrm>
           <a:prstGeom prst="rect">
             <a:avLst/>
@@ -2337,12 +2337,12 @@
           <a:p>
             <a:pPr indent="0" marL="0">
               <a:lnSpc>
-                <a:spcPct val="112000"/>
+                <a:spcPct val="145000"/>
               </a:lnSpc>
               <a:buNone/>
             </a:pPr>
             <a:r>
-              <a:rPr lang="en-US" sz="1500" dirty="0">
+              <a:rPr lang="en-US" sz="1800" dirty="0">
                 <a:solidFill>
                   <a:srgbClr val="C9D6EC"/>
                 </a:solidFill>
@@ -2350,27 +2350,49 @@
                 <a:ea typeface="Arial" pitchFamily="34" charset="-122"/>
                 <a:cs typeface="Arial" pitchFamily="34" charset="-120"/>
               </a:rPr>
-              <a:t>Meer laden, lagere netkosten, sterker net.
-</a:t>
-            </a:r>
+              <a:t>1. Kilometer kost gedeeld door 4</a:t>
+            </a:r>
+            <a:endParaRPr lang="en-US" sz="1800" dirty="0"/>
+          </a:p>
+          <a:p>
             <a:pPr indent="0" marL="0">
               <a:lnSpc>
-                <a:spcPct val="112000"/>
+                <a:spcPct val="145000"/>
               </a:lnSpc>
               <a:buNone/>
             </a:pPr>
             <a:r>
-              <a:rPr lang="en-US" sz="1500" i="1" dirty="0">
-                <a:solidFill>
-                  <a:srgbClr val="9FB4D9"/>
-                </a:solidFill>
-                <a:latin typeface="Arial" pitchFamily="34" charset="0"/>
-                <a:ea typeface="Arial" pitchFamily="34" charset="-122"/>
-                <a:cs typeface="Arial" pitchFamily="34" charset="-120"/>
-              </a:rPr>
-              <a:t>We kijken verder dan laden alleen: ook de impact van elektrische mobiliteit op de kost per kilometer én op de lokale congestie in Zwevegem.</a:t>
-            </a:r>
-            <a:endParaRPr lang="en-US" sz="1500" dirty="0"/>
+              <a:rPr lang="en-US" sz="1800" dirty="0">
+                <a:solidFill>
+                  <a:srgbClr val="C9D6EC"/>
+                </a:solidFill>
+                <a:latin typeface="Arial" pitchFamily="34" charset="0"/>
+                <a:ea typeface="Arial" pitchFamily="34" charset="-122"/>
+                <a:cs typeface="Arial" pitchFamily="34" charset="-120"/>
+              </a:rPr>
+              <a:t>2. Congestie voorkomen</a:t>
+            </a:r>
+            <a:endParaRPr lang="en-US" sz="1800" dirty="0"/>
+          </a:p>
+          <a:p>
+            <a:pPr indent="0" marL="0">
+              <a:lnSpc>
+                <a:spcPct val="145000"/>
+              </a:lnSpc>
+              <a:buNone/>
+            </a:pPr>
+            <a:r>
+              <a:rPr lang="en-US" sz="1800" dirty="0">
+                <a:solidFill>
+                  <a:srgbClr val="C9D6EC"/>
+                </a:solidFill>
+                <a:latin typeface="Arial" pitchFamily="34" charset="0"/>
+                <a:ea typeface="Arial" pitchFamily="34" charset="-122"/>
+                <a:cs typeface="Arial" pitchFamily="34" charset="-120"/>
+              </a:rPr>
+              <a:t>3. Lokale energie voor lokale EV</a:t>
+            </a:r>
+            <a:endParaRPr lang="en-US" sz="1800" dirty="0"/>
           </a:p>
         </p:txBody>
       </p:sp>
@@ -3220,7 +3242,7 @@
     <p:bg>
       <p:bgPr>
         <a:solidFill>
-          <a:srgbClr val="FFFFFF"/>
+          <a:srgbClr val="1F3864"/>
         </a:solidFill>
       </p:bgPr>
     </p:bg>
@@ -3307,7 +3329,7 @@
             <a:r>
               <a:rPr lang="en-US" sz="3000" b="1" dirty="0">
                 <a:solidFill>
-                  <a:srgbClr val="1F3864"/>
+                  <a:srgbClr val="FFFFFF"/>
                 </a:solidFill>
                 <a:latin typeface="Arial" pitchFamily="34" charset="0"/>
                 <a:ea typeface="Arial" pitchFamily="34" charset="-122"/>
@@ -3327,7 +3349,7 @@
         </p:nvSpPr>
         <p:spPr>
           <a:xfrm>
-            <a:off x="640080" y="2103120"/>
+            <a:off x="320040" y="2103120"/>
             <a:ext cx="3611880" cy="3291840"/>
           </a:xfrm>
           <a:prstGeom prst="roundRect">
@@ -3361,7 +3383,7 @@
         </p:nvSpPr>
         <p:spPr>
           <a:xfrm>
-            <a:off x="932688" y="2395728"/>
+            <a:off x="612648" y="2395728"/>
             <a:ext cx="777240" cy="777240"/>
           </a:xfrm>
           <a:prstGeom prst="ellipse">
@@ -3389,7 +3411,7 @@
         </p:blipFill>
         <p:spPr>
           <a:xfrm>
-            <a:off x="1134770" y="2597810"/>
+            <a:off x="814730" y="2597810"/>
             <a:ext cx="373075" cy="373075"/>
           </a:xfrm>
           <a:prstGeom prst="rect">
@@ -3397,54 +3419,39 @@
           </a:prstGeom>
         </p:spPr>
       </p:pic>
-      <p:sp>
-        <p:nvSpPr>
-          <p:cNvPr id="7" name="Text 4"/>
-          <p:cNvSpPr/>
-          <p:nvPr/>
-        </p:nvSpPr>
-        <p:spPr>
-          <a:xfrm>
-            <a:off x="3474720" y="2377440"/>
-            <a:ext cx="548640" cy="548640"/>
-          </a:xfrm>
-          <a:prstGeom prst="rect">
-            <a:avLst/>
-          </a:prstGeom>
-          <a:noFill/>
-          <a:ln/>
-        </p:spPr>
-        <p:txBody>
-          <a:bodyPr wrap="square" lIns="0" tIns="0" rIns="0" bIns="0" rtlCol="0" anchor="ctr"/>
-          <a:lstStyle/>
-          <a:p>
-            <a:pPr algn="r" indent="0" marL="0">
-              <a:buNone/>
-            </a:pPr>
-            <a:r>
-              <a:rPr lang="en-US" sz="3000" b="1" dirty="0">
-                <a:solidFill>
-                  <a:srgbClr val="DDE3EA"/>
-                </a:solidFill>
-                <a:latin typeface="Arial" pitchFamily="34" charset="0"/>
-                <a:ea typeface="Arial" pitchFamily="34" charset="-122"/>
-                <a:cs typeface="Arial" pitchFamily="34" charset="-120"/>
-              </a:rPr>
-              <a:t>1</a:t>
-            </a:r>
-            <a:endParaRPr lang="en-US" sz="3000" dirty="0"/>
-          </a:p>
-        </p:txBody>
-      </p:sp>
-      <p:sp>
-        <p:nvSpPr>
-          <p:cNvPr id="8" name="Text 5"/>
-          <p:cNvSpPr/>
-          <p:nvPr/>
-        </p:nvSpPr>
-        <p:spPr>
-          <a:xfrm>
-            <a:off x="932688" y="3429000"/>
+      <p:pic>
+        <p:nvPicPr>
+          <p:cNvPr id="7" name="Image 1" descr="preencoded.png">    </p:cNvPr>
+          <p:cNvPicPr>
+            <a:picLocks noChangeAspect="1"/>
+          </p:cNvPicPr>
+          <p:nvPr/>
+        </p:nvPicPr>
+        <p:blipFill>
+          <a:blip r:embed="rId2"/>
+          <a:stretch>
+            <a:fillRect/>
+          </a:stretch>
+        </p:blipFill>
+        <p:spPr>
+          <a:xfrm>
+            <a:off x="2816352" y="2286000"/>
+            <a:ext cx="914400" cy="914400"/>
+          </a:xfrm>
+          <a:prstGeom prst="rect">
+            <a:avLst/>
+          </a:prstGeom>
+        </p:spPr>
+      </p:pic>
+      <p:sp>
+        <p:nvSpPr>
+          <p:cNvPr id="8" name="Text 4"/>
+          <p:cNvSpPr/>
+          <p:nvPr/>
+        </p:nvSpPr>
+        <p:spPr>
+          <a:xfrm>
+            <a:off x="612648" y="3429000"/>
             <a:ext cx="3063240" cy="731520"/>
           </a:xfrm>
           <a:prstGeom prst="rect">
@@ -3480,13 +3487,13 @@
       </p:sp>
       <p:sp>
         <p:nvSpPr>
-          <p:cNvPr id="9" name="Text 6"/>
-          <p:cNvSpPr/>
-          <p:nvPr/>
-        </p:nvSpPr>
-        <p:spPr>
-          <a:xfrm>
-            <a:off x="932688" y="4206240"/>
+          <p:cNvPr id="9" name="Text 5"/>
+          <p:cNvSpPr/>
+          <p:nvPr/>
+        </p:nvSpPr>
+        <p:spPr>
+          <a:xfrm>
+            <a:off x="612648" y="4206240"/>
             <a:ext cx="3063240" cy="1051560"/>
           </a:xfrm>
           <a:prstGeom prst="rect">
@@ -3522,13 +3529,13 @@
       </p:sp>
       <p:sp>
         <p:nvSpPr>
-          <p:cNvPr id="10" name="Shape 7"/>
-          <p:cNvSpPr/>
-          <p:nvPr/>
-        </p:nvSpPr>
-        <p:spPr>
-          <a:xfrm>
-            <a:off x="4608576" y="2103120"/>
+          <p:cNvPr id="10" name="Shape 6"/>
+          <p:cNvSpPr/>
+          <p:nvPr/>
+        </p:nvSpPr>
+        <p:spPr>
+          <a:xfrm>
+            <a:off x="4288536" y="2103120"/>
             <a:ext cx="3611880" cy="3291840"/>
           </a:xfrm>
           <a:prstGeom prst="roundRect">
@@ -3556,13 +3563,13 @@
       </p:sp>
       <p:sp>
         <p:nvSpPr>
-          <p:cNvPr id="11" name="Shape 8"/>
-          <p:cNvSpPr/>
-          <p:nvPr/>
-        </p:nvSpPr>
-        <p:spPr>
-          <a:xfrm>
-            <a:off x="4901184" y="2395728"/>
+          <p:cNvPr id="11" name="Shape 7"/>
+          <p:cNvSpPr/>
+          <p:nvPr/>
+        </p:nvSpPr>
+        <p:spPr>
+          <a:xfrm>
+            <a:off x="4581144" y="2395728"/>
             <a:ext cx="777240" cy="777240"/>
           </a:xfrm>
           <a:prstGeom prst="ellipse">
@@ -3576,21 +3583,21 @@
       </p:sp>
       <p:pic>
         <p:nvPicPr>
-          <p:cNvPr id="12" name="Image 1" descr="preencoded.png">    </p:cNvPr>
+          <p:cNvPr id="12" name="Image 2" descr="preencoded.png">    </p:cNvPr>
           <p:cNvPicPr>
             <a:picLocks noChangeAspect="1"/>
           </p:cNvPicPr>
           <p:nvPr/>
         </p:nvPicPr>
         <p:blipFill>
-          <a:blip r:embed="rId2"/>
+          <a:blip r:embed="rId3"/>
           <a:stretch>
             <a:fillRect/>
           </a:stretch>
         </p:blipFill>
         <p:spPr>
           <a:xfrm>
-            <a:off x="5103266" y="2597810"/>
+            <a:off x="4783226" y="2597810"/>
             <a:ext cx="373075" cy="373075"/>
           </a:xfrm>
           <a:prstGeom prst="rect">
@@ -3598,54 +3605,39 @@
           </a:prstGeom>
         </p:spPr>
       </p:pic>
-      <p:sp>
-        <p:nvSpPr>
-          <p:cNvPr id="13" name="Text 9"/>
-          <p:cNvSpPr/>
-          <p:nvPr/>
-        </p:nvSpPr>
-        <p:spPr>
-          <a:xfrm>
-            <a:off x="7443216" y="2377440"/>
-            <a:ext cx="548640" cy="548640"/>
-          </a:xfrm>
-          <a:prstGeom prst="rect">
-            <a:avLst/>
-          </a:prstGeom>
-          <a:noFill/>
-          <a:ln/>
-        </p:spPr>
-        <p:txBody>
-          <a:bodyPr wrap="square" lIns="0" tIns="0" rIns="0" bIns="0" rtlCol="0" anchor="ctr"/>
-          <a:lstStyle/>
-          <a:p>
-            <a:pPr algn="r" indent="0" marL="0">
-              <a:buNone/>
-            </a:pPr>
-            <a:r>
-              <a:rPr lang="en-US" sz="3000" b="1" dirty="0">
-                <a:solidFill>
-                  <a:srgbClr val="DDE3EA"/>
-                </a:solidFill>
-                <a:latin typeface="Arial" pitchFamily="34" charset="0"/>
-                <a:ea typeface="Arial" pitchFamily="34" charset="-122"/>
-                <a:cs typeface="Arial" pitchFamily="34" charset="-120"/>
-              </a:rPr>
-              <a:t>2</a:t>
-            </a:r>
-            <a:endParaRPr lang="en-US" sz="3000" dirty="0"/>
-          </a:p>
-        </p:txBody>
-      </p:sp>
-      <p:sp>
-        <p:nvSpPr>
-          <p:cNvPr id="14" name="Text 10"/>
-          <p:cNvSpPr/>
-          <p:nvPr/>
-        </p:nvSpPr>
-        <p:spPr>
-          <a:xfrm>
-            <a:off x="4901184" y="3429000"/>
+      <p:pic>
+        <p:nvPicPr>
+          <p:cNvPr id="13" name="Image 3" descr="preencoded.png">    </p:cNvPr>
+          <p:cNvPicPr>
+            <a:picLocks noChangeAspect="1"/>
+          </p:cNvPicPr>
+          <p:nvPr/>
+        </p:nvPicPr>
+        <p:blipFill>
+          <a:blip r:embed="rId4"/>
+          <a:stretch>
+            <a:fillRect/>
+          </a:stretch>
+        </p:blipFill>
+        <p:spPr>
+          <a:xfrm>
+            <a:off x="6784848" y="2286000"/>
+            <a:ext cx="914400" cy="914400"/>
+          </a:xfrm>
+          <a:prstGeom prst="rect">
+            <a:avLst/>
+          </a:prstGeom>
+        </p:spPr>
+      </p:pic>
+      <p:sp>
+        <p:nvSpPr>
+          <p:cNvPr id="14" name="Text 8"/>
+          <p:cNvSpPr/>
+          <p:nvPr/>
+        </p:nvSpPr>
+        <p:spPr>
+          <a:xfrm>
+            <a:off x="4581144" y="3429000"/>
             <a:ext cx="3063240" cy="731520"/>
           </a:xfrm>
           <a:prstGeom prst="rect">
@@ -3681,13 +3673,13 @@
       </p:sp>
       <p:sp>
         <p:nvSpPr>
-          <p:cNvPr id="15" name="Text 11"/>
-          <p:cNvSpPr/>
-          <p:nvPr/>
-        </p:nvSpPr>
-        <p:spPr>
-          <a:xfrm>
-            <a:off x="4901184" y="4206240"/>
+          <p:cNvPr id="15" name="Text 9"/>
+          <p:cNvSpPr/>
+          <p:nvPr/>
+        </p:nvSpPr>
+        <p:spPr>
+          <a:xfrm>
+            <a:off x="4581144" y="4206240"/>
             <a:ext cx="3063240" cy="1051560"/>
           </a:xfrm>
           <a:prstGeom prst="rect">
@@ -3715,7 +3707,7 @@
                 <a:ea typeface="Arial" pitchFamily="34" charset="-122"/>
                 <a:cs typeface="Arial" pitchFamily="34" charset="-120"/>
               </a:rPr>
-              <a:t>+103% meer energie</a:t>
+              <a:t>+0% meer energie</a:t>
             </a:r>
             <a:pPr indent="0" marL="0">
               <a:lnSpc>
@@ -3740,13 +3732,13 @@
       </p:sp>
       <p:sp>
         <p:nvSpPr>
-          <p:cNvPr id="16" name="Shape 12"/>
-          <p:cNvSpPr/>
-          <p:nvPr/>
-        </p:nvSpPr>
-        <p:spPr>
-          <a:xfrm>
-            <a:off x="8577072" y="2103120"/>
+          <p:cNvPr id="16" name="Shape 10"/>
+          <p:cNvSpPr/>
+          <p:nvPr/>
+        </p:nvSpPr>
+        <p:spPr>
+          <a:xfrm>
+            <a:off x="8257032" y="2103120"/>
             <a:ext cx="3611880" cy="3291840"/>
           </a:xfrm>
           <a:prstGeom prst="roundRect">
@@ -3774,13 +3766,13 @@
       </p:sp>
       <p:sp>
         <p:nvSpPr>
-          <p:cNvPr id="17" name="Shape 13"/>
-          <p:cNvSpPr/>
-          <p:nvPr/>
-        </p:nvSpPr>
-        <p:spPr>
-          <a:xfrm>
-            <a:off x="8869680" y="2395728"/>
+          <p:cNvPr id="17" name="Shape 11"/>
+          <p:cNvSpPr/>
+          <p:nvPr/>
+        </p:nvSpPr>
+        <p:spPr>
+          <a:xfrm>
+            <a:off x="8549640" y="2395728"/>
             <a:ext cx="777240" cy="777240"/>
           </a:xfrm>
           <a:prstGeom prst="ellipse">
@@ -3794,21 +3786,21 @@
       </p:sp>
       <p:pic>
         <p:nvPicPr>
-          <p:cNvPr id="18" name="Image 2" descr="preencoded.png">    </p:cNvPr>
+          <p:cNvPr id="18" name="Image 4" descr="preencoded.png">    </p:cNvPr>
           <p:cNvPicPr>
             <a:picLocks noChangeAspect="1"/>
           </p:cNvPicPr>
           <p:nvPr/>
         </p:nvPicPr>
         <p:blipFill>
-          <a:blip r:embed="rId3"/>
+          <a:blip r:embed="rId5"/>
           <a:stretch>
             <a:fillRect/>
           </a:stretch>
         </p:blipFill>
         <p:spPr>
           <a:xfrm>
-            <a:off x="9071762" y="2597810"/>
+            <a:off x="8751722" y="2597810"/>
             <a:ext cx="373075" cy="373075"/>
           </a:xfrm>
           <a:prstGeom prst="rect">
@@ -3816,54 +3808,39 @@
           </a:prstGeom>
         </p:spPr>
       </p:pic>
-      <p:sp>
-        <p:nvSpPr>
-          <p:cNvPr id="19" name="Text 14"/>
-          <p:cNvSpPr/>
-          <p:nvPr/>
-        </p:nvSpPr>
-        <p:spPr>
-          <a:xfrm>
-            <a:off x="11411712" y="2377440"/>
-            <a:ext cx="548640" cy="548640"/>
-          </a:xfrm>
-          <a:prstGeom prst="rect">
-            <a:avLst/>
-          </a:prstGeom>
-          <a:noFill/>
-          <a:ln/>
-        </p:spPr>
-        <p:txBody>
-          <a:bodyPr wrap="square" lIns="0" tIns="0" rIns="0" bIns="0" rtlCol="0" anchor="ctr"/>
-          <a:lstStyle/>
-          <a:p>
-            <a:pPr algn="r" indent="0" marL="0">
-              <a:buNone/>
-            </a:pPr>
-            <a:r>
-              <a:rPr lang="en-US" sz="3000" b="1" dirty="0">
-                <a:solidFill>
-                  <a:srgbClr val="DDE3EA"/>
-                </a:solidFill>
-                <a:latin typeface="Arial" pitchFamily="34" charset="0"/>
-                <a:ea typeface="Arial" pitchFamily="34" charset="-122"/>
-                <a:cs typeface="Arial" pitchFamily="34" charset="-120"/>
-              </a:rPr>
-              <a:t>3</a:t>
-            </a:r>
-            <a:endParaRPr lang="en-US" sz="3000" dirty="0"/>
-          </a:p>
-        </p:txBody>
-      </p:sp>
-      <p:sp>
-        <p:nvSpPr>
-          <p:cNvPr id="20" name="Text 15"/>
-          <p:cNvSpPr/>
-          <p:nvPr/>
-        </p:nvSpPr>
-        <p:spPr>
-          <a:xfrm>
-            <a:off x="8869680" y="3429000"/>
+      <p:pic>
+        <p:nvPicPr>
+          <p:cNvPr id="19" name="Image 5" descr="preencoded.png">    </p:cNvPr>
+          <p:cNvPicPr>
+            <a:picLocks noChangeAspect="1"/>
+          </p:cNvPicPr>
+          <p:nvPr/>
+        </p:nvPicPr>
+        <p:blipFill>
+          <a:blip r:embed="rId6"/>
+          <a:stretch>
+            <a:fillRect/>
+          </a:stretch>
+        </p:blipFill>
+        <p:spPr>
+          <a:xfrm>
+            <a:off x="10753344" y="2286000"/>
+            <a:ext cx="914400" cy="914400"/>
+          </a:xfrm>
+          <a:prstGeom prst="rect">
+            <a:avLst/>
+          </a:prstGeom>
+        </p:spPr>
+      </p:pic>
+      <p:sp>
+        <p:nvSpPr>
+          <p:cNvPr id="20" name="Text 12"/>
+          <p:cNvSpPr/>
+          <p:nvPr/>
+        </p:nvSpPr>
+        <p:spPr>
+          <a:xfrm>
+            <a:off x="8549640" y="3429000"/>
             <a:ext cx="3063240" cy="731520"/>
           </a:xfrm>
           <a:prstGeom prst="rect">
@@ -3899,13 +3876,13 @@
       </p:sp>
       <p:sp>
         <p:nvSpPr>
-          <p:cNvPr id="21" name="Text 16"/>
-          <p:cNvSpPr/>
-          <p:nvPr/>
-        </p:nvSpPr>
-        <p:spPr>
-          <a:xfrm>
-            <a:off x="8869680" y="4206240"/>
+          <p:cNvPr id="21" name="Text 13"/>
+          <p:cNvSpPr/>
+          <p:nvPr/>
+        </p:nvSpPr>
+        <p:spPr>
+          <a:xfrm>
+            <a:off x="8549640" y="4206240"/>
             <a:ext cx="3063240" cy="1051560"/>
           </a:xfrm>
           <a:prstGeom prst="rect">
@@ -3941,7 +3918,7 @@
       </p:sp>
       <p:sp>
         <p:nvSpPr>
-          <p:cNvPr id="22" name="Text 17"/>
+          <p:cNvPr id="22" name="Text 14"/>
           <p:cNvSpPr/>
           <p:nvPr/>
         </p:nvSpPr>
@@ -3966,7 +3943,7 @@
             <a:r>
               <a:rPr lang="en-US" sz="1400" i="1" dirty="0">
                 <a:solidFill>
-                  <a:srgbClr val="1A1A1A"/>
+                  <a:srgbClr val="C9D6EC"/>
                 </a:solidFill>
                 <a:latin typeface="Arial" pitchFamily="34" charset="0"/>
                 <a:ea typeface="Arial" pitchFamily="34" charset="-122"/>
@@ -3980,7 +3957,7 @@
       </p:sp>
       <p:sp>
         <p:nvSpPr>
-          <p:cNvPr id="23" name="Text 18"/>
+          <p:cNvPr id="23" name="Text 15"/>
           <p:cNvSpPr/>
           <p:nvPr/>
         </p:nvSpPr>
@@ -4019,7 +3996,7 @@
       </p:sp>
       <p:sp>
         <p:nvSpPr>
-          <p:cNvPr id="24" name="Text 19"/>
+          <p:cNvPr id="24" name="Text 16"/>
           <p:cNvSpPr/>
           <p:nvPr/>
         </p:nvSpPr>
@@ -6478,20 +6455,68 @@
           </a:p>
         </p:txBody>
       </p:sp>
-      <p:sp>
-        <p:nvSpPr>
-          <p:cNvPr id="9" name="Shape 6"/>
-          <p:cNvSpPr/>
-          <p:nvPr/>
-        </p:nvSpPr>
-        <p:spPr>
-          <a:xfrm>
-            <a:off x="7040880" y="1965960"/>
-            <a:ext cx="4507992" cy="3611880"/>
+      <p:pic>
+        <p:nvPicPr>
+          <p:cNvPr id="9" name="Image 1" descr="preencoded.png">    </p:cNvPr>
+          <p:cNvPicPr>
+            <a:picLocks noChangeAspect="1"/>
+          </p:cNvPicPr>
+          <p:nvPr/>
+        </p:nvPicPr>
+        <p:blipFill>
+          <a:blip r:embed="rId2"/>
+          <a:stretch>
+            <a:fillRect/>
+          </a:stretch>
+        </p:blipFill>
+        <p:spPr>
+          <a:xfrm>
+            <a:off x="8001000" y="1371600"/>
+            <a:ext cx="2560320" cy="1819656"/>
+          </a:xfrm>
+          <a:prstGeom prst="rect">
+            <a:avLst/>
+          </a:prstGeom>
+        </p:spPr>
+      </p:pic>
+      <p:pic>
+        <p:nvPicPr>
+          <p:cNvPr id="10" name="Image 2" descr="preencoded.png">    </p:cNvPr>
+          <p:cNvPicPr>
+            <a:picLocks noChangeAspect="1"/>
+          </p:cNvPicPr>
+          <p:nvPr/>
+        </p:nvPicPr>
+        <p:blipFill>
+          <a:blip r:embed="rId3"/>
+          <a:stretch>
+            <a:fillRect/>
+          </a:stretch>
+        </p:blipFill>
+        <p:spPr>
+          <a:xfrm>
+            <a:off x="8001000" y="3310128"/>
+            <a:ext cx="2560320" cy="2020824"/>
+          </a:xfrm>
+          <a:prstGeom prst="rect">
+            <a:avLst/>
+          </a:prstGeom>
+        </p:spPr>
+      </p:pic>
+      <p:sp>
+        <p:nvSpPr>
+          <p:cNvPr id="11" name="Shape 6"/>
+          <p:cNvSpPr/>
+          <p:nvPr/>
+        </p:nvSpPr>
+        <p:spPr>
+          <a:xfrm>
+            <a:off x="640080" y="5486400"/>
+            <a:ext cx="10908792" cy="868680"/>
           </a:xfrm>
           <a:prstGeom prst="roundRect">
             <a:avLst>
-              <a:gd name="adj" fmla="val 2532"/>
+              <a:gd name="adj" fmla="val 10526"/>
             </a:avLst>
           </a:prstGeom>
           <a:solidFill>
@@ -6509,14 +6534,14 @@
       </p:sp>
       <p:sp>
         <p:nvSpPr>
-          <p:cNvPr id="10" name="Shape 7"/>
-          <p:cNvSpPr/>
-          <p:nvPr/>
-        </p:nvSpPr>
-        <p:spPr>
-          <a:xfrm>
-            <a:off x="7315200" y="2240280"/>
-            <a:ext cx="640080" cy="640080"/>
+          <p:cNvPr id="12" name="Shape 7"/>
+          <p:cNvSpPr/>
+          <p:nvPr/>
+        </p:nvSpPr>
+        <p:spPr>
+          <a:xfrm>
+            <a:off x="868680" y="5641848"/>
+            <a:ext cx="548640" cy="548640"/>
           </a:xfrm>
           <a:prstGeom prst="ellipse">
             <a:avLst/>
@@ -6529,22 +6554,22 @@
       </p:sp>
       <p:pic>
         <p:nvPicPr>
-          <p:cNvPr id="11" name="Image 1" descr="preencoded.png">    </p:cNvPr>
+          <p:cNvPr id="13" name="Image 3" descr="preencoded.png">    </p:cNvPr>
           <p:cNvPicPr>
             <a:picLocks noChangeAspect="1"/>
           </p:cNvPicPr>
           <p:nvPr/>
         </p:nvPicPr>
         <p:blipFill>
-          <a:blip r:embed="rId2"/>
+          <a:blip r:embed="rId4"/>
           <a:stretch>
             <a:fillRect/>
           </a:stretch>
         </p:blipFill>
         <p:spPr>
           <a:xfrm>
-            <a:off x="7481621" y="2406701"/>
-            <a:ext cx="307238" cy="307238"/>
+            <a:off x="1011326" y="5784494"/>
+            <a:ext cx="263347" cy="263347"/>
           </a:xfrm>
           <a:prstGeom prst="rect">
             <a:avLst/>
@@ -6553,30 +6578,30 @@
       </p:pic>
       <p:sp>
         <p:nvSpPr>
-          <p:cNvPr id="12" name="Text 8"/>
-          <p:cNvSpPr/>
-          <p:nvPr/>
-        </p:nvSpPr>
-        <p:spPr>
-          <a:xfrm>
-            <a:off x="8092440" y="2286000"/>
-            <a:ext cx="3291840" cy="457200"/>
-          </a:xfrm>
-          <a:prstGeom prst="rect">
-            <a:avLst/>
-          </a:prstGeom>
-          <a:noFill/>
-          <a:ln/>
-        </p:spPr>
-        <p:txBody>
-          <a:bodyPr wrap="square" lIns="0" tIns="0" rIns="0" bIns="0" rtlCol="0" anchor="ctr"/>
-          <a:lstStyle/>
-          <a:p>
-            <a:pPr indent="0" marL="0">
-              <a:buNone/>
-            </a:pPr>
-            <a:r>
-              <a:rPr lang="en-US" sz="2000" b="1" dirty="0">
+          <p:cNvPr id="14" name="Text 8"/>
+          <p:cNvSpPr/>
+          <p:nvPr/>
+        </p:nvSpPr>
+        <p:spPr>
+          <a:xfrm>
+            <a:off x="1572768" y="5650992"/>
+            <a:ext cx="1737360" cy="548640"/>
+          </a:xfrm>
+          <a:prstGeom prst="rect">
+            <a:avLst/>
+          </a:prstGeom>
+          <a:noFill/>
+          <a:ln/>
+        </p:spPr>
+        <p:txBody>
+          <a:bodyPr wrap="square" lIns="0" tIns="0" rIns="0" bIns="0" rtlCol="0" anchor="ctr"/>
+          <a:lstStyle/>
+          <a:p>
+            <a:pPr indent="0" marL="0">
+              <a:buNone/>
+            </a:pPr>
+            <a:r>
+              <a:rPr lang="en-US" sz="1700" b="1" dirty="0">
                 <a:solidFill>
                   <a:srgbClr val="FFFFFF"/>
                 </a:solidFill>
@@ -6586,20 +6611,20 @@
               </a:rPr>
               <a:t>Loadfactor</a:t>
             </a:r>
-            <a:endParaRPr lang="en-US" sz="2000" dirty="0"/>
-          </a:p>
-        </p:txBody>
-      </p:sp>
-      <p:sp>
-        <p:nvSpPr>
-          <p:cNvPr id="13" name="Text 9"/>
-          <p:cNvSpPr/>
-          <p:nvPr/>
-        </p:nvSpPr>
-        <p:spPr>
-          <a:xfrm>
-            <a:off x="7315200" y="3154680"/>
-            <a:ext cx="3977640" cy="1371600"/>
+            <a:endParaRPr lang="en-US" sz="1700" dirty="0"/>
+          </a:p>
+        </p:txBody>
+      </p:sp>
+      <p:sp>
+        <p:nvSpPr>
+          <p:cNvPr id="15" name="Text 9"/>
+          <p:cNvSpPr/>
+          <p:nvPr/>
+        </p:nvSpPr>
+        <p:spPr>
+          <a:xfrm>
+            <a:off x="3154680" y="5577840"/>
+            <a:ext cx="5029200" cy="713232"/>
           </a:xfrm>
           <a:prstGeom prst="rect">
             <a:avLst/>
@@ -6613,12 +6638,12 @@
           <a:p>
             <a:pPr indent="0" marL="0">
               <a:lnSpc>
-                <a:spcPct val="112000"/>
+                <a:spcPct val="104000"/>
               </a:lnSpc>
               <a:buNone/>
             </a:pPr>
             <a:r>
-              <a:rPr lang="en-US" sz="1400" dirty="0">
+              <a:rPr lang="en-US" sz="1100" dirty="0">
                 <a:solidFill>
                   <a:srgbClr val="DCE6F5"/>
                 </a:solidFill>
@@ -6628,36 +6653,39 @@
               </a:rPr>
               <a:t>De verhouding tussen het werkelijke verbruik per jaar en de energie die geleverd zou kunnen worden als men constant op het maximale vermogen zou leveren.</a:t>
             </a:r>
-            <a:endParaRPr lang="en-US" sz="1400" dirty="0"/>
-          </a:p>
-        </p:txBody>
-      </p:sp>
-      <p:sp>
-        <p:nvSpPr>
-          <p:cNvPr id="14" name="Text 10"/>
-          <p:cNvSpPr/>
-          <p:nvPr/>
-        </p:nvSpPr>
-        <p:spPr>
-          <a:xfrm>
-            <a:off x="7315200" y="4800600"/>
-            <a:ext cx="3977640" cy="548640"/>
-          </a:xfrm>
-          <a:prstGeom prst="rect">
-            <a:avLst/>
-          </a:prstGeom>
-          <a:noFill/>
-          <a:ln/>
-        </p:spPr>
-        <p:txBody>
-          <a:bodyPr wrap="square" lIns="0" tIns="0" rIns="0" bIns="0" rtlCol="0" anchor="ctr"/>
-          <a:lstStyle/>
-          <a:p>
-            <a:pPr indent="0" marL="0">
-              <a:buNone/>
-            </a:pPr>
-            <a:r>
-              <a:rPr lang="en-US" sz="1400" b="1" dirty="0">
+            <a:endParaRPr lang="en-US" sz="1100" dirty="0"/>
+          </a:p>
+        </p:txBody>
+      </p:sp>
+      <p:sp>
+        <p:nvSpPr>
+          <p:cNvPr id="16" name="Text 10"/>
+          <p:cNvSpPr/>
+          <p:nvPr/>
+        </p:nvSpPr>
+        <p:spPr>
+          <a:xfrm>
+            <a:off x="8366760" y="5577840"/>
+            <a:ext cx="3063240" cy="713232"/>
+          </a:xfrm>
+          <a:prstGeom prst="rect">
+            <a:avLst/>
+          </a:prstGeom>
+          <a:noFill/>
+          <a:ln/>
+        </p:spPr>
+        <p:txBody>
+          <a:bodyPr wrap="square" lIns="0" tIns="0" rIns="0" bIns="0" rtlCol="0" anchor="ctr"/>
+          <a:lstStyle/>
+          <a:p>
+            <a:pPr indent="0" marL="0">
+              <a:lnSpc>
+                <a:spcPct val="104000"/>
+              </a:lnSpc>
+              <a:buNone/>
+            </a:pPr>
+            <a:r>
+              <a:rPr lang="en-US" sz="1150" b="1" dirty="0">
                 <a:solidFill>
                   <a:srgbClr val="FFFFFF"/>
                 </a:solidFill>
@@ -6668,10 +6696,13 @@
               <a:t>Lage loadfactor = </a:t>
             </a:r>
             <a:pPr indent="0" marL="0">
-              <a:buNone/>
-            </a:pPr>
-            <a:r>
-              <a:rPr lang="en-US" sz="1400" dirty="0">
+              <a:lnSpc>
+                <a:spcPct val="104000"/>
+              </a:lnSpc>
+              <a:buNone/>
+            </a:pPr>
+            <a:r>
+              <a:rPr lang="en-US" sz="1150" dirty="0">
                 <a:solidFill>
                   <a:srgbClr val="9FE7B8"/>
                 </a:solidFill>
@@ -6681,13 +6712,13 @@
               </a:rPr>
               <a:t>veel ongebruikte, al betaalde capaciteit.</a:t>
             </a:r>
-            <a:endParaRPr lang="en-US" sz="1400" dirty="0"/>
-          </a:p>
-        </p:txBody>
-      </p:sp>
-      <p:sp>
-        <p:nvSpPr>
-          <p:cNvPr id="15" name="Text 11"/>
+            <a:endParaRPr lang="en-US" sz="1150" dirty="0"/>
+          </a:p>
+        </p:txBody>
+      </p:sp>
+      <p:sp>
+        <p:nvSpPr>
+          <p:cNvPr id="17" name="Text 11"/>
           <p:cNvSpPr/>
           <p:nvPr/>
         </p:nvSpPr>
@@ -6726,7 +6757,7 @@
       </p:sp>
       <p:sp>
         <p:nvSpPr>
-          <p:cNvPr id="16" name="Text 12"/>
+          <p:cNvPr id="18" name="Text 12"/>
           <p:cNvSpPr/>
           <p:nvPr/>
         </p:nvSpPr>
@@ -7646,7 +7677,7 @@
                 <a:ea typeface="Arial" pitchFamily="34" charset="-122"/>
                 <a:cs typeface="Arial" pitchFamily="34" charset="-120"/>
               </a:rPr>
-              <a:t>De 8.446 wagens zijn de </a:t>
+              <a:t>De 0 wagens zijn de </a:t>
             </a:r>
             <a:pPr indent="0" marL="0">
               <a:buNone/>
@@ -7665,17 +7696,6 @@
             <a:pPr indent="0" marL="0">
               <a:buNone/>
             </a:pPr>
-            <a:r>
-              <a:rPr lang="en-US" sz="1500" dirty="0">
-                <a:solidFill>
-                  <a:srgbClr val="1A1A1A"/>
-                </a:solidFill>
-                <a:latin typeface="Arial" pitchFamily="34" charset="0"/>
-                <a:ea typeface="Arial" pitchFamily="34" charset="-122"/>
-                <a:cs typeface="Arial" pitchFamily="34" charset="-120"/>
-              </a:rPr>
-              <a:t> (de gemeente zelf + 163 parkings in de band van ±2 km rond de grens)</a:t>
-            </a:r>
             <a:pPr indent="0" marL="0">
               <a:buNone/>
             </a:pPr>
@@ -7817,7 +7837,7 @@
                 <a:ea typeface="Arial" pitchFamily="34" charset="-122"/>
                 <a:cs typeface="Arial" pitchFamily="34" charset="-120"/>
               </a:rPr>
-              <a:t>8.446</a:t>
+              <a:t>0</a:t>
             </a:r>
             <a:endParaRPr lang="en-US" sz="3200" dirty="0"/>
           </a:p>
@@ -7929,7 +7949,7 @@
                 <a:ea typeface="Arial" pitchFamily="34" charset="-122"/>
                 <a:cs typeface="Arial" pitchFamily="34" charset="-120"/>
               </a:rPr>
-              <a:t>243</a:t>
+              <a:t>0</a:t>
             </a:r>
             <a:endParaRPr lang="en-US" sz="3200" dirty="0"/>
           </a:p>
@@ -8041,7 +8061,7 @@
                 <a:ea typeface="Arial" pitchFamily="34" charset="-122"/>
                 <a:cs typeface="Arial" pitchFamily="34" charset="-120"/>
               </a:rPr>
-              <a:t>€ 12,67 mln</a:t>
+              <a:t>€ 0,00 mln</a:t>
             </a:r>
             <a:endParaRPr lang="en-US" sz="3200" dirty="0"/>
           </a:p>
@@ -8153,7 +8173,7 @@
                 <a:ea typeface="Arial" pitchFamily="34" charset="-122"/>
                 <a:cs typeface="Arial" pitchFamily="34" charset="-120"/>
               </a:rPr>
-              <a:t>€ 25,34 mln</a:t>
+              <a:t>€ 0,00 mln</a:t>
             </a:r>
             <a:endParaRPr lang="en-US" sz="3200" dirty="0"/>
           </a:p>
@@ -8260,7 +8280,7 @@
                 <a:ea typeface="Arial" pitchFamily="34" charset="-122"/>
                 <a:cs typeface="Arial" pitchFamily="34" charset="-120"/>
               </a:rPr>
-              <a:t>8.446 wagens</a:t>
+              <a:t>0 wagens</a:t>
             </a:r>
             <a:pPr indent="0" marL="0">
               <a:buNone/>
@@ -8288,7 +8308,7 @@
                 <a:ea typeface="Arial" pitchFamily="34" charset="-122"/>
                 <a:cs typeface="Arial" pitchFamily="34" charset="-120"/>
               </a:rPr>
-              <a:t>€ 12,67 mln besparing / jaar</a:t>
+              <a:t>€ 0,00 mln besparing / jaar</a:t>
             </a:r>
             <a:endParaRPr lang="en-US" sz="1500" dirty="0"/>
           </a:p>
@@ -8327,7 +8347,7 @@
                 <a:ea typeface="Arial" pitchFamily="34" charset="-122"/>
                 <a:cs typeface="Arial" pitchFamily="34" charset="-120"/>
               </a:rPr>
-              <a:t>8.446 wagens</a:t>
+              <a:t>0 wagens</a:t>
             </a:r>
             <a:pPr indent="0" marL="0">
               <a:buNone/>
@@ -8355,7 +8375,7 @@
                 <a:ea typeface="Arial" pitchFamily="34" charset="-122"/>
                 <a:cs typeface="Arial" pitchFamily="34" charset="-120"/>
               </a:rPr>
-              <a:t>€ 25,34 mln investering</a:t>
+              <a:t>€ 0,00 mln investering</a:t>
             </a:r>
             <a:pPr indent="0" marL="0">
               <a:buNone/>
@@ -8701,7 +8721,7 @@
                 <a:ea typeface="Arial" pitchFamily="34" charset="-122"/>
                 <a:cs typeface="Arial" pitchFamily="34" charset="-120"/>
               </a:rPr>
-              <a:t>243 parkings · 8.446 plaatsen</a:t>
+              <a:t>0 parkings · 0 plaatsen</a:t>
             </a:r>
             <a:endParaRPr lang="en-US" sz="2200" dirty="0"/>
           </a:p>
@@ -10663,11 +10683,11 @@
         <p:spPr>
           <a:xfrm>
             <a:off x="640080" y="3886200"/>
-            <a:ext cx="6126480" cy="1691640"/>
+            <a:ext cx="6126480" cy="1371600"/>
           </a:xfrm>
           <a:prstGeom prst="roundRect">
             <a:avLst>
-              <a:gd name="adj" fmla="val 5405"/>
+              <a:gd name="adj" fmla="val 6667"/>
             </a:avLst>
           </a:prstGeom>
           <a:solidFill>
@@ -10684,7 +10704,7 @@
         </p:nvSpPr>
         <p:spPr>
           <a:xfrm>
-            <a:off x="914400" y="4206240"/>
+            <a:off x="914400" y="4160520"/>
             <a:ext cx="640080" cy="640080"/>
           </a:xfrm>
           <a:prstGeom prst="ellipse">
@@ -10712,7 +10732,7 @@
         </p:blipFill>
         <p:spPr>
           <a:xfrm>
-            <a:off x="1080821" y="4372661"/>
+            <a:off x="1080821" y="4326941"/>
             <a:ext cx="307238" cy="307238"/>
           </a:xfrm>
           <a:prstGeom prst="rect">
@@ -10728,8 +10748,8 @@
         </p:nvSpPr>
         <p:spPr>
           <a:xfrm>
-            <a:off x="1828800" y="4114800"/>
-            <a:ext cx="4754880" cy="1234440"/>
+            <a:off x="1828800" y="4069080"/>
+            <a:ext cx="4754880" cy="1005840"/>
           </a:xfrm>
           <a:prstGeom prst="rect">
             <a:avLst/>
@@ -10756,7 +10776,7 @@
                 <a:ea typeface="Arial" pitchFamily="34" charset="-122"/>
                 <a:cs typeface="Arial" pitchFamily="34" charset="-120"/>
               </a:rPr>
-              <a:t>2.134 auto’s op 80 slimme parkings in Zwevegem </a:t>
+              <a:t>0 auto’s op 0 slimme parkings in Zwevegem </a:t>
             </a:r>
             <a:pPr indent="0" marL="0">
               <a:lnSpc>
@@ -10773,7 +10793,7 @@
                 <a:ea typeface="Arial" pitchFamily="34" charset="-122"/>
                 <a:cs typeface="Arial" pitchFamily="34" charset="-120"/>
               </a:rPr>
-              <a:t>verhogen de loadfactor van 31% naar 63% en remmen de congestie af.</a:t>
+              <a:t>verhogen de loadfactor van 34% naar 34% en remmen de congestie af.</a:t>
             </a:r>
             <a:endParaRPr lang="en-US" sz="1400" dirty="0"/>
           </a:p>
@@ -10787,8 +10807,8 @@
         </p:nvSpPr>
         <p:spPr>
           <a:xfrm>
-            <a:off x="640080" y="5486400"/>
-            <a:ext cx="6126480" cy="292608"/>
+            <a:off x="640080" y="5321808"/>
+            <a:ext cx="6126480" cy="384048"/>
           </a:xfrm>
           <a:prstGeom prst="rect">
             <a:avLst/>
@@ -10815,7 +10835,7 @@
                 <a:ea typeface="Arial" pitchFamily="34" charset="-122"/>
                 <a:cs typeface="Arial" pitchFamily="34" charset="-120"/>
               </a:rPr>
-              <a:t>* Loadfactor t.o.v. referentiestation: kopstation HAREL 36 (36 kV), 7.1 km van Zwevegem (laagste load van de cluster &lt;5 km). · v4</a:t>
+              <a:t>* Loadfactor t.o.v. referentiestation: kopstation RUIEN 70 (70 kV), 7.8 km van Zwevegem (laagste load van de cluster &lt;5 km). · v6</a:t>
             </a:r>
             <a:endParaRPr lang="en-US" sz="900" dirty="0"/>
           </a:p>
@@ -10860,32 +10880,80 @@
           </a:p>
         </p:txBody>
       </p:sp>
+      <p:pic>
+        <p:nvPicPr>
+          <p:cNvPr id="11" name="Image 1" descr="preencoded.png">    </p:cNvPr>
+          <p:cNvPicPr>
+            <a:picLocks noChangeAspect="1"/>
+          </p:cNvPicPr>
+          <p:nvPr/>
+        </p:nvPicPr>
+        <p:blipFill>
+          <a:blip r:embed="rId2"/>
+          <a:stretch>
+            <a:fillRect/>
+          </a:stretch>
+        </p:blipFill>
+        <p:spPr>
+          <a:xfrm>
+            <a:off x="7669987" y="2286000"/>
+            <a:ext cx="1691640" cy="979322"/>
+          </a:xfrm>
+          <a:prstGeom prst="rect">
+            <a:avLst/>
+          </a:prstGeom>
+        </p:spPr>
+      </p:pic>
+      <p:pic>
+        <p:nvPicPr>
+          <p:cNvPr id="12" name="Image 2" descr="preencoded.png">    </p:cNvPr>
+          <p:cNvPicPr>
+            <a:picLocks noChangeAspect="1"/>
+          </p:cNvPicPr>
+          <p:nvPr/>
+        </p:nvPicPr>
+        <p:blipFill>
+          <a:blip r:embed="rId3"/>
+          <a:stretch>
+            <a:fillRect/>
+          </a:stretch>
+        </p:blipFill>
+        <p:spPr>
+          <a:xfrm>
+            <a:off x="9670694" y="2286000"/>
+            <a:ext cx="1691640" cy="979322"/>
+          </a:xfrm>
+          <a:prstGeom prst="rect">
+            <a:avLst/>
+          </a:prstGeom>
+        </p:spPr>
+      </p:pic>
       <p:graphicFrame>
         <p:nvGraphicFramePr>
-          <p:cNvPr id="11" name="Chart 0" descr=""/>
+          <p:cNvPr id="13" name="Chart 0" descr=""/>
           <p:cNvGraphicFramePr/>
           <p:nvPr/>
         </p:nvGraphicFramePr>
         <p:xfrm>
-          <a:off x="7040880" y="2286000"/>
-          <a:ext cx="4572000" cy="2743200"/>
+          <a:off x="7040880" y="3246120"/>
+          <a:ext cx="4572000" cy="1965960"/>
         </p:xfrm>
         <a:graphic xmlns:a="http://schemas.openxmlformats.org/drawingml/2006/main">
           <a:graphicData uri="http://schemas.openxmlformats.org/drawingml/2006/chart">
-            <c:chart xmlns:c="http://schemas.openxmlformats.org/drawingml/2006/chart" r:id="rId2"/>
+            <c:chart xmlns:c="http://schemas.openxmlformats.org/drawingml/2006/chart" r:id="rId4"/>
           </a:graphicData>
         </a:graphic>
       </p:graphicFrame>
       <p:sp>
         <p:nvSpPr>
-          <p:cNvPr id="12" name="Text 8"/>
-          <p:cNvSpPr/>
-          <p:nvPr/>
-        </p:nvSpPr>
-        <p:spPr>
-          <a:xfrm>
-            <a:off x="7040880" y="5120640"/>
-            <a:ext cx="4572000" cy="777240"/>
+          <p:cNvPr id="14" name="Text 8"/>
+          <p:cNvSpPr/>
+          <p:nvPr/>
+        </p:nvSpPr>
+        <p:spPr>
+          <a:xfrm>
+            <a:off x="7040880" y="5248656"/>
+            <a:ext cx="4572000" cy="475488"/>
           </a:xfrm>
           <a:prstGeom prst="rect">
             <a:avLst/>
@@ -10899,12 +10967,12 @@
           <a:p>
             <a:pPr indent="0" marL="0">
               <a:lnSpc>
-                <a:spcPct val="105000"/>
+                <a:spcPct val="100000"/>
               </a:lnSpc>
               <a:buNone/>
             </a:pPr>
             <a:r>
-              <a:rPr lang="en-US" sz="950" i="1" dirty="0">
+              <a:rPr lang="en-US" sz="900" i="1" dirty="0">
                 <a:solidFill>
                   <a:srgbClr val="5A6473"/>
                 </a:solidFill>
@@ -10912,26 +10980,26 @@
                 <a:ea typeface="Arial" pitchFamily="34" charset="-122"/>
                 <a:cs typeface="Arial" pitchFamily="34" charset="-120"/>
               </a:rPr>
-              <a:t>Loadfactor van station HAREL 36 (36 kV) — dichtste kopstation bij Zwevegem, op ± 7.1 km (laagste load van de cluster &lt;5 km). Flex ≈ 12 MW (11 kW/wagen + 10 kW batterij) op 60 MW firm capacity.</a:t>
-            </a:r>
-            <a:endParaRPr lang="en-US" sz="950" dirty="0"/>
-          </a:p>
-        </p:txBody>
-      </p:sp>
-      <p:sp>
-        <p:nvSpPr>
-          <p:cNvPr id="13" name="Shape 9"/>
-          <p:cNvSpPr/>
-          <p:nvPr/>
-        </p:nvSpPr>
-        <p:spPr>
-          <a:xfrm>
-            <a:off x="640080" y="5943600"/>
-            <a:ext cx="10908792" cy="457200"/>
+              <a:t>Loadfactor van station RUIEN 70 (70 kV) — dichtste kopstation bij Zwevegem, op ± 7.8 km (laagste load van de cluster &lt;5 km). Flex ≈ 0 MW (11 kW/wagen + 10 kW batterij) op 60 MW firm capacity.</a:t>
+            </a:r>
+            <a:endParaRPr lang="en-US" sz="900" dirty="0"/>
+          </a:p>
+        </p:txBody>
+      </p:sp>
+      <p:sp>
+        <p:nvSpPr>
+          <p:cNvPr id="15" name="Shape 9"/>
+          <p:cNvSpPr/>
+          <p:nvPr/>
+        </p:nvSpPr>
+        <p:spPr>
+          <a:xfrm>
+            <a:off x="640080" y="5797296"/>
+            <a:ext cx="10908792" cy="585216"/>
           </a:xfrm>
           <a:prstGeom prst="roundRect">
             <a:avLst>
-              <a:gd name="adj" fmla="val 16000"/>
+              <a:gd name="adj" fmla="val 12500"/>
             </a:avLst>
           </a:prstGeom>
           <a:solidFill>
@@ -10949,14 +11017,14 @@
       </p:sp>
       <p:sp>
         <p:nvSpPr>
-          <p:cNvPr id="14" name="Text 10"/>
-          <p:cNvSpPr/>
-          <p:nvPr/>
-        </p:nvSpPr>
-        <p:spPr>
-          <a:xfrm>
-            <a:off x="822960" y="5961888"/>
-            <a:ext cx="10515600" cy="420624"/>
+          <p:cNvPr id="16" name="Text 10"/>
+          <p:cNvSpPr/>
+          <p:nvPr/>
+        </p:nvSpPr>
+        <p:spPr>
+          <a:xfrm>
+            <a:off x="640080" y="5797296"/>
+            <a:ext cx="10908792" cy="585216"/>
           </a:xfrm>
           <a:prstGeom prst="rect">
             <a:avLst/>
@@ -10969,10 +11037,13 @@
           <a:lstStyle/>
           <a:p>
             <a:pPr algn="ctr" indent="0" marL="0">
-              <a:buNone/>
-            </a:pPr>
-            <a:r>
-              <a:rPr lang="en-US" sz="1450" b="1" dirty="0">
+              <a:lnSpc>
+                <a:spcPct val="105000"/>
+              </a:lnSpc>
+              <a:buNone/>
+            </a:pPr>
+            <a:r>
+              <a:rPr lang="en-US" sz="1300" b="1" dirty="0">
                 <a:solidFill>
                   <a:srgbClr val="FFFFFF"/>
                 </a:solidFill>
@@ -10980,13 +11051,36 @@
                 <a:ea typeface="Arial" pitchFamily="34" charset="-122"/>
                 <a:cs typeface="Arial" pitchFamily="34" charset="-120"/>
               </a:rPr>
-              <a:t>Een slim laadplein zorgt voor een stijging van de bruikbare energie voor bedrijven en gezinnen in Zwevegem met </a:t>
-            </a:r>
+              <a:t>Een slim laadplein zorgt voor een stijging van de bruikbare energie</a:t>
+            </a:r>
+            <a:endParaRPr lang="en-US" sz="1300" dirty="0"/>
+          </a:p>
+          <a:p>
             <a:pPr algn="ctr" indent="0" marL="0">
-              <a:buNone/>
-            </a:pPr>
-            <a:r>
-              <a:rPr lang="en-US" sz="1450" b="1" dirty="0">
+              <a:lnSpc>
+                <a:spcPct val="105000"/>
+              </a:lnSpc>
+              <a:buNone/>
+            </a:pPr>
+            <a:r>
+              <a:rPr lang="en-US" sz="1300" b="1" dirty="0">
+                <a:solidFill>
+                  <a:srgbClr val="FFFFFF"/>
+                </a:solidFill>
+                <a:latin typeface="Arial" pitchFamily="34" charset="0"/>
+                <a:ea typeface="Arial" pitchFamily="34" charset="-122"/>
+                <a:cs typeface="Arial" pitchFamily="34" charset="-120"/>
+              </a:rPr>
+              <a:t>voor bedrijven en gezinnen in Zwevegem met </a:t>
+            </a:r>
+            <a:pPr algn="ctr" indent="0" marL="0">
+              <a:lnSpc>
+                <a:spcPct val="105000"/>
+              </a:lnSpc>
+              <a:buNone/>
+            </a:pPr>
+            <a:r>
+              <a:rPr lang="en-US" sz="1300" b="1" dirty="0">
                 <a:solidFill>
                   <a:srgbClr val="9FE7B8"/>
                 </a:solidFill>
@@ -10994,13 +11088,16 @@
                 <a:ea typeface="Arial" pitchFamily="34" charset="-122"/>
                 <a:cs typeface="Arial" pitchFamily="34" charset="-120"/>
               </a:rPr>
-              <a:t>+103%</a:t>
+              <a:t>+0%</a:t>
             </a:r>
             <a:pPr algn="ctr" indent="0" marL="0">
-              <a:buNone/>
-            </a:pPr>
-            <a:r>
-              <a:rPr lang="en-US" sz="1450" b="1" dirty="0">
+              <a:lnSpc>
+                <a:spcPct val="105000"/>
+              </a:lnSpc>
+              <a:buNone/>
+            </a:pPr>
+            <a:r>
+              <a:rPr lang="en-US" sz="1300" b="1" dirty="0">
                 <a:solidFill>
                   <a:srgbClr val="FFFFFF"/>
                 </a:solidFill>
@@ -11010,13 +11107,13 @@
               </a:rPr>
               <a:t>.</a:t>
             </a:r>
-            <a:endParaRPr lang="en-US" sz="1450" dirty="0"/>
-          </a:p>
-        </p:txBody>
-      </p:sp>
-      <p:sp>
-        <p:nvSpPr>
-          <p:cNvPr id="15" name="Text 11"/>
+            <a:endParaRPr lang="en-US" sz="1300" dirty="0"/>
+          </a:p>
+        </p:txBody>
+      </p:sp>
+      <p:sp>
+        <p:nvSpPr>
+          <p:cNvPr id="17" name="Text 11"/>
           <p:cNvSpPr/>
           <p:nvPr/>
         </p:nvSpPr>
@@ -11055,7 +11152,7 @@
       </p:sp>
       <p:sp>
         <p:nvSpPr>
-          <p:cNvPr id="16" name="Text 12"/>
+          <p:cNvPr id="18" name="Text 12"/>
           <p:cNvSpPr/>
           <p:nvPr/>
         </p:nvSpPr>

--- a/Fluctus_Laadplan_Zwevegem.pptx
+++ b/Fluctus_Laadplan_Zwevegem.pptx
@@ -223,7 +223,7 @@
                   <c:v>34</c:v>
                 </c:pt>
                 <c:pt idx="1">
-                  <c:v>34</c:v>
+                  <c:v>65</c:v>
                 </c:pt>
               </c:numCache>
             </c:numRef>
@@ -304,7 +304,7 @@
         <c:axId val="2094734552"/>
         <c:scaling>
           <c:orientation val="minMax"/>
-          <c:max val="50"/>
+          <c:max val="80"/>
           <c:min val="0"/>
         </c:scaling>
         <c:delete val="0"/>
@@ -3707,7 +3707,7 @@
                 <a:ea typeface="Arial" pitchFamily="34" charset="-122"/>
                 <a:cs typeface="Arial" pitchFamily="34" charset="-120"/>
               </a:rPr>
-              <a:t>+0% meer energie</a:t>
+              <a:t>+91% meer energie</a:t>
             </a:r>
             <a:pPr indent="0" marL="0">
               <a:lnSpc>
@@ -7677,7 +7677,7 @@
                 <a:ea typeface="Arial" pitchFamily="34" charset="-122"/>
                 <a:cs typeface="Arial" pitchFamily="34" charset="-120"/>
               </a:rPr>
-              <a:t>De 0 wagens zijn de </a:t>
+              <a:t>De 8.446 wagens zijn de </a:t>
             </a:r>
             <a:pPr indent="0" marL="0">
               <a:buNone/>
@@ -7696,6 +7696,17 @@
             <a:pPr indent="0" marL="0">
               <a:buNone/>
             </a:pPr>
+            <a:r>
+              <a:rPr lang="en-US" sz="1500" dirty="0">
+                <a:solidFill>
+                  <a:srgbClr val="1A1A1A"/>
+                </a:solidFill>
+                <a:latin typeface="Arial" pitchFamily="34" charset="0"/>
+                <a:ea typeface="Arial" pitchFamily="34" charset="-122"/>
+                <a:cs typeface="Arial" pitchFamily="34" charset="-120"/>
+              </a:rPr>
+              <a:t> (de gemeente zelf + 163 parkings in de band van ±2 km rond de grens)</a:t>
+            </a:r>
             <a:pPr indent="0" marL="0">
               <a:buNone/>
             </a:pPr>
@@ -7837,7 +7848,7 @@
                 <a:ea typeface="Arial" pitchFamily="34" charset="-122"/>
                 <a:cs typeface="Arial" pitchFamily="34" charset="-120"/>
               </a:rPr>
-              <a:t>0</a:t>
+              <a:t>8.446</a:t>
             </a:r>
             <a:endParaRPr lang="en-US" sz="3200" dirty="0"/>
           </a:p>
@@ -7949,7 +7960,7 @@
                 <a:ea typeface="Arial" pitchFamily="34" charset="-122"/>
                 <a:cs typeface="Arial" pitchFamily="34" charset="-120"/>
               </a:rPr>
-              <a:t>0</a:t>
+              <a:t>243</a:t>
             </a:r>
             <a:endParaRPr lang="en-US" sz="3200" dirty="0"/>
           </a:p>
@@ -8061,7 +8072,7 @@
                 <a:ea typeface="Arial" pitchFamily="34" charset="-122"/>
                 <a:cs typeface="Arial" pitchFamily="34" charset="-120"/>
               </a:rPr>
-              <a:t>€ 0,00 mln</a:t>
+              <a:t>€ 12,67 mln</a:t>
             </a:r>
             <a:endParaRPr lang="en-US" sz="3200" dirty="0"/>
           </a:p>
@@ -8173,7 +8184,7 @@
                 <a:ea typeface="Arial" pitchFamily="34" charset="-122"/>
                 <a:cs typeface="Arial" pitchFamily="34" charset="-120"/>
               </a:rPr>
-              <a:t>€ 0,00 mln</a:t>
+              <a:t>€ 25,34 mln</a:t>
             </a:r>
             <a:endParaRPr lang="en-US" sz="3200" dirty="0"/>
           </a:p>
@@ -8280,7 +8291,7 @@
                 <a:ea typeface="Arial" pitchFamily="34" charset="-122"/>
                 <a:cs typeface="Arial" pitchFamily="34" charset="-120"/>
               </a:rPr>
-              <a:t>0 wagens</a:t>
+              <a:t>8.446 wagens</a:t>
             </a:r>
             <a:pPr indent="0" marL="0">
               <a:buNone/>
@@ -8308,7 +8319,7 @@
                 <a:ea typeface="Arial" pitchFamily="34" charset="-122"/>
                 <a:cs typeface="Arial" pitchFamily="34" charset="-120"/>
               </a:rPr>
-              <a:t>€ 0,00 mln besparing / jaar</a:t>
+              <a:t>€ 12,67 mln besparing / jaar</a:t>
             </a:r>
             <a:endParaRPr lang="en-US" sz="1500" dirty="0"/>
           </a:p>
@@ -8347,7 +8358,7 @@
                 <a:ea typeface="Arial" pitchFamily="34" charset="-122"/>
                 <a:cs typeface="Arial" pitchFamily="34" charset="-120"/>
               </a:rPr>
-              <a:t>0 wagens</a:t>
+              <a:t>8.446 wagens</a:t>
             </a:r>
             <a:pPr indent="0" marL="0">
               <a:buNone/>
@@ -8375,7 +8386,7 @@
                 <a:ea typeface="Arial" pitchFamily="34" charset="-122"/>
                 <a:cs typeface="Arial" pitchFamily="34" charset="-120"/>
               </a:rPr>
-              <a:t>€ 0,00 mln investering</a:t>
+              <a:t>€ 25,34 mln investering</a:t>
             </a:r>
             <a:pPr indent="0" marL="0">
               <a:buNone/>
@@ -8721,7 +8732,7 @@
                 <a:ea typeface="Arial" pitchFamily="34" charset="-122"/>
                 <a:cs typeface="Arial" pitchFamily="34" charset="-120"/>
               </a:rPr>
-              <a:t>0 parkings · 0 plaatsen</a:t>
+              <a:t>243 parkings · 8.446 plaatsen</a:t>
             </a:r>
             <a:endParaRPr lang="en-US" sz="2200" dirty="0"/>
           </a:p>
@@ -10776,7 +10787,7 @@
                 <a:ea typeface="Arial" pitchFamily="34" charset="-122"/>
                 <a:cs typeface="Arial" pitchFamily="34" charset="-120"/>
               </a:rPr>
-              <a:t>0 auto’s op 0 slimme parkings in Zwevegem </a:t>
+              <a:t>2.134 auto’s op 80 slimme parkings in Zwevegem </a:t>
             </a:r>
             <a:pPr indent="0" marL="0">
               <a:lnSpc>
@@ -10793,7 +10804,7 @@
                 <a:ea typeface="Arial" pitchFamily="34" charset="-122"/>
                 <a:cs typeface="Arial" pitchFamily="34" charset="-120"/>
               </a:rPr>
-              <a:t>verhogen de loadfactor van 34% naar 34% en remmen de congestie af.</a:t>
+              <a:t>verhogen de loadfactor van 34% naar 65% en remmen de congestie af.</a:t>
             </a:r>
             <a:endParaRPr lang="en-US" sz="1400" dirty="0"/>
           </a:p>
@@ -10980,7 +10991,7 @@
                 <a:ea typeface="Arial" pitchFamily="34" charset="-122"/>
                 <a:cs typeface="Arial" pitchFamily="34" charset="-120"/>
               </a:rPr>
-              <a:t>Loadfactor van station RUIEN 70 (70 kV) — dichtste kopstation bij Zwevegem, op ± 7.8 km (laagste load van de cluster &lt;5 km). Flex ≈ 0 MW (11 kW/wagen + 10 kW batterij) op 60 MW firm capacity.</a:t>
+              <a:t>Loadfactor van station RUIEN 70 (70 kV) — dichtste kopstation bij Zwevegem, op ± 7.8 km (laagste load van de cluster &lt;5 km). Flex ≈ 12 MW (11 kW/wagen + 10 kW batterij) op 60 MW firm capacity.</a:t>
             </a:r>
             <a:endParaRPr lang="en-US" sz="900" dirty="0"/>
           </a:p>
@@ -11088,7 +11099,7 @@
                 <a:ea typeface="Arial" pitchFamily="34" charset="-122"/>
                 <a:cs typeface="Arial" pitchFamily="34" charset="-120"/>
               </a:rPr>
-              <a:t>+0%</a:t>
+              <a:t>+91%</a:t>
             </a:r>
             <a:pPr algn="ctr" indent="0" marL="0">
               <a:lnSpc>

--- a/Fluctus_Laadplan_Zwevegem.pptx
+++ b/Fluctus_Laadplan_Zwevegem.pptx
@@ -118,7 +118,7 @@
 </p:presentation>
 </file>
 
-<file path=ppt/charts/chart2.xml><?xml version="1.0" encoding="utf-8"?>
+<file path=ppt/charts/chart4.xml><?xml version="1.0" encoding="utf-8"?>
 <c:chartSpace xmlns:c="http://schemas.openxmlformats.org/drawingml/2006/chart" xmlns:a="http://schemas.openxmlformats.org/drawingml/2006/main" xmlns:r="http://schemas.openxmlformats.org/officeDocument/2006/relationships">
   <c:date1904 val="0"/>
   <c:roundedCorners val="1"/>
@@ -223,7 +223,7 @@
                   <c:v>34</c:v>
                 </c:pt>
                 <c:pt idx="1">
-                  <c:v>65</c:v>
+                  <c:v>34</c:v>
                 </c:pt>
               </c:numCache>
             </c:numRef>
@@ -304,7 +304,7 @@
         <c:axId val="2094734552"/>
         <c:scaling>
           <c:orientation val="minMax"/>
-          <c:max val="80"/>
+          <c:max val="50"/>
           <c:min val="0"/>
         </c:scaling>
         <c:delete val="0"/>
@@ -3707,7 +3707,7 @@
                 <a:ea typeface="Arial" pitchFamily="34" charset="-122"/>
                 <a:cs typeface="Arial" pitchFamily="34" charset="-120"/>
               </a:rPr>
-              <a:t>+91% meer energie</a:t>
+              <a:t>+0% meer energie</a:t>
             </a:r>
             <a:pPr indent="0" marL="0">
               <a:lnSpc>
@@ -7677,7 +7677,7 @@
                 <a:ea typeface="Arial" pitchFamily="34" charset="-122"/>
                 <a:cs typeface="Arial" pitchFamily="34" charset="-120"/>
               </a:rPr>
-              <a:t>De 8.446 wagens zijn de </a:t>
+              <a:t>De 9.858 wagens zijn de </a:t>
             </a:r>
             <a:pPr indent="0" marL="0">
               <a:buNone/>
@@ -7705,7 +7705,7 @@
                 <a:ea typeface="Arial" pitchFamily="34" charset="-122"/>
                 <a:cs typeface="Arial" pitchFamily="34" charset="-120"/>
               </a:rPr>
-              <a:t> (de gemeente zelf + 163 parkings in de band van ±2 km rond de grens)</a:t>
+              <a:t> (de gemeente zelf + 254 parkings in de band van ±2 km rond de grens)</a:t>
             </a:r>
             <a:pPr indent="0" marL="0">
               <a:buNone/>
@@ -7848,7 +7848,7 @@
                 <a:ea typeface="Arial" pitchFamily="34" charset="-122"/>
                 <a:cs typeface="Arial" pitchFamily="34" charset="-120"/>
               </a:rPr>
-              <a:t>8.446</a:t>
+              <a:t>9.858</a:t>
             </a:r>
             <a:endParaRPr lang="en-US" sz="3200" dirty="0"/>
           </a:p>
@@ -7960,7 +7960,7 @@
                 <a:ea typeface="Arial" pitchFamily="34" charset="-122"/>
                 <a:cs typeface="Arial" pitchFamily="34" charset="-120"/>
               </a:rPr>
-              <a:t>243</a:t>
+              <a:t>254</a:t>
             </a:r>
             <a:endParaRPr lang="en-US" sz="3200" dirty="0"/>
           </a:p>
@@ -8072,7 +8072,7 @@
                 <a:ea typeface="Arial" pitchFamily="34" charset="-122"/>
                 <a:cs typeface="Arial" pitchFamily="34" charset="-120"/>
               </a:rPr>
-              <a:t>€ 12,67 mln</a:t>
+              <a:t>€ 14,79 mln</a:t>
             </a:r>
             <a:endParaRPr lang="en-US" sz="3200" dirty="0"/>
           </a:p>
@@ -8184,7 +8184,7 @@
                 <a:ea typeface="Arial" pitchFamily="34" charset="-122"/>
                 <a:cs typeface="Arial" pitchFamily="34" charset="-120"/>
               </a:rPr>
-              <a:t>€ 25,34 mln</a:t>
+              <a:t>€ 29,57 mln</a:t>
             </a:r>
             <a:endParaRPr lang="en-US" sz="3200" dirty="0"/>
           </a:p>
@@ -8291,7 +8291,7 @@
                 <a:ea typeface="Arial" pitchFamily="34" charset="-122"/>
                 <a:cs typeface="Arial" pitchFamily="34" charset="-120"/>
               </a:rPr>
-              <a:t>8.446 wagens</a:t>
+              <a:t>9.858 wagens</a:t>
             </a:r>
             <a:pPr indent="0" marL="0">
               <a:buNone/>
@@ -8319,7 +8319,7 @@
                 <a:ea typeface="Arial" pitchFamily="34" charset="-122"/>
                 <a:cs typeface="Arial" pitchFamily="34" charset="-120"/>
               </a:rPr>
-              <a:t>€ 12,67 mln besparing / jaar</a:t>
+              <a:t>€ 14,79 mln besparing / jaar</a:t>
             </a:r>
             <a:endParaRPr lang="en-US" sz="1500" dirty="0"/>
           </a:p>
@@ -8358,7 +8358,7 @@
                 <a:ea typeface="Arial" pitchFamily="34" charset="-122"/>
                 <a:cs typeface="Arial" pitchFamily="34" charset="-120"/>
               </a:rPr>
-              <a:t>8.446 wagens</a:t>
+              <a:t>9.858 wagens</a:t>
             </a:r>
             <a:pPr indent="0" marL="0">
               <a:buNone/>
@@ -8386,7 +8386,7 @@
                 <a:ea typeface="Arial" pitchFamily="34" charset="-122"/>
                 <a:cs typeface="Arial" pitchFamily="34" charset="-120"/>
               </a:rPr>
-              <a:t>€ 25,34 mln investering</a:t>
+              <a:t>€ 29,57 mln investering</a:t>
             </a:r>
             <a:pPr indent="0" marL="0">
               <a:buNone/>
@@ -8732,7 +8732,7 @@
                 <a:ea typeface="Arial" pitchFamily="34" charset="-122"/>
                 <a:cs typeface="Arial" pitchFamily="34" charset="-120"/>
               </a:rPr>
-              <a:t>243 parkings · 8.446 plaatsen</a:t>
+              <a:t>254 parkings · 9.858 plaatsen</a:t>
             </a:r>
             <a:endParaRPr lang="en-US" sz="2200" dirty="0"/>
           </a:p>
@@ -10787,7 +10787,7 @@
                 <a:ea typeface="Arial" pitchFamily="34" charset="-122"/>
                 <a:cs typeface="Arial" pitchFamily="34" charset="-120"/>
               </a:rPr>
-              <a:t>2.134 auto’s op 80 slimme parkings in Zwevegem </a:t>
+              <a:t>0 auto’s op 0 slimme parkings in Zwevegem </a:t>
             </a:r>
             <a:pPr indent="0" marL="0">
               <a:lnSpc>
@@ -10804,7 +10804,7 @@
                 <a:ea typeface="Arial" pitchFamily="34" charset="-122"/>
                 <a:cs typeface="Arial" pitchFamily="34" charset="-120"/>
               </a:rPr>
-              <a:t>verhogen de loadfactor van 34% naar 65% en remmen de congestie af.</a:t>
+              <a:t>verhogen de loadfactor van 34% naar 34% en remmen de congestie af.</a:t>
             </a:r>
             <a:endParaRPr lang="en-US" sz="1400" dirty="0"/>
           </a:p>
@@ -10991,7 +10991,7 @@
                 <a:ea typeface="Arial" pitchFamily="34" charset="-122"/>
                 <a:cs typeface="Arial" pitchFamily="34" charset="-120"/>
               </a:rPr>
-              <a:t>Loadfactor van station RUIEN 70 (70 kV) — dichtste kopstation bij Zwevegem, op ± 7.8 km (laagste load van de cluster &lt;5 km). Flex ≈ 12 MW (11 kW/wagen + 10 kW batterij) op 60 MW firm capacity.</a:t>
+              <a:t>Loadfactor van station RUIEN 70 (70 kV) — dichtste kopstation bij Zwevegem, op ± 7.8 km (laagste load van de cluster &lt;5 km). Flex ≈ 0 MW (11 kW/wagen + 10 kW batterij) op 60 MW firm capacity.</a:t>
             </a:r>
             <a:endParaRPr lang="en-US" sz="900" dirty="0"/>
           </a:p>
@@ -11099,7 +11099,7 @@
                 <a:ea typeface="Arial" pitchFamily="34" charset="-122"/>
                 <a:cs typeface="Arial" pitchFamily="34" charset="-120"/>
               </a:rPr>
-              <a:t>+91%</a:t>
+              <a:t>+0%</a:t>
             </a:r>
             <a:pPr algn="ctr" indent="0" marL="0">
               <a:lnSpc>

--- a/Fluctus_Laadplan_Zwevegem.pptx
+++ b/Fluctus_Laadplan_Zwevegem.pptx
@@ -118,7 +118,7 @@
 </p:presentation>
 </file>
 
-<file path=ppt/charts/chart4.xml><?xml version="1.0" encoding="utf-8"?>
+<file path=ppt/charts/chart2.xml><?xml version="1.0" encoding="utf-8"?>
 <c:chartSpace xmlns:c="http://schemas.openxmlformats.org/drawingml/2006/chart" xmlns:a="http://schemas.openxmlformats.org/drawingml/2006/main" xmlns:r="http://schemas.openxmlformats.org/officeDocument/2006/relationships">
   <c:date1904 val="0"/>
   <c:roundedCorners val="1"/>
@@ -223,7 +223,7 @@
                   <c:v>34</c:v>
                 </c:pt>
                 <c:pt idx="1">
-                  <c:v>34</c:v>
+                  <c:v>65</c:v>
                 </c:pt>
               </c:numCache>
             </c:numRef>
@@ -304,7 +304,7 @@
         <c:axId val="2094734552"/>
         <c:scaling>
           <c:orientation val="minMax"/>
-          <c:max val="50"/>
+          <c:max val="80"/>
           <c:min val="0"/>
         </c:scaling>
         <c:delete val="0"/>
@@ -3707,7 +3707,7 @@
                 <a:ea typeface="Arial" pitchFamily="34" charset="-122"/>
                 <a:cs typeface="Arial" pitchFamily="34" charset="-120"/>
               </a:rPr>
-              <a:t>+0% meer energie</a:t>
+              <a:t>+91% meer energie</a:t>
             </a:r>
             <a:pPr indent="0" marL="0">
               <a:lnSpc>
@@ -7677,7 +7677,7 @@
                 <a:ea typeface="Arial" pitchFamily="34" charset="-122"/>
                 <a:cs typeface="Arial" pitchFamily="34" charset="-120"/>
               </a:rPr>
-              <a:t>De 9.858 wagens zijn de </a:t>
+              <a:t>De 8.446 wagens zijn de </a:t>
             </a:r>
             <a:pPr indent="0" marL="0">
               <a:buNone/>
@@ -7705,7 +7705,7 @@
                 <a:ea typeface="Arial" pitchFamily="34" charset="-122"/>
                 <a:cs typeface="Arial" pitchFamily="34" charset="-120"/>
               </a:rPr>
-              <a:t> (de gemeente zelf + 254 parkings in de band van ±2 km rond de grens)</a:t>
+              <a:t> (de gemeente zelf + 163 parkings in de band van ±2 km rond de grens)</a:t>
             </a:r>
             <a:pPr indent="0" marL="0">
               <a:buNone/>
@@ -7848,7 +7848,7 @@
                 <a:ea typeface="Arial" pitchFamily="34" charset="-122"/>
                 <a:cs typeface="Arial" pitchFamily="34" charset="-120"/>
               </a:rPr>
-              <a:t>9.858</a:t>
+              <a:t>8.446</a:t>
             </a:r>
             <a:endParaRPr lang="en-US" sz="3200" dirty="0"/>
           </a:p>
@@ -7960,7 +7960,7 @@
                 <a:ea typeface="Arial" pitchFamily="34" charset="-122"/>
                 <a:cs typeface="Arial" pitchFamily="34" charset="-120"/>
               </a:rPr>
-              <a:t>254</a:t>
+              <a:t>243</a:t>
             </a:r>
             <a:endParaRPr lang="en-US" sz="3200" dirty="0"/>
           </a:p>
@@ -8072,7 +8072,7 @@
                 <a:ea typeface="Arial" pitchFamily="34" charset="-122"/>
                 <a:cs typeface="Arial" pitchFamily="34" charset="-120"/>
               </a:rPr>
-              <a:t>€ 14,79 mln</a:t>
+              <a:t>€ 12,67 mln</a:t>
             </a:r>
             <a:endParaRPr lang="en-US" sz="3200" dirty="0"/>
           </a:p>
@@ -8184,7 +8184,7 @@
                 <a:ea typeface="Arial" pitchFamily="34" charset="-122"/>
                 <a:cs typeface="Arial" pitchFamily="34" charset="-120"/>
               </a:rPr>
-              <a:t>€ 29,57 mln</a:t>
+              <a:t>€ 25,34 mln</a:t>
             </a:r>
             <a:endParaRPr lang="en-US" sz="3200" dirty="0"/>
           </a:p>
@@ -8291,7 +8291,7 @@
                 <a:ea typeface="Arial" pitchFamily="34" charset="-122"/>
                 <a:cs typeface="Arial" pitchFamily="34" charset="-120"/>
               </a:rPr>
-              <a:t>9.858 wagens</a:t>
+              <a:t>8.446 wagens</a:t>
             </a:r>
             <a:pPr indent="0" marL="0">
               <a:buNone/>
@@ -8319,7 +8319,7 @@
                 <a:ea typeface="Arial" pitchFamily="34" charset="-122"/>
                 <a:cs typeface="Arial" pitchFamily="34" charset="-120"/>
               </a:rPr>
-              <a:t>€ 14,79 mln besparing / jaar</a:t>
+              <a:t>€ 12,67 mln besparing / jaar</a:t>
             </a:r>
             <a:endParaRPr lang="en-US" sz="1500" dirty="0"/>
           </a:p>
@@ -8358,7 +8358,7 @@
                 <a:ea typeface="Arial" pitchFamily="34" charset="-122"/>
                 <a:cs typeface="Arial" pitchFamily="34" charset="-120"/>
               </a:rPr>
-              <a:t>9.858 wagens</a:t>
+              <a:t>8.446 wagens</a:t>
             </a:r>
             <a:pPr indent="0" marL="0">
               <a:buNone/>
@@ -8386,7 +8386,7 @@
                 <a:ea typeface="Arial" pitchFamily="34" charset="-122"/>
                 <a:cs typeface="Arial" pitchFamily="34" charset="-120"/>
               </a:rPr>
-              <a:t>€ 29,57 mln investering</a:t>
+              <a:t>€ 25,34 mln investering</a:t>
             </a:r>
             <a:pPr indent="0" marL="0">
               <a:buNone/>
@@ -8732,7 +8732,7 @@
                 <a:ea typeface="Arial" pitchFamily="34" charset="-122"/>
                 <a:cs typeface="Arial" pitchFamily="34" charset="-120"/>
               </a:rPr>
-              <a:t>254 parkings · 9.858 plaatsen</a:t>
+              <a:t>243 parkings · 8.446 plaatsen</a:t>
             </a:r>
             <a:endParaRPr lang="en-US" sz="2200" dirty="0"/>
           </a:p>
@@ -8827,7 +8827,46 @@
       </p:sp>
       <p:sp>
         <p:nvSpPr>
-          <p:cNvPr id="10" name="Shape 7"/>
+          <p:cNvPr id="10" name="Text 7"/>
+          <p:cNvSpPr/>
+          <p:nvPr/>
+        </p:nvSpPr>
+        <p:spPr>
+          <a:xfrm>
+            <a:off x="640080" y="6071616"/>
+            <a:ext cx="10058400" cy="237744"/>
+          </a:xfrm>
+          <a:prstGeom prst="rect">
+            <a:avLst/>
+          </a:prstGeom>
+          <a:noFill/>
+          <a:ln/>
+        </p:spPr>
+        <p:txBody>
+          <a:bodyPr wrap="square" lIns="0" tIns="0" rIns="0" bIns="0" rtlCol="0" anchor="ctr"/>
+          <a:lstStyle/>
+          <a:p>
+            <a:pPr indent="0" marL="0">
+              <a:buNone/>
+            </a:pPr>
+            <a:r>
+              <a:rPr lang="en-US" sz="800" i="1" dirty="0">
+                <a:solidFill>
+                  <a:srgbClr val="5A6473"/>
+                </a:solidFill>
+                <a:latin typeface="Arial" pitchFamily="34" charset="0"/>
+                <a:ea typeface="Arial" pitchFamily="34" charset="-122"/>
+                <a:cs typeface="Arial" pitchFamily="34" charset="-120"/>
+              </a:rPr>
+              <a:t>Bron bestaande laadpunten: Departement Mobiliteit en Openbare Werken (Vlaanderen).</a:t>
+            </a:r>
+            <a:endParaRPr lang="en-US" sz="800" dirty="0"/>
+          </a:p>
+        </p:txBody>
+      </p:sp>
+      <p:sp>
+        <p:nvSpPr>
+          <p:cNvPr id="11" name="Shape 8"/>
           <p:cNvSpPr/>
           <p:nvPr/>
         </p:nvSpPr>
@@ -8847,7 +8886,7 @@
       </p:sp>
       <p:pic>
         <p:nvPicPr>
-          <p:cNvPr id="11" name="Image 1" descr="preencoded.png">    </p:cNvPr>
+          <p:cNvPr id="12" name="Image 1" descr="preencoded.png">    </p:cNvPr>
           <p:cNvPicPr>
             <a:picLocks noChangeAspect="1"/>
           </p:cNvPicPr>
@@ -8871,7 +8910,7 @@
       </p:pic>
       <p:sp>
         <p:nvSpPr>
-          <p:cNvPr id="12" name="Text 8"/>
+          <p:cNvPr id="13" name="Text 9"/>
           <p:cNvSpPr/>
           <p:nvPr/>
         </p:nvSpPr>
@@ -8913,7 +8952,7 @@
       </p:sp>
       <p:sp>
         <p:nvSpPr>
-          <p:cNvPr id="13" name="Shape 9"/>
+          <p:cNvPr id="14" name="Shape 10"/>
           <p:cNvSpPr/>
           <p:nvPr/>
         </p:nvSpPr>
@@ -8933,7 +8972,7 @@
       </p:sp>
       <p:pic>
         <p:nvPicPr>
-          <p:cNvPr id="14" name="Image 2" descr="preencoded.png">    </p:cNvPr>
+          <p:cNvPr id="15" name="Image 2" descr="preencoded.png">    </p:cNvPr>
           <p:cNvPicPr>
             <a:picLocks noChangeAspect="1"/>
           </p:cNvPicPr>
@@ -8957,7 +8996,7 @@
       </p:pic>
       <p:sp>
         <p:nvSpPr>
-          <p:cNvPr id="15" name="Text 10"/>
+          <p:cNvPr id="16" name="Text 11"/>
           <p:cNvSpPr/>
           <p:nvPr/>
         </p:nvSpPr>
@@ -8999,7 +9038,7 @@
       </p:sp>
       <p:sp>
         <p:nvSpPr>
-          <p:cNvPr id="16" name="Shape 11"/>
+          <p:cNvPr id="17" name="Shape 12"/>
           <p:cNvSpPr/>
           <p:nvPr/>
         </p:nvSpPr>
@@ -9019,7 +9058,7 @@
       </p:sp>
       <p:pic>
         <p:nvPicPr>
-          <p:cNvPr id="17" name="Image 3" descr="preencoded.png">    </p:cNvPr>
+          <p:cNvPr id="18" name="Image 3" descr="preencoded.png">    </p:cNvPr>
           <p:cNvPicPr>
             <a:picLocks noChangeAspect="1"/>
           </p:cNvPicPr>
@@ -9043,7 +9082,7 @@
       </p:pic>
       <p:sp>
         <p:nvSpPr>
-          <p:cNvPr id="18" name="Text 12"/>
+          <p:cNvPr id="19" name="Text 13"/>
           <p:cNvSpPr/>
           <p:nvPr/>
         </p:nvSpPr>
@@ -9085,7 +9124,7 @@
       </p:sp>
       <p:sp>
         <p:nvSpPr>
-          <p:cNvPr id="19" name="Text 13"/>
+          <p:cNvPr id="20" name="Text 14"/>
           <p:cNvSpPr/>
           <p:nvPr/>
         </p:nvSpPr>
@@ -9124,7 +9163,7 @@
       </p:sp>
       <p:sp>
         <p:nvSpPr>
-          <p:cNvPr id="20" name="Text 14"/>
+          <p:cNvPr id="21" name="Text 15"/>
           <p:cNvSpPr/>
           <p:nvPr/>
         </p:nvSpPr>
@@ -10787,7 +10826,7 @@
                 <a:ea typeface="Arial" pitchFamily="34" charset="-122"/>
                 <a:cs typeface="Arial" pitchFamily="34" charset="-120"/>
               </a:rPr>
-              <a:t>0 auto’s op 0 slimme parkings in Zwevegem </a:t>
+              <a:t>2.134 auto’s op 80 slimme parkings in Zwevegem </a:t>
             </a:r>
             <a:pPr indent="0" marL="0">
               <a:lnSpc>
@@ -10804,7 +10843,7 @@
                 <a:ea typeface="Arial" pitchFamily="34" charset="-122"/>
                 <a:cs typeface="Arial" pitchFamily="34" charset="-120"/>
               </a:rPr>
-              <a:t>verhogen de loadfactor van 34% naar 34% en remmen de congestie af.</a:t>
+              <a:t>verhogen de loadfactor van 34% naar 65% en remmen de congestie af.</a:t>
             </a:r>
             <a:endParaRPr lang="en-US" sz="1400" dirty="0"/>
           </a:p>
@@ -10991,7 +11030,7 @@
                 <a:ea typeface="Arial" pitchFamily="34" charset="-122"/>
                 <a:cs typeface="Arial" pitchFamily="34" charset="-120"/>
               </a:rPr>
-              <a:t>Loadfactor van station RUIEN 70 (70 kV) — dichtste kopstation bij Zwevegem, op ± 7.8 km (laagste load van de cluster &lt;5 km). Flex ≈ 0 MW (11 kW/wagen + 10 kW batterij) op 60 MW firm capacity.</a:t>
+              <a:t>Loadfactor van station RUIEN 70 (70 kV) — dichtste kopstation bij Zwevegem, op ± 7.8 km (laagste load van de cluster &lt;5 km). Flex ≈ 12 MW (11 kW/wagen + 10 kW batterij) op 60 MW firm capacity.</a:t>
             </a:r>
             <a:endParaRPr lang="en-US" sz="900" dirty="0"/>
           </a:p>
@@ -11099,7 +11138,7 @@
                 <a:ea typeface="Arial" pitchFamily="34" charset="-122"/>
                 <a:cs typeface="Arial" pitchFamily="34" charset="-120"/>
               </a:rPr>
-              <a:t>+0%</a:t>
+              <a:t>+91%</a:t>
             </a:r>
             <a:pPr algn="ctr" indent="0" marL="0">
               <a:lnSpc>

--- a/Fluctus_Laadplan_Zwevegem.pptx
+++ b/Fluctus_Laadplan_Zwevegem.pptx
@@ -118,7 +118,7 @@
 </p:presentation>
 </file>
 
-<file path=ppt/charts/chart2.xml><?xml version="1.0" encoding="utf-8"?>
+<file path=ppt/charts/chart498.xml><?xml version="1.0" encoding="utf-8"?>
 <c:chartSpace xmlns:c="http://schemas.openxmlformats.org/drawingml/2006/chart" xmlns:a="http://schemas.openxmlformats.org/drawingml/2006/main" xmlns:r="http://schemas.openxmlformats.org/officeDocument/2006/relationships">
   <c:date1904 val="0"/>
   <c:roundedCorners val="1"/>
